--- a/анализатор подозрительности доменных имен (DNS).pptx
+++ b/анализатор подозрительности доменных имен (DNS).pptx
@@ -5,10 +5,10 @@
     <p:sldMasterId id="2147483650" r:id="rId4"/>
   </p:sldMasterIdLst>
   <p:notesMasterIdLst>
-    <p:notesMasterId r:id="rId27"/>
+    <p:notesMasterId r:id="rId35"/>
   </p:notesMasterIdLst>
   <p:handoutMasterIdLst>
-    <p:handoutMasterId r:id="rId28"/>
+    <p:handoutMasterId r:id="rId36"/>
   </p:handoutMasterIdLst>
   <p:sldIdLst>
     <p:sldId id="312" r:id="rId5"/>
@@ -21,18 +21,26 @@
     <p:sldId id="325" r:id="rId12"/>
     <p:sldId id="326" r:id="rId13"/>
     <p:sldId id="282" r:id="rId14"/>
-    <p:sldId id="322" r:id="rId15"/>
-    <p:sldId id="330" r:id="rId16"/>
-    <p:sldId id="329" r:id="rId17"/>
-    <p:sldId id="319" r:id="rId18"/>
-    <p:sldId id="327" r:id="rId19"/>
-    <p:sldId id="317" r:id="rId20"/>
-    <p:sldId id="318" r:id="rId21"/>
-    <p:sldId id="331" r:id="rId22"/>
-    <p:sldId id="321" r:id="rId23"/>
-    <p:sldId id="333" r:id="rId24"/>
-    <p:sldId id="332" r:id="rId25"/>
-    <p:sldId id="297" r:id="rId26"/>
+    <p:sldId id="337" r:id="rId15"/>
+    <p:sldId id="322" r:id="rId16"/>
+    <p:sldId id="338" r:id="rId17"/>
+    <p:sldId id="345" r:id="rId18"/>
+    <p:sldId id="329" r:id="rId19"/>
+    <p:sldId id="319" r:id="rId20"/>
+    <p:sldId id="327" r:id="rId21"/>
+    <p:sldId id="317" r:id="rId22"/>
+    <p:sldId id="335" r:id="rId23"/>
+    <p:sldId id="334" r:id="rId24"/>
+    <p:sldId id="318" r:id="rId25"/>
+    <p:sldId id="331" r:id="rId26"/>
+    <p:sldId id="321" r:id="rId27"/>
+    <p:sldId id="333" r:id="rId28"/>
+    <p:sldId id="341" r:id="rId29"/>
+    <p:sldId id="342" r:id="rId30"/>
+    <p:sldId id="344" r:id="rId31"/>
+    <p:sldId id="343" r:id="rId32"/>
+    <p:sldId id="332" r:id="rId33"/>
+    <p:sldId id="297" r:id="rId34"/>
   </p:sldIdLst>
   <p:sldSz cx="12192000" cy="6858000"/>
   <p:notesSz cx="13716000" cy="24384000"/>
@@ -239,6 +247,888 @@
 </p188:authorLst>
 </file>
 
+<file path=ppt/charts/chart1.xml><?xml version="1.0" encoding="utf-8"?>
+<c:chartSpace xmlns:c="http://schemas.openxmlformats.org/drawingml/2006/chart" xmlns:a="http://schemas.openxmlformats.org/drawingml/2006/main" xmlns:r="http://schemas.openxmlformats.org/officeDocument/2006/relationships" xmlns:c16r2="http://schemas.microsoft.com/office/drawing/2015/06/chart">
+  <c:date1904 val="0"/>
+  <c:lang val="en-US"/>
+  <c:roundedCorners val="0"/>
+  <mc:AlternateContent xmlns:mc="http://schemas.openxmlformats.org/markup-compatibility/2006">
+    <mc:Choice xmlns:c14="http://schemas.microsoft.com/office/drawing/2007/8/2/chart" Requires="c14">
+      <c14:style val="108"/>
+    </mc:Choice>
+    <mc:Fallback>
+      <c:style val="8"/>
+    </mc:Fallback>
+  </mc:AlternateContent>
+  <c:chart>
+    <c:title>
+      <c:overlay val="0"/>
+      <c:spPr>
+        <a:noFill/>
+        <a:ln>
+          <a:noFill/>
+        </a:ln>
+        <a:effectLst/>
+      </c:spPr>
+      <c:txPr>
+        <a:bodyPr rot="0" spcFirstLastPara="1" vertOverflow="ellipsis" vert="horz" wrap="square" anchor="ctr" anchorCtr="1"/>
+        <a:lstStyle/>
+        <a:p>
+          <a:pPr>
+            <a:defRPr sz="1862" b="0" i="0" u="none" strike="noStrike" kern="1200" spc="0" baseline="0">
+              <a:solidFill>
+                <a:schemeClr val="tx1">
+                  <a:lumMod val="65000"/>
+                  <a:lumOff val="35000"/>
+                </a:schemeClr>
+              </a:solidFill>
+              <a:latin typeface="+mn-lt"/>
+              <a:ea typeface="+mn-ea"/>
+              <a:cs typeface="+mn-cs"/>
+            </a:defRPr>
+          </a:pPr>
+          <a:endParaRPr lang="ru-RU"/>
+        </a:p>
+      </c:txPr>
+    </c:title>
+    <c:autoTitleDeleted val="0"/>
+    <c:plotArea>
+      <c:layout/>
+      <c:pieChart>
+        <c:varyColors val="1"/>
+        <c:ser>
+          <c:idx val="0"/>
+          <c:order val="0"/>
+          <c:tx>
+            <c:strRef>
+              <c:f>Лист1!$B$1</c:f>
+              <c:strCache>
+                <c:ptCount val="1"/>
+                <c:pt idx="0">
+                  <c:v>Распределение классов</c:v>
+                </c:pt>
+              </c:strCache>
+            </c:strRef>
+          </c:tx>
+          <c:dPt>
+            <c:idx val="0"/>
+            <c:bubble3D val="0"/>
+            <c:spPr>
+              <a:solidFill>
+                <a:schemeClr val="accent6">
+                  <a:tint val="77000"/>
+                </a:schemeClr>
+              </a:solidFill>
+              <a:ln w="19050">
+                <a:solidFill>
+                  <a:schemeClr val="lt1"/>
+                </a:solidFill>
+              </a:ln>
+              <a:effectLst/>
+            </c:spPr>
+            <c:extLst>
+              <c:ext xmlns:c16="http://schemas.microsoft.com/office/drawing/2014/chart" uri="{C3380CC4-5D6E-409C-BE32-E72D297353CC}">
+                <c16:uniqueId val="{00000002-605D-446C-B9B7-FD4F2EFDC5FD}"/>
+              </c:ext>
+            </c:extLst>
+          </c:dPt>
+          <c:dPt>
+            <c:idx val="1"/>
+            <c:bubble3D val="0"/>
+            <c:spPr>
+              <a:solidFill>
+                <a:schemeClr val="accent6">
+                  <a:shade val="76000"/>
+                </a:schemeClr>
+              </a:solidFill>
+              <a:ln w="19050">
+                <a:solidFill>
+                  <a:schemeClr val="lt1"/>
+                </a:solidFill>
+              </a:ln>
+              <a:effectLst/>
+            </c:spPr>
+            <c:extLst>
+              <c:ext xmlns:c16="http://schemas.microsoft.com/office/drawing/2014/chart" uri="{C3380CC4-5D6E-409C-BE32-E72D297353CC}">
+                <c16:uniqueId val="{00000003-605D-446C-B9B7-FD4F2EFDC5FD}"/>
+              </c:ext>
+            </c:extLst>
+          </c:dPt>
+          <c:dLbls>
+            <c:dLbl>
+              <c:idx val="0"/>
+              <c:tx>
+                <c:rich>
+                  <a:bodyPr/>
+                  <a:lstStyle/>
+                  <a:p>
+                    <a:fld id="{0715DB43-95CE-4AAD-9753-2683C93DC0DE}" type="VALUE">
+                      <a:rPr lang="en-US" baseline="0">
+                        <a:solidFill>
+                          <a:schemeClr val="bg1"/>
+                        </a:solidFill>
+                      </a:rPr>
+                      <a:pPr/>
+                      <a:t>[ЗНАЧЕНИЕ]</a:t>
+                    </a:fld>
+                    <a:endParaRPr lang="ru-RU"/>
+                  </a:p>
+                </c:rich>
+              </c:tx>
+              <c:showLegendKey val="0"/>
+              <c:showVal val="1"/>
+              <c:showCatName val="0"/>
+              <c:showSerName val="0"/>
+              <c:showPercent val="0"/>
+              <c:showBubbleSize val="0"/>
+              <c:extLst>
+                <c:ext xmlns:c15="http://schemas.microsoft.com/office/drawing/2012/chart" uri="{CE6537A1-D6FC-4f65-9D91-7224C49458BB}">
+                  <c15:dlblFieldTable/>
+                  <c15:showDataLabelsRange val="0"/>
+                </c:ext>
+                <c:ext xmlns:c16="http://schemas.microsoft.com/office/drawing/2014/chart" uri="{C3380CC4-5D6E-409C-BE32-E72D297353CC}">
+                  <c16:uniqueId val="{00000002-605D-446C-B9B7-FD4F2EFDC5FD}"/>
+                </c:ext>
+              </c:extLst>
+            </c:dLbl>
+            <c:dLbl>
+              <c:idx val="1"/>
+              <c:spPr>
+                <a:noFill/>
+                <a:ln>
+                  <a:noFill/>
+                </a:ln>
+                <a:effectLst/>
+              </c:spPr>
+              <c:txPr>
+                <a:bodyPr rot="0" spcFirstLastPara="1" vertOverflow="ellipsis" vert="horz" wrap="square" lIns="38100" tIns="19050" rIns="38100" bIns="19050" anchor="ctr" anchorCtr="1">
+                  <a:spAutoFit/>
+                </a:bodyPr>
+                <a:lstStyle/>
+                <a:p>
+                  <a:pPr>
+                    <a:defRPr sz="1197" b="0" i="0" u="none" strike="noStrike" kern="1200" baseline="0">
+                      <a:solidFill>
+                        <a:schemeClr val="bg1"/>
+                      </a:solidFill>
+                      <a:latin typeface="+mn-lt"/>
+                      <a:ea typeface="+mn-ea"/>
+                      <a:cs typeface="+mn-cs"/>
+                    </a:defRPr>
+                  </a:pPr>
+                  <a:endParaRPr lang="ru-RU"/>
+                </a:p>
+              </c:txPr>
+              <c:showLegendKey val="0"/>
+              <c:showVal val="1"/>
+              <c:showCatName val="0"/>
+              <c:showSerName val="0"/>
+              <c:showPercent val="0"/>
+              <c:showBubbleSize val="0"/>
+              <c:extLst>
+                <c:ext xmlns:c16="http://schemas.microsoft.com/office/drawing/2014/chart" uri="{C3380CC4-5D6E-409C-BE32-E72D297353CC}">
+                  <c16:uniqueId val="{00000003-605D-446C-B9B7-FD4F2EFDC5FD}"/>
+                </c:ext>
+              </c:extLst>
+            </c:dLbl>
+            <c:spPr>
+              <a:noFill/>
+              <a:ln>
+                <a:noFill/>
+              </a:ln>
+              <a:effectLst/>
+            </c:spPr>
+            <c:txPr>
+              <a:bodyPr rot="0" spcFirstLastPara="1" vertOverflow="ellipsis" vert="horz" wrap="square" lIns="38100" tIns="19050" rIns="38100" bIns="19050" anchor="ctr" anchorCtr="1">
+                <a:spAutoFit/>
+              </a:bodyPr>
+              <a:lstStyle/>
+              <a:p>
+                <a:pPr>
+                  <a:defRPr sz="1197" b="0" i="0" u="none" strike="noStrike" kern="1200" baseline="0">
+                    <a:solidFill>
+                      <a:schemeClr val="tx1">
+                        <a:lumMod val="75000"/>
+                        <a:lumOff val="25000"/>
+                      </a:schemeClr>
+                    </a:solidFill>
+                    <a:latin typeface="+mn-lt"/>
+                    <a:ea typeface="+mn-ea"/>
+                    <a:cs typeface="+mn-cs"/>
+                  </a:defRPr>
+                </a:pPr>
+                <a:endParaRPr lang="ru-RU"/>
+              </a:p>
+            </c:txPr>
+            <c:showLegendKey val="0"/>
+            <c:showVal val="1"/>
+            <c:showCatName val="0"/>
+            <c:showSerName val="0"/>
+            <c:showPercent val="0"/>
+            <c:showBubbleSize val="0"/>
+            <c:showLeaderLines val="1"/>
+            <c:leaderLines>
+              <c:spPr>
+                <a:ln w="9525" cap="flat" cmpd="sng" algn="ctr">
+                  <a:solidFill>
+                    <a:schemeClr val="tx1">
+                      <a:lumMod val="35000"/>
+                      <a:lumOff val="65000"/>
+                    </a:schemeClr>
+                  </a:solidFill>
+                  <a:round/>
+                </a:ln>
+                <a:effectLst/>
+              </c:spPr>
+            </c:leaderLines>
+            <c:extLst>
+              <c:ext xmlns:c15="http://schemas.microsoft.com/office/drawing/2012/chart" uri="{CE6537A1-D6FC-4f65-9D91-7224C49458BB}"/>
+            </c:extLst>
+          </c:dLbls>
+          <c:cat>
+            <c:strRef>
+              <c:f>Лист1!$A$2:$A$3</c:f>
+              <c:strCache>
+                <c:ptCount val="2"/>
+                <c:pt idx="0">
+                  <c:v>Фишинговые</c:v>
+                </c:pt>
+                <c:pt idx="1">
+                  <c:v>Легитимные</c:v>
+                </c:pt>
+              </c:strCache>
+            </c:strRef>
+          </c:cat>
+          <c:val>
+            <c:numRef>
+              <c:f>Лист1!$B$2:$B$3</c:f>
+              <c:numCache>
+                <c:formatCode>0.00%</c:formatCode>
+                <c:ptCount val="2"/>
+                <c:pt idx="0">
+                  <c:v>0.30499999999999999</c:v>
+                </c:pt>
+                <c:pt idx="1">
+                  <c:v>0.69499999999999995</c:v>
+                </c:pt>
+              </c:numCache>
+            </c:numRef>
+          </c:val>
+          <c:extLst>
+            <c:ext xmlns:c16="http://schemas.microsoft.com/office/drawing/2014/chart" uri="{C3380CC4-5D6E-409C-BE32-E72D297353CC}">
+              <c16:uniqueId val="{00000000-605D-446C-B9B7-FD4F2EFDC5FD}"/>
+            </c:ext>
+          </c:extLst>
+        </c:ser>
+        <c:dLbls>
+          <c:showLegendKey val="0"/>
+          <c:showVal val="0"/>
+          <c:showCatName val="0"/>
+          <c:showSerName val="0"/>
+          <c:showPercent val="0"/>
+          <c:showBubbleSize val="0"/>
+          <c:showLeaderLines val="1"/>
+        </c:dLbls>
+        <c:firstSliceAng val="0"/>
+      </c:pieChart>
+      <c:spPr>
+        <a:noFill/>
+        <a:ln>
+          <a:noFill/>
+        </a:ln>
+        <a:effectLst/>
+      </c:spPr>
+    </c:plotArea>
+    <c:legend>
+      <c:legendPos val="b"/>
+      <c:overlay val="0"/>
+      <c:spPr>
+        <a:noFill/>
+        <a:ln>
+          <a:noFill/>
+        </a:ln>
+        <a:effectLst/>
+      </c:spPr>
+      <c:txPr>
+        <a:bodyPr rot="0" spcFirstLastPara="1" vertOverflow="ellipsis" vert="horz" wrap="square" anchor="ctr" anchorCtr="1"/>
+        <a:lstStyle/>
+        <a:p>
+          <a:pPr>
+            <a:defRPr sz="1197" b="0" i="0" u="none" strike="noStrike" kern="1200" baseline="0">
+              <a:solidFill>
+                <a:schemeClr val="tx1">
+                  <a:lumMod val="65000"/>
+                  <a:lumOff val="35000"/>
+                </a:schemeClr>
+              </a:solidFill>
+              <a:latin typeface="+mn-lt"/>
+              <a:ea typeface="+mn-ea"/>
+              <a:cs typeface="+mn-cs"/>
+            </a:defRPr>
+          </a:pPr>
+          <a:endParaRPr lang="ru-RU"/>
+        </a:p>
+      </c:txPr>
+    </c:legend>
+    <c:plotVisOnly val="1"/>
+    <c:dispBlanksAs val="gap"/>
+    <c:extLst>
+      <c:ext xmlns:c16r3="http://schemas.microsoft.com/office/drawing/2017/03/chart" uri="{56B9EC1D-385E-4148-901F-78D8002777C0}">
+        <c16r3:dataDisplayOptions16>
+          <c16r3:dispNaAsBlank val="1"/>
+        </c16r3:dataDisplayOptions16>
+      </c:ext>
+    </c:extLst>
+    <c:showDLblsOverMax val="0"/>
+  </c:chart>
+  <c:spPr>
+    <a:noFill/>
+    <a:ln>
+      <a:noFill/>
+    </a:ln>
+    <a:effectLst/>
+  </c:spPr>
+  <c:txPr>
+    <a:bodyPr/>
+    <a:lstStyle/>
+    <a:p>
+      <a:pPr>
+        <a:defRPr/>
+      </a:pPr>
+      <a:endParaRPr lang="ru-RU"/>
+    </a:p>
+  </c:txPr>
+  <c:externalData r:id="rId3">
+    <c:autoUpdate val="0"/>
+  </c:externalData>
+</c:chartSpace>
+</file>
+
+<file path=ppt/charts/colors1.xml><?xml version="1.0" encoding="utf-8"?>
+<cs:colorStyle xmlns:cs="http://schemas.microsoft.com/office/drawing/2012/chartStyle" xmlns:a="http://schemas.openxmlformats.org/drawingml/2006/main" meth="withinLinearReversed" id="26">
+  <a:schemeClr val="accent6"/>
+</cs:colorStyle>
+</file>
+
+<file path=ppt/charts/style1.xml><?xml version="1.0" encoding="utf-8"?>
+<cs:chartStyle xmlns:cs="http://schemas.microsoft.com/office/drawing/2012/chartStyle" xmlns:a="http://schemas.openxmlformats.org/drawingml/2006/main" id="251">
+  <cs:axisTitle>
+    <cs:lnRef idx="0"/>
+    <cs:fillRef idx="0"/>
+    <cs:effectRef idx="0"/>
+    <cs:fontRef idx="minor">
+      <a:schemeClr val="tx1">
+        <a:lumMod val="65000"/>
+        <a:lumOff val="35000"/>
+      </a:schemeClr>
+    </cs:fontRef>
+    <cs:defRPr sz="1330" kern="1200"/>
+  </cs:axisTitle>
+  <cs:categoryAxis>
+    <cs:lnRef idx="0"/>
+    <cs:fillRef idx="0"/>
+    <cs:effectRef idx="0"/>
+    <cs:fontRef idx="minor">
+      <a:schemeClr val="tx1">
+        <a:lumMod val="65000"/>
+        <a:lumOff val="35000"/>
+      </a:schemeClr>
+    </cs:fontRef>
+    <cs:spPr>
+      <a:ln w="9525" cap="flat" cmpd="sng" algn="ctr">
+        <a:solidFill>
+          <a:schemeClr val="tx1">
+            <a:lumMod val="15000"/>
+            <a:lumOff val="85000"/>
+          </a:schemeClr>
+        </a:solidFill>
+        <a:round/>
+      </a:ln>
+    </cs:spPr>
+    <cs:defRPr sz="1197" kern="1200"/>
+  </cs:categoryAxis>
+  <cs:chartArea mods="allowNoFillOverride allowNoLineOverride">
+    <cs:lnRef idx="0"/>
+    <cs:fillRef idx="0"/>
+    <cs:effectRef idx="0"/>
+    <cs:fontRef idx="minor">
+      <a:schemeClr val="tx1"/>
+    </cs:fontRef>
+    <cs:spPr>
+      <a:solidFill>
+        <a:schemeClr val="bg1"/>
+      </a:solidFill>
+      <a:ln w="9525" cap="flat" cmpd="sng" algn="ctr">
+        <a:solidFill>
+          <a:schemeClr val="tx1">
+            <a:lumMod val="15000"/>
+            <a:lumOff val="85000"/>
+          </a:schemeClr>
+        </a:solidFill>
+        <a:round/>
+      </a:ln>
+    </cs:spPr>
+    <cs:defRPr sz="1197" kern="1200"/>
+  </cs:chartArea>
+  <cs:dataLabel>
+    <cs:lnRef idx="0"/>
+    <cs:fillRef idx="0"/>
+    <cs:effectRef idx="0"/>
+    <cs:fontRef idx="minor">
+      <a:schemeClr val="tx1">
+        <a:lumMod val="75000"/>
+        <a:lumOff val="25000"/>
+      </a:schemeClr>
+    </cs:fontRef>
+    <cs:defRPr sz="1197" kern="1200"/>
+  </cs:dataLabel>
+  <cs:dataLabelCallout>
+    <cs:lnRef idx="0"/>
+    <cs:fillRef idx="0"/>
+    <cs:effectRef idx="0"/>
+    <cs:fontRef idx="minor">
+      <a:schemeClr val="dk1">
+        <a:lumMod val="65000"/>
+        <a:lumOff val="35000"/>
+      </a:schemeClr>
+    </cs:fontRef>
+    <cs:spPr>
+      <a:solidFill>
+        <a:schemeClr val="lt1"/>
+      </a:solidFill>
+      <a:ln>
+        <a:solidFill>
+          <a:schemeClr val="dk1">
+            <a:lumMod val="25000"/>
+            <a:lumOff val="75000"/>
+          </a:schemeClr>
+        </a:solidFill>
+      </a:ln>
+    </cs:spPr>
+    <cs:defRPr sz="1197" kern="1200"/>
+    <cs:bodyPr rot="0" spcFirstLastPara="1" vertOverflow="clip" horzOverflow="clip" vert="horz" wrap="square" lIns="36576" tIns="18288" rIns="36576" bIns="18288" anchor="ctr" anchorCtr="1">
+      <a:spAutoFit/>
+    </cs:bodyPr>
+  </cs:dataLabelCallout>
+  <cs:dataPoint>
+    <cs:lnRef idx="0"/>
+    <cs:fillRef idx="1">
+      <cs:styleClr val="auto"/>
+    </cs:fillRef>
+    <cs:effectRef idx="0"/>
+    <cs:fontRef idx="minor">
+      <a:schemeClr val="tx1"/>
+    </cs:fontRef>
+    <cs:spPr>
+      <a:ln w="19050">
+        <a:solidFill>
+          <a:schemeClr val="lt1"/>
+        </a:solidFill>
+      </a:ln>
+    </cs:spPr>
+  </cs:dataPoint>
+  <cs:dataPoint3D>
+    <cs:lnRef idx="0"/>
+    <cs:fillRef idx="1">
+      <cs:styleClr val="auto"/>
+    </cs:fillRef>
+    <cs:effectRef idx="0"/>
+    <cs:fontRef idx="minor">
+      <a:schemeClr val="tx1"/>
+    </cs:fontRef>
+    <cs:spPr>
+      <a:ln w="25400">
+        <a:solidFill>
+          <a:schemeClr val="lt1"/>
+        </a:solidFill>
+      </a:ln>
+    </cs:spPr>
+  </cs:dataPoint3D>
+  <cs:dataPointLine>
+    <cs:lnRef idx="0">
+      <cs:styleClr val="auto"/>
+    </cs:lnRef>
+    <cs:fillRef idx="0"/>
+    <cs:effectRef idx="0"/>
+    <cs:fontRef idx="minor">
+      <a:schemeClr val="tx1"/>
+    </cs:fontRef>
+    <cs:spPr>
+      <a:ln w="28575" cap="rnd">
+        <a:solidFill>
+          <a:schemeClr val="phClr"/>
+        </a:solidFill>
+        <a:round/>
+      </a:ln>
+    </cs:spPr>
+  </cs:dataPointLine>
+  <cs:dataPointMarker>
+    <cs:lnRef idx="0">
+      <cs:styleClr val="auto"/>
+    </cs:lnRef>
+    <cs:fillRef idx="1">
+      <cs:styleClr val="auto"/>
+    </cs:fillRef>
+    <cs:effectRef idx="0"/>
+    <cs:fontRef idx="minor">
+      <a:schemeClr val="tx1"/>
+    </cs:fontRef>
+    <cs:spPr>
+      <a:ln w="9525">
+        <a:solidFill>
+          <a:schemeClr val="phClr"/>
+        </a:solidFill>
+      </a:ln>
+    </cs:spPr>
+  </cs:dataPointMarker>
+  <cs:dataPointMarkerLayout symbol="circle" size="5"/>
+  <cs:dataPointWireframe>
+    <cs:lnRef idx="0">
+      <cs:styleClr val="auto"/>
+    </cs:lnRef>
+    <cs:fillRef idx="0"/>
+    <cs:effectRef idx="0"/>
+    <cs:fontRef idx="minor">
+      <a:schemeClr val="tx1"/>
+    </cs:fontRef>
+    <cs:spPr>
+      <a:ln w="9525" cap="rnd">
+        <a:solidFill>
+          <a:schemeClr val="phClr"/>
+        </a:solidFill>
+        <a:round/>
+      </a:ln>
+    </cs:spPr>
+  </cs:dataPointWireframe>
+  <cs:dataTable>
+    <cs:lnRef idx="0"/>
+    <cs:fillRef idx="0"/>
+    <cs:effectRef idx="0"/>
+    <cs:fontRef idx="minor">
+      <a:schemeClr val="tx1">
+        <a:lumMod val="65000"/>
+        <a:lumOff val="35000"/>
+      </a:schemeClr>
+    </cs:fontRef>
+    <cs:spPr>
+      <a:noFill/>
+      <a:ln w="9525" cap="flat" cmpd="sng" algn="ctr">
+        <a:solidFill>
+          <a:schemeClr val="tx1">
+            <a:lumMod val="15000"/>
+            <a:lumOff val="85000"/>
+          </a:schemeClr>
+        </a:solidFill>
+        <a:round/>
+      </a:ln>
+    </cs:spPr>
+    <cs:defRPr sz="1197" kern="1200"/>
+  </cs:dataTable>
+  <cs:downBar>
+    <cs:lnRef idx="0"/>
+    <cs:fillRef idx="0"/>
+    <cs:effectRef idx="0"/>
+    <cs:fontRef idx="minor">
+      <a:schemeClr val="tx1"/>
+    </cs:fontRef>
+    <cs:spPr>
+      <a:solidFill>
+        <a:schemeClr val="dk1">
+          <a:lumMod val="75000"/>
+          <a:lumOff val="25000"/>
+        </a:schemeClr>
+      </a:solidFill>
+      <a:ln w="9525" cap="flat" cmpd="sng" algn="ctr">
+        <a:solidFill>
+          <a:schemeClr val="tx1">
+            <a:lumMod val="65000"/>
+            <a:lumOff val="35000"/>
+          </a:schemeClr>
+        </a:solidFill>
+        <a:round/>
+      </a:ln>
+    </cs:spPr>
+  </cs:downBar>
+  <cs:dropLine>
+    <cs:lnRef idx="0"/>
+    <cs:fillRef idx="0"/>
+    <cs:effectRef idx="0"/>
+    <cs:fontRef idx="minor">
+      <a:schemeClr val="tx1"/>
+    </cs:fontRef>
+    <cs:spPr>
+      <a:ln w="9525" cap="flat" cmpd="sng" algn="ctr">
+        <a:solidFill>
+          <a:schemeClr val="tx1">
+            <a:lumMod val="35000"/>
+            <a:lumOff val="65000"/>
+          </a:schemeClr>
+        </a:solidFill>
+        <a:round/>
+      </a:ln>
+    </cs:spPr>
+  </cs:dropLine>
+  <cs:errorBar>
+    <cs:lnRef idx="0"/>
+    <cs:fillRef idx="0"/>
+    <cs:effectRef idx="0"/>
+    <cs:fontRef idx="minor">
+      <a:schemeClr val="tx1"/>
+    </cs:fontRef>
+    <cs:spPr>
+      <a:ln w="9525" cap="flat" cmpd="sng" algn="ctr">
+        <a:solidFill>
+          <a:schemeClr val="tx1">
+            <a:lumMod val="65000"/>
+            <a:lumOff val="35000"/>
+          </a:schemeClr>
+        </a:solidFill>
+        <a:round/>
+      </a:ln>
+    </cs:spPr>
+  </cs:errorBar>
+  <cs:floor>
+    <cs:lnRef idx="0"/>
+    <cs:fillRef idx="0"/>
+    <cs:effectRef idx="0"/>
+    <cs:fontRef idx="minor">
+      <a:schemeClr val="tx1"/>
+    </cs:fontRef>
+    <cs:spPr>
+      <a:noFill/>
+      <a:ln>
+        <a:noFill/>
+      </a:ln>
+    </cs:spPr>
+  </cs:floor>
+  <cs:gridlineMajor>
+    <cs:lnRef idx="0"/>
+    <cs:fillRef idx="0"/>
+    <cs:effectRef idx="0"/>
+    <cs:fontRef idx="minor">
+      <a:schemeClr val="tx1"/>
+    </cs:fontRef>
+    <cs:spPr>
+      <a:ln w="9525" cap="flat" cmpd="sng" algn="ctr">
+        <a:solidFill>
+          <a:schemeClr val="tx1">
+            <a:lumMod val="15000"/>
+            <a:lumOff val="85000"/>
+          </a:schemeClr>
+        </a:solidFill>
+        <a:round/>
+      </a:ln>
+    </cs:spPr>
+  </cs:gridlineMajor>
+  <cs:gridlineMinor>
+    <cs:lnRef idx="0"/>
+    <cs:fillRef idx="0"/>
+    <cs:effectRef idx="0"/>
+    <cs:fontRef idx="minor">
+      <a:schemeClr val="tx1"/>
+    </cs:fontRef>
+    <cs:spPr>
+      <a:ln w="9525" cap="flat" cmpd="sng" algn="ctr">
+        <a:solidFill>
+          <a:schemeClr val="tx1">
+            <a:lumMod val="5000"/>
+            <a:lumOff val="95000"/>
+          </a:schemeClr>
+        </a:solidFill>
+        <a:round/>
+      </a:ln>
+    </cs:spPr>
+  </cs:gridlineMinor>
+  <cs:hiLoLine>
+    <cs:lnRef idx="0"/>
+    <cs:fillRef idx="0"/>
+    <cs:effectRef idx="0"/>
+    <cs:fontRef idx="minor">
+      <a:schemeClr val="tx1"/>
+    </cs:fontRef>
+    <cs:spPr>
+      <a:ln w="9525" cap="flat" cmpd="sng" algn="ctr">
+        <a:solidFill>
+          <a:schemeClr val="tx1">
+            <a:lumMod val="50000"/>
+            <a:lumOff val="50000"/>
+          </a:schemeClr>
+        </a:solidFill>
+        <a:round/>
+      </a:ln>
+    </cs:spPr>
+  </cs:hiLoLine>
+  <cs:leaderLine>
+    <cs:lnRef idx="0"/>
+    <cs:fillRef idx="0"/>
+    <cs:effectRef idx="0"/>
+    <cs:fontRef idx="minor">
+      <a:schemeClr val="tx1"/>
+    </cs:fontRef>
+    <cs:spPr>
+      <a:ln w="9525" cap="flat" cmpd="sng" algn="ctr">
+        <a:solidFill>
+          <a:schemeClr val="tx1">
+            <a:lumMod val="35000"/>
+            <a:lumOff val="65000"/>
+          </a:schemeClr>
+        </a:solidFill>
+        <a:round/>
+      </a:ln>
+    </cs:spPr>
+  </cs:leaderLine>
+  <cs:legend>
+    <cs:lnRef idx="0"/>
+    <cs:fillRef idx="0"/>
+    <cs:effectRef idx="0"/>
+    <cs:fontRef idx="minor">
+      <a:schemeClr val="tx1">
+        <a:lumMod val="65000"/>
+        <a:lumOff val="35000"/>
+      </a:schemeClr>
+    </cs:fontRef>
+    <cs:defRPr sz="1197" kern="1200"/>
+  </cs:legend>
+  <cs:plotArea mods="allowNoFillOverride allowNoLineOverride">
+    <cs:lnRef idx="0"/>
+    <cs:fillRef idx="0"/>
+    <cs:effectRef idx="0"/>
+    <cs:fontRef idx="minor">
+      <a:schemeClr val="tx1"/>
+    </cs:fontRef>
+  </cs:plotArea>
+  <cs:plotArea3D mods="allowNoFillOverride allowNoLineOverride">
+    <cs:lnRef idx="0"/>
+    <cs:fillRef idx="0"/>
+    <cs:effectRef idx="0"/>
+    <cs:fontRef idx="minor">
+      <a:schemeClr val="tx1"/>
+    </cs:fontRef>
+  </cs:plotArea3D>
+  <cs:seriesAxis>
+    <cs:lnRef idx="0"/>
+    <cs:fillRef idx="0"/>
+    <cs:effectRef idx="0"/>
+    <cs:fontRef idx="minor">
+      <a:schemeClr val="tx1">
+        <a:lumMod val="65000"/>
+        <a:lumOff val="35000"/>
+      </a:schemeClr>
+    </cs:fontRef>
+    <cs:defRPr sz="1197" kern="1200"/>
+  </cs:seriesAxis>
+  <cs:seriesLine>
+    <cs:lnRef idx="0"/>
+    <cs:fillRef idx="0"/>
+    <cs:effectRef idx="0"/>
+    <cs:fontRef idx="minor">
+      <a:schemeClr val="tx1"/>
+    </cs:fontRef>
+    <cs:spPr>
+      <a:ln w="9525" cap="flat" cmpd="sng" algn="ctr">
+        <a:solidFill>
+          <a:schemeClr val="tx1">
+            <a:lumMod val="35000"/>
+            <a:lumOff val="65000"/>
+          </a:schemeClr>
+        </a:solidFill>
+        <a:round/>
+      </a:ln>
+    </cs:spPr>
+  </cs:seriesLine>
+  <cs:title>
+    <cs:lnRef idx="0"/>
+    <cs:fillRef idx="0"/>
+    <cs:effectRef idx="0"/>
+    <cs:fontRef idx="minor">
+      <a:schemeClr val="tx1">
+        <a:lumMod val="65000"/>
+        <a:lumOff val="35000"/>
+      </a:schemeClr>
+    </cs:fontRef>
+    <cs:defRPr sz="1862" b="0" kern="1200" spc="0" baseline="0"/>
+  </cs:title>
+  <cs:trendline>
+    <cs:lnRef idx="0">
+      <cs:styleClr val="auto"/>
+    </cs:lnRef>
+    <cs:fillRef idx="0"/>
+    <cs:effectRef idx="0"/>
+    <cs:fontRef idx="minor">
+      <a:schemeClr val="tx1"/>
+    </cs:fontRef>
+    <cs:spPr>
+      <a:ln w="19050" cap="rnd">
+        <a:solidFill>
+          <a:schemeClr val="phClr"/>
+        </a:solidFill>
+        <a:prstDash val="sysDot"/>
+      </a:ln>
+    </cs:spPr>
+  </cs:trendline>
+  <cs:trendlineLabel>
+    <cs:lnRef idx="0"/>
+    <cs:fillRef idx="0"/>
+    <cs:effectRef idx="0"/>
+    <cs:fontRef idx="minor">
+      <a:schemeClr val="tx1">
+        <a:lumMod val="65000"/>
+        <a:lumOff val="35000"/>
+      </a:schemeClr>
+    </cs:fontRef>
+    <cs:defRPr sz="1197" kern="1200"/>
+  </cs:trendlineLabel>
+  <cs:upBar>
+    <cs:lnRef idx="0"/>
+    <cs:fillRef idx="0"/>
+    <cs:effectRef idx="0"/>
+    <cs:fontRef idx="minor">
+      <a:schemeClr val="tx1"/>
+    </cs:fontRef>
+    <cs:spPr>
+      <a:solidFill>
+        <a:schemeClr val="lt1"/>
+      </a:solidFill>
+      <a:ln w="9525" cap="flat" cmpd="sng" algn="ctr">
+        <a:solidFill>
+          <a:schemeClr val="tx1">
+            <a:lumMod val="65000"/>
+            <a:lumOff val="35000"/>
+          </a:schemeClr>
+        </a:solidFill>
+        <a:round/>
+      </a:ln>
+    </cs:spPr>
+  </cs:upBar>
+  <cs:valueAxis>
+    <cs:lnRef idx="0"/>
+    <cs:fillRef idx="0"/>
+    <cs:effectRef idx="0"/>
+    <cs:fontRef idx="minor">
+      <a:schemeClr val="tx1">
+        <a:lumMod val="65000"/>
+        <a:lumOff val="35000"/>
+      </a:schemeClr>
+    </cs:fontRef>
+    <cs:defRPr sz="1197" kern="1200"/>
+  </cs:valueAxis>
+  <cs:wall>
+    <cs:lnRef idx="0"/>
+    <cs:fillRef idx="0"/>
+    <cs:effectRef idx="0"/>
+    <cs:fontRef idx="minor">
+      <a:schemeClr val="tx1"/>
+    </cs:fontRef>
+    <cs:spPr>
+      <a:noFill/>
+      <a:ln>
+        <a:noFill/>
+      </a:ln>
+    </cs:spPr>
+  </cs:wall>
+</cs:chartStyle>
+</file>
+
 <file path=ppt/handoutMasters/handoutMaster1.xml><?xml version="1.0" encoding="utf-8"?>
 <p:handoutMaster xmlns:a="http://schemas.openxmlformats.org/drawingml/2006/main" xmlns:r="http://schemas.openxmlformats.org/officeDocument/2006/relationships" xmlns:p="http://schemas.openxmlformats.org/presentationml/2006/main">
   <p:cSld>
@@ -794,7 +1684,7 @@
     </p:spTree>
     <p:extLst>
       <p:ext uri="{BB962C8B-B14F-4D97-AF65-F5344CB8AC3E}">
-        <p14:creationId xmlns:p14="http://schemas.microsoft.com/office/powerpoint/2010/main" val="2508814883"/>
+        <p14:creationId xmlns:p14="http://schemas.microsoft.com/office/powerpoint/2010/main" val="402800901"/>
       </p:ext>
     </p:extLst>
   </p:cSld>
@@ -877,7 +1767,7 @@
     </p:spTree>
     <p:extLst>
       <p:ext uri="{BB962C8B-B14F-4D97-AF65-F5344CB8AC3E}">
-        <p14:creationId xmlns:p14="http://schemas.microsoft.com/office/powerpoint/2010/main" val="3652000157"/>
+        <p14:creationId xmlns:p14="http://schemas.microsoft.com/office/powerpoint/2010/main" val="2508814883"/>
       </p:ext>
     </p:extLst>
   </p:cSld>
@@ -960,7 +1850,7 @@
     </p:spTree>
     <p:extLst>
       <p:ext uri="{BB962C8B-B14F-4D97-AF65-F5344CB8AC3E}">
-        <p14:creationId xmlns:p14="http://schemas.microsoft.com/office/powerpoint/2010/main" val="445347873"/>
+        <p14:creationId xmlns:p14="http://schemas.microsoft.com/office/powerpoint/2010/main" val="4283992923"/>
       </p:ext>
     </p:extLst>
   </p:cSld>
@@ -1043,7 +1933,7 @@
     </p:spTree>
     <p:extLst>
       <p:ext uri="{BB962C8B-B14F-4D97-AF65-F5344CB8AC3E}">
-        <p14:creationId xmlns:p14="http://schemas.microsoft.com/office/powerpoint/2010/main" val="4110138705"/>
+        <p14:creationId xmlns:p14="http://schemas.microsoft.com/office/powerpoint/2010/main" val="396564960"/>
       </p:ext>
     </p:extLst>
   </p:cSld>
@@ -1126,7 +2016,7 @@
     </p:spTree>
     <p:extLst>
       <p:ext uri="{BB962C8B-B14F-4D97-AF65-F5344CB8AC3E}">
-        <p14:creationId xmlns:p14="http://schemas.microsoft.com/office/powerpoint/2010/main" val="879999001"/>
+        <p14:creationId xmlns:p14="http://schemas.microsoft.com/office/powerpoint/2010/main" val="445347873"/>
       </p:ext>
     </p:extLst>
   </p:cSld>
@@ -1209,7 +2099,7 @@
     </p:spTree>
     <p:extLst>
       <p:ext uri="{BB962C8B-B14F-4D97-AF65-F5344CB8AC3E}">
-        <p14:creationId xmlns:p14="http://schemas.microsoft.com/office/powerpoint/2010/main" val="177914689"/>
+        <p14:creationId xmlns:p14="http://schemas.microsoft.com/office/powerpoint/2010/main" val="4110138705"/>
       </p:ext>
     </p:extLst>
   </p:cSld>
@@ -1292,7 +2182,7 @@
     </p:spTree>
     <p:extLst>
       <p:ext uri="{BB962C8B-B14F-4D97-AF65-F5344CB8AC3E}">
-        <p14:creationId xmlns:p14="http://schemas.microsoft.com/office/powerpoint/2010/main" val="984541709"/>
+        <p14:creationId xmlns:p14="http://schemas.microsoft.com/office/powerpoint/2010/main" val="879999001"/>
       </p:ext>
     </p:extLst>
   </p:cSld>
@@ -1375,7 +2265,7 @@
     </p:spTree>
     <p:extLst>
       <p:ext uri="{BB962C8B-B14F-4D97-AF65-F5344CB8AC3E}">
-        <p14:creationId xmlns:p14="http://schemas.microsoft.com/office/powerpoint/2010/main" val="2382564525"/>
+        <p14:creationId xmlns:p14="http://schemas.microsoft.com/office/powerpoint/2010/main" val="177914689"/>
       </p:ext>
     </p:extLst>
   </p:cSld>
@@ -1458,7 +2348,7 @@
     </p:spTree>
     <p:extLst>
       <p:ext uri="{BB962C8B-B14F-4D97-AF65-F5344CB8AC3E}">
-        <p14:creationId xmlns:p14="http://schemas.microsoft.com/office/powerpoint/2010/main" val="3047668310"/>
+        <p14:creationId xmlns:p14="http://schemas.microsoft.com/office/powerpoint/2010/main" val="764078960"/>
       </p:ext>
     </p:extLst>
   </p:cSld>
@@ -1624,7 +2514,7 @@
     </p:spTree>
     <p:extLst>
       <p:ext uri="{BB962C8B-B14F-4D97-AF65-F5344CB8AC3E}">
-        <p14:creationId xmlns:p14="http://schemas.microsoft.com/office/powerpoint/2010/main" val="1290744481"/>
+        <p14:creationId xmlns:p14="http://schemas.microsoft.com/office/powerpoint/2010/main" val="1535697532"/>
       </p:ext>
     </p:extLst>
   </p:cSld>
@@ -1707,7 +2597,7 @@
     </p:spTree>
     <p:extLst>
       <p:ext uri="{BB962C8B-B14F-4D97-AF65-F5344CB8AC3E}">
-        <p14:creationId xmlns:p14="http://schemas.microsoft.com/office/powerpoint/2010/main" val="368585227"/>
+        <p14:creationId xmlns:p14="http://schemas.microsoft.com/office/powerpoint/2010/main" val="984541709"/>
       </p:ext>
     </p:extLst>
   </p:cSld>
@@ -1790,7 +2680,588 @@
     </p:spTree>
     <p:extLst>
       <p:ext uri="{BB962C8B-B14F-4D97-AF65-F5344CB8AC3E}">
-        <p14:creationId xmlns:p14="http://schemas.microsoft.com/office/powerpoint/2010/main" val="931307476"/>
+        <p14:creationId xmlns:p14="http://schemas.microsoft.com/office/powerpoint/2010/main" val="2382564525"/>
+      </p:ext>
+    </p:extLst>
+  </p:cSld>
+  <p:clrMapOvr>
+    <a:masterClrMapping/>
+  </p:clrMapOvr>
+</p:notes>
+</file>
+
+<file path=ppt/notesSlides/notesSlide23.xml><?xml version="1.0" encoding="utf-8"?>
+<p:notes xmlns:a="http://schemas.openxmlformats.org/drawingml/2006/main" xmlns:r="http://schemas.openxmlformats.org/officeDocument/2006/relationships" xmlns:p="http://schemas.openxmlformats.org/presentationml/2006/main">
+  <p:cSld>
+    <p:spTree>
+      <p:nvGrpSpPr>
+        <p:cNvPr id="1" name=""/>
+        <p:cNvGrpSpPr/>
+        <p:nvPr/>
+      </p:nvGrpSpPr>
+      <p:grpSpPr>
+        <a:xfrm>
+          <a:off x="0" y="0"/>
+          <a:ext cx="0" cy="0"/>
+          <a:chOff x="0" y="0"/>
+          <a:chExt cx="0" cy="0"/>
+        </a:xfrm>
+      </p:grpSpPr>
+      <p:sp>
+        <p:nvSpPr>
+          <p:cNvPr id="2" name="Slide Image Placeholder 1"/>
+          <p:cNvSpPr>
+            <a:spLocks noGrp="1" noRot="1" noChangeAspect="1"/>
+          </p:cNvSpPr>
+          <p:nvPr>
+            <p:ph type="sldImg"/>
+          </p:nvPr>
+        </p:nvSpPr>
+        <p:spPr>
+          <a:xfrm>
+            <a:off x="-457200" y="3048000"/>
+            <a:ext cx="14630400" cy="8229600"/>
+          </a:xfrm>
+          <a:prstGeom prst="rect">
+            <a:avLst/>
+          </a:prstGeom>
+          <a:noFill/>
+          <a:ln w="12700">
+            <a:solidFill>
+              <a:prstClr val="black"/>
+            </a:solidFill>
+          </a:ln>
+        </p:spPr>
+      </p:sp>
+      <p:sp>
+        <p:nvSpPr>
+          <p:cNvPr id="3" name="Notes Placeholder 2"/>
+          <p:cNvSpPr>
+            <a:spLocks noGrp="1"/>
+          </p:cNvSpPr>
+          <p:nvPr>
+            <p:ph type="body" idx="1"/>
+          </p:nvPr>
+        </p:nvSpPr>
+        <p:spPr>
+          <a:xfrm>
+            <a:off x="1371600" y="11734800"/>
+            <a:ext cx="10972800" cy="9601200"/>
+          </a:xfrm>
+          <a:prstGeom prst="rect">
+            <a:avLst/>
+          </a:prstGeom>
+        </p:spPr>
+        <p:txBody>
+          <a:bodyPr/>
+          <a:lstStyle/>
+          <a:p>
+            <a:endParaRPr lang="en-US" dirty="0"/>
+          </a:p>
+        </p:txBody>
+      </p:sp>
+    </p:spTree>
+    <p:extLst>
+      <p:ext uri="{BB962C8B-B14F-4D97-AF65-F5344CB8AC3E}">
+        <p14:creationId xmlns:p14="http://schemas.microsoft.com/office/powerpoint/2010/main" val="3047668310"/>
+      </p:ext>
+    </p:extLst>
+  </p:cSld>
+  <p:clrMapOvr>
+    <a:masterClrMapping/>
+  </p:clrMapOvr>
+</p:notes>
+</file>
+
+<file path=ppt/notesSlides/notesSlide24.xml><?xml version="1.0" encoding="utf-8"?>
+<p:notes xmlns:a="http://schemas.openxmlformats.org/drawingml/2006/main" xmlns:r="http://schemas.openxmlformats.org/officeDocument/2006/relationships" xmlns:p="http://schemas.openxmlformats.org/presentationml/2006/main">
+  <p:cSld>
+    <p:spTree>
+      <p:nvGrpSpPr>
+        <p:cNvPr id="1" name=""/>
+        <p:cNvGrpSpPr/>
+        <p:nvPr/>
+      </p:nvGrpSpPr>
+      <p:grpSpPr>
+        <a:xfrm>
+          <a:off x="0" y="0"/>
+          <a:ext cx="0" cy="0"/>
+          <a:chOff x="0" y="0"/>
+          <a:chExt cx="0" cy="0"/>
+        </a:xfrm>
+      </p:grpSpPr>
+      <p:sp>
+        <p:nvSpPr>
+          <p:cNvPr id="2" name="Slide Image Placeholder 1"/>
+          <p:cNvSpPr>
+            <a:spLocks noGrp="1" noRot="1" noChangeAspect="1"/>
+          </p:cNvSpPr>
+          <p:nvPr>
+            <p:ph type="sldImg"/>
+          </p:nvPr>
+        </p:nvSpPr>
+        <p:spPr>
+          <a:xfrm>
+            <a:off x="-457200" y="3048000"/>
+            <a:ext cx="14630400" cy="8229600"/>
+          </a:xfrm>
+          <a:prstGeom prst="rect">
+            <a:avLst/>
+          </a:prstGeom>
+          <a:noFill/>
+          <a:ln w="12700">
+            <a:solidFill>
+              <a:prstClr val="black"/>
+            </a:solidFill>
+          </a:ln>
+        </p:spPr>
+      </p:sp>
+      <p:sp>
+        <p:nvSpPr>
+          <p:cNvPr id="3" name="Notes Placeholder 2"/>
+          <p:cNvSpPr>
+            <a:spLocks noGrp="1"/>
+          </p:cNvSpPr>
+          <p:nvPr>
+            <p:ph type="body" idx="1"/>
+          </p:nvPr>
+        </p:nvSpPr>
+        <p:spPr>
+          <a:xfrm>
+            <a:off x="1371600" y="11734800"/>
+            <a:ext cx="10972800" cy="9601200"/>
+          </a:xfrm>
+          <a:prstGeom prst="rect">
+            <a:avLst/>
+          </a:prstGeom>
+        </p:spPr>
+        <p:txBody>
+          <a:bodyPr/>
+          <a:lstStyle/>
+          <a:p>
+            <a:endParaRPr lang="en-US" dirty="0"/>
+          </a:p>
+        </p:txBody>
+      </p:sp>
+    </p:spTree>
+    <p:extLst>
+      <p:ext uri="{BB962C8B-B14F-4D97-AF65-F5344CB8AC3E}">
+        <p14:creationId xmlns:p14="http://schemas.microsoft.com/office/powerpoint/2010/main" val="1290744481"/>
+      </p:ext>
+    </p:extLst>
+  </p:cSld>
+  <p:clrMapOvr>
+    <a:masterClrMapping/>
+  </p:clrMapOvr>
+</p:notes>
+</file>
+
+<file path=ppt/notesSlides/notesSlide25.xml><?xml version="1.0" encoding="utf-8"?>
+<p:notes xmlns:a="http://schemas.openxmlformats.org/drawingml/2006/main" xmlns:r="http://schemas.openxmlformats.org/officeDocument/2006/relationships" xmlns:p="http://schemas.openxmlformats.org/presentationml/2006/main">
+  <p:cSld>
+    <p:spTree>
+      <p:nvGrpSpPr>
+        <p:cNvPr id="1" name=""/>
+        <p:cNvGrpSpPr/>
+        <p:nvPr/>
+      </p:nvGrpSpPr>
+      <p:grpSpPr>
+        <a:xfrm>
+          <a:off x="0" y="0"/>
+          <a:ext cx="0" cy="0"/>
+          <a:chOff x="0" y="0"/>
+          <a:chExt cx="0" cy="0"/>
+        </a:xfrm>
+      </p:grpSpPr>
+      <p:sp>
+        <p:nvSpPr>
+          <p:cNvPr id="2" name="Slide Image Placeholder 1"/>
+          <p:cNvSpPr>
+            <a:spLocks noGrp="1" noRot="1" noChangeAspect="1"/>
+          </p:cNvSpPr>
+          <p:nvPr>
+            <p:ph type="sldImg"/>
+          </p:nvPr>
+        </p:nvSpPr>
+        <p:spPr>
+          <a:xfrm>
+            <a:off x="-457200" y="3048000"/>
+            <a:ext cx="14630400" cy="8229600"/>
+          </a:xfrm>
+          <a:prstGeom prst="rect">
+            <a:avLst/>
+          </a:prstGeom>
+          <a:noFill/>
+          <a:ln w="12700">
+            <a:solidFill>
+              <a:prstClr val="black"/>
+            </a:solidFill>
+          </a:ln>
+        </p:spPr>
+      </p:sp>
+      <p:sp>
+        <p:nvSpPr>
+          <p:cNvPr id="3" name="Notes Placeholder 2"/>
+          <p:cNvSpPr>
+            <a:spLocks noGrp="1"/>
+          </p:cNvSpPr>
+          <p:nvPr>
+            <p:ph type="body" idx="1"/>
+          </p:nvPr>
+        </p:nvSpPr>
+        <p:spPr>
+          <a:xfrm>
+            <a:off x="1371600" y="11734800"/>
+            <a:ext cx="10972800" cy="9601200"/>
+          </a:xfrm>
+          <a:prstGeom prst="rect">
+            <a:avLst/>
+          </a:prstGeom>
+        </p:spPr>
+        <p:txBody>
+          <a:bodyPr/>
+          <a:lstStyle/>
+          <a:p>
+            <a:endParaRPr lang="en-US" dirty="0"/>
+          </a:p>
+        </p:txBody>
+      </p:sp>
+    </p:spTree>
+    <p:extLst>
+      <p:ext uri="{BB962C8B-B14F-4D97-AF65-F5344CB8AC3E}">
+        <p14:creationId xmlns:p14="http://schemas.microsoft.com/office/powerpoint/2010/main" val="1424317412"/>
+      </p:ext>
+    </p:extLst>
+  </p:cSld>
+  <p:clrMapOvr>
+    <a:masterClrMapping/>
+  </p:clrMapOvr>
+</p:notes>
+</file>
+
+<file path=ppt/notesSlides/notesSlide26.xml><?xml version="1.0" encoding="utf-8"?>
+<p:notes xmlns:a="http://schemas.openxmlformats.org/drawingml/2006/main" xmlns:r="http://schemas.openxmlformats.org/officeDocument/2006/relationships" xmlns:p="http://schemas.openxmlformats.org/presentationml/2006/main">
+  <p:cSld>
+    <p:spTree>
+      <p:nvGrpSpPr>
+        <p:cNvPr id="1" name=""/>
+        <p:cNvGrpSpPr/>
+        <p:nvPr/>
+      </p:nvGrpSpPr>
+      <p:grpSpPr>
+        <a:xfrm>
+          <a:off x="0" y="0"/>
+          <a:ext cx="0" cy="0"/>
+          <a:chOff x="0" y="0"/>
+          <a:chExt cx="0" cy="0"/>
+        </a:xfrm>
+      </p:grpSpPr>
+      <p:sp>
+        <p:nvSpPr>
+          <p:cNvPr id="2" name="Slide Image Placeholder 1"/>
+          <p:cNvSpPr>
+            <a:spLocks noGrp="1" noRot="1" noChangeAspect="1"/>
+          </p:cNvSpPr>
+          <p:nvPr>
+            <p:ph type="sldImg"/>
+          </p:nvPr>
+        </p:nvSpPr>
+        <p:spPr>
+          <a:xfrm>
+            <a:off x="-457200" y="3048000"/>
+            <a:ext cx="14630400" cy="8229600"/>
+          </a:xfrm>
+          <a:prstGeom prst="rect">
+            <a:avLst/>
+          </a:prstGeom>
+          <a:noFill/>
+          <a:ln w="12700">
+            <a:solidFill>
+              <a:prstClr val="black"/>
+            </a:solidFill>
+          </a:ln>
+        </p:spPr>
+      </p:sp>
+      <p:sp>
+        <p:nvSpPr>
+          <p:cNvPr id="3" name="Notes Placeholder 2"/>
+          <p:cNvSpPr>
+            <a:spLocks noGrp="1"/>
+          </p:cNvSpPr>
+          <p:nvPr>
+            <p:ph type="body" idx="1"/>
+          </p:nvPr>
+        </p:nvSpPr>
+        <p:spPr>
+          <a:xfrm>
+            <a:off x="1371600" y="11734800"/>
+            <a:ext cx="10972800" cy="9601200"/>
+          </a:xfrm>
+          <a:prstGeom prst="rect">
+            <a:avLst/>
+          </a:prstGeom>
+        </p:spPr>
+        <p:txBody>
+          <a:bodyPr/>
+          <a:lstStyle/>
+          <a:p>
+            <a:endParaRPr lang="en-US" dirty="0"/>
+          </a:p>
+        </p:txBody>
+      </p:sp>
+    </p:spTree>
+    <p:extLst>
+      <p:ext uri="{BB962C8B-B14F-4D97-AF65-F5344CB8AC3E}">
+        <p14:creationId xmlns:p14="http://schemas.microsoft.com/office/powerpoint/2010/main" val="915333948"/>
+      </p:ext>
+    </p:extLst>
+  </p:cSld>
+  <p:clrMapOvr>
+    <a:masterClrMapping/>
+  </p:clrMapOvr>
+</p:notes>
+</file>
+
+<file path=ppt/notesSlides/notesSlide27.xml><?xml version="1.0" encoding="utf-8"?>
+<p:notes xmlns:a="http://schemas.openxmlformats.org/drawingml/2006/main" xmlns:r="http://schemas.openxmlformats.org/officeDocument/2006/relationships" xmlns:p="http://schemas.openxmlformats.org/presentationml/2006/main">
+  <p:cSld>
+    <p:spTree>
+      <p:nvGrpSpPr>
+        <p:cNvPr id="1" name=""/>
+        <p:cNvGrpSpPr/>
+        <p:nvPr/>
+      </p:nvGrpSpPr>
+      <p:grpSpPr>
+        <a:xfrm>
+          <a:off x="0" y="0"/>
+          <a:ext cx="0" cy="0"/>
+          <a:chOff x="0" y="0"/>
+          <a:chExt cx="0" cy="0"/>
+        </a:xfrm>
+      </p:grpSpPr>
+      <p:sp>
+        <p:nvSpPr>
+          <p:cNvPr id="2" name="Slide Image Placeholder 1"/>
+          <p:cNvSpPr>
+            <a:spLocks noGrp="1" noRot="1" noChangeAspect="1"/>
+          </p:cNvSpPr>
+          <p:nvPr>
+            <p:ph type="sldImg"/>
+          </p:nvPr>
+        </p:nvSpPr>
+        <p:spPr>
+          <a:xfrm>
+            <a:off x="-457200" y="3048000"/>
+            <a:ext cx="14630400" cy="8229600"/>
+          </a:xfrm>
+          <a:prstGeom prst="rect">
+            <a:avLst/>
+          </a:prstGeom>
+          <a:noFill/>
+          <a:ln w="12700">
+            <a:solidFill>
+              <a:prstClr val="black"/>
+            </a:solidFill>
+          </a:ln>
+        </p:spPr>
+      </p:sp>
+      <p:sp>
+        <p:nvSpPr>
+          <p:cNvPr id="3" name="Notes Placeholder 2"/>
+          <p:cNvSpPr>
+            <a:spLocks noGrp="1"/>
+          </p:cNvSpPr>
+          <p:nvPr>
+            <p:ph type="body" idx="1"/>
+          </p:nvPr>
+        </p:nvSpPr>
+        <p:spPr>
+          <a:xfrm>
+            <a:off x="1371600" y="11734800"/>
+            <a:ext cx="10972800" cy="9601200"/>
+          </a:xfrm>
+          <a:prstGeom prst="rect">
+            <a:avLst/>
+          </a:prstGeom>
+        </p:spPr>
+        <p:txBody>
+          <a:bodyPr/>
+          <a:lstStyle/>
+          <a:p>
+            <a:endParaRPr lang="en-US" dirty="0"/>
+          </a:p>
+        </p:txBody>
+      </p:sp>
+    </p:spTree>
+    <p:extLst>
+      <p:ext uri="{BB962C8B-B14F-4D97-AF65-F5344CB8AC3E}">
+        <p14:creationId xmlns:p14="http://schemas.microsoft.com/office/powerpoint/2010/main" val="1995494101"/>
+      </p:ext>
+    </p:extLst>
+  </p:cSld>
+  <p:clrMapOvr>
+    <a:masterClrMapping/>
+  </p:clrMapOvr>
+</p:notes>
+</file>
+
+<file path=ppt/notesSlides/notesSlide28.xml><?xml version="1.0" encoding="utf-8"?>
+<p:notes xmlns:a="http://schemas.openxmlformats.org/drawingml/2006/main" xmlns:r="http://schemas.openxmlformats.org/officeDocument/2006/relationships" xmlns:p="http://schemas.openxmlformats.org/presentationml/2006/main">
+  <p:cSld>
+    <p:spTree>
+      <p:nvGrpSpPr>
+        <p:cNvPr id="1" name=""/>
+        <p:cNvGrpSpPr/>
+        <p:nvPr/>
+      </p:nvGrpSpPr>
+      <p:grpSpPr>
+        <a:xfrm>
+          <a:off x="0" y="0"/>
+          <a:ext cx="0" cy="0"/>
+          <a:chOff x="0" y="0"/>
+          <a:chExt cx="0" cy="0"/>
+        </a:xfrm>
+      </p:grpSpPr>
+      <p:sp>
+        <p:nvSpPr>
+          <p:cNvPr id="2" name="Slide Image Placeholder 1"/>
+          <p:cNvSpPr>
+            <a:spLocks noGrp="1" noRot="1" noChangeAspect="1"/>
+          </p:cNvSpPr>
+          <p:nvPr>
+            <p:ph type="sldImg"/>
+          </p:nvPr>
+        </p:nvSpPr>
+        <p:spPr>
+          <a:xfrm>
+            <a:off x="-457200" y="3048000"/>
+            <a:ext cx="14630400" cy="8229600"/>
+          </a:xfrm>
+          <a:prstGeom prst="rect">
+            <a:avLst/>
+          </a:prstGeom>
+          <a:noFill/>
+          <a:ln w="12700">
+            <a:solidFill>
+              <a:prstClr val="black"/>
+            </a:solidFill>
+          </a:ln>
+        </p:spPr>
+      </p:sp>
+      <p:sp>
+        <p:nvSpPr>
+          <p:cNvPr id="3" name="Notes Placeholder 2"/>
+          <p:cNvSpPr>
+            <a:spLocks noGrp="1"/>
+          </p:cNvSpPr>
+          <p:nvPr>
+            <p:ph type="body" idx="1"/>
+          </p:nvPr>
+        </p:nvSpPr>
+        <p:spPr>
+          <a:xfrm>
+            <a:off x="1371600" y="11734800"/>
+            <a:ext cx="10972800" cy="9601200"/>
+          </a:xfrm>
+          <a:prstGeom prst="rect">
+            <a:avLst/>
+          </a:prstGeom>
+        </p:spPr>
+        <p:txBody>
+          <a:bodyPr/>
+          <a:lstStyle/>
+          <a:p>
+            <a:endParaRPr lang="en-US" dirty="0"/>
+          </a:p>
+        </p:txBody>
+      </p:sp>
+    </p:spTree>
+    <p:extLst>
+      <p:ext uri="{BB962C8B-B14F-4D97-AF65-F5344CB8AC3E}">
+        <p14:creationId xmlns:p14="http://schemas.microsoft.com/office/powerpoint/2010/main" val="3203978241"/>
+      </p:ext>
+    </p:extLst>
+  </p:cSld>
+  <p:clrMapOvr>
+    <a:masterClrMapping/>
+  </p:clrMapOvr>
+</p:notes>
+</file>
+
+<file path=ppt/notesSlides/notesSlide29.xml><?xml version="1.0" encoding="utf-8"?>
+<p:notes xmlns:a="http://schemas.openxmlformats.org/drawingml/2006/main" xmlns:r="http://schemas.openxmlformats.org/officeDocument/2006/relationships" xmlns:p="http://schemas.openxmlformats.org/presentationml/2006/main">
+  <p:cSld>
+    <p:spTree>
+      <p:nvGrpSpPr>
+        <p:cNvPr id="1" name=""/>
+        <p:cNvGrpSpPr/>
+        <p:nvPr/>
+      </p:nvGrpSpPr>
+      <p:grpSpPr>
+        <a:xfrm>
+          <a:off x="0" y="0"/>
+          <a:ext cx="0" cy="0"/>
+          <a:chOff x="0" y="0"/>
+          <a:chExt cx="0" cy="0"/>
+        </a:xfrm>
+      </p:grpSpPr>
+      <p:sp>
+        <p:nvSpPr>
+          <p:cNvPr id="2" name="Slide Image Placeholder 1"/>
+          <p:cNvSpPr>
+            <a:spLocks noGrp="1" noRot="1" noChangeAspect="1"/>
+          </p:cNvSpPr>
+          <p:nvPr>
+            <p:ph type="sldImg"/>
+          </p:nvPr>
+        </p:nvSpPr>
+        <p:spPr>
+          <a:xfrm>
+            <a:off x="-457200" y="3048000"/>
+            <a:ext cx="14630400" cy="8229600"/>
+          </a:xfrm>
+          <a:prstGeom prst="rect">
+            <a:avLst/>
+          </a:prstGeom>
+          <a:noFill/>
+          <a:ln w="12700">
+            <a:solidFill>
+              <a:prstClr val="black"/>
+            </a:solidFill>
+          </a:ln>
+        </p:spPr>
+      </p:sp>
+      <p:sp>
+        <p:nvSpPr>
+          <p:cNvPr id="3" name="Notes Placeholder 2"/>
+          <p:cNvSpPr>
+            <a:spLocks noGrp="1"/>
+          </p:cNvSpPr>
+          <p:nvPr>
+            <p:ph type="body" idx="1"/>
+          </p:nvPr>
+        </p:nvSpPr>
+        <p:spPr>
+          <a:xfrm>
+            <a:off x="1371600" y="11734800"/>
+            <a:ext cx="10972800" cy="9601200"/>
+          </a:xfrm>
+          <a:prstGeom prst="rect">
+            <a:avLst/>
+          </a:prstGeom>
+        </p:spPr>
+        <p:txBody>
+          <a:bodyPr/>
+          <a:lstStyle/>
+          <a:p>
+            <a:endParaRPr lang="en-US" dirty="0"/>
+          </a:p>
+        </p:txBody>
+      </p:sp>
+    </p:spTree>
+    <p:extLst>
+      <p:ext uri="{BB962C8B-B14F-4D97-AF65-F5344CB8AC3E}">
+        <p14:creationId xmlns:p14="http://schemas.microsoft.com/office/powerpoint/2010/main" val="368585227"/>
       </p:ext>
     </p:extLst>
   </p:cSld>
@@ -1874,6 +3345,89 @@
     <p:extLst>
       <p:ext uri="{BB962C8B-B14F-4D97-AF65-F5344CB8AC3E}">
         <p14:creationId xmlns:p14="http://schemas.microsoft.com/office/powerpoint/2010/main" val="3108843130"/>
+      </p:ext>
+    </p:extLst>
+  </p:cSld>
+  <p:clrMapOvr>
+    <a:masterClrMapping/>
+  </p:clrMapOvr>
+</p:notes>
+</file>
+
+<file path=ppt/notesSlides/notesSlide30.xml><?xml version="1.0" encoding="utf-8"?>
+<p:notes xmlns:a="http://schemas.openxmlformats.org/drawingml/2006/main" xmlns:r="http://schemas.openxmlformats.org/officeDocument/2006/relationships" xmlns:p="http://schemas.openxmlformats.org/presentationml/2006/main">
+  <p:cSld>
+    <p:spTree>
+      <p:nvGrpSpPr>
+        <p:cNvPr id="1" name=""/>
+        <p:cNvGrpSpPr/>
+        <p:nvPr/>
+      </p:nvGrpSpPr>
+      <p:grpSpPr>
+        <a:xfrm>
+          <a:off x="0" y="0"/>
+          <a:ext cx="0" cy="0"/>
+          <a:chOff x="0" y="0"/>
+          <a:chExt cx="0" cy="0"/>
+        </a:xfrm>
+      </p:grpSpPr>
+      <p:sp>
+        <p:nvSpPr>
+          <p:cNvPr id="2" name="Slide Image Placeholder 1"/>
+          <p:cNvSpPr>
+            <a:spLocks noGrp="1" noRot="1" noChangeAspect="1"/>
+          </p:cNvSpPr>
+          <p:nvPr>
+            <p:ph type="sldImg"/>
+          </p:nvPr>
+        </p:nvSpPr>
+        <p:spPr>
+          <a:xfrm>
+            <a:off x="-457200" y="3048000"/>
+            <a:ext cx="14630400" cy="8229600"/>
+          </a:xfrm>
+          <a:prstGeom prst="rect">
+            <a:avLst/>
+          </a:prstGeom>
+          <a:noFill/>
+          <a:ln w="12700">
+            <a:solidFill>
+              <a:prstClr val="black"/>
+            </a:solidFill>
+          </a:ln>
+        </p:spPr>
+      </p:sp>
+      <p:sp>
+        <p:nvSpPr>
+          <p:cNvPr id="3" name="Notes Placeholder 2"/>
+          <p:cNvSpPr>
+            <a:spLocks noGrp="1"/>
+          </p:cNvSpPr>
+          <p:nvPr>
+            <p:ph type="body" idx="1"/>
+          </p:nvPr>
+        </p:nvSpPr>
+        <p:spPr>
+          <a:xfrm>
+            <a:off x="1371600" y="11734800"/>
+            <a:ext cx="10972800" cy="9601200"/>
+          </a:xfrm>
+          <a:prstGeom prst="rect">
+            <a:avLst/>
+          </a:prstGeom>
+        </p:spPr>
+        <p:txBody>
+          <a:bodyPr/>
+          <a:lstStyle/>
+          <a:p>
+            <a:endParaRPr lang="en-US" dirty="0"/>
+          </a:p>
+        </p:txBody>
+      </p:sp>
+    </p:spTree>
+    <p:extLst>
+      <p:ext uri="{BB962C8B-B14F-4D97-AF65-F5344CB8AC3E}">
+        <p14:creationId xmlns:p14="http://schemas.microsoft.com/office/powerpoint/2010/main" val="931307476"/>
       </p:ext>
     </p:extLst>
   </p:cSld>
@@ -18851,8 +20405,8 @@
         </p:nvSpPr>
         <p:spPr>
           <a:xfrm>
-            <a:off x="3460565" y="928688"/>
-            <a:ext cx="7965461" cy="1122750"/>
+            <a:off x="2529841" y="131568"/>
+            <a:ext cx="8896186" cy="1122750"/>
           </a:xfrm>
         </p:spPr>
         <p:txBody>
@@ -18893,13 +20447,13 @@
         </p:nvSpPr>
         <p:spPr>
           <a:xfrm>
-            <a:off x="3460565" y="2303028"/>
-            <a:ext cx="7965460" cy="1407581"/>
+            <a:off x="2529840" y="1254318"/>
+            <a:ext cx="5203307" cy="5603682"/>
           </a:xfrm>
         </p:spPr>
         <p:txBody>
           <a:bodyPr>
-            <a:normAutofit/>
+            <a:noAutofit/>
           </a:bodyPr>
           <a:lstStyle/>
           <a:p>
@@ -18926,23 +20480,8 @@
                 <a:solidFill>
                   <a:srgbClr val="7030A0"/>
                 </a:solidFill>
-                <a:hlinkClick r:id="rId3">
-                  <a:extLst>
-                    <a:ext uri="{A12FA001-AC4F-418D-AE19-62706E023703}">
-                      <ahyp:hlinkClr xmlns:ahyp="http://schemas.microsoft.com/office/drawing/2018/hyperlinkcolor" val="tx"/>
-                    </a:ext>
-                  </a:extLst>
-                </a:hlinkClick>
               </a:rPr>
-              <a:t>https://data.mendeley.com/datasets/hx4m73v2sf/2</a:t>
-            </a:r>
-            <a:r>
-              <a:rPr lang="ru-RU" sz="2200" dirty="0">
-                <a:solidFill>
-                  <a:srgbClr val="7030A0"/>
-                </a:solidFill>
-              </a:rPr>
-              <a:t> </a:t>
+              <a:t>https://www.kaggle.com/datasets/hassaanmustafavi/phishing-urls-dataset?resource=download </a:t>
             </a:r>
             <a:r>
               <a:rPr lang="af-ZA" sz="2200" dirty="0">
@@ -18950,7 +20489,7 @@
                   <a:srgbClr val="202C8F"/>
                 </a:solidFill>
               </a:rPr>
-              <a:t>LegitPhish Dataset</a:t>
+              <a:t>Phishing URLs Dataset </a:t>
             </a:r>
             <a:r>
               <a:rPr lang="ru-RU" sz="2200" dirty="0">
@@ -18958,7 +20497,7 @@
                   <a:srgbClr val="202C8F"/>
                 </a:solidFill>
               </a:rPr>
-              <a:t> (авторы: </a:t>
+              <a:t>(автор: </a:t>
             </a:r>
             <a:r>
               <a:rPr lang="af-ZA" sz="2200" dirty="0">
@@ -18966,7 +20505,7 @@
                   <a:srgbClr val="202C8F"/>
                 </a:solidFill>
               </a:rPr>
-              <a:t>Rachana Potpelwar,</a:t>
+              <a:t>Hassaan Mustafavi</a:t>
             </a:r>
             <a:r>
               <a:rPr lang="ru-RU" sz="2200" dirty="0">
@@ -18974,40 +20513,110 @@
                   <a:srgbClr val="202C8F"/>
                 </a:solidFill>
               </a:rPr>
-              <a:t> </a:t>
-            </a:r>
-            <a:r>
-              <a:rPr lang="af-ZA" sz="2200" dirty="0">
-                <a:solidFill>
-                  <a:srgbClr val="202C8F"/>
-                </a:solidFill>
-              </a:rPr>
-              <a:t>Uday Kulkarni,</a:t>
-            </a:r>
+              <a:t>).</a:t>
+            </a:r>
+          </a:p>
+          <a:p>
+            <a:pPr marL="0" indent="0">
+              <a:buNone/>
+            </a:pPr>
             <a:r>
               <a:rPr lang="ru-RU" sz="2200" dirty="0">
                 <a:solidFill>
                   <a:srgbClr val="202C8F"/>
                 </a:solidFill>
               </a:rPr>
-              <a:t> </a:t>
-            </a:r>
-            <a:r>
-              <a:rPr lang="af-ZA" sz="2200" dirty="0">
-                <a:solidFill>
-                  <a:srgbClr val="202C8F"/>
-                </a:solidFill>
-              </a:rPr>
-              <a:t>Jaishri Waghmare</a:t>
-            </a:r>
+              <a:t>Подготовка данных:</a:t>
+            </a:r>
+          </a:p>
+          <a:p>
             <a:r>
               <a:rPr lang="ru-RU" sz="2200" dirty="0">
                 <a:solidFill>
                   <a:srgbClr val="202C8F"/>
                 </a:solidFill>
               </a:rPr>
-              <a:t>)</a:t>
-            </a:r>
+              <a:t>Исходный </a:t>
+            </a:r>
+            <a:r>
+              <a:rPr lang="ru-RU" sz="2200" dirty="0" err="1">
+                <a:solidFill>
+                  <a:srgbClr val="202C8F"/>
+                </a:solidFill>
+              </a:rPr>
+              <a:t>датасет</a:t>
+            </a:r>
+            <a:r>
+              <a:rPr lang="ru-RU" sz="2200" dirty="0">
+                <a:solidFill>
+                  <a:srgbClr val="202C8F"/>
+                </a:solidFill>
+              </a:rPr>
+              <a:t> очищен от дубликатов </a:t>
+            </a:r>
+          </a:p>
+          <a:p>
+            <a:r>
+              <a:rPr lang="ru-RU" sz="2200" dirty="0">
+                <a:solidFill>
+                  <a:srgbClr val="202C8F"/>
+                </a:solidFill>
+              </a:rPr>
+              <a:t>Проведена балансировка данных</a:t>
+            </a:r>
+          </a:p>
+          <a:p>
+            <a:r>
+              <a:rPr lang="ru-RU" sz="2200" dirty="0">
+                <a:solidFill>
+                  <a:srgbClr val="202C8F"/>
+                </a:solidFill>
+              </a:rPr>
+              <a:t>Добавлены признаки</a:t>
+            </a:r>
+          </a:p>
+          <a:p>
+            <a:r>
+              <a:rPr lang="ru-RU" sz="2200" dirty="0">
+                <a:solidFill>
+                  <a:srgbClr val="202C8F"/>
+                </a:solidFill>
+              </a:rPr>
+              <a:t>В итоге </a:t>
+            </a:r>
+            <a:r>
+              <a:rPr lang="ru-RU" sz="2200" dirty="0" err="1">
+                <a:solidFill>
+                  <a:srgbClr val="202C8F"/>
+                </a:solidFill>
+              </a:rPr>
+              <a:t>датасет</a:t>
+            </a:r>
+            <a:r>
+              <a:rPr lang="ru-RU" sz="2200" dirty="0">
+                <a:solidFill>
+                  <a:srgbClr val="202C8F"/>
+                </a:solidFill>
+              </a:rPr>
+              <a:t> содержит </a:t>
+            </a:r>
+            <a:r>
+              <a:rPr lang="ru-RU" sz="2400" dirty="0"/>
+              <a:t>160081 </a:t>
+            </a:r>
+            <a:r>
+              <a:rPr lang="en-US" sz="2400" dirty="0"/>
+              <a:t>URL </a:t>
+            </a:r>
+            <a:r>
+              <a:rPr lang="ru-RU" sz="2400" dirty="0"/>
+              <a:t>и 27 признаков</a:t>
+            </a:r>
+            <a:endParaRPr lang="ru-RU" sz="2200" dirty="0">
+              <a:solidFill>
+                <a:srgbClr val="202C8F"/>
+              </a:solidFill>
+            </a:endParaRPr>
           </a:p>
         </p:txBody>
       </p:sp>
@@ -19061,14 +20670,14 @@
           <p:nvPr>
             <p:extLst>
               <p:ext uri="{D42A27DB-BD31-4B8C-83A1-F6EECF244321}">
-                <p14:modId xmlns:p14="http://schemas.microsoft.com/office/powerpoint/2010/main" val="3346528764"/>
+                <p14:modId xmlns:p14="http://schemas.microsoft.com/office/powerpoint/2010/main" val="4278331152"/>
               </p:ext>
             </p:extLst>
           </p:nvPr>
         </p:nvGraphicFramePr>
         <p:xfrm>
-          <a:off x="3460564" y="3737940"/>
-          <a:ext cx="7965462" cy="1974231"/>
+          <a:off x="7374464" y="5532922"/>
+          <a:ext cx="4724400" cy="1316154"/>
         </p:xfrm>
         <a:graphic>
           <a:graphicData uri="http://schemas.openxmlformats.org/drawingml/2006/table">
@@ -19077,21 +20686,21 @@
                 <a:tableStyleId>{C083E6E3-FA7D-4D7B-A595-EF9225AFEA82}</a:tableStyleId>
               </a:tblPr>
               <a:tblGrid>
-                <a:gridCol w="3430566">
+                <a:gridCol w="1598504">
                   <a:extLst>
                     <a:ext uri="{9D8B030D-6E8A-4147-A177-3AD203B41FA5}">
                       <a16:colId xmlns:a16="http://schemas.microsoft.com/office/drawing/2014/main" val="1764027237"/>
                     </a:ext>
                   </a:extLst>
                 </a:gridCol>
-                <a:gridCol w="2557670">
+                <a:gridCol w="1366487">
                   <a:extLst>
                     <a:ext uri="{9D8B030D-6E8A-4147-A177-3AD203B41FA5}">
                       <a16:colId xmlns:a16="http://schemas.microsoft.com/office/drawing/2014/main" val="778914542"/>
                     </a:ext>
                   </a:extLst>
                 </a:gridCol>
-                <a:gridCol w="1977226">
+                <a:gridCol w="1759409">
                   <a:extLst>
                     <a:ext uri="{9D8B030D-6E8A-4147-A177-3AD203B41FA5}">
                       <a16:colId xmlns:a16="http://schemas.microsoft.com/office/drawing/2014/main" val="4233386372"/>
@@ -19158,51 +20767,9 @@
                     <a:lstStyle/>
                     <a:p>
                       <a:r>
-                        <a:rPr lang="en-US" dirty="0"/>
-                        <a:t>101 219</a:t>
+                        <a:rPr lang="ru-RU" sz="1800" dirty="0"/>
+                        <a:t>160081</a:t>
                       </a:r>
-                    </a:p>
-                  </a:txBody>
-                  <a:tcPr anchor="ctr"/>
-                </a:tc>
-                <a:tc>
-                  <a:txBody>
-                    <a:bodyPr/>
-                    <a:lstStyle/>
-                    <a:p>
-                      <a:r>
-                        <a:rPr lang="en-US" dirty="0"/>
-                        <a:t>63 678</a:t>
-                      </a:r>
-                    </a:p>
-                  </a:txBody>
-                  <a:tcPr anchor="ctr"/>
-                </a:tc>
-                <a:tc>
-                  <a:txBody>
-                    <a:bodyPr/>
-                    <a:lstStyle/>
-                    <a:p>
-                      <a:r>
-                        <a:rPr lang="en-US" dirty="0"/>
-                        <a:t>37 540</a:t>
-                      </a:r>
-                    </a:p>
-                  </a:txBody>
-                  <a:tcPr anchor="ctr"/>
-                </a:tc>
-                <a:extLst>
-                  <a:ext uri="{0D108BD9-81ED-4DB2-BD59-A6C34878D82A}">
-                    <a16:rowId xmlns:a16="http://schemas.microsoft.com/office/drawing/2014/main" val="773796761"/>
-                  </a:ext>
-                </a:extLst>
-              </a:tr>
-              <a:tr h="658077">
-                <a:tc>
-                  <a:txBody>
-                    <a:bodyPr/>
-                    <a:lstStyle/>
-                    <a:p>
                       <a:endParaRPr lang="en-US" dirty="0"/>
                     </a:p>
                   </a:txBody>
@@ -19214,9 +20781,10 @@
                     <a:lstStyle/>
                     <a:p>
                       <a:r>
-                        <a:rPr lang="en-US" dirty="0"/>
-                        <a:t>(62.9%)</a:t>
+                        <a:rPr lang="ru-RU" dirty="0"/>
+                        <a:t>48875</a:t>
                       </a:r>
+                      <a:endParaRPr lang="en-US" dirty="0"/>
                     </a:p>
                   </a:txBody>
                   <a:tcPr anchor="ctr"/>
@@ -19227,20 +20795,49 @@
                     <a:lstStyle/>
                     <a:p>
                       <a:r>
-                        <a:rPr lang="en-US" dirty="0"/>
-                        <a:t>(37.1%)</a:t>
+                        <a:rPr lang="ru-RU" dirty="0"/>
+                        <a:t>111206</a:t>
                       </a:r>
+                      <a:endParaRPr lang="en-US" dirty="0"/>
                     </a:p>
                   </a:txBody>
                   <a:tcPr anchor="ctr"/>
                 </a:tc>
                 <a:extLst>
                   <a:ext uri="{0D108BD9-81ED-4DB2-BD59-A6C34878D82A}">
-                    <a16:rowId xmlns:a16="http://schemas.microsoft.com/office/drawing/2014/main" val="1789202252"/>
+                    <a16:rowId xmlns:a16="http://schemas.microsoft.com/office/drawing/2014/main" val="773796761"/>
                   </a:ext>
                 </a:extLst>
               </a:tr>
             </a:tbl>
+          </a:graphicData>
+        </a:graphic>
+      </p:graphicFrame>
+      <p:graphicFrame>
+        <p:nvGraphicFramePr>
+          <p:cNvPr id="6" name="Диаграмма 5">
+            <a:extLst>
+              <a:ext uri="{FF2B5EF4-FFF2-40B4-BE49-F238E27FC236}">
+                <a16:creationId xmlns:a16="http://schemas.microsoft.com/office/drawing/2014/main" id="{BCB98B98-13E9-4A15-967D-EE2E66D4D0C8}"/>
+              </a:ext>
+            </a:extLst>
+          </p:cNvPr>
+          <p:cNvGraphicFramePr/>
+          <p:nvPr>
+            <p:extLst>
+              <p:ext uri="{D42A27DB-BD31-4B8C-83A1-F6EECF244321}">
+                <p14:modId xmlns:p14="http://schemas.microsoft.com/office/powerpoint/2010/main" val="2374776442"/>
+              </p:ext>
+            </p:extLst>
+          </p:nvPr>
+        </p:nvGraphicFramePr>
+        <p:xfrm>
+          <a:off x="7374464" y="1239638"/>
+          <a:ext cx="4724400" cy="4284361"/>
+        </p:xfrm>
+        <a:graphic>
+          <a:graphicData uri="http://schemas.openxmlformats.org/drawingml/2006/chart">
+            <c:chart xmlns:c="http://schemas.openxmlformats.org/drawingml/2006/chart" xmlns:r="http://schemas.openxmlformats.org/officeDocument/2006/relationships" r:id="rId3"/>
           </a:graphicData>
         </a:graphic>
       </p:graphicFrame>
@@ -19258,6 +20855,238 @@
 </file>
 
 <file path=ppt/slides/slide11.xml><?xml version="1.0" encoding="utf-8"?>
+<p:sld xmlns:a="http://schemas.openxmlformats.org/drawingml/2006/main" xmlns:r="http://schemas.openxmlformats.org/officeDocument/2006/relationships" xmlns:p="http://schemas.openxmlformats.org/presentationml/2006/main">
+  <p:cSld>
+    <p:spTree>
+      <p:nvGrpSpPr>
+        <p:cNvPr id="1" name=""/>
+        <p:cNvGrpSpPr/>
+        <p:nvPr/>
+      </p:nvGrpSpPr>
+      <p:grpSpPr>
+        <a:xfrm>
+          <a:off x="0" y="0"/>
+          <a:ext cx="0" cy="0"/>
+          <a:chOff x="0" y="0"/>
+          <a:chExt cx="0" cy="0"/>
+        </a:xfrm>
+      </p:grpSpPr>
+      <p:sp>
+        <p:nvSpPr>
+          <p:cNvPr id="2" name="Title 1">
+            <a:extLst>
+              <a:ext uri="{FF2B5EF4-FFF2-40B4-BE49-F238E27FC236}">
+                <a16:creationId xmlns:a16="http://schemas.microsoft.com/office/drawing/2014/main" id="{FD5E8954-9BCB-7FD9-A210-38DC54382D45}"/>
+              </a:ext>
+            </a:extLst>
+          </p:cNvPr>
+          <p:cNvSpPr>
+            <a:spLocks noGrp="1"/>
+          </p:cNvSpPr>
+          <p:nvPr>
+            <p:ph type="title"/>
+          </p:nvPr>
+        </p:nvSpPr>
+        <p:spPr>
+          <a:xfrm>
+            <a:off x="2529841" y="131568"/>
+            <a:ext cx="8896186" cy="1122750"/>
+          </a:xfrm>
+        </p:spPr>
+        <p:txBody>
+          <a:bodyPr/>
+          <a:lstStyle/>
+          <a:p>
+            <a:r>
+              <a:rPr lang="ru-RU" dirty="0"/>
+              <a:t>Почему выбран </a:t>
+            </a:r>
+            <a:br>
+              <a:rPr lang="ru-RU" dirty="0"/>
+            </a:br>
+            <a:r>
+              <a:rPr lang="af-ZA" dirty="0"/>
+              <a:t>Phishing URLs Dataset</a:t>
+            </a:r>
+            <a:endParaRPr lang="en-US" dirty="0"/>
+          </a:p>
+        </p:txBody>
+      </p:sp>
+      <p:sp>
+        <p:nvSpPr>
+          <p:cNvPr id="3" name="Content Placeholder 2">
+            <a:extLst>
+              <a:ext uri="{FF2B5EF4-FFF2-40B4-BE49-F238E27FC236}">
+                <a16:creationId xmlns:a16="http://schemas.microsoft.com/office/drawing/2014/main" id="{75111C33-898C-4414-4665-5136EB6FC126}"/>
+              </a:ext>
+            </a:extLst>
+          </p:cNvPr>
+          <p:cNvSpPr>
+            <a:spLocks noGrp="1"/>
+          </p:cNvSpPr>
+          <p:nvPr>
+            <p:ph sz="half" idx="2"/>
+          </p:nvPr>
+        </p:nvSpPr>
+        <p:spPr>
+          <a:xfrm>
+            <a:off x="2529840" y="1254318"/>
+            <a:ext cx="9662159" cy="5603682"/>
+          </a:xfrm>
+        </p:spPr>
+        <p:txBody>
+          <a:bodyPr>
+            <a:noAutofit/>
+          </a:bodyPr>
+          <a:lstStyle/>
+          <a:p>
+            <a:r>
+              <a:rPr lang="ru-RU" sz="2200" b="1" dirty="0"/>
+              <a:t>Масштаб и разнообразие</a:t>
+            </a:r>
+            <a:br>
+              <a:rPr lang="ru-RU" sz="2200" dirty="0"/>
+            </a:br>
+            <a:r>
+              <a:rPr lang="ru-RU" sz="2200" dirty="0"/>
+              <a:t>Более 450 000 реальных URL из разных источников покрывают широкий спектр фишинговых и легитимных паттернов, а также 25?? признаков.</a:t>
+            </a:r>
+          </a:p>
+          <a:p>
+            <a:r>
+              <a:rPr lang="ru-RU" sz="2200" b="1" dirty="0"/>
+              <a:t>Актуальность и качество</a:t>
+            </a:r>
+            <a:br>
+              <a:rPr lang="ru-RU" sz="2200" dirty="0"/>
+            </a:br>
+            <a:r>
+              <a:rPr lang="ru-RU" sz="2200" dirty="0"/>
+              <a:t>Данные предварительно очищены и подготовлены для </a:t>
+            </a:r>
+            <a:r>
+              <a:rPr lang="ru-RU" sz="2200" dirty="0" err="1"/>
+              <a:t>machine</a:t>
+            </a:r>
+            <a:r>
+              <a:rPr lang="ru-RU" sz="2200" dirty="0"/>
+              <a:t> </a:t>
+            </a:r>
+            <a:r>
+              <a:rPr lang="ru-RU" sz="2200" dirty="0" err="1"/>
+              <a:t>learning</a:t>
+            </a:r>
+            <a:r>
+              <a:rPr lang="ru-RU" sz="2200" dirty="0"/>
+              <a:t>, что сократило время предобработки и позволило сосредоточиться на обучении модели.</a:t>
+            </a:r>
+          </a:p>
+          <a:p>
+            <a:r>
+              <a:rPr lang="ru-RU" sz="2200" b="1" dirty="0"/>
+              <a:t>Сбалансированность классов</a:t>
+            </a:r>
+            <a:br>
+              <a:rPr lang="ru-RU" sz="2200" dirty="0"/>
+            </a:br>
+            <a:r>
+              <a:rPr lang="ru-RU" sz="2200" dirty="0"/>
+              <a:t>Изначально близкое к равному распределение </a:t>
+            </a:r>
+            <a:r>
+              <a:rPr lang="ru-RU" sz="2200" dirty="0" err="1"/>
+              <a:t>phishing</a:t>
+            </a:r>
+            <a:r>
+              <a:rPr lang="ru-RU" sz="2200" dirty="0"/>
+              <a:t>/</a:t>
+            </a:r>
+            <a:r>
+              <a:rPr lang="ru-RU" sz="2200" dirty="0" err="1"/>
+              <a:t>legitimate</a:t>
+            </a:r>
+            <a:r>
+              <a:rPr lang="ru-RU" sz="2200" dirty="0"/>
+              <a:t> обеспечило устойчивость модели без дополнительной балансировки на ранних этапах.</a:t>
+            </a:r>
+          </a:p>
+          <a:p>
+            <a:r>
+              <a:rPr lang="ru-RU" sz="2200" b="1" dirty="0"/>
+              <a:t>Простота интеграции</a:t>
+            </a:r>
+            <a:br>
+              <a:rPr lang="ru-RU" sz="2200" dirty="0"/>
+            </a:br>
+            <a:r>
+              <a:rPr lang="ru-RU" sz="2200" dirty="0"/>
+              <a:t>Стандартный CSV-формат легко загружается в ML.NET без дополнительных зависимостей и сложных </a:t>
+            </a:r>
+            <a:r>
+              <a:rPr lang="ru-RU" sz="2200" dirty="0" err="1"/>
+              <a:t>пайплайнов</a:t>
+            </a:r>
+            <a:r>
+              <a:rPr lang="ru-RU" sz="2200" dirty="0"/>
+              <a:t> обработки.</a:t>
+            </a:r>
+            <a:endParaRPr lang="ru-RU" sz="2200" dirty="0">
+              <a:solidFill>
+                <a:srgbClr val="202C8F"/>
+              </a:solidFill>
+            </a:endParaRPr>
+          </a:p>
+        </p:txBody>
+      </p:sp>
+      <p:sp>
+        <p:nvSpPr>
+          <p:cNvPr id="23" name="Slide Number Placeholder 22">
+            <a:extLst>
+              <a:ext uri="{FF2B5EF4-FFF2-40B4-BE49-F238E27FC236}">
+                <a16:creationId xmlns:a16="http://schemas.microsoft.com/office/drawing/2014/main" id="{94FF72B7-0438-3641-5939-75128934B0DF}"/>
+              </a:ext>
+            </a:extLst>
+          </p:cNvPr>
+          <p:cNvSpPr>
+            <a:spLocks noGrp="1"/>
+          </p:cNvSpPr>
+          <p:nvPr>
+            <p:ph type="sldNum" sz="quarter" idx="10"/>
+          </p:nvPr>
+        </p:nvSpPr>
+        <p:spPr>
+          <a:xfrm>
+            <a:off x="10358437" y="457199"/>
+            <a:ext cx="1067589" cy="471489"/>
+          </a:xfrm>
+        </p:spPr>
+        <p:txBody>
+          <a:bodyPr/>
+          <a:lstStyle/>
+          <a:p>
+            <a:fld id="{48F63A3B-78C7-47BE-AE5E-E10140E04643}" type="slidenum">
+              <a:rPr lang="en-US" smtClean="0"/>
+              <a:pPr/>
+              <a:t>11</a:t>
+            </a:fld>
+            <a:endParaRPr lang="en-US" dirty="0"/>
+          </a:p>
+        </p:txBody>
+      </p:sp>
+    </p:spTree>
+    <p:extLst>
+      <p:ext uri="{BB962C8B-B14F-4D97-AF65-F5344CB8AC3E}">
+        <p14:creationId xmlns:p14="http://schemas.microsoft.com/office/powerpoint/2010/main" val="387504392"/>
+      </p:ext>
+    </p:extLst>
+  </p:cSld>
+  <p:clrMapOvr>
+    <a:masterClrMapping/>
+  </p:clrMapOvr>
+</p:sld>
+</file>
+
+<file path=ppt/slides/slide12.xml><?xml version="1.0" encoding="utf-8"?>
 <p:sld xmlns:a="http://schemas.openxmlformats.org/drawingml/2006/main" xmlns:r="http://schemas.openxmlformats.org/officeDocument/2006/relationships" xmlns:p="http://schemas.openxmlformats.org/presentationml/2006/main">
   <p:cSld>
     <p:spTree>
@@ -19337,7 +21166,7 @@
             <a:fld id="{48F63A3B-78C7-47BE-AE5E-E10140E04643}" type="slidenum">
               <a:rPr lang="en-US" smtClean="0"/>
               <a:pPr/>
-              <a:t>11</a:t>
+              <a:t>12</a:t>
             </a:fld>
             <a:endParaRPr lang="en-US" dirty="0"/>
           </a:p>
@@ -19362,7 +21191,7 @@
         <p:spPr>
           <a:xfrm>
             <a:off x="914400" y="2316067"/>
-            <a:ext cx="10511627" cy="2471875"/>
+            <a:ext cx="10511627" cy="3484659"/>
           </a:xfrm>
         </p:spPr>
         <p:txBody>
@@ -19373,43 +21202,59 @@
           <a:p>
             <a:r>
               <a:rPr lang="ru-RU" sz="2200" dirty="0"/>
-              <a:t>Фишинговые URL: взяты из базы </a:t>
+              <a:t>Фишинговые URL: собраны из актуальных открытых баз угроз (</a:t>
             </a:r>
             <a:r>
               <a:rPr lang="ru-RU" sz="2200" dirty="0" err="1"/>
-              <a:t>URLHaus</a:t>
+              <a:t>PhishTank</a:t>
             </a:r>
             <a:r>
               <a:rPr lang="ru-RU" sz="2200" dirty="0"/>
-              <a:t>, вручную верифицированы. Реальные примеры атак.</a:t>
-            </a:r>
-          </a:p>
-          <a:p>
+              <a:t>, </a:t>
+            </a:r>
+            <a:r>
+              <a:rPr lang="ru-RU" sz="2200" dirty="0" err="1"/>
+              <a:t>OpenPhish</a:t>
+            </a:r>
             <a:r>
               <a:rPr lang="ru-RU" sz="2200" dirty="0"/>
-              <a:t>Легитимные URL: собраны из Wikipedia, </a:t>
+              <a:t>) и вручную верифицированы автором </a:t>
             </a:r>
             <a:r>
               <a:rPr lang="ru-RU" sz="2200" dirty="0" err="1"/>
-              <a:t>Stack</a:t>
+              <a:t>датасета</a:t>
             </a:r>
             <a:r>
               <a:rPr lang="ru-RU" sz="2200" dirty="0"/>
-              <a:t> </a:t>
+              <a:t> — реальные примеры атак без «мусорных» записей.</a:t>
+            </a:r>
+          </a:p>
+          <a:p>
+            <a:r>
+              <a:rPr lang="ru-RU" sz="2200" dirty="0"/>
+              <a:t>Легитимные URL: отобраны из авторитетных рейтингов и каталогов (</a:t>
             </a:r>
             <a:r>
               <a:rPr lang="ru-RU" sz="2200" dirty="0" err="1"/>
-              <a:t>Overflow</a:t>
+              <a:t>Alexa</a:t>
             </a:r>
             <a:r>
               <a:rPr lang="ru-RU" sz="2200" dirty="0"/>
-              <a:t> и других доверенных источников, случайная выборка для разнообразия.</a:t>
-            </a:r>
-          </a:p>
-          <a:p>
+              <a:t> Top </a:t>
+            </a:r>
+            <a:r>
+              <a:rPr lang="ru-RU" sz="2200" dirty="0" err="1"/>
+              <a:t>Sites</a:t>
+            </a:r>
             <a:r>
               <a:rPr lang="ru-RU" sz="2200" dirty="0"/>
-              <a:t>Особенность: </a:t>
+              <a:t>, DMOZ, Wikipedia) для максимального разнообразия безопасных доменов.</a:t>
+            </a:r>
+          </a:p>
+          <a:p>
+            <a:r>
+              <a:rPr lang="ru-RU" sz="2200" dirty="0"/>
+              <a:t>Особенность: изначально </a:t>
             </a:r>
             <a:r>
               <a:rPr lang="ru-RU" sz="2200" dirty="0" err="1"/>
@@ -19417,7 +21262,7 @@
             </a:r>
             <a:r>
               <a:rPr lang="ru-RU" sz="2200" dirty="0"/>
-              <a:t> сбалансирован по источникам, что повышает устойчивость модели.</a:t>
+              <a:t> сбалансирован по классам, а дополнительная очистка и отбор признаков с нашей стороны повысили устойчивость модели к шумам.</a:t>
             </a:r>
           </a:p>
         </p:txBody>
@@ -19435,7 +21280,7 @@
 </p:sld>
 </file>
 
-<file path=ppt/slides/slide12.xml><?xml version="1.0" encoding="utf-8"?>
+<file path=ppt/slides/slide13.xml><?xml version="1.0" encoding="utf-8"?>
 <p:sld xmlns:a="http://schemas.openxmlformats.org/drawingml/2006/main" xmlns:r="http://schemas.openxmlformats.org/officeDocument/2006/relationships" xmlns:p="http://schemas.openxmlformats.org/presentationml/2006/main">
   <p:cSld>
     <p:spTree>
@@ -19452,582 +21297,40 @@
           <a:chExt cx="0" cy="0"/>
         </a:xfrm>
       </p:grpSpPr>
-      <p:graphicFrame>
-        <p:nvGraphicFramePr>
-          <p:cNvPr id="5" name="Content Placeholder 4">
+      <p:sp>
+        <p:nvSpPr>
+          <p:cNvPr id="2" name="Title 1">
             <a:extLst>
               <a:ext uri="{FF2B5EF4-FFF2-40B4-BE49-F238E27FC236}">
-                <a16:creationId xmlns:a16="http://schemas.microsoft.com/office/drawing/2014/main" id="{AC0C7FF8-9CAF-6C67-C1E5-AF40401D0B3D}"/>
+                <a16:creationId xmlns:a16="http://schemas.microsoft.com/office/drawing/2014/main" id="{4730A324-0737-F0DA-1F7D-10CBE06D7C3F}"/>
               </a:ext>
             </a:extLst>
           </p:cNvPr>
-          <p:cNvGraphicFramePr>
-            <a:graphicFrameLocks noGrp="1"/>
-          </p:cNvGraphicFramePr>
+          <p:cNvSpPr>
+            <a:spLocks noGrp="1"/>
+          </p:cNvSpPr>
           <p:nvPr>
-            <p:ph sz="quarter" idx="4"/>
-            <p:extLst>
-              <p:ext uri="{D42A27DB-BD31-4B8C-83A1-F6EECF244321}">
-                <p14:modId xmlns:p14="http://schemas.microsoft.com/office/powerpoint/2010/main" val="923384028"/>
-              </p:ext>
-            </p:extLst>
+            <p:ph type="title"/>
           </p:nvPr>
-        </p:nvGraphicFramePr>
-        <p:xfrm>
-          <a:off x="4888995" y="490029"/>
-          <a:ext cx="6003236" cy="6126480"/>
-        </p:xfrm>
-        <a:graphic>
-          <a:graphicData uri="http://schemas.openxmlformats.org/drawingml/2006/table">
-            <a:tbl>
-              <a:tblPr firstRow="1" bandRow="1">
-                <a:tableStyleId>{C083E6E3-FA7D-4D7B-A595-EF9225AFEA82}</a:tableStyleId>
-              </a:tblPr>
-              <a:tblGrid>
-                <a:gridCol w="3001618">
-                  <a:extLst>
-                    <a:ext uri="{9D8B030D-6E8A-4147-A177-3AD203B41FA5}">
-                      <a16:colId xmlns:a16="http://schemas.microsoft.com/office/drawing/2014/main" val="1764027237"/>
-                    </a:ext>
-                  </a:extLst>
-                </a:gridCol>
-                <a:gridCol w="3001618">
-                  <a:extLst>
-                    <a:ext uri="{9D8B030D-6E8A-4147-A177-3AD203B41FA5}">
-                      <a16:colId xmlns:a16="http://schemas.microsoft.com/office/drawing/2014/main" val="778914542"/>
-                    </a:ext>
-                  </a:extLst>
-                </a:gridCol>
-              </a:tblGrid>
-              <a:tr h="347240">
-                <a:tc gridSpan="2">
-                  <a:txBody>
-                    <a:bodyPr/>
-                    <a:lstStyle/>
-                    <a:p>
-                      <a:pPr algn="ctr"/>
-                      <a:r>
-                        <a:rPr lang="ru-RU" dirty="0"/>
-                        <a:t>Признаки</a:t>
-                      </a:r>
-                      <a:endParaRPr lang="en-US" dirty="0"/>
-                    </a:p>
-                  </a:txBody>
-                  <a:tcPr anchor="ctr"/>
-                </a:tc>
-                <a:tc hMerge="1">
-                  <a:txBody>
-                    <a:bodyPr/>
-                    <a:lstStyle/>
-                    <a:p>
-                      <a:r>
-                        <a:rPr lang="ru-RU" dirty="0"/>
-                        <a:t>Метка</a:t>
-                      </a:r>
-                      <a:endParaRPr lang="en-US" dirty="0"/>
-                    </a:p>
-                  </a:txBody>
-                  <a:tcPr anchor="ctr"/>
-                </a:tc>
-                <a:extLst>
-                  <a:ext uri="{0D108BD9-81ED-4DB2-BD59-A6C34878D82A}">
-                    <a16:rowId xmlns:a16="http://schemas.microsoft.com/office/drawing/2014/main" val="2865033212"/>
-                  </a:ext>
-                </a:extLst>
-              </a:tr>
-              <a:tr h="318084">
-                <a:tc>
-                  <a:txBody>
-                    <a:bodyPr/>
-                    <a:lstStyle/>
-                    <a:p>
-                      <a:r>
-                        <a:rPr lang="en-US" dirty="0" err="1"/>
-                        <a:t>url_length</a:t>
-                      </a:r>
-                      <a:r>
-                        <a:rPr lang="en-US" dirty="0"/>
-                        <a:t> – </a:t>
-                      </a:r>
-                      <a:r>
-                        <a:rPr lang="ru-RU" dirty="0"/>
-                        <a:t>длина </a:t>
-                      </a:r>
-                      <a:r>
-                        <a:rPr lang="en-US" dirty="0"/>
-                        <a:t>URL</a:t>
-                      </a:r>
-                    </a:p>
-                  </a:txBody>
-                  <a:tcPr anchor="ctr"/>
-                </a:tc>
-                <a:tc>
-                  <a:txBody>
-                    <a:bodyPr/>
-                    <a:lstStyle/>
-                    <a:p>
-                      <a:r>
-                        <a:rPr lang="af-ZA" dirty="0"/>
-                        <a:t>path_length – </a:t>
-                      </a:r>
-                      <a:r>
-                        <a:rPr lang="ru-RU" dirty="0"/>
-                        <a:t>длина пути</a:t>
-                      </a:r>
-                    </a:p>
-                  </a:txBody>
-                  <a:tcPr anchor="ctr"/>
-                </a:tc>
-                <a:extLst>
-                  <a:ext uri="{0D108BD9-81ED-4DB2-BD59-A6C34878D82A}">
-                    <a16:rowId xmlns:a16="http://schemas.microsoft.com/office/drawing/2014/main" val="773796761"/>
-                  </a:ext>
-                </a:extLst>
-              </a:tr>
-              <a:tr h="347240">
-                <a:tc>
-                  <a:txBody>
-                    <a:bodyPr/>
-                    <a:lstStyle/>
-                    <a:p>
-                      <a:r>
-                        <a:rPr lang="en-US" dirty="0" err="1"/>
-                        <a:t>has_ip_address</a:t>
-                      </a:r>
-                      <a:r>
-                        <a:rPr lang="en-US" dirty="0"/>
-                        <a:t> – </a:t>
-                      </a:r>
-                      <a:r>
-                        <a:rPr lang="en-US" dirty="0" err="1"/>
-                        <a:t>наличие</a:t>
-                      </a:r>
-                      <a:r>
-                        <a:rPr lang="en-US" dirty="0"/>
-                        <a:t> IP</a:t>
-                      </a:r>
-                    </a:p>
-                  </a:txBody>
-                  <a:tcPr anchor="ctr"/>
-                </a:tc>
-                <a:tc>
-                  <a:txBody>
-                    <a:bodyPr/>
-                    <a:lstStyle/>
-                    <a:p>
-                      <a:r>
-                        <a:rPr lang="en-US" dirty="0" err="1"/>
-                        <a:t>has_hyphen_in_domain</a:t>
-                      </a:r>
-                      <a:r>
-                        <a:rPr lang="en-US" dirty="0"/>
-                        <a:t> – </a:t>
-                      </a:r>
-                      <a:r>
-                        <a:rPr lang="en-US" dirty="0" err="1"/>
-                        <a:t>дефис</a:t>
-                      </a:r>
-                      <a:r>
-                        <a:rPr lang="en-US" dirty="0"/>
-                        <a:t> в </a:t>
-                      </a:r>
-                      <a:r>
-                        <a:rPr lang="en-US" dirty="0" err="1"/>
-                        <a:t>домене</a:t>
-                      </a:r>
-                      <a:endParaRPr lang="en-US" dirty="0"/>
-                    </a:p>
-                  </a:txBody>
-                  <a:tcPr anchor="ctr"/>
-                </a:tc>
-                <a:extLst>
-                  <a:ext uri="{0D108BD9-81ED-4DB2-BD59-A6C34878D82A}">
-                    <a16:rowId xmlns:a16="http://schemas.microsoft.com/office/drawing/2014/main" val="713751665"/>
-                  </a:ext>
-                </a:extLst>
-              </a:tr>
-              <a:tr h="347240">
-                <a:tc>
-                  <a:txBody>
-                    <a:bodyPr/>
-                    <a:lstStyle/>
-                    <a:p>
-                      <a:r>
-                        <a:rPr lang="en-US" dirty="0" err="1"/>
-                        <a:t>dot_count</a:t>
-                      </a:r>
-                      <a:r>
-                        <a:rPr lang="en-US" dirty="0"/>
-                        <a:t> – </a:t>
-                      </a:r>
-                      <a:r>
-                        <a:rPr lang="ru-RU" dirty="0"/>
-                        <a:t>количество точек</a:t>
-                      </a:r>
-                    </a:p>
-                  </a:txBody>
-                  <a:tcPr anchor="ctr"/>
-                </a:tc>
-                <a:tc>
-                  <a:txBody>
-                    <a:bodyPr/>
-                    <a:lstStyle/>
-                    <a:p>
-                      <a:r>
-                        <a:rPr lang="ru-RU" dirty="0" err="1"/>
-                        <a:t>number_of_digits</a:t>
-                      </a:r>
-                      <a:r>
-                        <a:rPr lang="ru-RU" dirty="0"/>
-                        <a:t> – количество цифр</a:t>
-                      </a:r>
-                    </a:p>
-                  </a:txBody>
-                  <a:tcPr anchor="ctr"/>
-                </a:tc>
-                <a:extLst>
-                  <a:ext uri="{0D108BD9-81ED-4DB2-BD59-A6C34878D82A}">
-                    <a16:rowId xmlns:a16="http://schemas.microsoft.com/office/drawing/2014/main" val="3992887512"/>
-                  </a:ext>
-                </a:extLst>
-              </a:tr>
-              <a:tr h="347240">
-                <a:tc>
-                  <a:txBody>
-                    <a:bodyPr/>
-                    <a:lstStyle/>
-                    <a:p>
-                      <a:r>
-                        <a:rPr lang="en-US" dirty="0" err="1"/>
-                        <a:t>https_flag</a:t>
-                      </a:r>
-                      <a:r>
-                        <a:rPr lang="en-US" dirty="0"/>
-                        <a:t> – </a:t>
-                      </a:r>
-                      <a:r>
-                        <a:rPr lang="ru-RU" dirty="0"/>
-                        <a:t>использование </a:t>
-                      </a:r>
-                      <a:r>
-                        <a:rPr lang="en-US" dirty="0"/>
-                        <a:t>HTTPS</a:t>
-                      </a:r>
-                    </a:p>
-                  </a:txBody>
-                  <a:tcPr anchor="ctr"/>
-                </a:tc>
-                <a:tc>
-                  <a:txBody>
-                    <a:bodyPr/>
-                    <a:lstStyle/>
-                    <a:p>
-                      <a:r>
-                        <a:rPr lang="ru-RU" dirty="0" err="1"/>
-                        <a:t>tld_popularity</a:t>
-                      </a:r>
-                      <a:r>
-                        <a:rPr lang="ru-RU" dirty="0"/>
-                        <a:t> – популярный ли TLD</a:t>
-                      </a:r>
-                    </a:p>
-                  </a:txBody>
-                  <a:tcPr anchor="ctr"/>
-                </a:tc>
-                <a:extLst>
-                  <a:ext uri="{0D108BD9-81ED-4DB2-BD59-A6C34878D82A}">
-                    <a16:rowId xmlns:a16="http://schemas.microsoft.com/office/drawing/2014/main" val="1631318449"/>
-                  </a:ext>
-                </a:extLst>
-              </a:tr>
-              <a:tr h="607671">
-                <a:tc>
-                  <a:txBody>
-                    <a:bodyPr/>
-                    <a:lstStyle/>
-                    <a:p>
-                      <a:r>
-                        <a:rPr lang="en-US" dirty="0" err="1"/>
-                        <a:t>url_entropy</a:t>
-                      </a:r>
-                      <a:r>
-                        <a:rPr lang="en-US" dirty="0"/>
-                        <a:t> – </a:t>
-                      </a:r>
-                      <a:r>
-                        <a:rPr lang="ru-RU" dirty="0"/>
-                        <a:t>энтропия строки</a:t>
-                      </a:r>
-                    </a:p>
-                  </a:txBody>
-                  <a:tcPr anchor="ctr"/>
-                </a:tc>
-                <a:tc>
-                  <a:txBody>
-                    <a:bodyPr/>
-                    <a:lstStyle/>
-                    <a:p>
-                      <a:r>
-                        <a:rPr lang="en-US" dirty="0" err="1"/>
-                        <a:t>suspicious_file_extension</a:t>
-                      </a:r>
-                      <a:r>
-                        <a:rPr lang="en-US" dirty="0"/>
-                        <a:t> – </a:t>
-                      </a:r>
-                      <a:r>
-                        <a:rPr lang="ru-RU" dirty="0"/>
-                        <a:t>подозрительное расширение (.</a:t>
-                      </a:r>
-                      <a:r>
-                        <a:rPr lang="en-US" dirty="0"/>
-                        <a:t>exe, .zip)</a:t>
-                      </a:r>
-                    </a:p>
-                  </a:txBody>
-                  <a:tcPr anchor="ctr"/>
-                </a:tc>
-                <a:extLst>
-                  <a:ext uri="{0D108BD9-81ED-4DB2-BD59-A6C34878D82A}">
-                    <a16:rowId xmlns:a16="http://schemas.microsoft.com/office/drawing/2014/main" val="1789202252"/>
-                  </a:ext>
-                </a:extLst>
-              </a:tr>
-              <a:tr h="347240">
-                <a:tc>
-                  <a:txBody>
-                    <a:bodyPr/>
-                    <a:lstStyle/>
-                    <a:p>
-                      <a:r>
-                        <a:rPr lang="en-US" dirty="0" err="1"/>
-                        <a:t>token_count</a:t>
-                      </a:r>
-                      <a:r>
-                        <a:rPr lang="en-US" dirty="0"/>
-                        <a:t> – </a:t>
-                      </a:r>
-                      <a:r>
-                        <a:rPr lang="ru-RU" dirty="0"/>
-                        <a:t>количество токенов</a:t>
-                      </a:r>
-                    </a:p>
-                  </a:txBody>
-                  <a:tcPr anchor="ctr"/>
-                </a:tc>
-                <a:tc>
-                  <a:txBody>
-                    <a:bodyPr/>
-                    <a:lstStyle/>
-                    <a:p>
-                      <a:r>
-                        <a:rPr lang="ru-RU" dirty="0" err="1"/>
-                        <a:t>domain_name_length</a:t>
-                      </a:r>
-                      <a:r>
-                        <a:rPr lang="ru-RU" dirty="0"/>
-                        <a:t> – длина доменного имени</a:t>
-                      </a:r>
-                    </a:p>
-                  </a:txBody>
-                  <a:tcPr anchor="ctr"/>
-                </a:tc>
-                <a:extLst>
-                  <a:ext uri="{0D108BD9-81ED-4DB2-BD59-A6C34878D82A}">
-                    <a16:rowId xmlns:a16="http://schemas.microsoft.com/office/drawing/2014/main" val="2325356481"/>
-                  </a:ext>
-                </a:extLst>
-              </a:tr>
-              <a:tr h="347240">
-                <a:tc>
-                  <a:txBody>
-                    <a:bodyPr/>
-                    <a:lstStyle/>
-                    <a:p>
-                      <a:r>
-                        <a:rPr lang="en-US" dirty="0" err="1"/>
-                        <a:t>subdomain_count</a:t>
-                      </a:r>
-                      <a:r>
-                        <a:rPr lang="en-US" dirty="0"/>
-                        <a:t> – </a:t>
-                      </a:r>
-                      <a:r>
-                        <a:rPr lang="ru-RU" dirty="0"/>
-                        <a:t>число </a:t>
-                      </a:r>
-                      <a:r>
-                        <a:rPr lang="ru-RU" dirty="0" err="1"/>
-                        <a:t>поддоменов</a:t>
-                      </a:r>
-                      <a:endParaRPr lang="ru-RU" dirty="0"/>
-                    </a:p>
-                  </a:txBody>
-                  <a:tcPr anchor="ctr"/>
-                </a:tc>
-                <a:tc>
-                  <a:txBody>
-                    <a:bodyPr/>
-                    <a:lstStyle/>
-                    <a:p>
-                      <a:r>
-                        <a:rPr lang="en-US" dirty="0" err="1"/>
-                        <a:t>percentage_numeric_chars</a:t>
-                      </a:r>
-                      <a:r>
-                        <a:rPr lang="en-US" dirty="0"/>
-                        <a:t> – </a:t>
-                      </a:r>
-                      <a:r>
-                        <a:rPr lang="en-US" dirty="0" err="1"/>
-                        <a:t>доля</a:t>
-                      </a:r>
-                      <a:r>
-                        <a:rPr lang="en-US" dirty="0"/>
-                        <a:t> </a:t>
-                      </a:r>
-                      <a:r>
-                        <a:rPr lang="en-US" dirty="0" err="1"/>
-                        <a:t>цифр</a:t>
-                      </a:r>
-                      <a:endParaRPr lang="en-US" dirty="0"/>
-                    </a:p>
-                  </a:txBody>
-                  <a:tcPr anchor="ctr"/>
-                </a:tc>
-                <a:extLst>
-                  <a:ext uri="{0D108BD9-81ED-4DB2-BD59-A6C34878D82A}">
-                    <a16:rowId xmlns:a16="http://schemas.microsoft.com/office/drawing/2014/main" val="3322085491"/>
-                  </a:ext>
-                </a:extLst>
-              </a:tr>
-              <a:tr h="347240">
-                <a:tc>
-                  <a:txBody>
-                    <a:bodyPr/>
-                    <a:lstStyle/>
-                    <a:p>
-                      <a:r>
-                        <a:rPr lang="ru-RU" dirty="0" err="1"/>
-                        <a:t>query_param_count</a:t>
-                      </a:r>
-                      <a:r>
-                        <a:rPr lang="ru-RU" dirty="0"/>
-                        <a:t> – количество GET-параметров</a:t>
-                      </a:r>
-                    </a:p>
-                  </a:txBody>
-                  <a:tcPr anchor="ctr"/>
-                </a:tc>
-                <a:tc>
-                  <a:txBody>
-                    <a:bodyPr/>
-                    <a:lstStyle/>
-                    <a:p>
-                      <a:r>
-                        <a:rPr lang="en-US" dirty="0" err="1"/>
-                        <a:t>ClassLabel</a:t>
-                      </a:r>
-                      <a:r>
-                        <a:rPr lang="en-US" dirty="0"/>
-                        <a:t> – </a:t>
-                      </a:r>
-                      <a:r>
-                        <a:rPr lang="ru-RU" dirty="0"/>
-                        <a:t>целевая метка</a:t>
-                      </a:r>
-                    </a:p>
-                  </a:txBody>
-                  <a:tcPr anchor="ctr"/>
-                </a:tc>
-                <a:extLst>
-                  <a:ext uri="{0D108BD9-81ED-4DB2-BD59-A6C34878D82A}">
-                    <a16:rowId xmlns:a16="http://schemas.microsoft.com/office/drawing/2014/main" val="2682318458"/>
-                  </a:ext>
-                </a:extLst>
-              </a:tr>
-              <a:tr h="347240">
-                <a:tc>
-                  <a:txBody>
-                    <a:bodyPr/>
-                    <a:lstStyle/>
-                    <a:p>
-                      <a:r>
-                        <a:rPr lang="af-ZA" dirty="0"/>
-                        <a:t>tld_length – </a:t>
-                      </a:r>
-                      <a:r>
-                        <a:rPr lang="ru-RU" dirty="0"/>
-                        <a:t>длина </a:t>
-                      </a:r>
-                      <a:r>
-                        <a:rPr lang="af-ZA" dirty="0"/>
-                        <a:t>TLD</a:t>
-                      </a:r>
-                    </a:p>
-                  </a:txBody>
-                  <a:tcPr anchor="ctr"/>
-                </a:tc>
-                <a:tc>
-                  <a:txBody>
-                    <a:bodyPr/>
-                    <a:lstStyle/>
-                    <a:p>
-                      <a:r>
-                        <a:rPr lang="af-ZA" dirty="0"/>
-                        <a:t>URL</a:t>
-                      </a:r>
-                      <a:r>
-                        <a:rPr lang="ru-RU" dirty="0"/>
-                        <a:t> </a:t>
-                      </a:r>
-                      <a:r>
-                        <a:rPr lang="en-US" dirty="0"/>
-                        <a:t>–</a:t>
-                      </a:r>
-                      <a:r>
-                        <a:rPr lang="ru-RU" dirty="0"/>
-                        <a:t> </a:t>
-                      </a:r>
-                      <a:r>
-                        <a:rPr lang="ru-RU" sz="1800" b="0" i="0" kern="1200" dirty="0">
-                          <a:solidFill>
-                            <a:schemeClr val="tx1"/>
-                          </a:solidFill>
-                          <a:effectLst/>
-                          <a:latin typeface="+mn-lt"/>
-                          <a:ea typeface="+mn-ea"/>
-                          <a:cs typeface="+mn-cs"/>
-                        </a:rPr>
-                        <a:t>Полная строка </a:t>
-                      </a:r>
-                      <a:r>
-                        <a:rPr lang="af-ZA" sz="1800" b="0" i="0" kern="1200" dirty="0">
-                          <a:solidFill>
-                            <a:schemeClr val="tx1"/>
-                          </a:solidFill>
-                          <a:effectLst/>
-                          <a:latin typeface="+mn-lt"/>
-                          <a:ea typeface="+mn-ea"/>
-                          <a:cs typeface="+mn-cs"/>
-                        </a:rPr>
-                        <a:t>URL</a:t>
-                      </a:r>
-                      <a:endParaRPr lang="ru-RU" dirty="0"/>
-                    </a:p>
-                  </a:txBody>
-                  <a:tcPr anchor="ctr"/>
-                </a:tc>
-                <a:extLst>
-                  <a:ext uri="{0D108BD9-81ED-4DB2-BD59-A6C34878D82A}">
-                    <a16:rowId xmlns:a16="http://schemas.microsoft.com/office/drawing/2014/main" val="1247557740"/>
-                  </a:ext>
-                </a:extLst>
-              </a:tr>
-            </a:tbl>
-          </a:graphicData>
-        </a:graphic>
-      </p:graphicFrame>
+        </p:nvSpPr>
+        <p:spPr>
+          <a:xfrm>
+            <a:off x="840186" y="928688"/>
+            <a:ext cx="10511627" cy="619126"/>
+          </a:xfrm>
+        </p:spPr>
+        <p:txBody>
+          <a:bodyPr/>
+          <a:lstStyle/>
+          <a:p>
+            <a:r>
+              <a:rPr lang="ru-RU" dirty="0"/>
+              <a:t>Источники данных</a:t>
+            </a:r>
+            <a:endParaRPr lang="en-US" dirty="0"/>
+          </a:p>
+        </p:txBody>
+      </p:sp>
       <p:sp>
         <p:nvSpPr>
           <p:cNvPr id="3" name="Slide Number Placeholder 2">
@@ -20057,7 +21360,7 @@
             <a:fld id="{48F63A3B-78C7-47BE-AE5E-E10140E04643}" type="slidenum">
               <a:rPr lang="en-US" smtClean="0"/>
               <a:pPr/>
-              <a:t>12</a:t>
+              <a:t>13</a:t>
             </a:fld>
             <a:endParaRPr lang="en-US" dirty="0"/>
           </a:p>
@@ -20065,210 +21368,131 @@
       </p:sp>
       <p:sp>
         <p:nvSpPr>
-          <p:cNvPr id="7" name="Объект 5">
+          <p:cNvPr id="6" name="Объект 5">
             <a:extLst>
               <a:ext uri="{FF2B5EF4-FFF2-40B4-BE49-F238E27FC236}">
-                <a16:creationId xmlns:a16="http://schemas.microsoft.com/office/drawing/2014/main" id="{00C81980-9288-48B1-9093-AED0A0E2F520}"/>
+                <a16:creationId xmlns:a16="http://schemas.microsoft.com/office/drawing/2014/main" id="{01A2C253-428A-4EC9-9418-123E65BDAA0A}"/>
               </a:ext>
             </a:extLst>
           </p:cNvPr>
-          <p:cNvSpPr txBox="1">
-            <a:spLocks/>
+          <p:cNvSpPr>
+            <a:spLocks noGrp="1"/>
           </p:cNvSpPr>
-          <p:nvPr/>
+          <p:nvPr>
+            <p:ph sz="quarter" idx="4"/>
+          </p:nvPr>
         </p:nvSpPr>
         <p:spPr>
           <a:xfrm>
-            <a:off x="966352" y="2926276"/>
-            <a:ext cx="3922643" cy="1253986"/>
+            <a:off x="426720" y="1584962"/>
+            <a:ext cx="11323320" cy="5273037"/>
           </a:xfrm>
-          <a:prstGeom prst="rect">
-            <a:avLst/>
-          </a:prstGeom>
         </p:spPr>
         <p:txBody>
-          <a:bodyPr vert="horz" lIns="91440" tIns="91440" rIns="91440" bIns="91440" rtlCol="0">
-            <a:normAutofit/>
+          <a:bodyPr>
+            <a:noAutofit/>
           </a:bodyPr>
-          <a:lstStyle>
-            <a:lvl1pPr marL="347472" indent="-347472" algn="l" defTabSz="914400" rtl="0" eaLnBrk="1" latinLnBrk="0" hangingPunct="1">
-              <a:lnSpc>
-                <a:spcPct val="100000"/>
-              </a:lnSpc>
-              <a:spcBef>
-                <a:spcPts val="1000"/>
-              </a:spcBef>
-              <a:buFont typeface="Arial" panose="020B0604020202020204" pitchFamily="34" charset="0"/>
-              <a:buChar char="•"/>
-              <a:defRPr sz="1800" kern="1200">
-                <a:solidFill>
-                  <a:schemeClr val="accent6"/>
-                </a:solidFill>
-                <a:latin typeface="+mn-lt"/>
-                <a:ea typeface="+mn-ea"/>
-                <a:cs typeface="+mn-cs"/>
-              </a:defRPr>
-            </a:lvl1pPr>
-            <a:lvl2pPr marL="685800" indent="-347472" algn="l" defTabSz="914400" rtl="0" eaLnBrk="1" latinLnBrk="0" hangingPunct="1">
-              <a:lnSpc>
-                <a:spcPct val="100000"/>
-              </a:lnSpc>
-              <a:spcBef>
-                <a:spcPts val="1000"/>
-              </a:spcBef>
-              <a:buFont typeface="Arial" panose="020B0604020202020204" pitchFamily="34" charset="0"/>
-              <a:buChar char="•"/>
-              <a:defRPr sz="1800" kern="1200">
-                <a:solidFill>
-                  <a:schemeClr val="accent6"/>
-                </a:solidFill>
-                <a:latin typeface="+mn-lt"/>
-                <a:ea typeface="+mn-ea"/>
-                <a:cs typeface="+mn-cs"/>
-              </a:defRPr>
-            </a:lvl2pPr>
-            <a:lvl3pPr marL="1143000" indent="-347472" algn="l" defTabSz="914400" rtl="0" eaLnBrk="1" latinLnBrk="0" hangingPunct="1">
-              <a:lnSpc>
-                <a:spcPct val="100000"/>
-              </a:lnSpc>
-              <a:spcBef>
-                <a:spcPts val="1000"/>
-              </a:spcBef>
-              <a:buFont typeface="Arial" panose="020B0604020202020204" pitchFamily="34" charset="0"/>
-              <a:buChar char="•"/>
-              <a:defRPr sz="1800" kern="1200">
-                <a:solidFill>
-                  <a:schemeClr val="accent6"/>
-                </a:solidFill>
-                <a:latin typeface="+mn-lt"/>
-                <a:ea typeface="+mn-ea"/>
-                <a:cs typeface="+mn-cs"/>
-              </a:defRPr>
-            </a:lvl3pPr>
-            <a:lvl4pPr marL="1600200" indent="-347472" algn="l" defTabSz="914400" rtl="0" eaLnBrk="1" latinLnBrk="0" hangingPunct="1">
-              <a:lnSpc>
-                <a:spcPct val="100000"/>
-              </a:lnSpc>
-              <a:spcBef>
-                <a:spcPts val="1000"/>
-              </a:spcBef>
-              <a:buFont typeface="Arial" panose="020B0604020202020204" pitchFamily="34" charset="0"/>
-              <a:buChar char="•"/>
-              <a:defRPr sz="1800" kern="1200">
-                <a:solidFill>
-                  <a:schemeClr val="accent6"/>
-                </a:solidFill>
-                <a:latin typeface="+mn-lt"/>
-                <a:ea typeface="+mn-ea"/>
-                <a:cs typeface="+mn-cs"/>
-              </a:defRPr>
-            </a:lvl4pPr>
-            <a:lvl5pPr marL="2057400" indent="-347472" algn="l" defTabSz="914400" rtl="0" eaLnBrk="1" latinLnBrk="0" hangingPunct="1">
-              <a:lnSpc>
-                <a:spcPct val="100000"/>
-              </a:lnSpc>
-              <a:spcBef>
-                <a:spcPts val="1000"/>
-              </a:spcBef>
-              <a:buFont typeface="Arial" panose="020B0604020202020204" pitchFamily="34" charset="0"/>
-              <a:buChar char="•"/>
-              <a:defRPr sz="1800" kern="1200">
-                <a:solidFill>
-                  <a:schemeClr val="accent6"/>
-                </a:solidFill>
-                <a:latin typeface="+mn-lt"/>
-                <a:ea typeface="+mn-ea"/>
-                <a:cs typeface="+mn-cs"/>
-              </a:defRPr>
-            </a:lvl5pPr>
-            <a:lvl6pPr marL="2514600" indent="-228600" algn="l" defTabSz="914400" rtl="0" eaLnBrk="1" latinLnBrk="0" hangingPunct="1">
-              <a:lnSpc>
-                <a:spcPct val="90000"/>
-              </a:lnSpc>
-              <a:spcBef>
-                <a:spcPts val="500"/>
-              </a:spcBef>
-              <a:buFont typeface="Arial" panose="020B0604020202020204" pitchFamily="34" charset="0"/>
-              <a:buChar char="•"/>
-              <a:defRPr sz="1800" kern="1200">
-                <a:solidFill>
-                  <a:schemeClr val="tx1"/>
-                </a:solidFill>
-                <a:latin typeface="+mn-lt"/>
-                <a:ea typeface="+mn-ea"/>
-                <a:cs typeface="+mn-cs"/>
-              </a:defRPr>
-            </a:lvl6pPr>
-            <a:lvl7pPr marL="2971800" indent="-228600" algn="l" defTabSz="914400" rtl="0" eaLnBrk="1" latinLnBrk="0" hangingPunct="1">
-              <a:lnSpc>
-                <a:spcPct val="90000"/>
-              </a:lnSpc>
-              <a:spcBef>
-                <a:spcPts val="500"/>
-              </a:spcBef>
-              <a:buFont typeface="Arial" panose="020B0604020202020204" pitchFamily="34" charset="0"/>
-              <a:buChar char="•"/>
-              <a:defRPr sz="1800" kern="1200">
-                <a:solidFill>
-                  <a:schemeClr val="tx1"/>
-                </a:solidFill>
-                <a:latin typeface="+mn-lt"/>
-                <a:ea typeface="+mn-ea"/>
-                <a:cs typeface="+mn-cs"/>
-              </a:defRPr>
-            </a:lvl7pPr>
-            <a:lvl8pPr marL="3429000" indent="-228600" algn="l" defTabSz="914400" rtl="0" eaLnBrk="1" latinLnBrk="0" hangingPunct="1">
-              <a:lnSpc>
-                <a:spcPct val="90000"/>
-              </a:lnSpc>
-              <a:spcBef>
-                <a:spcPts val="500"/>
-              </a:spcBef>
-              <a:buFont typeface="Arial" panose="020B0604020202020204" pitchFamily="34" charset="0"/>
-              <a:buChar char="•"/>
-              <a:defRPr sz="1800" kern="1200">
-                <a:solidFill>
-                  <a:schemeClr val="tx1"/>
-                </a:solidFill>
-                <a:latin typeface="+mn-lt"/>
-                <a:ea typeface="+mn-ea"/>
-                <a:cs typeface="+mn-cs"/>
-              </a:defRPr>
-            </a:lvl8pPr>
-            <a:lvl9pPr marL="3886200" indent="-228600" algn="l" defTabSz="914400" rtl="0" eaLnBrk="1" latinLnBrk="0" hangingPunct="1">
-              <a:lnSpc>
-                <a:spcPct val="90000"/>
-              </a:lnSpc>
-              <a:spcBef>
-                <a:spcPts val="500"/>
-              </a:spcBef>
-              <a:buFont typeface="Arial" panose="020B0604020202020204" pitchFamily="34" charset="0"/>
-              <a:buChar char="•"/>
-              <a:defRPr sz="1800" kern="1200">
-                <a:solidFill>
-                  <a:schemeClr val="tx1"/>
-                </a:solidFill>
-                <a:latin typeface="+mn-lt"/>
-                <a:ea typeface="+mn-ea"/>
-                <a:cs typeface="+mn-cs"/>
-              </a:defRPr>
-            </a:lvl9pPr>
-          </a:lstStyle>
+          <a:lstStyle/>
           <a:p>
             <a:pPr marL="0" indent="0">
               <a:buNone/>
             </a:pPr>
             <a:r>
+              <a:rPr lang="ru-RU" sz="2200" b="1" dirty="0"/>
+              <a:t>Источники фишинговых URL</a:t>
+            </a:r>
+          </a:p>
+          <a:p>
+            <a:pPr marL="0" indent="0">
+              <a:buNone/>
+            </a:pPr>
+            <a:r>
+              <a:rPr lang="ru-RU" sz="2200" b="1" dirty="0" err="1"/>
+              <a:t>PhishTank</a:t>
+            </a:r>
+            <a:r>
               <a:rPr lang="ru-RU" sz="2200" dirty="0"/>
-              <a:t>Признаки </a:t>
+              <a:t> — бесплатный коллективный сервис (с 2006 г., управляется Cisco </a:t>
             </a:r>
             <a:r>
               <a:rPr lang="ru-RU" sz="2200" dirty="0" err="1"/>
-              <a:t>датасета</a:t>
+              <a:t>Talos</a:t>
             </a:r>
             <a:r>
               <a:rPr lang="ru-RU" sz="2200" dirty="0"/>
-              <a:t> (18 признаков, включая метку класса)</a:t>
+              <a:t>), где любой может отправить, проверить и отследить фишинговые ссылки. Предоставляет открытое API и считается отраслевым стандартом для </a:t>
+            </a:r>
+            <a:r>
+              <a:rPr lang="ru-RU" sz="2200" dirty="0" err="1"/>
+              <a:t>антифишинговых</a:t>
+            </a:r>
+            <a:r>
+              <a:rPr lang="ru-RU" sz="2200" dirty="0"/>
+              <a:t> исследований.</a:t>
+            </a:r>
+            <a:br>
+              <a:rPr lang="ru-RU" sz="2200" dirty="0"/>
+            </a:br>
+            <a:r>
+              <a:rPr lang="ru-RU" sz="2200" b="1" dirty="0" err="1"/>
+              <a:t>OpenPhish</a:t>
+            </a:r>
+            <a:r>
+              <a:rPr lang="ru-RU" sz="2200" dirty="0"/>
+              <a:t> — полностью автоматическая платформа (разработана </a:t>
+            </a:r>
+            <a:r>
+              <a:rPr lang="ru-RU" sz="2200" dirty="0" err="1"/>
+              <a:t>FraudSense</a:t>
+            </a:r>
+            <a:r>
+              <a:rPr lang="ru-RU" sz="2200" dirty="0"/>
+              <a:t>), которая с помощью ИИ выявляет фишинговые сайты в реальном времени без опоры на черные списки. Предоставляет непрерывно обновляемую ленту глобальных фишинговых URL.</a:t>
+            </a:r>
+          </a:p>
+          <a:p>
+            <a:pPr marL="0" indent="0">
+              <a:buNone/>
+            </a:pPr>
+            <a:r>
+              <a:rPr lang="ru-RU" sz="2200" b="1" dirty="0"/>
+              <a:t>Источники легитимных URL</a:t>
+            </a:r>
+          </a:p>
+          <a:p>
+            <a:pPr marL="0" indent="0">
+              <a:buNone/>
+            </a:pPr>
+            <a:r>
+              <a:rPr lang="ru-RU" sz="2200" b="1" dirty="0" err="1"/>
+              <a:t>Alexa</a:t>
+            </a:r>
+            <a:r>
+              <a:rPr lang="ru-RU" sz="2200" b="1" dirty="0"/>
+              <a:t> Top </a:t>
+            </a:r>
+            <a:r>
+              <a:rPr lang="ru-RU" sz="2200" b="1" dirty="0" err="1"/>
+              <a:t>Sites</a:t>
+            </a:r>
+            <a:r>
+              <a:rPr lang="ru-RU" sz="2200" b="1" dirty="0"/>
+              <a:t> </a:t>
+            </a:r>
+            <a:r>
+              <a:rPr lang="ru-RU" sz="2200" dirty="0"/>
+              <a:t>— сервис рейтинга сайтов (дочерний проект Amazon, закрыт в 2022 г.), предоставлявший список 1 млн самых посещаемых сайтов мира. Использовался в исследованиях как источник эталонных легитимных доменов.</a:t>
+            </a:r>
+            <a:br>
+              <a:rPr lang="ru-RU" sz="2200" dirty="0"/>
+            </a:br>
+            <a:r>
+              <a:rPr lang="ru-RU" sz="2200" b="1" dirty="0"/>
+              <a:t>DMOZ</a:t>
+            </a:r>
+            <a:r>
+              <a:rPr lang="ru-RU" sz="2200" dirty="0"/>
+              <a:t> — многоязычный свободный каталог сайтов (поддерживался AOL и сообществом редакторов-волонтеров), где все записи проходили ручную модерацию. Один из крупнейших структурированных источников ссылок своего времени.</a:t>
             </a:r>
           </a:p>
         </p:txBody>
@@ -20276,7 +21500,7 @@
     </p:spTree>
     <p:extLst>
       <p:ext uri="{BB962C8B-B14F-4D97-AF65-F5344CB8AC3E}">
-        <p14:creationId xmlns:p14="http://schemas.microsoft.com/office/powerpoint/2010/main" val="1030216164"/>
+        <p14:creationId xmlns:p14="http://schemas.microsoft.com/office/powerpoint/2010/main" val="1073560057"/>
       </p:ext>
     </p:extLst>
   </p:cSld>
@@ -20286,7 +21510,102 @@
 </p:sld>
 </file>
 
-<file path=ppt/slides/slide13.xml><?xml version="1.0" encoding="utf-8"?>
+<file path=ppt/slides/slide14.xml><?xml version="1.0" encoding="utf-8"?>
+<p:sld xmlns:a="http://schemas.openxmlformats.org/drawingml/2006/main" xmlns:r="http://schemas.openxmlformats.org/officeDocument/2006/relationships" xmlns:p="http://schemas.openxmlformats.org/presentationml/2006/main">
+  <p:cSld>
+    <p:spTree>
+      <p:nvGrpSpPr>
+        <p:cNvPr id="1" name=""/>
+        <p:cNvGrpSpPr/>
+        <p:nvPr/>
+      </p:nvGrpSpPr>
+      <p:grpSpPr>
+        <a:xfrm>
+          <a:off x="0" y="0"/>
+          <a:ext cx="0" cy="0"/>
+          <a:chOff x="0" y="0"/>
+          <a:chExt cx="0" cy="0"/>
+        </a:xfrm>
+      </p:grpSpPr>
+      <p:sp>
+        <p:nvSpPr>
+          <p:cNvPr id="3" name="Slide Number Placeholder 2">
+            <a:extLst>
+              <a:ext uri="{FF2B5EF4-FFF2-40B4-BE49-F238E27FC236}">
+                <a16:creationId xmlns:a16="http://schemas.microsoft.com/office/drawing/2014/main" id="{AC21286A-7B29-3B58-1636-0F45723890AB}"/>
+              </a:ext>
+            </a:extLst>
+          </p:cNvPr>
+          <p:cNvSpPr>
+            <a:spLocks noGrp="1"/>
+          </p:cNvSpPr>
+          <p:nvPr>
+            <p:ph type="sldNum" sz="quarter" idx="10"/>
+          </p:nvPr>
+        </p:nvSpPr>
+        <p:spPr>
+          <a:xfrm>
+            <a:off x="10358437" y="457199"/>
+            <a:ext cx="1067589" cy="471489"/>
+          </a:xfrm>
+        </p:spPr>
+        <p:txBody>
+          <a:bodyPr/>
+          <a:lstStyle/>
+          <a:p>
+            <a:fld id="{48F63A3B-78C7-47BE-AE5E-E10140E04643}" type="slidenum">
+              <a:rPr lang="en-US" smtClean="0"/>
+              <a:pPr/>
+              <a:t>14</a:t>
+            </a:fld>
+            <a:endParaRPr lang="en-US" dirty="0"/>
+          </a:p>
+        </p:txBody>
+      </p:sp>
+      <p:pic>
+        <p:nvPicPr>
+          <p:cNvPr id="9" name="Рисунок 8">
+            <a:extLst>
+              <a:ext uri="{FF2B5EF4-FFF2-40B4-BE49-F238E27FC236}">
+                <a16:creationId xmlns:a16="http://schemas.microsoft.com/office/drawing/2014/main" id="{C644C23F-1519-42D0-B6F2-6E99D5E94522}"/>
+              </a:ext>
+            </a:extLst>
+          </p:cNvPr>
+          <p:cNvPicPr>
+            <a:picLocks noChangeAspect="1"/>
+          </p:cNvPicPr>
+          <p:nvPr/>
+        </p:nvPicPr>
+        <p:blipFill>
+          <a:blip r:embed="rId3"/>
+          <a:stretch>
+            <a:fillRect/>
+          </a:stretch>
+        </p:blipFill>
+        <p:spPr>
+          <a:xfrm>
+            <a:off x="1947791" y="0"/>
+            <a:ext cx="8296417" cy="6858000"/>
+          </a:xfrm>
+          <a:prstGeom prst="rect">
+            <a:avLst/>
+          </a:prstGeom>
+        </p:spPr>
+      </p:pic>
+    </p:spTree>
+    <p:extLst>
+      <p:ext uri="{BB962C8B-B14F-4D97-AF65-F5344CB8AC3E}">
+        <p14:creationId xmlns:p14="http://schemas.microsoft.com/office/powerpoint/2010/main" val="485132904"/>
+      </p:ext>
+    </p:extLst>
+  </p:cSld>
+  <p:clrMapOvr>
+    <a:masterClrMapping/>
+  </p:clrMapOvr>
+</p:sld>
+</file>
+
+<file path=ppt/slides/slide15.xml><?xml version="1.0" encoding="utf-8"?>
 <p:sld xmlns:a="http://schemas.openxmlformats.org/drawingml/2006/main" xmlns:r="http://schemas.openxmlformats.org/officeDocument/2006/relationships" xmlns:p="http://schemas.openxmlformats.org/presentationml/2006/main">
   <p:cSld>
     <p:spTree>
@@ -20671,7 +21990,7 @@
             <a:fld id="{48F63A3B-78C7-47BE-AE5E-E10140E04643}" type="slidenum">
               <a:rPr lang="en-US" smtClean="0"/>
               <a:pPr/>
-              <a:t>13</a:t>
+              <a:t>15</a:t>
             </a:fld>
             <a:endParaRPr lang="en-US" dirty="0"/>
           </a:p>
@@ -20690,7 +22009,7 @@
 </p:sld>
 </file>
 
-<file path=ppt/slides/slide14.xml><?xml version="1.0" encoding="utf-8"?>
+<file path=ppt/slides/slide16.xml><?xml version="1.0" encoding="utf-8"?>
 <p:sld xmlns:a="http://schemas.openxmlformats.org/drawingml/2006/main" xmlns:r="http://schemas.openxmlformats.org/officeDocument/2006/relationships" xmlns:p="http://schemas.openxmlformats.org/presentationml/2006/main">
   <p:cSld>
     <p:spTree>
@@ -20756,7 +22075,7 @@
             <p:ph sz="half" idx="1"/>
             <p:extLst>
               <p:ext uri="{D42A27DB-BD31-4B8C-83A1-F6EECF244321}">
-                <p14:modId xmlns:p14="http://schemas.microsoft.com/office/powerpoint/2010/main" val="211059177"/>
+                <p14:modId xmlns:p14="http://schemas.microsoft.com/office/powerpoint/2010/main" val="3964634239"/>
               </p:ext>
             </p:extLst>
           </p:nvPr>
@@ -21223,7 +22542,7 @@
             <a:fld id="{48F63A3B-78C7-47BE-AE5E-E10140E04643}" type="slidenum">
               <a:rPr lang="en-US" smtClean="0"/>
               <a:pPr/>
-              <a:t>14</a:t>
+              <a:t>16</a:t>
             </a:fld>
             <a:endParaRPr lang="en-US" dirty="0"/>
           </a:p>
@@ -21242,7 +22561,7 @@
 </p:sld>
 </file>
 
-<file path=ppt/slides/slide15.xml><?xml version="1.0" encoding="utf-8"?>
+<file path=ppt/slides/slide17.xml><?xml version="1.0" encoding="utf-8"?>
 <p:sld xmlns:a="http://schemas.openxmlformats.org/drawingml/2006/main" xmlns:r="http://schemas.openxmlformats.org/officeDocument/2006/relationships" xmlns:p="http://schemas.openxmlformats.org/presentationml/2006/main">
   <p:cSld>
     <p:spTree>
@@ -21308,14 +22627,14 @@
             <p:ph sz="half" idx="1"/>
             <p:extLst>
               <p:ext uri="{D42A27DB-BD31-4B8C-83A1-F6EECF244321}">
-                <p14:modId xmlns:p14="http://schemas.microsoft.com/office/powerpoint/2010/main" val="3935937219"/>
+                <p14:modId xmlns:p14="http://schemas.microsoft.com/office/powerpoint/2010/main" val="1466035707"/>
               </p:ext>
             </p:extLst>
           </p:nvPr>
         </p:nvGraphicFramePr>
         <p:xfrm>
           <a:off x="1152939" y="1458755"/>
-          <a:ext cx="10277060" cy="5399245"/>
+          <a:ext cx="10277060" cy="5555005"/>
         </p:xfrm>
         <a:graphic>
           <a:graphicData uri="http://schemas.openxmlformats.org/drawingml/2006/table">
@@ -21352,7 +22671,7 @@
                     <a:bodyPr/>
                     <a:lstStyle/>
                     <a:p>
-                      <a:endParaRPr lang="en-US" dirty="0">
+                      <a:endParaRPr lang="en-US" sz="2200" dirty="0">
                         <a:solidFill>
                           <a:schemeClr val="accent6"/>
                         </a:solidFill>
@@ -21367,14 +22686,14 @@
                     <a:lstStyle/>
                     <a:p>
                       <a:r>
-                        <a:rPr lang="ru-RU" dirty="0">
+                        <a:rPr lang="ru-RU" sz="2200" dirty="0">
                           <a:solidFill>
                             <a:schemeClr val="accent6"/>
                           </a:solidFill>
                         </a:rPr>
                         <a:t>Конкуренты</a:t>
                       </a:r>
-                      <a:endParaRPr lang="en-US" dirty="0">
+                      <a:endParaRPr lang="en-US" sz="2200" dirty="0">
                         <a:solidFill>
                           <a:schemeClr val="accent6"/>
                         </a:solidFill>
@@ -21389,7 +22708,7 @@
                     <a:lstStyle/>
                     <a:p>
                       <a:r>
-                        <a:rPr lang="ru-RU" dirty="0">
+                        <a:rPr lang="ru-RU" sz="2200" dirty="0">
                           <a:solidFill>
                             <a:schemeClr val="accent6"/>
                           </a:solidFill>
@@ -21397,7 +22716,7 @@
                         <a:t>Наш </a:t>
                       </a:r>
                       <a:r>
-                        <a:rPr lang="af-ZA" dirty="0">
+                        <a:rPr lang="af-ZA" sz="2200" dirty="0">
                           <a:solidFill>
                             <a:schemeClr val="accent6"/>
                           </a:solidFill>
@@ -21405,14 +22724,14 @@
                         <a:t>DNS-</a:t>
                       </a:r>
                       <a:r>
-                        <a:rPr lang="ru-RU" dirty="0">
+                        <a:rPr lang="ru-RU" sz="2200" dirty="0">
                           <a:solidFill>
                             <a:schemeClr val="accent6"/>
                           </a:solidFill>
                         </a:rPr>
                         <a:t>анализатор</a:t>
                       </a:r>
-                      <a:endParaRPr lang="en-US" dirty="0">
+                      <a:endParaRPr lang="en-US" sz="2200" dirty="0">
                         <a:solidFill>
                           <a:schemeClr val="accent6"/>
                         </a:solidFill>
@@ -21434,14 +22753,14 @@
                     <a:lstStyle/>
                     <a:p>
                       <a:r>
-                        <a:rPr lang="ru-RU" dirty="0">
+                        <a:rPr lang="ru-RU" sz="2200" dirty="0">
                           <a:solidFill>
                             <a:schemeClr val="accent6"/>
                           </a:solidFill>
                         </a:rPr>
                         <a:t>Скорость</a:t>
                       </a:r>
-                      <a:endParaRPr lang="en-US" dirty="0">
+                      <a:endParaRPr lang="en-US" sz="2200" dirty="0">
                         <a:solidFill>
                           <a:schemeClr val="accent6"/>
                         </a:solidFill>
@@ -21456,14 +22775,14 @@
                     <a:lstStyle/>
                     <a:p>
                       <a:r>
-                        <a:rPr lang="ru-RU" dirty="0">
+                        <a:rPr lang="ru-RU" sz="2200" dirty="0">
                           <a:solidFill>
                             <a:schemeClr val="accent6"/>
                           </a:solidFill>
                         </a:rPr>
                         <a:t>Могут выполняться секунды.</a:t>
                       </a:r>
-                      <a:endParaRPr lang="en-US" dirty="0">
+                      <a:endParaRPr lang="en-US" sz="2200" dirty="0">
                         <a:solidFill>
                           <a:schemeClr val="accent6"/>
                         </a:solidFill>
@@ -21478,14 +22797,14 @@
                     <a:lstStyle/>
                     <a:p>
                       <a:r>
-                        <a:rPr lang="ru-RU" dirty="0">
+                        <a:rPr lang="ru-RU" sz="2200" dirty="0">
                           <a:solidFill>
                             <a:schemeClr val="accent6"/>
                           </a:solidFill>
                         </a:rPr>
-                        <a:t>Бесплатный, огромная база знаний, есть API.</a:t>
+                        <a:t>Ответ моментальный.</a:t>
                       </a:r>
-                      <a:endParaRPr lang="en-US" dirty="0">
+                      <a:endParaRPr lang="en-US" sz="2200" dirty="0">
                         <a:solidFill>
                           <a:schemeClr val="accent6"/>
                         </a:solidFill>
@@ -21507,14 +22826,14 @@
                     <a:lstStyle/>
                     <a:p>
                       <a:r>
-                        <a:rPr lang="ru-RU" dirty="0">
+                        <a:rPr lang="ru-RU" sz="2200" dirty="0">
                           <a:solidFill>
                             <a:schemeClr val="accent6"/>
                           </a:solidFill>
                         </a:rPr>
                         <a:t>Прозрачность</a:t>
                       </a:r>
-                      <a:endParaRPr lang="en-US" dirty="0">
+                      <a:endParaRPr lang="en-US" sz="2200" dirty="0">
                         <a:solidFill>
                           <a:schemeClr val="accent6"/>
                         </a:solidFill>
@@ -21529,14 +22848,14 @@
                     <a:lstStyle/>
                     <a:p>
                       <a:r>
-                        <a:rPr lang="ru-RU" dirty="0">
+                        <a:rPr lang="ru-RU" sz="2200" dirty="0">
                           <a:solidFill>
                             <a:schemeClr val="accent6"/>
                           </a:solidFill>
                         </a:rPr>
                         <a:t>В основном "черные ящики".</a:t>
                       </a:r>
-                      <a:endParaRPr lang="en-US" dirty="0">
+                      <a:endParaRPr lang="en-US" sz="2200" dirty="0">
                         <a:solidFill>
                           <a:schemeClr val="accent6"/>
                         </a:solidFill>
@@ -21551,14 +22870,14 @@
                     <a:lstStyle/>
                     <a:p>
                       <a:r>
-                        <a:rPr lang="ru-RU" dirty="0">
+                        <a:rPr lang="ru-RU" sz="2200" dirty="0">
                           <a:solidFill>
                             <a:schemeClr val="accent6"/>
                           </a:solidFill>
                         </a:rPr>
-                        <a:t>Понятное решение: вы получаете конкретный вердикт с вероятностью.</a:t>
+                        <a:t>Открытый исходный код.</a:t>
                       </a:r>
-                      <a:endParaRPr lang="en-US" dirty="0">
+                      <a:endParaRPr lang="en-US" sz="2200" dirty="0">
                         <a:solidFill>
                           <a:schemeClr val="accent6"/>
                         </a:solidFill>
@@ -21580,14 +22899,14 @@
                     <a:lstStyle/>
                     <a:p>
                       <a:r>
-                        <a:rPr lang="ru-RU" dirty="0">
+                        <a:rPr lang="ru-RU" sz="2200" dirty="0">
                           <a:solidFill>
                             <a:schemeClr val="accent6"/>
                           </a:solidFill>
                         </a:rPr>
                         <a:t>Технологии</a:t>
                       </a:r>
-                      <a:endParaRPr lang="en-US" dirty="0">
+                      <a:endParaRPr lang="en-US" sz="2200" dirty="0">
                         <a:solidFill>
                           <a:schemeClr val="accent6"/>
                         </a:solidFill>
@@ -21602,7 +22921,7 @@
                     <a:lstStyle/>
                     <a:p>
                       <a:r>
-                        <a:rPr lang="ru-RU" dirty="0">
+                        <a:rPr lang="ru-RU" sz="2200" dirty="0">
                           <a:solidFill>
                             <a:schemeClr val="accent6"/>
                           </a:solidFill>
@@ -21610,14 +22929,14 @@
                         <a:t>Разный стек, часто </a:t>
                       </a:r>
                       <a:r>
-                        <a:rPr lang="af-ZA" dirty="0">
+                        <a:rPr lang="af-ZA" sz="2200" dirty="0">
                           <a:solidFill>
                             <a:schemeClr val="accent6"/>
                           </a:solidFill>
                         </a:rPr>
                         <a:t>Python.</a:t>
                       </a:r>
-                      <a:endParaRPr lang="en-US" dirty="0">
+                      <a:endParaRPr lang="en-US" sz="2200" dirty="0">
                         <a:solidFill>
                           <a:schemeClr val="accent6"/>
                         </a:solidFill>
@@ -21632,14 +22951,14 @@
                     <a:lstStyle/>
                     <a:p>
                       <a:r>
-                        <a:rPr lang="ru-RU" dirty="0">
+                        <a:rPr lang="ru-RU" sz="2200" dirty="0">
                           <a:solidFill>
                             <a:schemeClr val="accent6"/>
                           </a:solidFill>
                         </a:rPr>
                         <a:t>C# и ML.NET: производительное, бесшовное решение в экосистеме .NET.</a:t>
                       </a:r>
-                      <a:endParaRPr lang="en-US" dirty="0">
+                      <a:endParaRPr lang="en-US" sz="2200" dirty="0">
                         <a:solidFill>
                           <a:schemeClr val="accent6"/>
                         </a:solidFill>
@@ -21661,14 +22980,14 @@
                     <a:lstStyle/>
                     <a:p>
                       <a:r>
-                        <a:rPr lang="ru-RU" dirty="0">
+                        <a:rPr lang="ru-RU" sz="2200" dirty="0">
                           <a:solidFill>
                             <a:schemeClr val="accent6"/>
                           </a:solidFill>
                         </a:rPr>
                         <a:t>Доступность</a:t>
                       </a:r>
-                      <a:endParaRPr lang="en-US" dirty="0">
+                      <a:endParaRPr lang="en-US" sz="2200" dirty="0">
                         <a:solidFill>
                           <a:schemeClr val="accent6"/>
                         </a:solidFill>
@@ -21683,14 +23002,14 @@
                     <a:lstStyle/>
                     <a:p>
                       <a:r>
-                        <a:rPr lang="ru-RU" dirty="0">
+                        <a:rPr lang="ru-RU" sz="2200" dirty="0">
                           <a:solidFill>
                             <a:schemeClr val="accent6"/>
                           </a:solidFill>
                         </a:rPr>
                         <a:t>Дорогие API или сложные внедрения.</a:t>
                       </a:r>
-                      <a:endParaRPr lang="en-US" dirty="0">
+                      <a:endParaRPr lang="en-US" sz="2200" dirty="0">
                         <a:solidFill>
                           <a:schemeClr val="accent6"/>
                         </a:solidFill>
@@ -21705,14 +23024,14 @@
                     <a:lstStyle/>
                     <a:p>
                       <a:r>
-                        <a:rPr lang="ru-RU" dirty="0">
+                        <a:rPr lang="ru-RU" sz="2200" dirty="0">
                           <a:solidFill>
                             <a:schemeClr val="accent6"/>
                           </a:solidFill>
                         </a:rPr>
-                        <a:t>SCORE: 100%. Простое API для любой системы.</a:t>
+                        <a:t>Простое API для любой системы, бесплатный.</a:t>
                       </a:r>
-                      <a:endParaRPr lang="en-US" dirty="0">
+                      <a:endParaRPr lang="en-US" sz="2200" dirty="0">
                         <a:solidFill>
                           <a:schemeClr val="accent6"/>
                         </a:solidFill>
@@ -21760,7 +23079,7 @@
             <a:fld id="{48F63A3B-78C7-47BE-AE5E-E10140E04643}" type="slidenum">
               <a:rPr lang="en-US" smtClean="0"/>
               <a:pPr/>
-              <a:t>15</a:t>
+              <a:t>17</a:t>
             </a:fld>
             <a:endParaRPr lang="en-US" dirty="0"/>
           </a:p>
@@ -21779,7 +23098,7 @@
 </p:sld>
 </file>
 
-<file path=ppt/slides/slide16.xml><?xml version="1.0" encoding="utf-8"?>
+<file path=ppt/slides/slide18.xml><?xml version="1.0" encoding="utf-8"?>
 <p:sld xmlns:a="http://schemas.openxmlformats.org/drawingml/2006/main" xmlns:r="http://schemas.openxmlformats.org/officeDocument/2006/relationships" xmlns:p="http://schemas.openxmlformats.org/presentationml/2006/main">
   <p:cSld>
     <p:spTree>
@@ -21906,27 +23225,15 @@
             </a:pPr>
             <a:r>
               <a:rPr lang="ru-RU" sz="2200" dirty="0"/>
-              <a:t>Алгоритм: бинарный классификатор (</a:t>
-            </a:r>
-            <a:r>
-              <a:rPr lang="en-US" sz="2200" dirty="0" err="1"/>
-              <a:t>LightGBM</a:t>
-            </a:r>
-            <a:r>
-              <a:rPr lang="en-US" sz="2200" dirty="0"/>
-              <a:t>/</a:t>
+              <a:t>Алгоритм: бинарный классификатор </a:t>
             </a:r>
             <a:r>
               <a:rPr lang="en-US" sz="2200" dirty="0" err="1"/>
               <a:t>FastTree</a:t>
             </a:r>
             <a:r>
-              <a:rPr lang="en-US" sz="2200" dirty="0"/>
-              <a:t> – </a:t>
-            </a:r>
-            <a:r>
               <a:rPr lang="ru-RU" sz="2200" dirty="0"/>
-              <a:t>уточнить у Андрея).</a:t>
+              <a:t>.</a:t>
             </a:r>
           </a:p>
           <a:p>
@@ -22004,48 +23311,30 @@
             <a:fld id="{48F63A3B-78C7-47BE-AE5E-E10140E04643}" type="slidenum">
               <a:rPr lang="en-US" smtClean="0"/>
               <a:pPr/>
-              <a:t>16</a:t>
+              <a:t>18</a:t>
             </a:fld>
             <a:endParaRPr lang="en-US" dirty="0"/>
           </a:p>
         </p:txBody>
       </p:sp>
-      <p:pic>
-        <p:nvPicPr>
-          <p:cNvPr id="12" name="Picture Placeholder 6" descr="A person standing in front of a whiteboard">
+      <p:sp>
+        <p:nvSpPr>
+          <p:cNvPr id="5" name="Рисунок 4">
             <a:extLst>
               <a:ext uri="{FF2B5EF4-FFF2-40B4-BE49-F238E27FC236}">
-                <a16:creationId xmlns:a16="http://schemas.microsoft.com/office/drawing/2014/main" id="{E9B6FD7A-943F-4FBD-A6CA-67A6C555D12B}"/>
+                <a16:creationId xmlns:a16="http://schemas.microsoft.com/office/drawing/2014/main" id="{0D133023-2941-4226-8A6A-2515314DB182}"/>
               </a:ext>
             </a:extLst>
           </p:cNvPr>
-          <p:cNvPicPr>
-            <a:picLocks noGrp="1" noChangeAspect="1"/>
-          </p:cNvPicPr>
+          <p:cNvSpPr>
+            <a:spLocks noGrp="1"/>
+          </p:cNvSpPr>
           <p:nvPr>
             <p:ph type="pic" sz="quarter" idx="14"/>
           </p:nvPr>
-        </p:nvPicPr>
-        <p:blipFill>
-          <a:blip r:embed="rId3">
-            <a:duotone>
-              <a:prstClr val="black"/>
-              <a:schemeClr val="accent1">
-                <a:tint val="45000"/>
-                <a:satMod val="400000"/>
-              </a:schemeClr>
-            </a:duotone>
-          </a:blip>
-          <a:srcRect l="31873" r="31873"/>
-          <a:stretch/>
-        </p:blipFill>
-        <p:spPr>
-          <a:xfrm>
-            <a:off x="8990013" y="965200"/>
-            <a:ext cx="3201987" cy="5892800"/>
-          </a:xfrm>
-        </p:spPr>
-      </p:pic>
+        </p:nvSpPr>
+        <p:spPr/>
+      </p:sp>
     </p:spTree>
     <p:extLst>
       <p:ext uri="{BB962C8B-B14F-4D97-AF65-F5344CB8AC3E}">
@@ -22059,7 +23348,805 @@
 </p:sld>
 </file>
 
-<file path=ppt/slides/slide17.xml><?xml version="1.0" encoding="utf-8"?>
+<file path=ppt/slides/slide19.xml><?xml version="1.0" encoding="utf-8"?>
+<p:sld xmlns:a="http://schemas.openxmlformats.org/drawingml/2006/main" xmlns:r="http://schemas.openxmlformats.org/officeDocument/2006/relationships" xmlns:p="http://schemas.openxmlformats.org/presentationml/2006/main">
+  <p:cSld>
+    <p:spTree>
+      <p:nvGrpSpPr>
+        <p:cNvPr id="1" name=""/>
+        <p:cNvGrpSpPr/>
+        <p:nvPr/>
+      </p:nvGrpSpPr>
+      <p:grpSpPr>
+        <a:xfrm>
+          <a:off x="0" y="0"/>
+          <a:ext cx="0" cy="0"/>
+          <a:chOff x="0" y="0"/>
+          <a:chExt cx="0" cy="0"/>
+        </a:xfrm>
+      </p:grpSpPr>
+      <p:sp>
+        <p:nvSpPr>
+          <p:cNvPr id="3" name="Title 2">
+            <a:extLst>
+              <a:ext uri="{FF2B5EF4-FFF2-40B4-BE49-F238E27FC236}">
+                <a16:creationId xmlns:a16="http://schemas.microsoft.com/office/drawing/2014/main" id="{3D55F2D4-C20E-BEBC-1CCF-4449B0456A7E}"/>
+              </a:ext>
+            </a:extLst>
+          </p:cNvPr>
+          <p:cNvSpPr>
+            <a:spLocks noGrp="1"/>
+          </p:cNvSpPr>
+          <p:nvPr>
+            <p:ph type="title"/>
+          </p:nvPr>
+        </p:nvSpPr>
+        <p:spPr>
+          <a:xfrm>
+            <a:off x="914400" y="965393"/>
+            <a:ext cx="7631709" cy="1091627"/>
+          </a:xfrm>
+        </p:spPr>
+        <p:txBody>
+          <a:bodyPr/>
+          <a:lstStyle/>
+          <a:p>
+            <a:r>
+              <a:rPr lang="ru-RU" dirty="0"/>
+              <a:t>Описание алгоритма </a:t>
+            </a:r>
+            <a:r>
+              <a:rPr lang="af-ZA" dirty="0"/>
+              <a:t>FastTree</a:t>
+            </a:r>
+            <a:endParaRPr lang="en-US" dirty="0"/>
+          </a:p>
+        </p:txBody>
+      </p:sp>
+      <p:sp>
+        <p:nvSpPr>
+          <p:cNvPr id="14" name="Content Placeholder 7">
+            <a:extLst>
+              <a:ext uri="{FF2B5EF4-FFF2-40B4-BE49-F238E27FC236}">
+                <a16:creationId xmlns:a16="http://schemas.microsoft.com/office/drawing/2014/main" id="{749C7CD1-A9AA-49E3-6734-AD9546F2DF5B}"/>
+              </a:ext>
+            </a:extLst>
+          </p:cNvPr>
+          <p:cNvSpPr>
+            <a:spLocks noGrp="1"/>
+          </p:cNvSpPr>
+          <p:nvPr>
+            <p:ph sz="half" idx="15"/>
+          </p:nvPr>
+        </p:nvSpPr>
+        <p:spPr>
+          <a:xfrm>
+            <a:off x="914399" y="2303463"/>
+            <a:ext cx="7050157" cy="4143375"/>
+          </a:xfrm>
+        </p:spPr>
+        <p:txBody>
+          <a:bodyPr>
+            <a:normAutofit lnSpcReduction="10000"/>
+          </a:bodyPr>
+          <a:lstStyle/>
+          <a:p>
+            <a:pPr marL="0" indent="0">
+              <a:buNone/>
+            </a:pPr>
+            <a:r>
+              <a:rPr lang="af-ZA" sz="2200" dirty="0"/>
+              <a:t>FastTree — </a:t>
+            </a:r>
+            <a:r>
+              <a:rPr lang="ru-RU" sz="2200" dirty="0"/>
+              <a:t>реализация градиентного </a:t>
+            </a:r>
+            <a:r>
+              <a:rPr lang="ru-RU" sz="2200" dirty="0" err="1"/>
+              <a:t>бустинга</a:t>
+            </a:r>
+            <a:r>
+              <a:rPr lang="ru-RU" sz="2200" dirty="0"/>
+              <a:t> деревьев решений в </a:t>
+            </a:r>
+            <a:r>
+              <a:rPr lang="af-ZA" sz="2200" dirty="0"/>
+              <a:t>ML.NET. </a:t>
+            </a:r>
+            <a:r>
+              <a:rPr lang="ru-RU" sz="2200" dirty="0"/>
+              <a:t>Алгоритм строит ансамбль решающих деревьев, минимизируя функцию потерь градиентным спуском. Ключевые гиперпараметры, использованные при обучении:</a:t>
+            </a:r>
+          </a:p>
+          <a:p>
+            <a:pPr marL="342900" indent="-342900">
+              <a:buFont typeface="Arial" panose="020B0604020202020204" pitchFamily="34" charset="0"/>
+              <a:buChar char="•"/>
+            </a:pPr>
+            <a:r>
+              <a:rPr lang="af-ZA" sz="2200" dirty="0"/>
+              <a:t>Number of Trees (</a:t>
+            </a:r>
+            <a:r>
+              <a:rPr lang="ru-RU" sz="2200" dirty="0"/>
+              <a:t>количество деревьев): 100</a:t>
+            </a:r>
+          </a:p>
+          <a:p>
+            <a:pPr marL="342900" indent="-342900">
+              <a:buFont typeface="Arial" panose="020B0604020202020204" pitchFamily="34" charset="0"/>
+              <a:buChar char="•"/>
+            </a:pPr>
+            <a:r>
+              <a:rPr lang="af-ZA" sz="2200" dirty="0"/>
+              <a:t>Number of Leaves (</a:t>
+            </a:r>
+            <a:r>
+              <a:rPr lang="ru-RU" sz="2200" dirty="0"/>
+              <a:t>число листьев на дерево): 20</a:t>
+            </a:r>
+          </a:p>
+          <a:p>
+            <a:pPr marL="342900" indent="-342900">
+              <a:buFont typeface="Arial" panose="020B0604020202020204" pitchFamily="34" charset="0"/>
+              <a:buChar char="•"/>
+            </a:pPr>
+            <a:r>
+              <a:rPr lang="af-ZA" sz="2200" dirty="0"/>
+              <a:t>Learning Rate (</a:t>
+            </a:r>
+            <a:r>
+              <a:rPr lang="ru-RU" sz="2200" dirty="0"/>
+              <a:t>темп обучения): 0.2</a:t>
+            </a:r>
+          </a:p>
+          <a:p>
+            <a:pPr marL="342900" indent="-342900">
+              <a:buFont typeface="Arial" panose="020B0604020202020204" pitchFamily="34" charset="0"/>
+              <a:buChar char="•"/>
+            </a:pPr>
+            <a:r>
+              <a:rPr lang="af-ZA" sz="2200" dirty="0"/>
+              <a:t>Minimum Example Count per Leaf: 10</a:t>
+            </a:r>
+          </a:p>
+          <a:p>
+            <a:pPr marL="342900" indent="-342900">
+              <a:buFont typeface="Arial" panose="020B0604020202020204" pitchFamily="34" charset="0"/>
+              <a:buChar char="•"/>
+            </a:pPr>
+            <a:r>
+              <a:rPr lang="af-ZA" sz="2200" dirty="0"/>
+              <a:t>Feature Fraction: 0.7 (</a:t>
+            </a:r>
+            <a:r>
+              <a:rPr lang="ru-RU" sz="2200" dirty="0"/>
+              <a:t>доля признаков для построения одного дерева)</a:t>
+            </a:r>
+            <a:endParaRPr lang="en-US" sz="2200" dirty="0"/>
+          </a:p>
+        </p:txBody>
+      </p:sp>
+      <p:sp>
+        <p:nvSpPr>
+          <p:cNvPr id="4" name="Slide Number Placeholder 3">
+            <a:extLst>
+              <a:ext uri="{FF2B5EF4-FFF2-40B4-BE49-F238E27FC236}">
+                <a16:creationId xmlns:a16="http://schemas.microsoft.com/office/drawing/2014/main" id="{C82CE1B8-1C92-D6D2-444B-652DB90E86D1}"/>
+              </a:ext>
+            </a:extLst>
+          </p:cNvPr>
+          <p:cNvSpPr>
+            <a:spLocks noGrp="1"/>
+          </p:cNvSpPr>
+          <p:nvPr>
+            <p:ph type="sldNum" sz="quarter" idx="10"/>
+          </p:nvPr>
+        </p:nvSpPr>
+        <p:spPr>
+          <a:xfrm>
+            <a:off x="10358437" y="457199"/>
+            <a:ext cx="1067589" cy="471489"/>
+          </a:xfrm>
+        </p:spPr>
+        <p:txBody>
+          <a:bodyPr/>
+          <a:lstStyle/>
+          <a:p>
+            <a:fld id="{48F63A3B-78C7-47BE-AE5E-E10140E04643}" type="slidenum">
+              <a:rPr lang="en-US" smtClean="0"/>
+              <a:pPr/>
+              <a:t>19</a:t>
+            </a:fld>
+            <a:endParaRPr lang="en-US" dirty="0"/>
+          </a:p>
+        </p:txBody>
+      </p:sp>
+      <p:sp>
+        <p:nvSpPr>
+          <p:cNvPr id="5" name="Рисунок 4">
+            <a:extLst>
+              <a:ext uri="{FF2B5EF4-FFF2-40B4-BE49-F238E27FC236}">
+                <a16:creationId xmlns:a16="http://schemas.microsoft.com/office/drawing/2014/main" id="{0D133023-2941-4226-8A6A-2515314DB182}"/>
+              </a:ext>
+            </a:extLst>
+          </p:cNvPr>
+          <p:cNvSpPr>
+            <a:spLocks noGrp="1"/>
+          </p:cNvSpPr>
+          <p:nvPr>
+            <p:ph type="pic" sz="quarter" idx="14"/>
+          </p:nvPr>
+        </p:nvSpPr>
+        <p:spPr/>
+      </p:sp>
+    </p:spTree>
+    <p:extLst>
+      <p:ext uri="{BB962C8B-B14F-4D97-AF65-F5344CB8AC3E}">
+        <p14:creationId xmlns:p14="http://schemas.microsoft.com/office/powerpoint/2010/main" val="2043926534"/>
+      </p:ext>
+    </p:extLst>
+  </p:cSld>
+  <p:clrMapOvr>
+    <a:masterClrMapping/>
+  </p:clrMapOvr>
+</p:sld>
+</file>
+
+<file path=ppt/slides/slide2.xml><?xml version="1.0" encoding="utf-8"?>
+<p:sld xmlns:a="http://schemas.openxmlformats.org/drawingml/2006/main" xmlns:r="http://schemas.openxmlformats.org/officeDocument/2006/relationships" xmlns:p="http://schemas.openxmlformats.org/presentationml/2006/main">
+  <p:cSld>
+    <p:spTree>
+      <p:nvGrpSpPr>
+        <p:cNvPr id="1" name=""/>
+        <p:cNvGrpSpPr/>
+        <p:nvPr/>
+      </p:nvGrpSpPr>
+      <p:grpSpPr>
+        <a:xfrm>
+          <a:off x="0" y="0"/>
+          <a:ext cx="0" cy="0"/>
+          <a:chOff x="0" y="0"/>
+          <a:chExt cx="0" cy="0"/>
+        </a:xfrm>
+      </p:grpSpPr>
+      <p:sp>
+        <p:nvSpPr>
+          <p:cNvPr id="2" name="Title 1">
+            <a:extLst>
+              <a:ext uri="{FF2B5EF4-FFF2-40B4-BE49-F238E27FC236}">
+                <a16:creationId xmlns:a16="http://schemas.microsoft.com/office/drawing/2014/main" id="{13021072-4A77-DB4D-DF41-58EADB7DA94E}"/>
+              </a:ext>
+            </a:extLst>
+          </p:cNvPr>
+          <p:cNvSpPr>
+            <a:spLocks noGrp="1"/>
+          </p:cNvSpPr>
+          <p:nvPr>
+            <p:ph type="title"/>
+          </p:nvPr>
+        </p:nvSpPr>
+        <p:spPr>
+          <a:xfrm>
+            <a:off x="914400" y="928688"/>
+            <a:ext cx="6583680" cy="1129335"/>
+          </a:xfrm>
+        </p:spPr>
+        <p:txBody>
+          <a:bodyPr/>
+          <a:lstStyle/>
+          <a:p>
+            <a:r>
+              <a:rPr lang="ru-RU" dirty="0"/>
+              <a:t>Актуальность и проблема</a:t>
+            </a:r>
+            <a:endParaRPr lang="en-US" dirty="0"/>
+          </a:p>
+        </p:txBody>
+      </p:sp>
+      <p:sp>
+        <p:nvSpPr>
+          <p:cNvPr id="3" name="Content Placeholder 2">
+            <a:extLst>
+              <a:ext uri="{FF2B5EF4-FFF2-40B4-BE49-F238E27FC236}">
+                <a16:creationId xmlns:a16="http://schemas.microsoft.com/office/drawing/2014/main" id="{D4D22962-3C7F-E480-5C35-7F4860A098E1}"/>
+              </a:ext>
+            </a:extLst>
+          </p:cNvPr>
+          <p:cNvSpPr>
+            <a:spLocks noGrp="1"/>
+          </p:cNvSpPr>
+          <p:nvPr>
+            <p:ph idx="1"/>
+          </p:nvPr>
+        </p:nvSpPr>
+        <p:spPr>
+          <a:xfrm>
+            <a:off x="914400" y="2058023"/>
+            <a:ext cx="6583680" cy="4023360"/>
+          </a:xfrm>
+        </p:spPr>
+        <p:txBody>
+          <a:bodyPr>
+            <a:normAutofit/>
+          </a:bodyPr>
+          <a:lstStyle/>
+          <a:p>
+            <a:pPr marL="342900" indent="-342900">
+              <a:buFont typeface="Arial" panose="020B0604020202020204" pitchFamily="34" charset="0"/>
+              <a:buChar char="•"/>
+            </a:pPr>
+            <a:r>
+              <a:rPr lang="ru-RU" sz="2200" dirty="0"/>
+              <a:t>Рост фишинговых атак с использованием подозрительных доменов.</a:t>
+            </a:r>
+          </a:p>
+          <a:p>
+            <a:pPr marL="342900" indent="-342900">
+              <a:buFont typeface="Arial" panose="020B0604020202020204" pitchFamily="34" charset="0"/>
+              <a:buChar char="•"/>
+            </a:pPr>
+            <a:r>
+              <a:rPr lang="ru-RU" sz="2200" dirty="0"/>
+              <a:t>Сложность ручной проверки большого числа доменов</a:t>
+            </a:r>
+            <a:r>
+              <a:rPr lang="ru-RU" dirty="0"/>
+              <a:t>.</a:t>
+            </a:r>
+          </a:p>
+        </p:txBody>
+      </p:sp>
+      <p:sp>
+        <p:nvSpPr>
+          <p:cNvPr id="4" name="Slide Number Placeholder 3">
+            <a:extLst>
+              <a:ext uri="{FF2B5EF4-FFF2-40B4-BE49-F238E27FC236}">
+                <a16:creationId xmlns:a16="http://schemas.microsoft.com/office/drawing/2014/main" id="{18D5CFA2-4E67-F157-5FFD-A246307D41F7}"/>
+              </a:ext>
+            </a:extLst>
+          </p:cNvPr>
+          <p:cNvSpPr>
+            <a:spLocks noGrp="1"/>
+          </p:cNvSpPr>
+          <p:nvPr>
+            <p:ph type="sldNum" sz="quarter" idx="10"/>
+          </p:nvPr>
+        </p:nvSpPr>
+        <p:spPr>
+          <a:xfrm>
+            <a:off x="10358437" y="457199"/>
+            <a:ext cx="1067589" cy="471489"/>
+          </a:xfrm>
+        </p:spPr>
+        <p:txBody>
+          <a:bodyPr/>
+          <a:lstStyle/>
+          <a:p>
+            <a:fld id="{48F63A3B-78C7-47BE-AE5E-E10140E04643}" type="slidenum">
+              <a:rPr lang="en-US" smtClean="0"/>
+              <a:pPr/>
+              <a:t>2</a:t>
+            </a:fld>
+            <a:endParaRPr lang="en-US" dirty="0"/>
+          </a:p>
+        </p:txBody>
+      </p:sp>
+    </p:spTree>
+    <p:extLst>
+      <p:ext uri="{BB962C8B-B14F-4D97-AF65-F5344CB8AC3E}">
+        <p14:creationId xmlns:p14="http://schemas.microsoft.com/office/powerpoint/2010/main" val="3913219759"/>
+      </p:ext>
+    </p:extLst>
+  </p:cSld>
+  <p:clrMapOvr>
+    <a:masterClrMapping/>
+  </p:clrMapOvr>
+</p:sld>
+</file>
+
+<file path=ppt/slides/slide20.xml><?xml version="1.0" encoding="utf-8"?>
+<p:sld xmlns:a="http://schemas.openxmlformats.org/drawingml/2006/main" xmlns:r="http://schemas.openxmlformats.org/officeDocument/2006/relationships" xmlns:p="http://schemas.openxmlformats.org/presentationml/2006/main">
+  <p:cSld>
+    <p:spTree>
+      <p:nvGrpSpPr>
+        <p:cNvPr id="1" name=""/>
+        <p:cNvGrpSpPr/>
+        <p:nvPr/>
+      </p:nvGrpSpPr>
+      <p:grpSpPr>
+        <a:xfrm>
+          <a:off x="0" y="0"/>
+          <a:ext cx="0" cy="0"/>
+          <a:chOff x="0" y="0"/>
+          <a:chExt cx="0" cy="0"/>
+        </a:xfrm>
+      </p:grpSpPr>
+      <p:sp>
+        <p:nvSpPr>
+          <p:cNvPr id="3" name="Title 2">
+            <a:extLst>
+              <a:ext uri="{FF2B5EF4-FFF2-40B4-BE49-F238E27FC236}">
+                <a16:creationId xmlns:a16="http://schemas.microsoft.com/office/drawing/2014/main" id="{3D55F2D4-C20E-BEBC-1CCF-4449B0456A7E}"/>
+              </a:ext>
+            </a:extLst>
+          </p:cNvPr>
+          <p:cNvSpPr>
+            <a:spLocks noGrp="1"/>
+          </p:cNvSpPr>
+          <p:nvPr>
+            <p:ph type="title"/>
+          </p:nvPr>
+        </p:nvSpPr>
+        <p:spPr>
+          <a:xfrm>
+            <a:off x="914400" y="965393"/>
+            <a:ext cx="7631709" cy="1091627"/>
+          </a:xfrm>
+        </p:spPr>
+        <p:txBody>
+          <a:bodyPr/>
+          <a:lstStyle/>
+          <a:p>
+            <a:r>
+              <a:rPr lang="ru-RU" dirty="0"/>
+              <a:t>Метрики качества модели</a:t>
+            </a:r>
+            <a:endParaRPr lang="en-US" dirty="0"/>
+          </a:p>
+        </p:txBody>
+      </p:sp>
+      <p:sp>
+        <p:nvSpPr>
+          <p:cNvPr id="14" name="Content Placeholder 7">
+            <a:extLst>
+              <a:ext uri="{FF2B5EF4-FFF2-40B4-BE49-F238E27FC236}">
+                <a16:creationId xmlns:a16="http://schemas.microsoft.com/office/drawing/2014/main" id="{749C7CD1-A9AA-49E3-6734-AD9546F2DF5B}"/>
+              </a:ext>
+            </a:extLst>
+          </p:cNvPr>
+          <p:cNvSpPr>
+            <a:spLocks noGrp="1"/>
+          </p:cNvSpPr>
+          <p:nvPr>
+            <p:ph sz="half" idx="15"/>
+          </p:nvPr>
+        </p:nvSpPr>
+        <p:spPr>
+          <a:xfrm>
+            <a:off x="914399" y="2303463"/>
+            <a:ext cx="7050157" cy="943320"/>
+          </a:xfrm>
+        </p:spPr>
+        <p:txBody>
+          <a:bodyPr>
+            <a:normAutofit lnSpcReduction="10000"/>
+          </a:bodyPr>
+          <a:lstStyle/>
+          <a:p>
+            <a:pPr marL="0" indent="0">
+              <a:buNone/>
+            </a:pPr>
+            <a:r>
+              <a:rPr lang="ru-RU" sz="2200" dirty="0"/>
+              <a:t>Модель демонстрирует высокую устойчивость: ложноположительные срабатывания минимальны, что критично для безопасности.</a:t>
+            </a:r>
+          </a:p>
+        </p:txBody>
+      </p:sp>
+      <p:sp>
+        <p:nvSpPr>
+          <p:cNvPr id="4" name="Slide Number Placeholder 3">
+            <a:extLst>
+              <a:ext uri="{FF2B5EF4-FFF2-40B4-BE49-F238E27FC236}">
+                <a16:creationId xmlns:a16="http://schemas.microsoft.com/office/drawing/2014/main" id="{C82CE1B8-1C92-D6D2-444B-652DB90E86D1}"/>
+              </a:ext>
+            </a:extLst>
+          </p:cNvPr>
+          <p:cNvSpPr>
+            <a:spLocks noGrp="1"/>
+          </p:cNvSpPr>
+          <p:nvPr>
+            <p:ph type="sldNum" sz="quarter" idx="10"/>
+          </p:nvPr>
+        </p:nvSpPr>
+        <p:spPr>
+          <a:xfrm>
+            <a:off x="10358437" y="457199"/>
+            <a:ext cx="1067589" cy="471489"/>
+          </a:xfrm>
+        </p:spPr>
+        <p:txBody>
+          <a:bodyPr/>
+          <a:lstStyle/>
+          <a:p>
+            <a:fld id="{48F63A3B-78C7-47BE-AE5E-E10140E04643}" type="slidenum">
+              <a:rPr lang="en-US" smtClean="0"/>
+              <a:pPr/>
+              <a:t>20</a:t>
+            </a:fld>
+            <a:endParaRPr lang="en-US" dirty="0"/>
+          </a:p>
+        </p:txBody>
+      </p:sp>
+      <p:sp>
+        <p:nvSpPr>
+          <p:cNvPr id="5" name="Рисунок 4">
+            <a:extLst>
+              <a:ext uri="{FF2B5EF4-FFF2-40B4-BE49-F238E27FC236}">
+                <a16:creationId xmlns:a16="http://schemas.microsoft.com/office/drawing/2014/main" id="{0D133023-2941-4226-8A6A-2515314DB182}"/>
+              </a:ext>
+            </a:extLst>
+          </p:cNvPr>
+          <p:cNvSpPr>
+            <a:spLocks noGrp="1"/>
+          </p:cNvSpPr>
+          <p:nvPr>
+            <p:ph type="pic" sz="quarter" idx="14"/>
+          </p:nvPr>
+        </p:nvSpPr>
+        <p:spPr/>
+      </p:sp>
+      <p:graphicFrame>
+        <p:nvGraphicFramePr>
+          <p:cNvPr id="8" name="Таблица 8">
+            <a:extLst>
+              <a:ext uri="{FF2B5EF4-FFF2-40B4-BE49-F238E27FC236}">
+                <a16:creationId xmlns:a16="http://schemas.microsoft.com/office/drawing/2014/main" id="{84597B91-405C-4C29-AB5A-96940C12B22E}"/>
+              </a:ext>
+            </a:extLst>
+          </p:cNvPr>
+          <p:cNvGraphicFramePr>
+            <a:graphicFrameLocks noGrp="1"/>
+          </p:cNvGraphicFramePr>
+          <p:nvPr>
+            <p:extLst>
+              <p:ext uri="{D42A27DB-BD31-4B8C-83A1-F6EECF244321}">
+                <p14:modId xmlns:p14="http://schemas.microsoft.com/office/powerpoint/2010/main" val="2098110512"/>
+              </p:ext>
+            </p:extLst>
+          </p:nvPr>
+        </p:nvGraphicFramePr>
+        <p:xfrm>
+          <a:off x="666254" y="3429001"/>
+          <a:ext cx="8128000" cy="2857500"/>
+        </p:xfrm>
+        <a:graphic>
+          <a:graphicData uri="http://schemas.openxmlformats.org/drawingml/2006/table">
+            <a:tbl>
+              <a:tblPr firstRow="1" bandRow="1">
+                <a:tableStyleId>{3B4B98B0-60AC-42C2-AFA5-B58CD77FA1E5}</a:tableStyleId>
+              </a:tblPr>
+              <a:tblGrid>
+                <a:gridCol w="4064000">
+                  <a:extLst>
+                    <a:ext uri="{9D8B030D-6E8A-4147-A177-3AD203B41FA5}">
+                      <a16:colId xmlns:a16="http://schemas.microsoft.com/office/drawing/2014/main" val="989786863"/>
+                    </a:ext>
+                  </a:extLst>
+                </a:gridCol>
+                <a:gridCol w="4064000">
+                  <a:extLst>
+                    <a:ext uri="{9D8B030D-6E8A-4147-A177-3AD203B41FA5}">
+                      <a16:colId xmlns:a16="http://schemas.microsoft.com/office/drawing/2014/main" val="3904807002"/>
+                    </a:ext>
+                  </a:extLst>
+                </a:gridCol>
+              </a:tblGrid>
+              <a:tr h="571500">
+                <a:tc>
+                  <a:txBody>
+                    <a:bodyPr/>
+                    <a:lstStyle/>
+                    <a:p>
+                      <a:pPr algn="ctr"/>
+                      <a:r>
+                        <a:rPr lang="ru-RU" sz="2200" dirty="0"/>
+                        <a:t>Метрика</a:t>
+                      </a:r>
+                    </a:p>
+                  </a:txBody>
+                  <a:tcPr/>
+                </a:tc>
+                <a:tc>
+                  <a:txBody>
+                    <a:bodyPr/>
+                    <a:lstStyle/>
+                    <a:p>
+                      <a:pPr algn="ctr"/>
+                      <a:r>
+                        <a:rPr lang="ru-RU" sz="2200" dirty="0"/>
+                        <a:t>Значение</a:t>
+                      </a:r>
+                    </a:p>
+                  </a:txBody>
+                  <a:tcPr/>
+                </a:tc>
+                <a:extLst>
+                  <a:ext uri="{0D108BD9-81ED-4DB2-BD59-A6C34878D82A}">
+                    <a16:rowId xmlns:a16="http://schemas.microsoft.com/office/drawing/2014/main" val="1205587032"/>
+                  </a:ext>
+                </a:extLst>
+              </a:tr>
+              <a:tr h="571500">
+                <a:tc>
+                  <a:txBody>
+                    <a:bodyPr/>
+                    <a:lstStyle/>
+                    <a:p>
+                      <a:pPr algn="ctr"/>
+                      <a:r>
+                        <a:rPr lang="af-ZA" sz="2200" dirty="0"/>
+                        <a:t>Accuracy</a:t>
+                      </a:r>
+                      <a:endParaRPr lang="ru-RU" sz="2200" dirty="0"/>
+                    </a:p>
+                  </a:txBody>
+                  <a:tcPr/>
+                </a:tc>
+                <a:tc>
+                  <a:txBody>
+                    <a:bodyPr/>
+                    <a:lstStyle/>
+                    <a:p>
+                      <a:pPr algn="ctr"/>
+                      <a:r>
+                        <a:rPr lang="ru-RU" sz="2200" dirty="0"/>
+                        <a:t>76%</a:t>
+                      </a:r>
+                    </a:p>
+                  </a:txBody>
+                  <a:tcPr/>
+                </a:tc>
+                <a:extLst>
+                  <a:ext uri="{0D108BD9-81ED-4DB2-BD59-A6C34878D82A}">
+                    <a16:rowId xmlns:a16="http://schemas.microsoft.com/office/drawing/2014/main" val="4096871637"/>
+                  </a:ext>
+                </a:extLst>
+              </a:tr>
+              <a:tr h="571500">
+                <a:tc>
+                  <a:txBody>
+                    <a:bodyPr/>
+                    <a:lstStyle/>
+                    <a:p>
+                      <a:pPr algn="ctr"/>
+                      <a:r>
+                        <a:rPr lang="af-ZA" sz="2200" b="0" i="0" kern="1200" dirty="0">
+                          <a:solidFill>
+                            <a:schemeClr val="tx1"/>
+                          </a:solidFill>
+                          <a:effectLst/>
+                          <a:latin typeface="+mn-lt"/>
+                          <a:ea typeface="+mn-ea"/>
+                          <a:cs typeface="+mn-cs"/>
+                        </a:rPr>
+                        <a:t>Precision</a:t>
+                      </a:r>
+                      <a:endParaRPr lang="ru-RU" sz="2200" dirty="0"/>
+                    </a:p>
+                  </a:txBody>
+                  <a:tcPr/>
+                </a:tc>
+                <a:tc>
+                  <a:txBody>
+                    <a:bodyPr/>
+                    <a:lstStyle/>
+                    <a:p>
+                      <a:pPr algn="ctr"/>
+                      <a:r>
+                        <a:rPr lang="ru-RU" sz="2200" dirty="0"/>
+                        <a:t>97%</a:t>
+                      </a:r>
+                    </a:p>
+                  </a:txBody>
+                  <a:tcPr/>
+                </a:tc>
+                <a:extLst>
+                  <a:ext uri="{0D108BD9-81ED-4DB2-BD59-A6C34878D82A}">
+                    <a16:rowId xmlns:a16="http://schemas.microsoft.com/office/drawing/2014/main" val="2182232104"/>
+                  </a:ext>
+                </a:extLst>
+              </a:tr>
+              <a:tr h="571500">
+                <a:tc>
+                  <a:txBody>
+                    <a:bodyPr/>
+                    <a:lstStyle/>
+                    <a:p>
+                      <a:pPr algn="ctr"/>
+                      <a:r>
+                        <a:rPr lang="af-ZA" sz="2200" b="0" i="0" kern="1200" dirty="0">
+                          <a:solidFill>
+                            <a:schemeClr val="tx1"/>
+                          </a:solidFill>
+                          <a:effectLst/>
+                          <a:latin typeface="+mn-lt"/>
+                          <a:ea typeface="+mn-ea"/>
+                          <a:cs typeface="+mn-cs"/>
+                        </a:rPr>
+                        <a:t>F1-score</a:t>
+                      </a:r>
+                      <a:endParaRPr lang="ru-RU" sz="2200" dirty="0"/>
+                    </a:p>
+                  </a:txBody>
+                  <a:tcPr/>
+                </a:tc>
+                <a:tc>
+                  <a:txBody>
+                    <a:bodyPr/>
+                    <a:lstStyle/>
+                    <a:p>
+                      <a:pPr algn="ctr"/>
+                      <a:r>
+                        <a:rPr lang="ru-RU" sz="2200" dirty="0"/>
+                        <a:t>80%</a:t>
+                      </a:r>
+                    </a:p>
+                  </a:txBody>
+                  <a:tcPr/>
+                </a:tc>
+                <a:extLst>
+                  <a:ext uri="{0D108BD9-81ED-4DB2-BD59-A6C34878D82A}">
+                    <a16:rowId xmlns:a16="http://schemas.microsoft.com/office/drawing/2014/main" val="1971452813"/>
+                  </a:ext>
+                </a:extLst>
+              </a:tr>
+              <a:tr h="571500">
+                <a:tc>
+                  <a:txBody>
+                    <a:bodyPr/>
+                    <a:lstStyle/>
+                    <a:p>
+                      <a:pPr algn="ctr"/>
+                      <a:r>
+                        <a:rPr lang="en-US" sz="2200" dirty="0"/>
+                        <a:t>AUC</a:t>
+                      </a:r>
+                      <a:endParaRPr lang="ru-RU" sz="2200" dirty="0"/>
+                    </a:p>
+                  </a:txBody>
+                  <a:tcPr/>
+                </a:tc>
+                <a:tc>
+                  <a:txBody>
+                    <a:bodyPr/>
+                    <a:lstStyle/>
+                    <a:p>
+                      <a:pPr algn="ctr"/>
+                      <a:r>
+                        <a:rPr lang="ru-RU" sz="2200" dirty="0"/>
+                        <a:t>95%</a:t>
+                      </a:r>
+                    </a:p>
+                  </a:txBody>
+                  <a:tcPr/>
+                </a:tc>
+                <a:extLst>
+                  <a:ext uri="{0D108BD9-81ED-4DB2-BD59-A6C34878D82A}">
+                    <a16:rowId xmlns:a16="http://schemas.microsoft.com/office/drawing/2014/main" val="1569953945"/>
+                  </a:ext>
+                </a:extLst>
+              </a:tr>
+            </a:tbl>
+          </a:graphicData>
+        </a:graphic>
+      </p:graphicFrame>
+    </p:spTree>
+    <p:extLst>
+      <p:ext uri="{BB962C8B-B14F-4D97-AF65-F5344CB8AC3E}">
+        <p14:creationId xmlns:p14="http://schemas.microsoft.com/office/powerpoint/2010/main" val="1740324376"/>
+      </p:ext>
+    </p:extLst>
+  </p:cSld>
+  <p:clrMapOvr>
+    <a:masterClrMapping/>
+  </p:clrMapOvr>
+</p:sld>
+</file>
+
+<file path=ppt/slides/slide21.xml><?xml version="1.0" encoding="utf-8"?>
 <p:sld xmlns:a="http://schemas.openxmlformats.org/drawingml/2006/main" xmlns:r="http://schemas.openxmlformats.org/officeDocument/2006/relationships" xmlns:p="http://schemas.openxmlformats.org/presentationml/2006/main">
   <p:cSld>
     <p:spTree>
@@ -22271,7 +24358,7 @@
             <a:fld id="{48F63A3B-78C7-47BE-AE5E-E10140E04643}" type="slidenum">
               <a:rPr lang="en-US" smtClean="0"/>
               <a:pPr/>
-              <a:t>17</a:t>
+              <a:t>21</a:t>
             </a:fld>
             <a:endParaRPr lang="en-US" dirty="0"/>
           </a:p>
@@ -22308,7 +24395,7 @@
 </p:sld>
 </file>
 
-<file path=ppt/slides/slide18.xml><?xml version="1.0" encoding="utf-8"?>
+<file path=ppt/slides/slide22.xml><?xml version="1.0" encoding="utf-8"?>
 <p:sld xmlns:a="http://schemas.openxmlformats.org/drawingml/2006/main" xmlns:r="http://schemas.openxmlformats.org/officeDocument/2006/relationships" xmlns:p="http://schemas.openxmlformats.org/presentationml/2006/main">
   <p:cSld>
     <p:spTree>
@@ -22377,7 +24464,7 @@
         </p:nvSpPr>
         <p:spPr>
           <a:xfrm>
-            <a:off x="1550565" y="2303028"/>
+            <a:off x="1402682" y="2303028"/>
             <a:ext cx="3288136" cy="3961593"/>
           </a:xfrm>
         </p:spPr>
@@ -22459,7 +24546,7 @@
             <a:fld id="{48F63A3B-78C7-47BE-AE5E-E10140E04643}" type="slidenum">
               <a:rPr lang="en-US" smtClean="0"/>
               <a:pPr/>
-              <a:t>18</a:t>
+              <a:t>22</a:t>
             </a:fld>
             <a:endParaRPr lang="en-US" dirty="0"/>
           </a:p>
@@ -22496,8 +24583,8 @@
         </p:blipFill>
         <p:spPr bwMode="auto">
           <a:xfrm>
-            <a:off x="5307994" y="2185606"/>
-            <a:ext cx="6319579" cy="3465894"/>
+            <a:off x="4690818" y="2185605"/>
+            <a:ext cx="6936756" cy="3804377"/>
           </a:xfrm>
           <a:prstGeom prst="rect">
             <a:avLst/>
@@ -22527,7 +24614,7 @@
 </p:sld>
 </file>
 
-<file path=ppt/slides/slide19.xml><?xml version="1.0" encoding="utf-8"?>
+<file path=ppt/slides/slide23.xml><?xml version="1.0" encoding="utf-8"?>
 <p:sld xmlns:a="http://schemas.openxmlformats.org/drawingml/2006/main" xmlns:r="http://schemas.openxmlformats.org/officeDocument/2006/relationships" xmlns:p="http://schemas.openxmlformats.org/presentationml/2006/main">
   <p:cSld>
     <p:spTree>
@@ -22607,7 +24694,7 @@
             <a:fld id="{48F63A3B-78C7-47BE-AE5E-E10140E04643}" type="slidenum">
               <a:rPr lang="en-US" smtClean="0"/>
               <a:pPr/>
-              <a:t>19</a:t>
+              <a:t>23</a:t>
             </a:fld>
             <a:endParaRPr lang="en-US" dirty="0"/>
           </a:p>
@@ -22684,159 +24771,7 @@
 </p:sld>
 </file>
 
-<file path=ppt/slides/slide2.xml><?xml version="1.0" encoding="utf-8"?>
-<p:sld xmlns:a="http://schemas.openxmlformats.org/drawingml/2006/main" xmlns:r="http://schemas.openxmlformats.org/officeDocument/2006/relationships" xmlns:p="http://schemas.openxmlformats.org/presentationml/2006/main">
-  <p:cSld>
-    <p:spTree>
-      <p:nvGrpSpPr>
-        <p:cNvPr id="1" name=""/>
-        <p:cNvGrpSpPr/>
-        <p:nvPr/>
-      </p:nvGrpSpPr>
-      <p:grpSpPr>
-        <a:xfrm>
-          <a:off x="0" y="0"/>
-          <a:ext cx="0" cy="0"/>
-          <a:chOff x="0" y="0"/>
-          <a:chExt cx="0" cy="0"/>
-        </a:xfrm>
-      </p:grpSpPr>
-      <p:sp>
-        <p:nvSpPr>
-          <p:cNvPr id="2" name="Title 1">
-            <a:extLst>
-              <a:ext uri="{FF2B5EF4-FFF2-40B4-BE49-F238E27FC236}">
-                <a16:creationId xmlns:a16="http://schemas.microsoft.com/office/drawing/2014/main" id="{13021072-4A77-DB4D-DF41-58EADB7DA94E}"/>
-              </a:ext>
-            </a:extLst>
-          </p:cNvPr>
-          <p:cNvSpPr>
-            <a:spLocks noGrp="1"/>
-          </p:cNvSpPr>
-          <p:nvPr>
-            <p:ph type="title"/>
-          </p:nvPr>
-        </p:nvSpPr>
-        <p:spPr>
-          <a:xfrm>
-            <a:off x="914400" y="928688"/>
-            <a:ext cx="6583680" cy="1129335"/>
-          </a:xfrm>
-        </p:spPr>
-        <p:txBody>
-          <a:bodyPr/>
-          <a:lstStyle/>
-          <a:p>
-            <a:r>
-              <a:rPr lang="ru-RU" dirty="0"/>
-              <a:t>Актуальность и проблема</a:t>
-            </a:r>
-            <a:endParaRPr lang="en-US" dirty="0"/>
-          </a:p>
-        </p:txBody>
-      </p:sp>
-      <p:sp>
-        <p:nvSpPr>
-          <p:cNvPr id="3" name="Content Placeholder 2">
-            <a:extLst>
-              <a:ext uri="{FF2B5EF4-FFF2-40B4-BE49-F238E27FC236}">
-                <a16:creationId xmlns:a16="http://schemas.microsoft.com/office/drawing/2014/main" id="{D4D22962-3C7F-E480-5C35-7F4860A098E1}"/>
-              </a:ext>
-            </a:extLst>
-          </p:cNvPr>
-          <p:cNvSpPr>
-            <a:spLocks noGrp="1"/>
-          </p:cNvSpPr>
-          <p:nvPr>
-            <p:ph idx="1"/>
-          </p:nvPr>
-        </p:nvSpPr>
-        <p:spPr>
-          <a:xfrm>
-            <a:off x="914400" y="2058023"/>
-            <a:ext cx="6583680" cy="4023360"/>
-          </a:xfrm>
-        </p:spPr>
-        <p:txBody>
-          <a:bodyPr>
-            <a:normAutofit/>
-          </a:bodyPr>
-          <a:lstStyle/>
-          <a:p>
-            <a:pPr marL="342900" indent="-342900">
-              <a:buFont typeface="Arial" panose="020B0604020202020204" pitchFamily="34" charset="0"/>
-              <a:buChar char="•"/>
-            </a:pPr>
-            <a:r>
-              <a:rPr lang="ru-RU" sz="2200" dirty="0"/>
-              <a:t>Рост фишинговых атак с использованием подозрительных доменов.</a:t>
-            </a:r>
-          </a:p>
-          <a:p>
-            <a:pPr marL="342900" indent="-342900">
-              <a:buFont typeface="Arial" panose="020B0604020202020204" pitchFamily="34" charset="0"/>
-              <a:buChar char="•"/>
-            </a:pPr>
-            <a:r>
-              <a:rPr lang="ru-RU" sz="2200" dirty="0"/>
-              <a:t>Сложность ручной проверки большого числа доменов</a:t>
-            </a:r>
-            <a:r>
-              <a:rPr lang="ru-RU" dirty="0"/>
-              <a:t>.</a:t>
-            </a:r>
-          </a:p>
-        </p:txBody>
-      </p:sp>
-      <p:sp>
-        <p:nvSpPr>
-          <p:cNvPr id="4" name="Slide Number Placeholder 3">
-            <a:extLst>
-              <a:ext uri="{FF2B5EF4-FFF2-40B4-BE49-F238E27FC236}">
-                <a16:creationId xmlns:a16="http://schemas.microsoft.com/office/drawing/2014/main" id="{18D5CFA2-4E67-F157-5FFD-A246307D41F7}"/>
-              </a:ext>
-            </a:extLst>
-          </p:cNvPr>
-          <p:cNvSpPr>
-            <a:spLocks noGrp="1"/>
-          </p:cNvSpPr>
-          <p:nvPr>
-            <p:ph type="sldNum" sz="quarter" idx="10"/>
-          </p:nvPr>
-        </p:nvSpPr>
-        <p:spPr>
-          <a:xfrm>
-            <a:off x="10358437" y="457199"/>
-            <a:ext cx="1067589" cy="471489"/>
-          </a:xfrm>
-        </p:spPr>
-        <p:txBody>
-          <a:bodyPr/>
-          <a:lstStyle/>
-          <a:p>
-            <a:fld id="{48F63A3B-78C7-47BE-AE5E-E10140E04643}" type="slidenum">
-              <a:rPr lang="en-US" smtClean="0"/>
-              <a:pPr/>
-              <a:t>2</a:t>
-            </a:fld>
-            <a:endParaRPr lang="en-US" dirty="0"/>
-          </a:p>
-        </p:txBody>
-      </p:sp>
-    </p:spTree>
-    <p:extLst>
-      <p:ext uri="{BB962C8B-B14F-4D97-AF65-F5344CB8AC3E}">
-        <p14:creationId xmlns:p14="http://schemas.microsoft.com/office/powerpoint/2010/main" val="3913219759"/>
-      </p:ext>
-    </p:extLst>
-  </p:cSld>
-  <p:clrMapOvr>
-    <a:masterClrMapping/>
-  </p:clrMapOvr>
-</p:sld>
-</file>
-
-<file path=ppt/slides/slide20.xml><?xml version="1.0" encoding="utf-8"?>
+<file path=ppt/slides/slide24.xml><?xml version="1.0" encoding="utf-8"?>
 <p:sld xmlns:a="http://schemas.openxmlformats.org/drawingml/2006/main" xmlns:r="http://schemas.openxmlformats.org/officeDocument/2006/relationships" xmlns:p="http://schemas.openxmlformats.org/presentationml/2006/main">
   <p:cSld>
     <p:spTree>
@@ -22881,7 +24816,7 @@
           <a:p>
             <a:r>
               <a:rPr lang="ru-RU" dirty="0"/>
-              <a:t>План работы по спринтам</a:t>
+              <a:t>Итоги работы по спринтам</a:t>
             </a:r>
             <a:endParaRPr lang="en-US" dirty="0"/>
           </a:p>
@@ -22916,7 +24851,7 @@
             <a:fld id="{48F63A3B-78C7-47BE-AE5E-E10140E04643}" type="slidenum">
               <a:rPr lang="en-US" smtClean="0"/>
               <a:pPr/>
-              <a:t>20</a:t>
+              <a:t>24</a:t>
             </a:fld>
             <a:endParaRPr lang="en-US" dirty="0"/>
           </a:p>
@@ -22941,14 +24876,26 @@
         <p:spPr>
           <a:xfrm>
             <a:off x="4364808" y="2338388"/>
-            <a:ext cx="7043618" cy="3703595"/>
+            <a:ext cx="7043618" cy="4519612"/>
           </a:xfrm>
         </p:spPr>
         <p:txBody>
           <a:bodyPr>
-            <a:normAutofit/>
+            <a:normAutofit lnSpcReduction="10000"/>
           </a:bodyPr>
           <a:lstStyle/>
+          <a:p>
+            <a:r>
+              <a:rPr lang="ru-RU" sz="2200" b="1" dirty="0"/>
+              <a:t>Спринт 1: </a:t>
+            </a:r>
+          </a:p>
+          <a:p>
+            <a:r>
+              <a:rPr lang="ru-RU" sz="2200" b="1" dirty="0"/>
+              <a:t>Что сделано:</a:t>
+            </a:r>
+          </a:p>
           <a:p>
             <a:pPr marL="342900" indent="-342900">
               <a:buFont typeface="Arial" panose="020B0604020202020204" pitchFamily="34" charset="0"/>
@@ -22956,7 +24903,7 @@
             </a:pPr>
             <a:r>
               <a:rPr lang="ru-RU" sz="2200" dirty="0"/>
-              <a:t>Спринт 1: Сбор и очистка </a:t>
+              <a:t>Сбор </a:t>
             </a:r>
             <a:r>
               <a:rPr lang="ru-RU" sz="2200" dirty="0" err="1"/>
@@ -22964,7 +24911,143 @@
             </a:r>
             <a:r>
               <a:rPr lang="ru-RU" sz="2200" dirty="0"/>
-              <a:t>, обучение базовой модели, создание каркаса API.</a:t>
+              <a:t> на 101219 </a:t>
+            </a:r>
+            <a:r>
+              <a:rPr lang="en-US" sz="2200" dirty="0"/>
+              <a:t>URL</a:t>
+            </a:r>
+            <a:r>
+              <a:rPr lang="ru-RU" sz="2200" dirty="0"/>
+              <a:t> </a:t>
+            </a:r>
+            <a:endParaRPr lang="en-US" sz="2200" dirty="0"/>
+          </a:p>
+          <a:p>
+            <a:pPr marL="342900" indent="-342900">
+              <a:buFont typeface="Arial" panose="020B0604020202020204" pitchFamily="34" charset="0"/>
+              <a:buChar char="•"/>
+            </a:pPr>
+            <a:r>
+              <a:rPr lang="ru-RU" sz="2200" dirty="0"/>
+              <a:t>Обучение базовой модели </a:t>
+            </a:r>
+          </a:p>
+          <a:p>
+            <a:pPr marL="342900" indent="-342900">
+              <a:buFont typeface="Arial" panose="020B0604020202020204" pitchFamily="34" charset="0"/>
+              <a:buChar char="•"/>
+            </a:pPr>
+            <a:r>
+              <a:rPr lang="ru-RU" sz="2200" dirty="0"/>
+              <a:t>Создание каркаса API</a:t>
+            </a:r>
+          </a:p>
+          <a:p>
+            <a:pPr marL="342900" indent="-342900">
+              <a:buFont typeface="Arial" panose="020B0604020202020204" pitchFamily="34" charset="0"/>
+              <a:buChar char="•"/>
+            </a:pPr>
+            <a:r>
+              <a:rPr lang="ru-RU" sz="2200" dirty="0"/>
+              <a:t>Создание</a:t>
+            </a:r>
+            <a:r>
+              <a:rPr lang="en-US" sz="2200" dirty="0"/>
+              <a:t> GitHub</a:t>
+            </a:r>
+            <a:r>
+              <a:rPr lang="ru-RU" sz="2200" dirty="0"/>
+              <a:t> репозитория</a:t>
+            </a:r>
+            <a:endParaRPr lang="en-US" sz="2200" dirty="0"/>
+          </a:p>
+          <a:p>
+            <a:pPr marL="342900" indent="-342900">
+              <a:buFont typeface="Arial" panose="020B0604020202020204" pitchFamily="34" charset="0"/>
+              <a:buChar char="•"/>
+            </a:pPr>
+            <a:r>
+              <a:rPr lang="ru-RU" sz="2200" dirty="0"/>
+              <a:t>Разработка базового веб-интерфейса на </a:t>
+            </a:r>
+            <a:r>
+              <a:rPr lang="en-US" sz="2200" dirty="0"/>
+              <a:t>HTML/JS/CSS</a:t>
+            </a:r>
+            <a:endParaRPr lang="ru-RU" sz="2200" dirty="0"/>
+          </a:p>
+          <a:p>
+            <a:pPr marL="342900" indent="-342900">
+              <a:buFont typeface="Arial" panose="020B0604020202020204" pitchFamily="34" charset="0"/>
+              <a:buChar char="•"/>
+            </a:pPr>
+            <a:r>
+              <a:rPr lang="ru-RU" sz="2200" dirty="0"/>
+              <a:t>Локально провели тестирование модели</a:t>
+            </a:r>
+          </a:p>
+          <a:p>
+            <a:pPr marL="342900" indent="-342900">
+              <a:buFont typeface="Arial" panose="020B0604020202020204" pitchFamily="34" charset="0"/>
+              <a:buChar char="•"/>
+            </a:pPr>
+            <a:r>
+              <a:rPr lang="ru-RU" sz="2200" dirty="0"/>
+              <a:t>Сделаны наброски презентации</a:t>
+            </a:r>
+            <a:endParaRPr lang="en-US" sz="2200" dirty="0"/>
+          </a:p>
+          <a:p>
+            <a:r>
+              <a:rPr lang="ru-RU" sz="2200" b="1" dirty="0"/>
+              <a:t>С какими трудностями столкнулись:</a:t>
+            </a:r>
+          </a:p>
+          <a:p>
+            <a:pPr marL="342900" indent="-342900">
+              <a:buFont typeface="Arial" panose="020B0604020202020204" pitchFamily="34" charset="0"/>
+              <a:buChar char="•"/>
+            </a:pPr>
+            <a:r>
+              <a:rPr lang="en-US" sz="2200" dirty="0"/>
+              <a:t>“</a:t>
+            </a:r>
+            <a:r>
+              <a:rPr lang="ru-RU" sz="2200" dirty="0"/>
+              <a:t>Грязный</a:t>
+            </a:r>
+            <a:r>
+              <a:rPr lang="en-US" sz="2200" dirty="0"/>
+              <a:t>”</a:t>
+            </a:r>
+            <a:r>
+              <a:rPr lang="ru-RU" sz="2200" dirty="0"/>
+              <a:t> </a:t>
+            </a:r>
+            <a:r>
+              <a:rPr lang="ru-RU" sz="2200" dirty="0" err="1"/>
+              <a:t>датасет</a:t>
+            </a:r>
+            <a:r>
+              <a:rPr lang="ru-RU" sz="2200" dirty="0"/>
+              <a:t>, пришлось очищать вручную</a:t>
+            </a:r>
+          </a:p>
+          <a:p>
+            <a:r>
+              <a:rPr lang="ru-RU" sz="2200" b="1" dirty="0"/>
+              <a:t>Результат:</a:t>
+            </a:r>
+          </a:p>
+          <a:p>
+            <a:pPr marL="342900" indent="-342900">
+              <a:buFont typeface="Arial" panose="020B0604020202020204" pitchFamily="34" charset="0"/>
+              <a:buChar char="•"/>
+            </a:pPr>
+            <a:r>
+              <a:rPr lang="ru-RU" sz="2200" dirty="0"/>
+              <a:t>Работающий сайт</a:t>
             </a:r>
           </a:p>
           <a:p>
@@ -22973,61 +25056,6 @@
               <a:buChar char="•"/>
             </a:pPr>
             <a:endParaRPr lang="ru-RU" sz="2200" dirty="0"/>
-          </a:p>
-          <a:p>
-            <a:pPr marL="342900" indent="-342900">
-              <a:buFont typeface="Arial" panose="020B0604020202020204" pitchFamily="34" charset="0"/>
-              <a:buChar char="•"/>
-            </a:pPr>
-            <a:r>
-              <a:rPr lang="ru-RU" sz="2200" dirty="0"/>
-              <a:t>Спринт 2: Реализация </a:t>
-            </a:r>
-            <a:r>
-              <a:rPr lang="ru-RU" sz="2200" dirty="0" err="1"/>
-              <a:t>Frontend</a:t>
-            </a:r>
-            <a:r>
-              <a:rPr lang="ru-RU" sz="2200" dirty="0"/>
-              <a:t>, интеграция, локальное тестирование связки.</a:t>
-            </a:r>
-          </a:p>
-          <a:p>
-            <a:pPr marL="342900" indent="-342900">
-              <a:buFont typeface="Arial" panose="020B0604020202020204" pitchFamily="34" charset="0"/>
-              <a:buChar char="•"/>
-            </a:pPr>
-            <a:endParaRPr lang="ru-RU" sz="2200" dirty="0"/>
-          </a:p>
-          <a:p>
-            <a:pPr marL="342900" indent="-342900">
-              <a:buFont typeface="Arial" panose="020B0604020202020204" pitchFamily="34" charset="0"/>
-              <a:buChar char="•"/>
-            </a:pPr>
-            <a:r>
-              <a:rPr lang="ru-RU" sz="2200" dirty="0"/>
-              <a:t>Спринт 3: Деплой на хостинг, настройка CI/CD, тестирование публичного API.</a:t>
-            </a:r>
-          </a:p>
-          <a:p>
-            <a:pPr marL="342900" indent="-342900">
-              <a:buFont typeface="Arial" panose="020B0604020202020204" pitchFamily="34" charset="0"/>
-              <a:buChar char="•"/>
-            </a:pPr>
-            <a:endParaRPr lang="ru-RU" sz="2200" dirty="0"/>
-          </a:p>
-          <a:p>
-            <a:pPr marL="342900" indent="-342900">
-              <a:buFont typeface="Arial" panose="020B0604020202020204" pitchFamily="34" charset="0"/>
-              <a:buChar char="•"/>
-            </a:pPr>
-            <a:r>
-              <a:rPr lang="ru-RU" sz="2200" dirty="0"/>
-              <a:t>Спринт 4: Оптимизация модели, финальная отладка, подготовка презентации.</a:t>
-            </a:r>
-          </a:p>
-          <a:p>
-            <a:endParaRPr lang="ru-RU" dirty="0"/>
           </a:p>
         </p:txBody>
       </p:sp>
@@ -23044,7 +25072,811 @@
 </p:sld>
 </file>
 
-<file path=ppt/slides/slide21.xml><?xml version="1.0" encoding="utf-8"?>
+<file path=ppt/slides/slide25.xml><?xml version="1.0" encoding="utf-8"?>
+<p:sld xmlns:a="http://schemas.openxmlformats.org/drawingml/2006/main" xmlns:r="http://schemas.openxmlformats.org/officeDocument/2006/relationships" xmlns:p="http://schemas.openxmlformats.org/presentationml/2006/main">
+  <p:cSld>
+    <p:spTree>
+      <p:nvGrpSpPr>
+        <p:cNvPr id="1" name=""/>
+        <p:cNvGrpSpPr/>
+        <p:nvPr/>
+      </p:nvGrpSpPr>
+      <p:grpSpPr>
+        <a:xfrm>
+          <a:off x="0" y="0"/>
+          <a:ext cx="0" cy="0"/>
+          <a:chOff x="0" y="0"/>
+          <a:chExt cx="0" cy="0"/>
+        </a:xfrm>
+      </p:grpSpPr>
+      <p:sp>
+        <p:nvSpPr>
+          <p:cNvPr id="3" name="Slide Number Placeholder 2">
+            <a:extLst>
+              <a:ext uri="{FF2B5EF4-FFF2-40B4-BE49-F238E27FC236}">
+                <a16:creationId xmlns:a16="http://schemas.microsoft.com/office/drawing/2014/main" id="{370AEC4F-E711-8552-9C34-82C1514A1E37}"/>
+              </a:ext>
+            </a:extLst>
+          </p:cNvPr>
+          <p:cNvSpPr>
+            <a:spLocks noGrp="1"/>
+          </p:cNvSpPr>
+          <p:nvPr>
+            <p:ph type="sldNum" sz="quarter" idx="10"/>
+          </p:nvPr>
+        </p:nvSpPr>
+        <p:spPr>
+          <a:xfrm>
+            <a:off x="10438475" y="457199"/>
+            <a:ext cx="987552" cy="471489"/>
+          </a:xfrm>
+        </p:spPr>
+        <p:txBody>
+          <a:bodyPr/>
+          <a:lstStyle/>
+          <a:p>
+            <a:fld id="{48F63A3B-78C7-47BE-AE5E-E10140E04643}" type="slidenum">
+              <a:rPr lang="en-US" smtClean="0"/>
+              <a:pPr/>
+              <a:t>25</a:t>
+            </a:fld>
+            <a:endParaRPr lang="en-US" dirty="0"/>
+          </a:p>
+        </p:txBody>
+      </p:sp>
+      <p:sp>
+        <p:nvSpPr>
+          <p:cNvPr id="4" name="Content Placeholder 3">
+            <a:extLst>
+              <a:ext uri="{FF2B5EF4-FFF2-40B4-BE49-F238E27FC236}">
+                <a16:creationId xmlns:a16="http://schemas.microsoft.com/office/drawing/2014/main" id="{BDDD6BDC-E008-6AB7-55A1-46ED9BCF054F}"/>
+              </a:ext>
+            </a:extLst>
+          </p:cNvPr>
+          <p:cNvSpPr>
+            <a:spLocks noGrp="1"/>
+          </p:cNvSpPr>
+          <p:nvPr>
+            <p:ph idx="11"/>
+          </p:nvPr>
+        </p:nvSpPr>
+        <p:spPr>
+          <a:xfrm>
+            <a:off x="4364808" y="711994"/>
+            <a:ext cx="7061219" cy="6146005"/>
+          </a:xfrm>
+        </p:spPr>
+        <p:txBody>
+          <a:bodyPr>
+            <a:noAutofit/>
+          </a:bodyPr>
+          <a:lstStyle/>
+          <a:p>
+            <a:r>
+              <a:rPr lang="ru-RU" sz="2200" b="1" dirty="0"/>
+              <a:t>Спринт 2: </a:t>
+            </a:r>
+          </a:p>
+          <a:p>
+            <a:r>
+              <a:rPr lang="ru-RU" sz="2200" b="1" dirty="0"/>
+              <a:t>Что сделано:</a:t>
+            </a:r>
+          </a:p>
+          <a:p>
+            <a:pPr marL="342900" indent="-342900">
+              <a:buFont typeface="Arial" panose="020B0604020202020204" pitchFamily="34" charset="0"/>
+              <a:buChar char="•"/>
+            </a:pPr>
+            <a:r>
+              <a:rPr lang="ru-RU" sz="2200" dirty="0"/>
+              <a:t>Упаковали сервис в </a:t>
+            </a:r>
+            <a:r>
+              <a:rPr lang="en-US" sz="2200" dirty="0"/>
+              <a:t>Docker</a:t>
+            </a:r>
+            <a:r>
+              <a:rPr lang="ru-RU" sz="2200" dirty="0"/>
+              <a:t>-контейнер</a:t>
+            </a:r>
+          </a:p>
+          <a:p>
+            <a:pPr marL="342900" indent="-342900">
+              <a:buFont typeface="Arial" panose="020B0604020202020204" pitchFamily="34" charset="0"/>
+              <a:buChar char="•"/>
+            </a:pPr>
+            <a:r>
+              <a:rPr lang="ru-RU" sz="2200" dirty="0"/>
+              <a:t>Начали разработку полноценного сайта, не </a:t>
+            </a:r>
+            <a:r>
+              <a:rPr lang="en-US" sz="2200" dirty="0"/>
+              <a:t>“</a:t>
+            </a:r>
+            <a:r>
+              <a:rPr lang="ru-RU" sz="2200" dirty="0"/>
+              <a:t>заглушки</a:t>
+            </a:r>
+            <a:r>
+              <a:rPr lang="en-US" sz="2200" dirty="0"/>
+              <a:t>”</a:t>
+            </a:r>
+            <a:endParaRPr lang="ru-RU" sz="2200" dirty="0"/>
+          </a:p>
+          <a:p>
+            <a:pPr marL="342900" indent="-342900">
+              <a:buFont typeface="Arial" panose="020B0604020202020204" pitchFamily="34" charset="0"/>
+              <a:buChar char="•"/>
+            </a:pPr>
+            <a:r>
+              <a:rPr lang="ru-RU" sz="2200" dirty="0"/>
+              <a:t>Отобразили в презентации то чего достигли в ходе работы над проектом</a:t>
+            </a:r>
+          </a:p>
+          <a:p>
+            <a:pPr marL="342900" indent="-342900">
+              <a:buFont typeface="Arial" panose="020B0604020202020204" pitchFamily="34" charset="0"/>
+              <a:buChar char="•"/>
+            </a:pPr>
+            <a:r>
+              <a:rPr lang="ru-RU" sz="2200" dirty="0"/>
+              <a:t>Полностью организовали удобную работу с разделением ролей на </a:t>
+            </a:r>
+            <a:r>
+              <a:rPr lang="en-US" sz="2200" dirty="0"/>
+              <a:t>GitHub</a:t>
+            </a:r>
+            <a:endParaRPr lang="ru-RU" sz="2200" dirty="0"/>
+          </a:p>
+          <a:p>
+            <a:r>
+              <a:rPr lang="ru-RU" sz="2200" b="1" dirty="0"/>
+              <a:t>С какими трудностями столкнулись:</a:t>
+            </a:r>
+          </a:p>
+          <a:p>
+            <a:pPr marL="342900" indent="-342900">
+              <a:buFont typeface="Arial" panose="020B0604020202020204" pitchFamily="34" charset="0"/>
+              <a:buChar char="•"/>
+            </a:pPr>
+            <a:r>
+              <a:rPr lang="ru-RU" sz="2200" dirty="0"/>
+              <a:t>Столкнулись с тем что сервис принимал адреса с пробелами внутри себя за легитимные</a:t>
+            </a:r>
+          </a:p>
+          <a:p>
+            <a:pPr marL="342900" indent="-342900">
+              <a:buFont typeface="Arial" panose="020B0604020202020204" pitchFamily="34" charset="0"/>
+              <a:buChar char="•"/>
+            </a:pPr>
+            <a:r>
+              <a:rPr lang="ru-RU" sz="2200" dirty="0"/>
+              <a:t>Не высокий уровень точности модели</a:t>
+            </a:r>
+          </a:p>
+          <a:p>
+            <a:pPr marL="342900" indent="-342900">
+              <a:buFont typeface="Arial" panose="020B0604020202020204" pitchFamily="34" charset="0"/>
+              <a:buChar char="•"/>
+            </a:pPr>
+            <a:r>
+              <a:rPr lang="ru-RU" sz="2200" dirty="0"/>
+              <a:t>После чистки </a:t>
+            </a:r>
+            <a:r>
+              <a:rPr lang="ru-RU" sz="2200" dirty="0" err="1"/>
+              <a:t>датасета</a:t>
+            </a:r>
+            <a:r>
+              <a:rPr lang="ru-RU" sz="2200" dirty="0"/>
+              <a:t> осталось </a:t>
+            </a:r>
+            <a:r>
+              <a:rPr lang="en-US" sz="2200" dirty="0"/>
+              <a:t>~</a:t>
+            </a:r>
+            <a:r>
+              <a:rPr lang="ru-RU" sz="2200" dirty="0"/>
+              <a:t>3000 строк</a:t>
+            </a:r>
+          </a:p>
+          <a:p>
+            <a:r>
+              <a:rPr lang="ru-RU" sz="2200" b="1" dirty="0"/>
+              <a:t>Результат:</a:t>
+            </a:r>
+          </a:p>
+          <a:p>
+            <a:pPr marL="342900" indent="-342900">
+              <a:buFont typeface="Arial" panose="020B0604020202020204" pitchFamily="34" charset="0"/>
+              <a:buChar char="•"/>
+            </a:pPr>
+            <a:r>
+              <a:rPr lang="ru-RU" sz="2200" dirty="0"/>
+              <a:t>Функционирующий прототип в </a:t>
+            </a:r>
+            <a:r>
+              <a:rPr lang="ru-RU" sz="2200" dirty="0" err="1"/>
+              <a:t>Docker</a:t>
+            </a:r>
+            <a:r>
+              <a:rPr lang="ru-RU" sz="2200" dirty="0"/>
+              <a:t>-контейнере, полностью организованная работа через </a:t>
+            </a:r>
+            <a:r>
+              <a:rPr lang="ru-RU" sz="2200" dirty="0" err="1"/>
+              <a:t>GitHub</a:t>
+            </a:r>
+            <a:endParaRPr lang="ru-RU" sz="2200" dirty="0"/>
+          </a:p>
+        </p:txBody>
+      </p:sp>
+    </p:spTree>
+    <p:extLst>
+      <p:ext uri="{BB962C8B-B14F-4D97-AF65-F5344CB8AC3E}">
+        <p14:creationId xmlns:p14="http://schemas.microsoft.com/office/powerpoint/2010/main" val="3958933742"/>
+      </p:ext>
+    </p:extLst>
+  </p:cSld>
+  <p:clrMapOvr>
+    <a:masterClrMapping/>
+  </p:clrMapOvr>
+</p:sld>
+</file>
+
+<file path=ppt/slides/slide26.xml><?xml version="1.0" encoding="utf-8"?>
+<p:sld xmlns:a="http://schemas.openxmlformats.org/drawingml/2006/main" xmlns:r="http://schemas.openxmlformats.org/officeDocument/2006/relationships" xmlns:p="http://schemas.openxmlformats.org/presentationml/2006/main">
+  <p:cSld>
+    <p:spTree>
+      <p:nvGrpSpPr>
+        <p:cNvPr id="1" name=""/>
+        <p:cNvGrpSpPr/>
+        <p:nvPr/>
+      </p:nvGrpSpPr>
+      <p:grpSpPr>
+        <a:xfrm>
+          <a:off x="0" y="0"/>
+          <a:ext cx="0" cy="0"/>
+          <a:chOff x="0" y="0"/>
+          <a:chExt cx="0" cy="0"/>
+        </a:xfrm>
+      </p:grpSpPr>
+      <p:sp>
+        <p:nvSpPr>
+          <p:cNvPr id="3" name="Slide Number Placeholder 2">
+            <a:extLst>
+              <a:ext uri="{FF2B5EF4-FFF2-40B4-BE49-F238E27FC236}">
+                <a16:creationId xmlns:a16="http://schemas.microsoft.com/office/drawing/2014/main" id="{370AEC4F-E711-8552-9C34-82C1514A1E37}"/>
+              </a:ext>
+            </a:extLst>
+          </p:cNvPr>
+          <p:cNvSpPr>
+            <a:spLocks noGrp="1"/>
+          </p:cNvSpPr>
+          <p:nvPr>
+            <p:ph type="sldNum" sz="quarter" idx="10"/>
+          </p:nvPr>
+        </p:nvSpPr>
+        <p:spPr>
+          <a:xfrm>
+            <a:off x="10438475" y="457199"/>
+            <a:ext cx="987552" cy="471489"/>
+          </a:xfrm>
+        </p:spPr>
+        <p:txBody>
+          <a:bodyPr/>
+          <a:lstStyle/>
+          <a:p>
+            <a:fld id="{48F63A3B-78C7-47BE-AE5E-E10140E04643}" type="slidenum">
+              <a:rPr lang="en-US" smtClean="0"/>
+              <a:pPr/>
+              <a:t>26</a:t>
+            </a:fld>
+            <a:endParaRPr lang="en-US" dirty="0"/>
+          </a:p>
+        </p:txBody>
+      </p:sp>
+      <p:sp>
+        <p:nvSpPr>
+          <p:cNvPr id="4" name="Content Placeholder 3">
+            <a:extLst>
+              <a:ext uri="{FF2B5EF4-FFF2-40B4-BE49-F238E27FC236}">
+                <a16:creationId xmlns:a16="http://schemas.microsoft.com/office/drawing/2014/main" id="{BDDD6BDC-E008-6AB7-55A1-46ED9BCF054F}"/>
+              </a:ext>
+            </a:extLst>
+          </p:cNvPr>
+          <p:cNvSpPr>
+            <a:spLocks noGrp="1"/>
+          </p:cNvSpPr>
+          <p:nvPr>
+            <p:ph idx="11"/>
+          </p:nvPr>
+        </p:nvSpPr>
+        <p:spPr>
+          <a:xfrm>
+            <a:off x="4382409" y="684370"/>
+            <a:ext cx="7043618" cy="4519612"/>
+          </a:xfrm>
+        </p:spPr>
+        <p:txBody>
+          <a:bodyPr>
+            <a:normAutofit/>
+          </a:bodyPr>
+          <a:lstStyle/>
+          <a:p>
+            <a:r>
+              <a:rPr lang="ru-RU" sz="2200" b="1" dirty="0"/>
+              <a:t>Спринт 3: </a:t>
+            </a:r>
+          </a:p>
+          <a:p>
+            <a:r>
+              <a:rPr lang="ru-RU" sz="2200" b="1" dirty="0"/>
+              <a:t>Что сделано:</a:t>
+            </a:r>
+          </a:p>
+          <a:p>
+            <a:pPr marL="342900" indent="-342900">
+              <a:buFont typeface="Arial" panose="020B0604020202020204" pitchFamily="34" charset="0"/>
+              <a:buChar char="•"/>
+            </a:pPr>
+            <a:r>
+              <a:rPr lang="ru-RU" sz="2200" dirty="0"/>
+              <a:t>Разместили проект на сервере</a:t>
+            </a:r>
+            <a:endParaRPr lang="ru-RU" sz="2200" b="1" dirty="0"/>
+          </a:p>
+          <a:p>
+            <a:pPr marL="342900" indent="-342900">
+              <a:buFont typeface="Arial" panose="020B0604020202020204" pitchFamily="34" charset="0"/>
+              <a:buChar char="•"/>
+            </a:pPr>
+            <a:r>
+              <a:rPr lang="ru-RU" sz="2200" dirty="0"/>
+              <a:t>Перешли на новый </a:t>
+            </a:r>
+            <a:r>
+              <a:rPr lang="ru-RU" sz="2200" dirty="0" err="1"/>
+              <a:t>датасет</a:t>
+            </a:r>
+            <a:r>
+              <a:rPr lang="ru-RU" sz="2200" dirty="0"/>
+              <a:t> и сбалансировали его</a:t>
+            </a:r>
+          </a:p>
+          <a:p>
+            <a:pPr marL="342900" indent="-342900">
+              <a:buFont typeface="Arial" panose="020B0604020202020204" pitchFamily="34" charset="0"/>
+              <a:buChar char="•"/>
+            </a:pPr>
+            <a:r>
+              <a:rPr lang="ru-RU" sz="2200" dirty="0"/>
+              <a:t>Переобучили модель на новом </a:t>
+            </a:r>
+            <a:r>
+              <a:rPr lang="ru-RU" sz="2200" dirty="0" err="1"/>
+              <a:t>датасете</a:t>
+            </a:r>
+            <a:r>
+              <a:rPr lang="ru-RU" sz="2200" dirty="0"/>
+              <a:t> </a:t>
+            </a:r>
+          </a:p>
+          <a:p>
+            <a:pPr marL="342900" indent="-342900">
+              <a:buFont typeface="Arial" panose="020B0604020202020204" pitchFamily="34" charset="0"/>
+              <a:buChar char="•"/>
+            </a:pPr>
+            <a:r>
+              <a:rPr lang="ru-RU" sz="2200" dirty="0"/>
+              <a:t>Провели тестирование модели</a:t>
+            </a:r>
+          </a:p>
+          <a:p>
+            <a:r>
+              <a:rPr lang="ru-RU" sz="2200" b="1" dirty="0"/>
+              <a:t>С какими трудностями столкнулись:</a:t>
+            </a:r>
+          </a:p>
+          <a:p>
+            <a:pPr marL="342900" indent="-342900">
+              <a:buFont typeface="Arial" panose="020B0604020202020204" pitchFamily="34" charset="0"/>
+              <a:buChar char="•"/>
+            </a:pPr>
+            <a:r>
+              <a:rPr lang="ru-RU" sz="2200" dirty="0"/>
+              <a:t>Модель выдает подозрительный результат на популярные сайты по типу </a:t>
+            </a:r>
+            <a:r>
+              <a:rPr lang="en-US" sz="2200" dirty="0"/>
+              <a:t>google.com</a:t>
+            </a:r>
+            <a:endParaRPr lang="ru-RU" sz="2200" dirty="0"/>
+          </a:p>
+          <a:p>
+            <a:r>
+              <a:rPr lang="ru-RU" sz="2200" b="1" dirty="0"/>
+              <a:t>Результат:</a:t>
+            </a:r>
+          </a:p>
+          <a:p>
+            <a:pPr marL="342900" indent="-342900">
+              <a:buFont typeface="Arial" panose="020B0604020202020204" pitchFamily="34" charset="0"/>
+              <a:buChar char="•"/>
+            </a:pPr>
+            <a:r>
+              <a:rPr lang="ru-RU" sz="2200" dirty="0"/>
+              <a:t>Сайт доступен 24/7</a:t>
+            </a:r>
+          </a:p>
+          <a:p>
+            <a:pPr marL="342900" indent="-342900">
+              <a:buFont typeface="Arial" panose="020B0604020202020204" pitchFamily="34" charset="0"/>
+              <a:buChar char="•"/>
+            </a:pPr>
+            <a:r>
+              <a:rPr lang="ru-RU" sz="2200" dirty="0"/>
+              <a:t>Модель стала немного точнее</a:t>
+            </a:r>
+          </a:p>
+          <a:p>
+            <a:endParaRPr lang="ru-RU" sz="2200" dirty="0"/>
+          </a:p>
+        </p:txBody>
+      </p:sp>
+    </p:spTree>
+    <p:extLst>
+      <p:ext uri="{BB962C8B-B14F-4D97-AF65-F5344CB8AC3E}">
+        <p14:creationId xmlns:p14="http://schemas.microsoft.com/office/powerpoint/2010/main" val="3769101858"/>
+      </p:ext>
+    </p:extLst>
+  </p:cSld>
+  <p:clrMapOvr>
+    <a:masterClrMapping/>
+  </p:clrMapOvr>
+</p:sld>
+</file>
+
+<file path=ppt/slides/slide27.xml><?xml version="1.0" encoding="utf-8"?>
+<p:sld xmlns:a="http://schemas.openxmlformats.org/drawingml/2006/main" xmlns:r="http://schemas.openxmlformats.org/officeDocument/2006/relationships" xmlns:p="http://schemas.openxmlformats.org/presentationml/2006/main">
+  <p:cSld>
+    <p:spTree>
+      <p:nvGrpSpPr>
+        <p:cNvPr id="1" name=""/>
+        <p:cNvGrpSpPr/>
+        <p:nvPr/>
+      </p:nvGrpSpPr>
+      <p:grpSpPr>
+        <a:xfrm>
+          <a:off x="0" y="0"/>
+          <a:ext cx="0" cy="0"/>
+          <a:chOff x="0" y="0"/>
+          <a:chExt cx="0" cy="0"/>
+        </a:xfrm>
+      </p:grpSpPr>
+      <p:sp>
+        <p:nvSpPr>
+          <p:cNvPr id="3" name="Slide Number Placeholder 2">
+            <a:extLst>
+              <a:ext uri="{FF2B5EF4-FFF2-40B4-BE49-F238E27FC236}">
+                <a16:creationId xmlns:a16="http://schemas.microsoft.com/office/drawing/2014/main" id="{370AEC4F-E711-8552-9C34-82C1514A1E37}"/>
+              </a:ext>
+            </a:extLst>
+          </p:cNvPr>
+          <p:cNvSpPr>
+            <a:spLocks noGrp="1"/>
+          </p:cNvSpPr>
+          <p:nvPr>
+            <p:ph type="sldNum" sz="quarter" idx="10"/>
+          </p:nvPr>
+        </p:nvSpPr>
+        <p:spPr>
+          <a:xfrm>
+            <a:off x="10438475" y="457199"/>
+            <a:ext cx="987552" cy="471489"/>
+          </a:xfrm>
+        </p:spPr>
+        <p:txBody>
+          <a:bodyPr/>
+          <a:lstStyle/>
+          <a:p>
+            <a:fld id="{48F63A3B-78C7-47BE-AE5E-E10140E04643}" type="slidenum">
+              <a:rPr lang="en-US" smtClean="0"/>
+              <a:pPr/>
+              <a:t>27</a:t>
+            </a:fld>
+            <a:endParaRPr lang="en-US" dirty="0"/>
+          </a:p>
+        </p:txBody>
+      </p:sp>
+      <p:sp>
+        <p:nvSpPr>
+          <p:cNvPr id="4" name="Content Placeholder 3">
+            <a:extLst>
+              <a:ext uri="{FF2B5EF4-FFF2-40B4-BE49-F238E27FC236}">
+                <a16:creationId xmlns:a16="http://schemas.microsoft.com/office/drawing/2014/main" id="{BDDD6BDC-E008-6AB7-55A1-46ED9BCF054F}"/>
+              </a:ext>
+            </a:extLst>
+          </p:cNvPr>
+          <p:cNvSpPr>
+            <a:spLocks noGrp="1"/>
+          </p:cNvSpPr>
+          <p:nvPr>
+            <p:ph idx="11"/>
+          </p:nvPr>
+        </p:nvSpPr>
+        <p:spPr>
+          <a:xfrm>
+            <a:off x="4382409" y="734377"/>
+            <a:ext cx="7043618" cy="4519612"/>
+          </a:xfrm>
+        </p:spPr>
+        <p:txBody>
+          <a:bodyPr>
+            <a:normAutofit/>
+          </a:bodyPr>
+          <a:lstStyle/>
+          <a:p>
+            <a:r>
+              <a:rPr lang="ru-RU" sz="2200" b="1" dirty="0"/>
+              <a:t>Спринт 4: </a:t>
+            </a:r>
+          </a:p>
+          <a:p>
+            <a:r>
+              <a:rPr lang="ru-RU" sz="2200" b="1" dirty="0"/>
+              <a:t>Что сделано:</a:t>
+            </a:r>
+          </a:p>
+          <a:p>
+            <a:pPr marL="342900" indent="-342900">
+              <a:buFont typeface="Arial" panose="020B0604020202020204" pitchFamily="34" charset="0"/>
+              <a:buChar char="•"/>
+            </a:pPr>
+            <a:r>
+              <a:rPr lang="ru-RU" sz="2200" dirty="0"/>
+              <a:t>Исправили проблему с выдачей подозрительных результатов </a:t>
+            </a:r>
+          </a:p>
+          <a:p>
+            <a:pPr marL="342900" indent="-342900">
+              <a:buFont typeface="Arial" panose="020B0604020202020204" pitchFamily="34" charset="0"/>
+              <a:buChar char="•"/>
+            </a:pPr>
+            <a:r>
+              <a:rPr lang="ru-RU" sz="2200" dirty="0"/>
+              <a:t>Добавили в </a:t>
+            </a:r>
+            <a:r>
+              <a:rPr lang="ru-RU" sz="2200" dirty="0" err="1"/>
+              <a:t>датасет</a:t>
+            </a:r>
+            <a:r>
+              <a:rPr lang="ru-RU" sz="2200" dirty="0"/>
+              <a:t> больше признаков</a:t>
+            </a:r>
+          </a:p>
+          <a:p>
+            <a:pPr marL="342900" indent="-342900">
+              <a:buFont typeface="Arial" panose="020B0604020202020204" pitchFamily="34" charset="0"/>
+              <a:buChar char="•"/>
+            </a:pPr>
+            <a:r>
+              <a:rPr lang="ru-RU" sz="2200" dirty="0"/>
+              <a:t>Переобучили модель</a:t>
+            </a:r>
+          </a:p>
+          <a:p>
+            <a:pPr marL="342900" indent="-342900">
+              <a:buFont typeface="Arial" panose="020B0604020202020204" pitchFamily="34" charset="0"/>
+              <a:buChar char="•"/>
+            </a:pPr>
+            <a:r>
+              <a:rPr lang="ru-RU" sz="2200" dirty="0"/>
+              <a:t>Подготовили презентацию проекта</a:t>
+            </a:r>
+          </a:p>
+          <a:p>
+            <a:r>
+              <a:rPr lang="ru-RU" sz="2200" b="1" dirty="0"/>
+              <a:t>С какими трудностями столкнулись:</a:t>
+            </a:r>
+          </a:p>
+          <a:p>
+            <a:pPr marL="342900" indent="-342900">
+              <a:buFont typeface="Arial" panose="020B0604020202020204" pitchFamily="34" charset="0"/>
+              <a:buChar char="•"/>
+            </a:pPr>
+            <a:r>
+              <a:rPr lang="ru-RU" sz="2200" dirty="0"/>
+              <a:t>Недоделаны сайт и презентация</a:t>
+            </a:r>
+          </a:p>
+          <a:p>
+            <a:r>
+              <a:rPr lang="ru-RU" sz="2200" b="1" dirty="0"/>
+              <a:t>Результат:</a:t>
+            </a:r>
+          </a:p>
+          <a:p>
+            <a:pPr marL="342900" indent="-342900">
+              <a:buFont typeface="Arial" panose="020B0604020202020204" pitchFamily="34" charset="0"/>
+              <a:buChar char="•"/>
+            </a:pPr>
+            <a:r>
+              <a:rPr lang="ru-RU" sz="2200" dirty="0"/>
+              <a:t>Модель стала выдавать более точные результаты</a:t>
+            </a:r>
+          </a:p>
+          <a:p>
+            <a:endParaRPr lang="ru-RU" sz="2200" dirty="0"/>
+          </a:p>
+        </p:txBody>
+      </p:sp>
+    </p:spTree>
+    <p:extLst>
+      <p:ext uri="{BB962C8B-B14F-4D97-AF65-F5344CB8AC3E}">
+        <p14:creationId xmlns:p14="http://schemas.microsoft.com/office/powerpoint/2010/main" val="2597081296"/>
+      </p:ext>
+    </p:extLst>
+  </p:cSld>
+  <p:clrMapOvr>
+    <a:masterClrMapping/>
+  </p:clrMapOvr>
+</p:sld>
+</file>
+
+<file path=ppt/slides/slide28.xml><?xml version="1.0" encoding="utf-8"?>
+<p:sld xmlns:a="http://schemas.openxmlformats.org/drawingml/2006/main" xmlns:r="http://schemas.openxmlformats.org/officeDocument/2006/relationships" xmlns:p="http://schemas.openxmlformats.org/presentationml/2006/main">
+  <p:cSld>
+    <p:spTree>
+      <p:nvGrpSpPr>
+        <p:cNvPr id="1" name=""/>
+        <p:cNvGrpSpPr/>
+        <p:nvPr/>
+      </p:nvGrpSpPr>
+      <p:grpSpPr>
+        <a:xfrm>
+          <a:off x="0" y="0"/>
+          <a:ext cx="0" cy="0"/>
+          <a:chOff x="0" y="0"/>
+          <a:chExt cx="0" cy="0"/>
+        </a:xfrm>
+      </p:grpSpPr>
+      <p:sp>
+        <p:nvSpPr>
+          <p:cNvPr id="3" name="Slide Number Placeholder 2">
+            <a:extLst>
+              <a:ext uri="{FF2B5EF4-FFF2-40B4-BE49-F238E27FC236}">
+                <a16:creationId xmlns:a16="http://schemas.microsoft.com/office/drawing/2014/main" id="{370AEC4F-E711-8552-9C34-82C1514A1E37}"/>
+              </a:ext>
+            </a:extLst>
+          </p:cNvPr>
+          <p:cNvSpPr>
+            <a:spLocks noGrp="1"/>
+          </p:cNvSpPr>
+          <p:nvPr>
+            <p:ph type="sldNum" sz="quarter" idx="10"/>
+          </p:nvPr>
+        </p:nvSpPr>
+        <p:spPr>
+          <a:xfrm>
+            <a:off x="10438475" y="457199"/>
+            <a:ext cx="987552" cy="471489"/>
+          </a:xfrm>
+        </p:spPr>
+        <p:txBody>
+          <a:bodyPr/>
+          <a:lstStyle/>
+          <a:p>
+            <a:fld id="{48F63A3B-78C7-47BE-AE5E-E10140E04643}" type="slidenum">
+              <a:rPr lang="en-US" smtClean="0"/>
+              <a:pPr/>
+              <a:t>28</a:t>
+            </a:fld>
+            <a:endParaRPr lang="en-US" dirty="0"/>
+          </a:p>
+        </p:txBody>
+      </p:sp>
+      <p:sp>
+        <p:nvSpPr>
+          <p:cNvPr id="4" name="Content Placeholder 3">
+            <a:extLst>
+              <a:ext uri="{FF2B5EF4-FFF2-40B4-BE49-F238E27FC236}">
+                <a16:creationId xmlns:a16="http://schemas.microsoft.com/office/drawing/2014/main" id="{BDDD6BDC-E008-6AB7-55A1-46ED9BCF054F}"/>
+              </a:ext>
+            </a:extLst>
+          </p:cNvPr>
+          <p:cNvSpPr>
+            <a:spLocks noGrp="1"/>
+          </p:cNvSpPr>
+          <p:nvPr>
+            <p:ph idx="11"/>
+          </p:nvPr>
+        </p:nvSpPr>
+        <p:spPr>
+          <a:xfrm>
+            <a:off x="4364808" y="692943"/>
+            <a:ext cx="7043618" cy="4519612"/>
+          </a:xfrm>
+        </p:spPr>
+        <p:txBody>
+          <a:bodyPr>
+            <a:normAutofit/>
+          </a:bodyPr>
+          <a:lstStyle/>
+          <a:p>
+            <a:r>
+              <a:rPr lang="ru-RU" sz="2200" b="1" dirty="0"/>
+              <a:t>Спринт 5: </a:t>
+            </a:r>
+          </a:p>
+          <a:p>
+            <a:r>
+              <a:rPr lang="ru-RU" sz="2200" b="1" dirty="0"/>
+              <a:t>Что сделано:</a:t>
+            </a:r>
+          </a:p>
+          <a:p>
+            <a:pPr marL="342900" indent="-342900">
+              <a:buFont typeface="Arial" panose="020B0604020202020204" pitchFamily="34" charset="0"/>
+              <a:buChar char="•"/>
+            </a:pPr>
+            <a:r>
+              <a:rPr lang="ru-RU" sz="2200" dirty="0"/>
+              <a:t>Доработали сайт</a:t>
+            </a:r>
+          </a:p>
+          <a:p>
+            <a:pPr marL="342900" indent="-342900">
+              <a:buFont typeface="Arial" panose="020B0604020202020204" pitchFamily="34" charset="0"/>
+              <a:buChar char="•"/>
+            </a:pPr>
+            <a:r>
+              <a:rPr lang="ru-RU" sz="2200" dirty="0"/>
+              <a:t>Доработали презентацию проекта</a:t>
+            </a:r>
+          </a:p>
+          <a:p>
+            <a:r>
+              <a:rPr lang="ru-RU" sz="2200" b="1" dirty="0"/>
+              <a:t>Результат:</a:t>
+            </a:r>
+          </a:p>
+          <a:p>
+            <a:pPr marL="342900" indent="-342900">
+              <a:buFont typeface="Arial" panose="020B0604020202020204" pitchFamily="34" charset="0"/>
+              <a:buChar char="•"/>
+            </a:pPr>
+            <a:r>
+              <a:rPr lang="ru-RU" sz="2200" dirty="0"/>
+              <a:t>Мы готовы презентовать наш проект</a:t>
+            </a:r>
+          </a:p>
+          <a:p>
+            <a:pPr marL="342900" indent="-342900">
+              <a:buFont typeface="Arial" panose="020B0604020202020204" pitchFamily="34" charset="0"/>
+              <a:buChar char="•"/>
+            </a:pPr>
+            <a:endParaRPr lang="ru-RU" sz="2200" dirty="0"/>
+          </a:p>
+        </p:txBody>
+      </p:sp>
+    </p:spTree>
+    <p:extLst>
+      <p:ext uri="{BB962C8B-B14F-4D97-AF65-F5344CB8AC3E}">
+        <p14:creationId xmlns:p14="http://schemas.microsoft.com/office/powerpoint/2010/main" val="2354483361"/>
+      </p:ext>
+    </p:extLst>
+  </p:cSld>
+  <p:clrMapOvr>
+    <a:masterClrMapping/>
+  </p:clrMapOvr>
+</p:sld>
+</file>
+
+<file path=ppt/slides/slide29.xml><?xml version="1.0" encoding="utf-8"?>
 <p:sld xmlns:a="http://schemas.openxmlformats.org/drawingml/2006/main" xmlns:r="http://schemas.openxmlformats.org/officeDocument/2006/relationships" xmlns:p="http://schemas.openxmlformats.org/presentationml/2006/main">
   <p:cSld>
     <p:spTree>
@@ -23124,7 +25956,7 @@
             <a:fld id="{48F63A3B-78C7-47BE-AE5E-E10140E04643}" type="slidenum">
               <a:rPr lang="en-US" smtClean="0"/>
               <a:pPr/>
-              <a:t>21</a:t>
+              <a:t>29</a:t>
             </a:fld>
             <a:endParaRPr lang="en-US" dirty="0"/>
           </a:p>
@@ -23183,8 +26015,12 @@
               <a:buChar char="o"/>
             </a:pPr>
             <a:r>
+              <a:rPr lang="ru-RU" dirty="0" err="1"/>
+              <a:t>Извлечени</a:t>
+            </a:r>
+            <a:r>
               <a:rPr lang="ru-RU" dirty="0"/>
-              <a:t>Извлечение значимых признаков из «сырых» доменных имён.</a:t>
+              <a:t> значимых признаков из «сырых» доменных имён.</a:t>
             </a:r>
           </a:p>
           <a:p>
@@ -23252,132 +26088,6 @@
     <p:extLst>
       <p:ext uri="{BB962C8B-B14F-4D97-AF65-F5344CB8AC3E}">
         <p14:creationId xmlns:p14="http://schemas.microsoft.com/office/powerpoint/2010/main" val="2526199008"/>
-      </p:ext>
-    </p:extLst>
-  </p:cSld>
-  <p:clrMapOvr>
-    <a:masterClrMapping/>
-  </p:clrMapOvr>
-</p:sld>
-</file>
-
-<file path=ppt/slides/slide22.xml><?xml version="1.0" encoding="utf-8"?>
-<p:sld xmlns:a="http://schemas.openxmlformats.org/drawingml/2006/main" xmlns:r="http://schemas.openxmlformats.org/officeDocument/2006/relationships" xmlns:p="http://schemas.openxmlformats.org/presentationml/2006/main">
-  <p:cSld>
-    <p:spTree>
-      <p:nvGrpSpPr>
-        <p:cNvPr id="1" name=""/>
-        <p:cNvGrpSpPr/>
-        <p:nvPr/>
-      </p:nvGrpSpPr>
-      <p:grpSpPr>
-        <a:xfrm>
-          <a:off x="0" y="0"/>
-          <a:ext cx="0" cy="0"/>
-          <a:chOff x="0" y="0"/>
-          <a:chExt cx="0" cy="0"/>
-        </a:xfrm>
-      </p:grpSpPr>
-      <p:sp>
-        <p:nvSpPr>
-          <p:cNvPr id="2" name="Title 1">
-            <a:extLst>
-              <a:ext uri="{FF2B5EF4-FFF2-40B4-BE49-F238E27FC236}">
-                <a16:creationId xmlns:a16="http://schemas.microsoft.com/office/drawing/2014/main" id="{509D22C5-0C9E-B582-A8FE-B45E70A01E7F}"/>
-              </a:ext>
-            </a:extLst>
-          </p:cNvPr>
-          <p:cNvSpPr>
-            <a:spLocks noGrp="1"/>
-          </p:cNvSpPr>
-          <p:nvPr>
-            <p:ph type="ctrTitle"/>
-          </p:nvPr>
-        </p:nvSpPr>
-        <p:spPr>
-          <a:xfrm>
-            <a:off x="914401" y="849783"/>
-            <a:ext cx="5715000" cy="2579218"/>
-          </a:xfrm>
-        </p:spPr>
-        <p:txBody>
-          <a:bodyPr/>
-          <a:lstStyle/>
-          <a:p>
-            <a:r>
-              <a:rPr lang="ru-RU" dirty="0"/>
-              <a:t>ссылки</a:t>
-            </a:r>
-            <a:endParaRPr lang="en-US" dirty="0"/>
-          </a:p>
-        </p:txBody>
-      </p:sp>
-      <p:sp>
-        <p:nvSpPr>
-          <p:cNvPr id="3" name="Subtitle 2">
-            <a:extLst>
-              <a:ext uri="{FF2B5EF4-FFF2-40B4-BE49-F238E27FC236}">
-                <a16:creationId xmlns:a16="http://schemas.microsoft.com/office/drawing/2014/main" id="{D8B5CEF2-E667-BBB5-2EA6-C06F93B6DE12}"/>
-              </a:ext>
-            </a:extLst>
-          </p:cNvPr>
-          <p:cNvSpPr>
-            <a:spLocks noGrp="1"/>
-          </p:cNvSpPr>
-          <p:nvPr>
-            <p:ph type="subTitle" idx="1"/>
-          </p:nvPr>
-        </p:nvSpPr>
-        <p:spPr>
-          <a:xfrm>
-            <a:off x="914401" y="3813606"/>
-            <a:ext cx="5715000" cy="2234642"/>
-          </a:xfrm>
-        </p:spPr>
-        <p:txBody>
-          <a:bodyPr/>
-          <a:lstStyle/>
-          <a:p>
-            <a:pPr marL="342900" indent="-342900">
-              <a:buFont typeface="Arial" panose="020B0604020202020204" pitchFamily="34" charset="0"/>
-              <a:buChar char="•"/>
-            </a:pPr>
-            <a:r>
-              <a:rPr lang="en-US" dirty="0"/>
-              <a:t>GitHub:</a:t>
-            </a:r>
-          </a:p>
-          <a:p>
-            <a:r>
-              <a:rPr lang="en-US" dirty="0">
-                <a:hlinkClick r:id="rId3"/>
-              </a:rPr>
-              <a:t>https://github.com/andreyilych/cs2valvesoftware</a:t>
-            </a:r>
-            <a:endParaRPr lang="en-US" dirty="0"/>
-          </a:p>
-          <a:p>
-            <a:pPr marL="342900" indent="-342900">
-              <a:buFont typeface="Arial" panose="020B0604020202020204" pitchFamily="34" charset="0"/>
-              <a:buChar char="•"/>
-            </a:pPr>
-            <a:r>
-              <a:rPr lang="ru-RU" dirty="0"/>
-              <a:t>Сайт:</a:t>
-            </a:r>
-          </a:p>
-          <a:p>
-            <a:r>
-              <a:rPr lang="en-US" dirty="0"/>
-              <a:t>http://79.174.85.57/</a:t>
-            </a:r>
-          </a:p>
-        </p:txBody>
-      </p:sp>
-    </p:spTree>
-    <p:extLst>
-      <p:ext uri="{BB962C8B-B14F-4D97-AF65-F5344CB8AC3E}">
-        <p14:creationId xmlns:p14="http://schemas.microsoft.com/office/powerpoint/2010/main" val="1973173046"/>
       </p:ext>
     </p:extLst>
   </p:cSld>
@@ -23512,6 +26222,132 @@
     <p:extLst>
       <p:ext uri="{BB962C8B-B14F-4D97-AF65-F5344CB8AC3E}">
         <p14:creationId xmlns:p14="http://schemas.microsoft.com/office/powerpoint/2010/main" val="3742881928"/>
+      </p:ext>
+    </p:extLst>
+  </p:cSld>
+  <p:clrMapOvr>
+    <a:masterClrMapping/>
+  </p:clrMapOvr>
+</p:sld>
+</file>
+
+<file path=ppt/slides/slide30.xml><?xml version="1.0" encoding="utf-8"?>
+<p:sld xmlns:a="http://schemas.openxmlformats.org/drawingml/2006/main" xmlns:r="http://schemas.openxmlformats.org/officeDocument/2006/relationships" xmlns:p="http://schemas.openxmlformats.org/presentationml/2006/main">
+  <p:cSld>
+    <p:spTree>
+      <p:nvGrpSpPr>
+        <p:cNvPr id="1" name=""/>
+        <p:cNvGrpSpPr/>
+        <p:nvPr/>
+      </p:nvGrpSpPr>
+      <p:grpSpPr>
+        <a:xfrm>
+          <a:off x="0" y="0"/>
+          <a:ext cx="0" cy="0"/>
+          <a:chOff x="0" y="0"/>
+          <a:chExt cx="0" cy="0"/>
+        </a:xfrm>
+      </p:grpSpPr>
+      <p:sp>
+        <p:nvSpPr>
+          <p:cNvPr id="2" name="Title 1">
+            <a:extLst>
+              <a:ext uri="{FF2B5EF4-FFF2-40B4-BE49-F238E27FC236}">
+                <a16:creationId xmlns:a16="http://schemas.microsoft.com/office/drawing/2014/main" id="{509D22C5-0C9E-B582-A8FE-B45E70A01E7F}"/>
+              </a:ext>
+            </a:extLst>
+          </p:cNvPr>
+          <p:cNvSpPr>
+            <a:spLocks noGrp="1"/>
+          </p:cNvSpPr>
+          <p:nvPr>
+            <p:ph type="ctrTitle"/>
+          </p:nvPr>
+        </p:nvSpPr>
+        <p:spPr>
+          <a:xfrm>
+            <a:off x="914401" y="849783"/>
+            <a:ext cx="5715000" cy="2579218"/>
+          </a:xfrm>
+        </p:spPr>
+        <p:txBody>
+          <a:bodyPr/>
+          <a:lstStyle/>
+          <a:p>
+            <a:r>
+              <a:rPr lang="ru-RU" dirty="0"/>
+              <a:t>ссылки</a:t>
+            </a:r>
+            <a:endParaRPr lang="en-US" dirty="0"/>
+          </a:p>
+        </p:txBody>
+      </p:sp>
+      <p:sp>
+        <p:nvSpPr>
+          <p:cNvPr id="3" name="Subtitle 2">
+            <a:extLst>
+              <a:ext uri="{FF2B5EF4-FFF2-40B4-BE49-F238E27FC236}">
+                <a16:creationId xmlns:a16="http://schemas.microsoft.com/office/drawing/2014/main" id="{D8B5CEF2-E667-BBB5-2EA6-C06F93B6DE12}"/>
+              </a:ext>
+            </a:extLst>
+          </p:cNvPr>
+          <p:cNvSpPr>
+            <a:spLocks noGrp="1"/>
+          </p:cNvSpPr>
+          <p:nvPr>
+            <p:ph type="subTitle" idx="1"/>
+          </p:nvPr>
+        </p:nvSpPr>
+        <p:spPr>
+          <a:xfrm>
+            <a:off x="914401" y="3813606"/>
+            <a:ext cx="5715000" cy="2234642"/>
+          </a:xfrm>
+        </p:spPr>
+        <p:txBody>
+          <a:bodyPr/>
+          <a:lstStyle/>
+          <a:p>
+            <a:pPr marL="342900" indent="-342900">
+              <a:buFont typeface="Arial" panose="020B0604020202020204" pitchFamily="34" charset="0"/>
+              <a:buChar char="•"/>
+            </a:pPr>
+            <a:r>
+              <a:rPr lang="en-US" dirty="0"/>
+              <a:t>GitHub:</a:t>
+            </a:r>
+          </a:p>
+          <a:p>
+            <a:r>
+              <a:rPr lang="en-US" dirty="0">
+                <a:hlinkClick r:id="rId3"/>
+              </a:rPr>
+              <a:t>https://github.com/andreyilych/cs2valvesoftware</a:t>
+            </a:r>
+            <a:endParaRPr lang="en-US" dirty="0"/>
+          </a:p>
+          <a:p>
+            <a:pPr marL="342900" indent="-342900">
+              <a:buFont typeface="Arial" panose="020B0604020202020204" pitchFamily="34" charset="0"/>
+              <a:buChar char="•"/>
+            </a:pPr>
+            <a:r>
+              <a:rPr lang="ru-RU" dirty="0"/>
+              <a:t>Сайт:</a:t>
+            </a:r>
+          </a:p>
+          <a:p>
+            <a:r>
+              <a:rPr lang="en-US" dirty="0"/>
+              <a:t>http://79.174.85.57/</a:t>
+            </a:r>
+          </a:p>
+        </p:txBody>
+      </p:sp>
+    </p:spTree>
+    <p:extLst>
+      <p:ext uri="{BB962C8B-B14F-4D97-AF65-F5344CB8AC3E}">
+        <p14:creationId xmlns:p14="http://schemas.microsoft.com/office/powerpoint/2010/main" val="1973173046"/>
       </p:ext>
     </p:extLst>
   </p:cSld>
@@ -24164,7 +27000,7 @@
             </a:r>
             <a:r>
               <a:rPr lang="ru-RU" dirty="0"/>
-              <a:t>) - разработчик презентации, визуализатор данных, дизайнер сайта (ответственный за презентацию)</a:t>
+              <a:t>) - визуализатор данных, разработчик презентации, дизайнер сайта (ответственный за презентацию)</a:t>
             </a:r>
             <a:endParaRPr lang="en-US" dirty="0"/>
           </a:p>
@@ -24243,8 +27079,8 @@
         </p:nvSpPr>
         <p:spPr>
           <a:xfrm>
-            <a:off x="836446" y="3634390"/>
-            <a:ext cx="5259554" cy="2495028"/>
+            <a:off x="836446" y="649194"/>
+            <a:ext cx="5259554" cy="5970392"/>
           </a:xfrm>
         </p:spPr>
         <p:txBody>
@@ -24261,7 +27097,7 @@
             </a:r>
             <a:r>
               <a:rPr lang="ru-RU" dirty="0"/>
-              <a:t>) - ассистент разработчика презентации, презентатор, оратор (демонстрирует продукт и его работу)</a:t>
+              <a:t>) – тестировщик, ассистент разработчика презентации, презентатор (демонстрирует продукт и его работу)</a:t>
             </a:r>
             <a:endParaRPr lang="en-US" dirty="0"/>
           </a:p>

--- a/анализатор подозрительности доменных имен (DNS).pptx
+++ b/анализатор подозрительности доменных имен (DNS).pptx
@@ -26339,7 +26339,7 @@
           <a:p>
             <a:r>
               <a:rPr lang="en-US" dirty="0"/>
-              <a:t>http://79.174.85.57/</a:t>
+              <a:t>http://130.49.149.249/</a:t>
             </a:r>
           </a:p>
         </p:txBody>

--- a/анализатор подозрительности доменных имен (DNS).pptx
+++ b/анализатор подозрительности доменных имен (DNS).pptx
@@ -30,8 +30,8 @@
     <p:sldId id="327" r:id="rId21"/>
     <p:sldId id="317" r:id="rId22"/>
     <p:sldId id="335" r:id="rId23"/>
-    <p:sldId id="334" r:id="rId24"/>
-    <p:sldId id="318" r:id="rId25"/>
+    <p:sldId id="318" r:id="rId24"/>
+    <p:sldId id="334" r:id="rId25"/>
     <p:sldId id="331" r:id="rId26"/>
     <p:sldId id="321" r:id="rId27"/>
     <p:sldId id="333" r:id="rId28"/>
@@ -506,10 +506,10 @@
                 <c:formatCode>0.00%</c:formatCode>
                 <c:ptCount val="2"/>
                 <c:pt idx="0">
-                  <c:v>0.30499999999999999</c:v>
+                  <c:v>0.5</c:v>
                 </c:pt>
                 <c:pt idx="1">
-                  <c:v>0.69499999999999995</c:v>
+                  <c:v>0.5</c:v>
                 </c:pt>
               </c:numCache>
             </c:numRef>
@@ -2514,7 +2514,7 @@
     </p:spTree>
     <p:extLst>
       <p:ext uri="{BB962C8B-B14F-4D97-AF65-F5344CB8AC3E}">
-        <p14:creationId xmlns:p14="http://schemas.microsoft.com/office/powerpoint/2010/main" val="1535697532"/>
+        <p14:creationId xmlns:p14="http://schemas.microsoft.com/office/powerpoint/2010/main" val="984541709"/>
       </p:ext>
     </p:extLst>
   </p:cSld>
@@ -2597,7 +2597,7 @@
     </p:spTree>
     <p:extLst>
       <p:ext uri="{BB962C8B-B14F-4D97-AF65-F5344CB8AC3E}">
-        <p14:creationId xmlns:p14="http://schemas.microsoft.com/office/powerpoint/2010/main" val="984541709"/>
+        <p14:creationId xmlns:p14="http://schemas.microsoft.com/office/powerpoint/2010/main" val="1535697532"/>
       </p:ext>
     </p:extLst>
   </p:cSld>
@@ -20602,7 +20602,7 @@
             </a:r>
             <a:r>
               <a:rPr lang="ru-RU" sz="2400" dirty="0"/>
-              <a:t>160081 </a:t>
+              <a:t>97766 </a:t>
             </a:r>
             <a:r>
               <a:rPr lang="en-US" sz="2400" dirty="0"/>
@@ -20670,7 +20670,7 @@
           <p:nvPr>
             <p:extLst>
               <p:ext uri="{D42A27DB-BD31-4B8C-83A1-F6EECF244321}">
-                <p14:modId xmlns:p14="http://schemas.microsoft.com/office/powerpoint/2010/main" val="4278331152"/>
+                <p14:modId xmlns:p14="http://schemas.microsoft.com/office/powerpoint/2010/main" val="1859881290"/>
               </p:ext>
             </p:extLst>
           </p:nvPr>
@@ -20767,8 +20767,8 @@
                     <a:lstStyle/>
                     <a:p>
                       <a:r>
-                        <a:rPr lang="ru-RU" sz="1800" dirty="0"/>
-                        <a:t>160081</a:t>
+                        <a:rPr lang="ru-RU" dirty="0"/>
+                        <a:t>97766</a:t>
                       </a:r>
                       <a:endParaRPr lang="en-US" dirty="0"/>
                     </a:p>
@@ -20782,7 +20782,7 @@
                     <a:p>
                       <a:r>
                         <a:rPr lang="ru-RU" dirty="0"/>
-                        <a:t>48875</a:t>
+                        <a:t>48883</a:t>
                       </a:r>
                       <a:endParaRPr lang="en-US" dirty="0"/>
                     </a:p>
@@ -20796,7 +20796,7 @@
                     <a:p>
                       <a:r>
                         <a:rPr lang="ru-RU" dirty="0"/>
-                        <a:t>111206</a:t>
+                        <a:t>48883</a:t>
                       </a:r>
                       <a:endParaRPr lang="en-US" dirty="0"/>
                     </a:p>
@@ -20826,7 +20826,7 @@
           <p:nvPr>
             <p:extLst>
               <p:ext uri="{D42A27DB-BD31-4B8C-83A1-F6EECF244321}">
-                <p14:modId xmlns:p14="http://schemas.microsoft.com/office/powerpoint/2010/main" val="2374776442"/>
+                <p14:modId xmlns:p14="http://schemas.microsoft.com/office/powerpoint/2010/main" val="4256202486"/>
               </p:ext>
             </p:extLst>
           </p:nvPr>
@@ -20949,7 +20949,7 @@
             </a:br>
             <a:r>
               <a:rPr lang="ru-RU" sz="2200" dirty="0"/>
-              <a:t>Более 450 000 реальных URL из разных источников покрывают широкий спектр фишинговых и легитимных паттернов, а также 25?? признаков.</a:t>
+              <a:t>Более 450 000 реальных URL из разных источников покрывают широкий спектр фишинговых и легитимных паттернов.</a:t>
             </a:r>
           </a:p>
           <a:p>
@@ -20979,35 +20979,6 @@
             <a:r>
               <a:rPr lang="ru-RU" sz="2200" dirty="0"/>
               <a:t>, что сократило время предобработки и позволило сосредоточиться на обучении модели.</a:t>
-            </a:r>
-          </a:p>
-          <a:p>
-            <a:r>
-              <a:rPr lang="ru-RU" sz="2200" b="1" dirty="0"/>
-              <a:t>Сбалансированность классов</a:t>
-            </a:r>
-            <a:br>
-              <a:rPr lang="ru-RU" sz="2200" dirty="0"/>
-            </a:br>
-            <a:r>
-              <a:rPr lang="ru-RU" sz="2200" dirty="0"/>
-              <a:t>Изначально близкое к равному распределение </a:t>
-            </a:r>
-            <a:r>
-              <a:rPr lang="ru-RU" sz="2200" dirty="0" err="1"/>
-              <a:t>phishing</a:t>
-            </a:r>
-            <a:r>
-              <a:rPr lang="ru-RU" sz="2200" dirty="0"/>
-              <a:t>/</a:t>
-            </a:r>
-            <a:r>
-              <a:rPr lang="ru-RU" sz="2200" dirty="0" err="1"/>
-              <a:t>legitimate</a:t>
-            </a:r>
-            <a:r>
-              <a:rPr lang="ru-RU" sz="2200" dirty="0"/>
-              <a:t> обеспечило устойчивость модели без дополнительной балансировки на ранних этапах.</a:t>
             </a:r>
           </a:p>
           <a:p>
@@ -23768,6 +23739,255 @@
           <p:cNvPr id="3" name="Title 2">
             <a:extLst>
               <a:ext uri="{FF2B5EF4-FFF2-40B4-BE49-F238E27FC236}">
+                <a16:creationId xmlns:a16="http://schemas.microsoft.com/office/drawing/2014/main" id="{9443EC8A-1733-CCF7-081F-EB4667CB3285}"/>
+              </a:ext>
+            </a:extLst>
+          </p:cNvPr>
+          <p:cNvSpPr>
+            <a:spLocks noGrp="1"/>
+          </p:cNvSpPr>
+          <p:nvPr>
+            <p:ph type="title"/>
+          </p:nvPr>
+        </p:nvSpPr>
+        <p:spPr>
+          <a:xfrm>
+            <a:off x="914400" y="1057274"/>
+            <a:ext cx="7843837" cy="1012782"/>
+          </a:xfrm>
+        </p:spPr>
+        <p:txBody>
+          <a:bodyPr/>
+          <a:lstStyle/>
+          <a:p>
+            <a:r>
+              <a:rPr lang="ru-RU" dirty="0"/>
+              <a:t>Почему C# и ML.NET</a:t>
+            </a:r>
+            <a:endParaRPr lang="en-US" dirty="0"/>
+          </a:p>
+        </p:txBody>
+      </p:sp>
+      <p:sp>
+        <p:nvSpPr>
+          <p:cNvPr id="4" name="Content Placeholder 3">
+            <a:extLst>
+              <a:ext uri="{FF2B5EF4-FFF2-40B4-BE49-F238E27FC236}">
+                <a16:creationId xmlns:a16="http://schemas.microsoft.com/office/drawing/2014/main" id="{ACE55D3D-AA24-CF53-6679-29B3C83F7646}"/>
+              </a:ext>
+            </a:extLst>
+          </p:cNvPr>
+          <p:cNvSpPr>
+            <a:spLocks noGrp="1"/>
+          </p:cNvSpPr>
+          <p:nvPr>
+            <p:ph idx="13"/>
+          </p:nvPr>
+        </p:nvSpPr>
+        <p:spPr>
+          <a:xfrm>
+            <a:off x="914400" y="2331791"/>
+            <a:ext cx="6903076" cy="4108766"/>
+          </a:xfrm>
+        </p:spPr>
+        <p:txBody>
+          <a:bodyPr>
+            <a:normAutofit fontScale="92500" lnSpcReduction="10000"/>
+          </a:bodyPr>
+          <a:lstStyle/>
+          <a:p>
+            <a:pPr marL="342900" indent="-342900">
+              <a:buFont typeface="Arial" panose="020B0604020202020204" pitchFamily="34" charset="0"/>
+              <a:buChar char="•"/>
+            </a:pPr>
+            <a:r>
+              <a:rPr lang="ru-RU" dirty="0"/>
+              <a:t>Отсутствие Python‑зависимостей, не требуется интерпретатор.</a:t>
+            </a:r>
+          </a:p>
+          <a:p>
+            <a:pPr marL="342900" indent="-342900">
+              <a:buFont typeface="Arial" panose="020B0604020202020204" pitchFamily="34" charset="0"/>
+              <a:buChar char="•"/>
+            </a:pPr>
+            <a:endParaRPr lang="ru-RU" dirty="0"/>
+          </a:p>
+          <a:p>
+            <a:pPr marL="342900" indent="-342900">
+              <a:buFont typeface="Arial" panose="020B0604020202020204" pitchFamily="34" charset="0"/>
+              <a:buChar char="•"/>
+            </a:pPr>
+            <a:r>
+              <a:rPr lang="ru-RU" dirty="0"/>
+              <a:t>Бесшовная интеграция с ASP.NET Core – модель загружается один раз при старте сервера.</a:t>
+            </a:r>
+          </a:p>
+          <a:p>
+            <a:pPr marL="342900" indent="-342900">
+              <a:buFont typeface="Arial" panose="020B0604020202020204" pitchFamily="34" charset="0"/>
+              <a:buChar char="•"/>
+            </a:pPr>
+            <a:endParaRPr lang="ru-RU" dirty="0"/>
+          </a:p>
+          <a:p>
+            <a:pPr marL="342900" indent="-342900">
+              <a:buFont typeface="Arial" panose="020B0604020202020204" pitchFamily="34" charset="0"/>
+              <a:buChar char="•"/>
+            </a:pPr>
+            <a:r>
+              <a:rPr lang="ru-RU" dirty="0"/>
+              <a:t>Высокая производительность: нативное выполнение, быстрый </a:t>
+            </a:r>
+            <a:r>
+              <a:rPr lang="ru-RU" dirty="0" err="1"/>
+              <a:t>инференс</a:t>
+            </a:r>
+            <a:r>
+              <a:rPr lang="ru-RU" dirty="0"/>
+              <a:t>.</a:t>
+            </a:r>
+          </a:p>
+          <a:p>
+            <a:pPr marL="342900" indent="-342900">
+              <a:buFont typeface="Arial" panose="020B0604020202020204" pitchFamily="34" charset="0"/>
+              <a:buChar char="•"/>
+            </a:pPr>
+            <a:endParaRPr lang="ru-RU" dirty="0"/>
+          </a:p>
+          <a:p>
+            <a:pPr marL="342900" indent="-342900">
+              <a:buFont typeface="Arial" panose="020B0604020202020204" pitchFamily="34" charset="0"/>
+              <a:buChar char="•"/>
+            </a:pPr>
+            <a:r>
+              <a:rPr lang="ru-RU" dirty="0"/>
+              <a:t>Кроссплатформенность, контейнеризация через </a:t>
+            </a:r>
+            <a:r>
+              <a:rPr lang="ru-RU" dirty="0" err="1"/>
+              <a:t>Docker</a:t>
+            </a:r>
+            <a:r>
+              <a:rPr lang="ru-RU" dirty="0"/>
+              <a:t> без лишних слоёв.</a:t>
+            </a:r>
+          </a:p>
+          <a:p>
+            <a:pPr marL="342900" indent="-342900">
+              <a:buFont typeface="Arial" panose="020B0604020202020204" pitchFamily="34" charset="0"/>
+              <a:buChar char="•"/>
+            </a:pPr>
+            <a:endParaRPr lang="ru-RU" dirty="0"/>
+          </a:p>
+          <a:p>
+            <a:pPr marL="342900" indent="-342900">
+              <a:buFont typeface="Arial" panose="020B0604020202020204" pitchFamily="34" charset="0"/>
+              <a:buChar char="•"/>
+            </a:pPr>
+            <a:r>
+              <a:rPr lang="ru-RU" dirty="0"/>
+              <a:t>Модель – просто </a:t>
+            </a:r>
+            <a:r>
+              <a:rPr lang="ru-RU" dirty="0" err="1"/>
+              <a:t>zip</a:t>
+            </a:r>
+            <a:r>
+              <a:rPr lang="ru-RU" dirty="0"/>
+              <a:t>‑архив, легко обновляется.</a:t>
+            </a:r>
+            <a:endParaRPr lang="en-US" dirty="0"/>
+          </a:p>
+        </p:txBody>
+      </p:sp>
+      <p:sp>
+        <p:nvSpPr>
+          <p:cNvPr id="2" name="Slide Number Placeholder 1">
+            <a:extLst>
+              <a:ext uri="{FF2B5EF4-FFF2-40B4-BE49-F238E27FC236}">
+                <a16:creationId xmlns:a16="http://schemas.microsoft.com/office/drawing/2014/main" id="{AB69D854-FB65-0E93-CFE2-041F7C41DD24}"/>
+              </a:ext>
+            </a:extLst>
+          </p:cNvPr>
+          <p:cNvSpPr>
+            <a:spLocks noGrp="1"/>
+          </p:cNvSpPr>
+          <p:nvPr>
+            <p:ph type="sldNum" sz="quarter" idx="10"/>
+          </p:nvPr>
+        </p:nvSpPr>
+        <p:spPr>
+          <a:xfrm>
+            <a:off x="10438475" y="457199"/>
+            <a:ext cx="987552" cy="471489"/>
+          </a:xfrm>
+        </p:spPr>
+        <p:txBody>
+          <a:bodyPr/>
+          <a:lstStyle/>
+          <a:p>
+            <a:fld id="{48F63A3B-78C7-47BE-AE5E-E10140E04643}" type="slidenum">
+              <a:rPr lang="en-US" smtClean="0"/>
+              <a:pPr/>
+              <a:t>20</a:t>
+            </a:fld>
+            <a:endParaRPr lang="en-US" dirty="0"/>
+          </a:p>
+        </p:txBody>
+      </p:sp>
+      <p:sp>
+        <p:nvSpPr>
+          <p:cNvPr id="6" name="Рисунок 5">
+            <a:extLst>
+              <a:ext uri="{FF2B5EF4-FFF2-40B4-BE49-F238E27FC236}">
+                <a16:creationId xmlns:a16="http://schemas.microsoft.com/office/drawing/2014/main" id="{BF4B158C-A2A1-4EE2-B7CC-3152E45AB33B}"/>
+              </a:ext>
+            </a:extLst>
+          </p:cNvPr>
+          <p:cNvSpPr>
+            <a:spLocks noGrp="1"/>
+          </p:cNvSpPr>
+          <p:nvPr>
+            <p:ph type="pic" sz="quarter" idx="14"/>
+          </p:nvPr>
+        </p:nvSpPr>
+        <p:spPr/>
+      </p:sp>
+    </p:spTree>
+    <p:extLst>
+      <p:ext uri="{BB962C8B-B14F-4D97-AF65-F5344CB8AC3E}">
+        <p14:creationId xmlns:p14="http://schemas.microsoft.com/office/powerpoint/2010/main" val="4072101725"/>
+      </p:ext>
+    </p:extLst>
+  </p:cSld>
+  <p:clrMapOvr>
+    <a:masterClrMapping/>
+  </p:clrMapOvr>
+</p:sld>
+</file>
+
+<file path=ppt/slides/slide21.xml><?xml version="1.0" encoding="utf-8"?>
+<p:sld xmlns:a="http://schemas.openxmlformats.org/drawingml/2006/main" xmlns:r="http://schemas.openxmlformats.org/officeDocument/2006/relationships" xmlns:p="http://schemas.openxmlformats.org/presentationml/2006/main">
+  <p:cSld>
+    <p:spTree>
+      <p:nvGrpSpPr>
+        <p:cNvPr id="1" name=""/>
+        <p:cNvGrpSpPr/>
+        <p:nvPr/>
+      </p:nvGrpSpPr>
+      <p:grpSpPr>
+        <a:xfrm>
+          <a:off x="0" y="0"/>
+          <a:ext cx="0" cy="0"/>
+          <a:chOff x="0" y="0"/>
+          <a:chExt cx="0" cy="0"/>
+        </a:xfrm>
+      </p:grpSpPr>
+      <p:sp>
+        <p:nvSpPr>
+          <p:cNvPr id="3" name="Title 2">
+            <a:extLst>
+              <a:ext uri="{FF2B5EF4-FFF2-40B4-BE49-F238E27FC236}">
                 <a16:creationId xmlns:a16="http://schemas.microsoft.com/office/drawing/2014/main" id="{3D55F2D4-C20E-BEBC-1CCF-4449B0456A7E}"/>
               </a:ext>
             </a:extLst>
@@ -23864,7 +24084,7 @@
             <a:fld id="{48F63A3B-78C7-47BE-AE5E-E10140E04643}" type="slidenum">
               <a:rPr lang="en-US" smtClean="0"/>
               <a:pPr/>
-              <a:t>20</a:t>
+              <a:t>21</a:t>
             </a:fld>
             <a:endParaRPr lang="en-US" dirty="0"/>
           </a:p>
@@ -24146,255 +24366,6 @@
 </p:sld>
 </file>
 
-<file path=ppt/slides/slide21.xml><?xml version="1.0" encoding="utf-8"?>
-<p:sld xmlns:a="http://schemas.openxmlformats.org/drawingml/2006/main" xmlns:r="http://schemas.openxmlformats.org/officeDocument/2006/relationships" xmlns:p="http://schemas.openxmlformats.org/presentationml/2006/main">
-  <p:cSld>
-    <p:spTree>
-      <p:nvGrpSpPr>
-        <p:cNvPr id="1" name=""/>
-        <p:cNvGrpSpPr/>
-        <p:nvPr/>
-      </p:nvGrpSpPr>
-      <p:grpSpPr>
-        <a:xfrm>
-          <a:off x="0" y="0"/>
-          <a:ext cx="0" cy="0"/>
-          <a:chOff x="0" y="0"/>
-          <a:chExt cx="0" cy="0"/>
-        </a:xfrm>
-      </p:grpSpPr>
-      <p:sp>
-        <p:nvSpPr>
-          <p:cNvPr id="3" name="Title 2">
-            <a:extLst>
-              <a:ext uri="{FF2B5EF4-FFF2-40B4-BE49-F238E27FC236}">
-                <a16:creationId xmlns:a16="http://schemas.microsoft.com/office/drawing/2014/main" id="{9443EC8A-1733-CCF7-081F-EB4667CB3285}"/>
-              </a:ext>
-            </a:extLst>
-          </p:cNvPr>
-          <p:cNvSpPr>
-            <a:spLocks noGrp="1"/>
-          </p:cNvSpPr>
-          <p:nvPr>
-            <p:ph type="title"/>
-          </p:nvPr>
-        </p:nvSpPr>
-        <p:spPr>
-          <a:xfrm>
-            <a:off x="914400" y="1057274"/>
-            <a:ext cx="7843837" cy="1012782"/>
-          </a:xfrm>
-        </p:spPr>
-        <p:txBody>
-          <a:bodyPr/>
-          <a:lstStyle/>
-          <a:p>
-            <a:r>
-              <a:rPr lang="ru-RU" dirty="0"/>
-              <a:t>Почему C# и ML.NET</a:t>
-            </a:r>
-            <a:endParaRPr lang="en-US" dirty="0"/>
-          </a:p>
-        </p:txBody>
-      </p:sp>
-      <p:sp>
-        <p:nvSpPr>
-          <p:cNvPr id="4" name="Content Placeholder 3">
-            <a:extLst>
-              <a:ext uri="{FF2B5EF4-FFF2-40B4-BE49-F238E27FC236}">
-                <a16:creationId xmlns:a16="http://schemas.microsoft.com/office/drawing/2014/main" id="{ACE55D3D-AA24-CF53-6679-29B3C83F7646}"/>
-              </a:ext>
-            </a:extLst>
-          </p:cNvPr>
-          <p:cNvSpPr>
-            <a:spLocks noGrp="1"/>
-          </p:cNvSpPr>
-          <p:nvPr>
-            <p:ph idx="13"/>
-          </p:nvPr>
-        </p:nvSpPr>
-        <p:spPr>
-          <a:xfrm>
-            <a:off x="914400" y="2331791"/>
-            <a:ext cx="6903076" cy="4108766"/>
-          </a:xfrm>
-        </p:spPr>
-        <p:txBody>
-          <a:bodyPr>
-            <a:normAutofit fontScale="92500" lnSpcReduction="10000"/>
-          </a:bodyPr>
-          <a:lstStyle/>
-          <a:p>
-            <a:pPr marL="342900" indent="-342900">
-              <a:buFont typeface="Arial" panose="020B0604020202020204" pitchFamily="34" charset="0"/>
-              <a:buChar char="•"/>
-            </a:pPr>
-            <a:r>
-              <a:rPr lang="ru-RU" dirty="0"/>
-              <a:t>Отсутствие Python‑зависимостей, не требуется интерпретатор.</a:t>
-            </a:r>
-          </a:p>
-          <a:p>
-            <a:pPr marL="342900" indent="-342900">
-              <a:buFont typeface="Arial" panose="020B0604020202020204" pitchFamily="34" charset="0"/>
-              <a:buChar char="•"/>
-            </a:pPr>
-            <a:endParaRPr lang="ru-RU" dirty="0"/>
-          </a:p>
-          <a:p>
-            <a:pPr marL="342900" indent="-342900">
-              <a:buFont typeface="Arial" panose="020B0604020202020204" pitchFamily="34" charset="0"/>
-              <a:buChar char="•"/>
-            </a:pPr>
-            <a:r>
-              <a:rPr lang="ru-RU" dirty="0"/>
-              <a:t>Бесшовная интеграция с ASP.NET Core – модель загружается один раз при старте сервера.</a:t>
-            </a:r>
-          </a:p>
-          <a:p>
-            <a:pPr marL="342900" indent="-342900">
-              <a:buFont typeface="Arial" panose="020B0604020202020204" pitchFamily="34" charset="0"/>
-              <a:buChar char="•"/>
-            </a:pPr>
-            <a:endParaRPr lang="ru-RU" dirty="0"/>
-          </a:p>
-          <a:p>
-            <a:pPr marL="342900" indent="-342900">
-              <a:buFont typeface="Arial" panose="020B0604020202020204" pitchFamily="34" charset="0"/>
-              <a:buChar char="•"/>
-            </a:pPr>
-            <a:r>
-              <a:rPr lang="ru-RU" dirty="0"/>
-              <a:t>Высокая производительность: нативное выполнение, быстрый </a:t>
-            </a:r>
-            <a:r>
-              <a:rPr lang="ru-RU" dirty="0" err="1"/>
-              <a:t>инференс</a:t>
-            </a:r>
-            <a:r>
-              <a:rPr lang="ru-RU" dirty="0"/>
-              <a:t>.</a:t>
-            </a:r>
-          </a:p>
-          <a:p>
-            <a:pPr marL="342900" indent="-342900">
-              <a:buFont typeface="Arial" panose="020B0604020202020204" pitchFamily="34" charset="0"/>
-              <a:buChar char="•"/>
-            </a:pPr>
-            <a:endParaRPr lang="ru-RU" dirty="0"/>
-          </a:p>
-          <a:p>
-            <a:pPr marL="342900" indent="-342900">
-              <a:buFont typeface="Arial" panose="020B0604020202020204" pitchFamily="34" charset="0"/>
-              <a:buChar char="•"/>
-            </a:pPr>
-            <a:r>
-              <a:rPr lang="ru-RU" dirty="0"/>
-              <a:t>Кроссплатформенность, контейнеризация через </a:t>
-            </a:r>
-            <a:r>
-              <a:rPr lang="ru-RU" dirty="0" err="1"/>
-              <a:t>Docker</a:t>
-            </a:r>
-            <a:r>
-              <a:rPr lang="ru-RU" dirty="0"/>
-              <a:t> без лишних слоёв.</a:t>
-            </a:r>
-          </a:p>
-          <a:p>
-            <a:pPr marL="342900" indent="-342900">
-              <a:buFont typeface="Arial" panose="020B0604020202020204" pitchFamily="34" charset="0"/>
-              <a:buChar char="•"/>
-            </a:pPr>
-            <a:endParaRPr lang="ru-RU" dirty="0"/>
-          </a:p>
-          <a:p>
-            <a:pPr marL="342900" indent="-342900">
-              <a:buFont typeface="Arial" panose="020B0604020202020204" pitchFamily="34" charset="0"/>
-              <a:buChar char="•"/>
-            </a:pPr>
-            <a:r>
-              <a:rPr lang="ru-RU" dirty="0"/>
-              <a:t>Модель – просто </a:t>
-            </a:r>
-            <a:r>
-              <a:rPr lang="ru-RU" dirty="0" err="1"/>
-              <a:t>zip</a:t>
-            </a:r>
-            <a:r>
-              <a:rPr lang="ru-RU" dirty="0"/>
-              <a:t>‑архив, легко обновляется.</a:t>
-            </a:r>
-            <a:endParaRPr lang="en-US" dirty="0"/>
-          </a:p>
-        </p:txBody>
-      </p:sp>
-      <p:sp>
-        <p:nvSpPr>
-          <p:cNvPr id="2" name="Slide Number Placeholder 1">
-            <a:extLst>
-              <a:ext uri="{FF2B5EF4-FFF2-40B4-BE49-F238E27FC236}">
-                <a16:creationId xmlns:a16="http://schemas.microsoft.com/office/drawing/2014/main" id="{AB69D854-FB65-0E93-CFE2-041F7C41DD24}"/>
-              </a:ext>
-            </a:extLst>
-          </p:cNvPr>
-          <p:cNvSpPr>
-            <a:spLocks noGrp="1"/>
-          </p:cNvSpPr>
-          <p:nvPr>
-            <p:ph type="sldNum" sz="quarter" idx="10"/>
-          </p:nvPr>
-        </p:nvSpPr>
-        <p:spPr>
-          <a:xfrm>
-            <a:off x="10438475" y="457199"/>
-            <a:ext cx="987552" cy="471489"/>
-          </a:xfrm>
-        </p:spPr>
-        <p:txBody>
-          <a:bodyPr/>
-          <a:lstStyle/>
-          <a:p>
-            <a:fld id="{48F63A3B-78C7-47BE-AE5E-E10140E04643}" type="slidenum">
-              <a:rPr lang="en-US" smtClean="0"/>
-              <a:pPr/>
-              <a:t>21</a:t>
-            </a:fld>
-            <a:endParaRPr lang="en-US" dirty="0"/>
-          </a:p>
-        </p:txBody>
-      </p:sp>
-      <p:sp>
-        <p:nvSpPr>
-          <p:cNvPr id="6" name="Рисунок 5">
-            <a:extLst>
-              <a:ext uri="{FF2B5EF4-FFF2-40B4-BE49-F238E27FC236}">
-                <a16:creationId xmlns:a16="http://schemas.microsoft.com/office/drawing/2014/main" id="{BF4B158C-A2A1-4EE2-B7CC-3152E45AB33B}"/>
-              </a:ext>
-            </a:extLst>
-          </p:cNvPr>
-          <p:cNvSpPr>
-            <a:spLocks noGrp="1"/>
-          </p:cNvSpPr>
-          <p:nvPr>
-            <p:ph type="pic" sz="quarter" idx="14"/>
-          </p:nvPr>
-        </p:nvSpPr>
-        <p:spPr/>
-      </p:sp>
-    </p:spTree>
-    <p:extLst>
-      <p:ext uri="{BB962C8B-B14F-4D97-AF65-F5344CB8AC3E}">
-        <p14:creationId xmlns:p14="http://schemas.microsoft.com/office/powerpoint/2010/main" val="4072101725"/>
-      </p:ext>
-    </p:extLst>
-  </p:cSld>
-  <p:clrMapOvr>
-    <a:masterClrMapping/>
-  </p:clrMapOvr>
-</p:sld>
-</file>
-
 <file path=ppt/slides/slide22.xml><?xml version="1.0" encoding="utf-8"?>
 <p:sld xmlns:a="http://schemas.openxmlformats.org/drawingml/2006/main" xmlns:r="http://schemas.openxmlformats.org/officeDocument/2006/relationships" xmlns:p="http://schemas.openxmlformats.org/presentationml/2006/main">
   <p:cSld>
@@ -26015,12 +25986,8 @@
               <a:buChar char="o"/>
             </a:pPr>
             <a:r>
-              <a:rPr lang="ru-RU" dirty="0" err="1"/>
-              <a:t>Извлечени</a:t>
-            </a:r>
-            <a:r>
               <a:rPr lang="ru-RU" dirty="0"/>
-              <a:t> значимых признаков из «сырых» доменных имён.</a:t>
+              <a:t>Извлечение значимых признаков из «сырых» доменных имён.</a:t>
             </a:r>
           </a:p>
           <a:p>
@@ -26073,8 +26040,8 @@
               <a:t>Команда научилась эффективно разделять зоны ответственности и координировать работу через </a:t>
             </a:r>
             <a:r>
-              <a:rPr lang="ru-RU" dirty="0" err="1"/>
-              <a:t>GitHub</a:t>
+              <a:rPr lang="en-US" dirty="0" err="1"/>
+              <a:t>Yougile</a:t>
             </a:r>
             <a:r>
               <a:rPr lang="ru-RU" dirty="0"/>
@@ -27000,7 +26967,15 @@
             </a:r>
             <a:r>
               <a:rPr lang="ru-RU" dirty="0"/>
-              <a:t>) - визуализатор данных, разработчик презентации, дизайнер сайта (ответственный за презентацию)</a:t>
+              <a:t>) - визуализатор данных, дизайнер сайта</a:t>
+            </a:r>
+            <a:r>
+              <a:rPr lang="en-US" dirty="0"/>
+              <a:t>, </a:t>
+            </a:r>
+            <a:r>
+              <a:rPr lang="ru-RU" dirty="0"/>
+              <a:t>разработчик презентации, (ответственный за презентацию)</a:t>
             </a:r>
             <a:endParaRPr lang="en-US" dirty="0"/>
           </a:p>

--- a/анализатор подозрительности доменных имен (DNS).pptx
+++ b/анализатор подозрительности доменных имен (DNS).pptx
@@ -24852,7 +24852,7 @@
         </p:spPr>
         <p:txBody>
           <a:bodyPr>
-            <a:normAutofit lnSpcReduction="10000"/>
+            <a:normAutofit/>
           </a:bodyPr>
           <a:lstStyle/>
           <a:p>
@@ -24913,25 +24913,6 @@
               <a:rPr lang="ru-RU" sz="2200" dirty="0"/>
               <a:t>Создание каркаса API</a:t>
             </a:r>
-          </a:p>
-          <a:p>
-            <a:pPr marL="342900" indent="-342900">
-              <a:buFont typeface="Arial" panose="020B0604020202020204" pitchFamily="34" charset="0"/>
-              <a:buChar char="•"/>
-            </a:pPr>
-            <a:r>
-              <a:rPr lang="ru-RU" sz="2200" dirty="0"/>
-              <a:t>Создание</a:t>
-            </a:r>
-            <a:r>
-              <a:rPr lang="en-US" sz="2200" dirty="0"/>
-              <a:t> GitHub</a:t>
-            </a:r>
-            <a:r>
-              <a:rPr lang="ru-RU" sz="2200" dirty="0"/>
-              <a:t> репозитория</a:t>
-            </a:r>
-            <a:endParaRPr lang="en-US" sz="2200" dirty="0"/>
           </a:p>
           <a:p>
             <a:pPr marL="342900" indent="-342900">
@@ -25113,8 +25094,8 @@
         </p:nvSpPr>
         <p:spPr>
           <a:xfrm>
-            <a:off x="4364808" y="711994"/>
-            <a:ext cx="7061219" cy="6146005"/>
+            <a:off x="3365500" y="457994"/>
+            <a:ext cx="8737600" cy="6400006"/>
           </a:xfrm>
         </p:spPr>
         <p:txBody>
@@ -25141,16 +25122,17 @@
             </a:pPr>
             <a:r>
               <a:rPr lang="ru-RU" sz="2200" dirty="0"/>
-              <a:t>Упаковали сервис в </a:t>
+              <a:t>Создание</a:t>
             </a:r>
             <a:r>
               <a:rPr lang="en-US" sz="2200" dirty="0"/>
-              <a:t>Docker</a:t>
+              <a:t> GitHub</a:t>
             </a:r>
             <a:r>
               <a:rPr lang="ru-RU" sz="2200" dirty="0"/>
-              <a:t>-контейнер</a:t>
-            </a:r>
+              <a:t> репозитория</a:t>
+            </a:r>
+            <a:endParaRPr lang="ru-RU" sz="2200" b="1" dirty="0"/>
           </a:p>
           <a:p>
             <a:pPr marL="342900" indent="-342900">
@@ -25159,21 +25141,16 @@
             </a:pPr>
             <a:r>
               <a:rPr lang="ru-RU" sz="2200" dirty="0"/>
-              <a:t>Начали разработку полноценного сайта, не </a:t>
+              <a:t>Упаковали сервис в </a:t>
             </a:r>
             <a:r>
               <a:rPr lang="en-US" sz="2200" dirty="0"/>
-              <a:t>“</a:t>
+              <a:t>Docker</a:t>
             </a:r>
             <a:r>
               <a:rPr lang="ru-RU" sz="2200" dirty="0"/>
-              <a:t>заглушки</a:t>
-            </a:r>
-            <a:r>
-              <a:rPr lang="en-US" sz="2200" dirty="0"/>
-              <a:t>”</a:t>
-            </a:r>
-            <a:endParaRPr lang="ru-RU" sz="2200" dirty="0"/>
+              <a:t>-контейнер</a:t>
+            </a:r>
           </a:p>
           <a:p>
             <a:pPr marL="342900" indent="-342900">
@@ -25182,7 +25159,7 @@
             </a:pPr>
             <a:r>
               <a:rPr lang="ru-RU" sz="2200" dirty="0"/>
-              <a:t>Отобразили в презентации то чего достигли в ходе работы над проектом</a:t>
+              <a:t>Разместили проект на сервере</a:t>
             </a:r>
           </a:p>
           <a:p>
@@ -25192,19 +25169,21 @@
             </a:pPr>
             <a:r>
               <a:rPr lang="ru-RU" sz="2200" dirty="0"/>
-              <a:t>Полностью организовали удобную работу с разделением ролей на </a:t>
+              <a:t>Начали разработку полноценного сайта, не </a:t>
             </a:r>
             <a:r>
               <a:rPr lang="en-US" sz="2200" dirty="0"/>
-              <a:t>GitHub</a:t>
+              <a:t>“</a:t>
+            </a:r>
+            <a:r>
+              <a:rPr lang="ru-RU" sz="2200" dirty="0"/>
+              <a:t>заглушки</a:t>
+            </a:r>
+            <a:r>
+              <a:rPr lang="en-US" sz="2200" dirty="0"/>
+              <a:t>”</a:t>
             </a:r>
             <a:endParaRPr lang="ru-RU" sz="2200" dirty="0"/>
-          </a:p>
-          <a:p>
-            <a:r>
-              <a:rPr lang="ru-RU" sz="2200" b="1" dirty="0"/>
-              <a:t>С какими трудностями столкнулись:</a:t>
-            </a:r>
           </a:p>
           <a:p>
             <a:pPr marL="342900" indent="-342900">
@@ -25213,7 +25192,7 @@
             </a:pPr>
             <a:r>
               <a:rPr lang="ru-RU" sz="2200" dirty="0"/>
-              <a:t>Столкнулись с тем что сервис принимал адреса с пробелами внутри себя за легитимные</a:t>
+              <a:t>Отобразили в презентации то чего достигли в ходе работы над проектом</a:t>
             </a:r>
           </a:p>
           <a:p>
@@ -25223,7 +25202,18 @@
             </a:pPr>
             <a:r>
               <a:rPr lang="ru-RU" sz="2200" dirty="0"/>
-              <a:t>Не высокий уровень точности модели</a:t>
+              <a:t>Полностью организовали удобную работу с разделением ролей на </a:t>
+            </a:r>
+            <a:r>
+              <a:rPr lang="en-US" sz="2200" dirty="0"/>
+              <a:t>GitHub</a:t>
+            </a:r>
+            <a:endParaRPr lang="ru-RU" sz="2200" dirty="0"/>
+          </a:p>
+          <a:p>
+            <a:r>
+              <a:rPr lang="ru-RU" sz="2200" b="1" dirty="0"/>
+              <a:t>С какими трудностями столкнулись:</a:t>
             </a:r>
           </a:p>
           <a:p>
@@ -25233,29 +25223,7 @@
             </a:pPr>
             <a:r>
               <a:rPr lang="ru-RU" sz="2200" dirty="0"/>
-              <a:t>После чистки </a:t>
-            </a:r>
-            <a:r>
-              <a:rPr lang="ru-RU" sz="2200" dirty="0" err="1"/>
-              <a:t>датасета</a:t>
-            </a:r>
-            <a:r>
-              <a:rPr lang="ru-RU" sz="2200" dirty="0"/>
-              <a:t> осталось </a:t>
-            </a:r>
-            <a:r>
-              <a:rPr lang="en-US" sz="2200" dirty="0"/>
-              <a:t>~</a:t>
-            </a:r>
-            <a:r>
-              <a:rPr lang="ru-RU" sz="2200" dirty="0"/>
-              <a:t>3000 строк</a:t>
-            </a:r>
-          </a:p>
-          <a:p>
-            <a:r>
-              <a:rPr lang="ru-RU" sz="2200" b="1" dirty="0"/>
-              <a:t>Результат:</a:t>
+              <a:t>Столкнулись с тем что сервис принимал адреса с пробелами внутри себя за легитимные</a:t>
             </a:r>
           </a:p>
           <a:p>
@@ -25265,6 +25233,48 @@
             </a:pPr>
             <a:r>
               <a:rPr lang="ru-RU" sz="2200" dirty="0"/>
+              <a:t>Не высокий уровень точности модели</a:t>
+            </a:r>
+          </a:p>
+          <a:p>
+            <a:pPr marL="342900" indent="-342900">
+              <a:buFont typeface="Arial" panose="020B0604020202020204" pitchFamily="34" charset="0"/>
+              <a:buChar char="•"/>
+            </a:pPr>
+            <a:r>
+              <a:rPr lang="ru-RU" sz="2200" dirty="0"/>
+              <a:t>После чистки </a:t>
+            </a:r>
+            <a:r>
+              <a:rPr lang="ru-RU" sz="2200" dirty="0" err="1"/>
+              <a:t>датасета</a:t>
+            </a:r>
+            <a:r>
+              <a:rPr lang="ru-RU" sz="2200" dirty="0"/>
+              <a:t> осталось </a:t>
+            </a:r>
+            <a:r>
+              <a:rPr lang="en-US" sz="2200" dirty="0"/>
+              <a:t>~</a:t>
+            </a:r>
+            <a:r>
+              <a:rPr lang="ru-RU" sz="2200" dirty="0"/>
+              <a:t>3000 строк</a:t>
+            </a:r>
+          </a:p>
+          <a:p>
+            <a:r>
+              <a:rPr lang="ru-RU" sz="2200" b="1" dirty="0"/>
+              <a:t>Результат:</a:t>
+            </a:r>
+          </a:p>
+          <a:p>
+            <a:pPr marL="342900" indent="-342900">
+              <a:buFont typeface="Arial" panose="020B0604020202020204" pitchFamily="34" charset="0"/>
+              <a:buChar char="•"/>
+            </a:pPr>
+            <a:r>
+              <a:rPr lang="ru-RU" sz="2200" dirty="0"/>
               <a:t>Функционирующий прототип в </a:t>
             </a:r>
             <a:r>
@@ -25280,6 +25290,16 @@
               <a:t>GitHub</a:t>
             </a:r>
             <a:endParaRPr lang="ru-RU" sz="2200" dirty="0"/>
+          </a:p>
+          <a:p>
+            <a:pPr marL="342900" indent="-342900">
+              <a:buFont typeface="Arial" panose="020B0604020202020204" pitchFamily="34" charset="0"/>
+              <a:buChar char="•"/>
+            </a:pPr>
+            <a:r>
+              <a:rPr lang="ru-RU" sz="2200" dirty="0"/>
+              <a:t>Сайт доступен 24/7</a:t>
+            </a:r>
           </a:p>
         </p:txBody>
       </p:sp>
@@ -25394,9 +25414,16 @@
             </a:pPr>
             <a:r>
               <a:rPr lang="ru-RU" sz="2200" dirty="0"/>
-              <a:t>Разместили проект на сервере</a:t>
-            </a:r>
-            <a:endParaRPr lang="ru-RU" sz="2200" b="1" dirty="0"/>
+              <a:t>Перешли на новый </a:t>
+            </a:r>
+            <a:r>
+              <a:rPr lang="ru-RU" sz="2200" dirty="0" err="1"/>
+              <a:t>датасет</a:t>
+            </a:r>
+            <a:r>
+              <a:rPr lang="ru-RU" sz="2200" dirty="0"/>
+              <a:t>, очистили его</a:t>
+            </a:r>
           </a:p>
           <a:p>
             <a:pPr marL="342900" indent="-342900">
@@ -25405,7 +25432,7 @@
             </a:pPr>
             <a:r>
               <a:rPr lang="ru-RU" sz="2200" dirty="0"/>
-              <a:t>Перешли на новый </a:t>
+              <a:t>Добавили в </a:t>
             </a:r>
             <a:r>
               <a:rPr lang="ru-RU" sz="2200" dirty="0" err="1"/>
@@ -25413,7 +25440,7 @@
             </a:r>
             <a:r>
               <a:rPr lang="ru-RU" sz="2200" dirty="0"/>
-              <a:t> и сбалансировали его</a:t>
+              <a:t> больше признаков</a:t>
             </a:r>
           </a:p>
           <a:p>
@@ -25478,17 +25505,7 @@
             </a:pPr>
             <a:r>
               <a:rPr lang="ru-RU" sz="2200" dirty="0"/>
-              <a:t>Сайт доступен 24/7</a:t>
-            </a:r>
-          </a:p>
-          <a:p>
-            <a:pPr marL="342900" indent="-342900">
-              <a:buFont typeface="Arial" panose="020B0604020202020204" pitchFamily="34" charset="0"/>
-              <a:buChar char="•"/>
-            </a:pPr>
-            <a:r>
-              <a:rPr lang="ru-RU" sz="2200" dirty="0"/>
-              <a:t>Модель стала немного точнее</a:t>
+              <a:t>Модель стала точнее</a:t>
             </a:r>
           </a:p>
           <a:p>
@@ -25607,8 +25624,13 @@
             </a:pPr>
             <a:r>
               <a:rPr lang="ru-RU" sz="2200" dirty="0"/>
-              <a:t>Исправили проблему с выдачей подозрительных результатов </a:t>
-            </a:r>
+              <a:t>Сбалансировали </a:t>
+            </a:r>
+            <a:r>
+              <a:rPr lang="ru-RU" sz="2200" dirty="0" err="1"/>
+              <a:t>датасет</a:t>
+            </a:r>
+            <a:endParaRPr lang="ru-RU" sz="2200" dirty="0"/>
           </a:p>
           <a:p>
             <a:pPr marL="342900" indent="-342900">
@@ -25617,15 +25639,7 @@
             </a:pPr>
             <a:r>
               <a:rPr lang="ru-RU" sz="2200" dirty="0"/>
-              <a:t>Добавили в </a:t>
-            </a:r>
-            <a:r>
-              <a:rPr lang="ru-RU" sz="2200" dirty="0" err="1"/>
-              <a:t>датасет</a:t>
-            </a:r>
-            <a:r>
-              <a:rPr lang="ru-RU" sz="2200" dirty="0"/>
-              <a:t> больше признаков</a:t>
+              <a:t>Исправили проблему с выдачей подозрительных результатов </a:t>
             </a:r>
           </a:p>
           <a:p>
@@ -26233,8 +26247,8 @@
         </p:nvSpPr>
         <p:spPr>
           <a:xfrm>
-            <a:off x="914401" y="849783"/>
-            <a:ext cx="5715000" cy="2579218"/>
+            <a:off x="914401" y="2025649"/>
+            <a:ext cx="5715000" cy="622301"/>
           </a:xfrm>
         </p:spPr>
         <p:txBody>
@@ -26267,8 +26281,8 @@
         </p:nvSpPr>
         <p:spPr>
           <a:xfrm>
-            <a:off x="914401" y="3813606"/>
-            <a:ext cx="5715000" cy="2234642"/>
+            <a:off x="914400" y="3032556"/>
+            <a:ext cx="6349999" cy="2234642"/>
           </a:xfrm>
         </p:spPr>
         <p:txBody>

--- a/анализатор подозрительности доменных имен (DNS).pptx
+++ b/анализатор подозрительности доменных имен (DNS).pptx
@@ -24,7 +24,7 @@
     <p:sldId id="337" r:id="rId15"/>
     <p:sldId id="322" r:id="rId16"/>
     <p:sldId id="338" r:id="rId17"/>
-    <p:sldId id="345" r:id="rId18"/>
+    <p:sldId id="346" r:id="rId18"/>
     <p:sldId id="329" r:id="rId19"/>
     <p:sldId id="319" r:id="rId20"/>
     <p:sldId id="327" r:id="rId21"/>
@@ -1933,7 +1933,7 @@
     </p:spTree>
     <p:extLst>
       <p:ext uri="{BB962C8B-B14F-4D97-AF65-F5344CB8AC3E}">
-        <p14:creationId xmlns:p14="http://schemas.microsoft.com/office/powerpoint/2010/main" val="396564960"/>
+        <p14:creationId xmlns:p14="http://schemas.microsoft.com/office/powerpoint/2010/main" val="181401505"/>
       </p:ext>
     </p:extLst>
   </p:cSld>
@@ -20949,7 +20949,15 @@
             </a:br>
             <a:r>
               <a:rPr lang="ru-RU" sz="2200" dirty="0"/>
-              <a:t>Более 450 000 реальных URL из разных источников покрывают широкий спектр фишинговых и легитимных паттернов.</a:t>
+              <a:t>Более 450 000 реальных </a:t>
+            </a:r>
+            <a:r>
+              <a:rPr lang="en-US" sz="2200" dirty="0"/>
+              <a:t>DNS</a:t>
+            </a:r>
+            <a:r>
+              <a:rPr lang="ru-RU" sz="2200" dirty="0"/>
+              <a:t> из разных источников покрывают широкий спектр фишинговых и легитимных паттернов.</a:t>
             </a:r>
           </a:p>
           <a:p>
@@ -21173,7 +21181,15 @@
           <a:p>
             <a:r>
               <a:rPr lang="ru-RU" sz="2200" dirty="0"/>
-              <a:t>Фишинговые URL: собраны из актуальных открытых баз угроз (</a:t>
+              <a:t>Фишинговые </a:t>
+            </a:r>
+            <a:r>
+              <a:rPr lang="en-US" sz="2200" dirty="0"/>
+              <a:t>DNS</a:t>
+            </a:r>
+            <a:r>
+              <a:rPr lang="ru-RU" sz="2200" dirty="0"/>
+              <a:t>: собраны из актуальных открытых баз угроз (</a:t>
             </a:r>
             <a:r>
               <a:rPr lang="ru-RU" sz="2200" dirty="0" err="1"/>
@@ -21203,7 +21219,15 @@
           <a:p>
             <a:r>
               <a:rPr lang="ru-RU" sz="2200" dirty="0"/>
-              <a:t>Легитимные URL: отобраны из авторитетных рейтингов и каталогов (</a:t>
+              <a:t>Легитимные </a:t>
+            </a:r>
+            <a:r>
+              <a:rPr lang="en-US" sz="2200" dirty="0"/>
+              <a:t>DNS</a:t>
+            </a:r>
+            <a:r>
+              <a:rPr lang="ru-RU" sz="2200" dirty="0"/>
+              <a:t>: отобраны из авторитетных рейтингов и каталогов (</a:t>
             </a:r>
             <a:r>
               <a:rPr lang="ru-RU" sz="2200" dirty="0" err="1"/>
@@ -21370,8 +21394,13 @@
             </a:pPr>
             <a:r>
               <a:rPr lang="ru-RU" sz="2200" b="1" dirty="0"/>
-              <a:t>Источники фишинговых URL</a:t>
-            </a:r>
+              <a:t>Источники фишинговых </a:t>
+            </a:r>
+            <a:r>
+              <a:rPr lang="en-US" sz="2200" b="1" dirty="0"/>
+              <a:t>DNS</a:t>
+            </a:r>
+            <a:endParaRPr lang="ru-RU" sz="2200" b="1" dirty="0"/>
           </a:p>
           <a:p>
             <a:pPr marL="0" indent="0">
@@ -21427,8 +21456,13 @@
             </a:pPr>
             <a:r>
               <a:rPr lang="ru-RU" sz="2200" b="1" dirty="0"/>
-              <a:t>Источники легитимных URL</a:t>
-            </a:r>
+              <a:t>Источники легитимных </a:t>
+            </a:r>
+            <a:r>
+              <a:rPr lang="en-US" sz="2200" b="1" dirty="0"/>
+              <a:t>DNS</a:t>
+            </a:r>
+            <a:endParaRPr lang="ru-RU" sz="2200" b="1" dirty="0"/>
           </a:p>
           <a:p>
             <a:pPr marL="0" indent="0">
@@ -21533,40 +21567,2521 @@
           </a:p>
         </p:txBody>
       </p:sp>
-      <p:pic>
-        <p:nvPicPr>
-          <p:cNvPr id="9" name="Рисунок 8">
+      <p:graphicFrame>
+        <p:nvGraphicFramePr>
+          <p:cNvPr id="2" name="Таблица 3">
             <a:extLst>
               <a:ext uri="{FF2B5EF4-FFF2-40B4-BE49-F238E27FC236}">
-                <a16:creationId xmlns:a16="http://schemas.microsoft.com/office/drawing/2014/main" id="{C644C23F-1519-42D0-B6F2-6E99D5E94522}"/>
+                <a16:creationId xmlns:a16="http://schemas.microsoft.com/office/drawing/2014/main" id="{FC75F37D-3FED-42B5-ABC9-C1E239885812}"/>
               </a:ext>
             </a:extLst>
           </p:cNvPr>
-          <p:cNvPicPr>
-            <a:picLocks noChangeAspect="1"/>
-          </p:cNvPicPr>
-          <p:nvPr/>
-        </p:nvPicPr>
-        <p:blipFill>
-          <a:blip r:embed="rId3"/>
-          <a:stretch>
-            <a:fillRect/>
-          </a:stretch>
-        </p:blipFill>
-        <p:spPr>
-          <a:xfrm>
-            <a:off x="1947791" y="0"/>
-            <a:ext cx="8296417" cy="6858000"/>
-          </a:xfrm>
-          <a:prstGeom prst="rect">
-            <a:avLst/>
-          </a:prstGeom>
-        </p:spPr>
-      </p:pic>
+          <p:cNvGraphicFramePr>
+            <a:graphicFrameLocks noGrp="1"/>
+          </p:cNvGraphicFramePr>
+          <p:nvPr>
+            <p:extLst>
+              <p:ext uri="{D42A27DB-BD31-4B8C-83A1-F6EECF244321}">
+                <p14:modId xmlns:p14="http://schemas.microsoft.com/office/powerpoint/2010/main" val="3235279169"/>
+              </p:ext>
+            </p:extLst>
+          </p:nvPr>
+        </p:nvGraphicFramePr>
+        <p:xfrm>
+          <a:off x="431800" y="0"/>
+          <a:ext cx="10693401" cy="6862812"/>
+        </p:xfrm>
+        <a:graphic>
+          <a:graphicData uri="http://schemas.openxmlformats.org/drawingml/2006/table">
+            <a:tbl>
+              <a:tblPr firstRow="1" bandRow="1">
+                <a:tableStyleId>{3B4B98B0-60AC-42C2-AFA5-B58CD77FA1E5}</a:tableStyleId>
+              </a:tblPr>
+              <a:tblGrid>
+                <a:gridCol w="3564467">
+                  <a:extLst>
+                    <a:ext uri="{9D8B030D-6E8A-4147-A177-3AD203B41FA5}">
+                      <a16:colId xmlns:a16="http://schemas.microsoft.com/office/drawing/2014/main" val="2051167510"/>
+                    </a:ext>
+                  </a:extLst>
+                </a:gridCol>
+                <a:gridCol w="3564467">
+                  <a:extLst>
+                    <a:ext uri="{9D8B030D-6E8A-4147-A177-3AD203B41FA5}">
+                      <a16:colId xmlns:a16="http://schemas.microsoft.com/office/drawing/2014/main" val="3351848418"/>
+                    </a:ext>
+                  </a:extLst>
+                </a:gridCol>
+                <a:gridCol w="3564467">
+                  <a:extLst>
+                    <a:ext uri="{9D8B030D-6E8A-4147-A177-3AD203B41FA5}">
+                      <a16:colId xmlns:a16="http://schemas.microsoft.com/office/drawing/2014/main" val="3317258678"/>
+                    </a:ext>
+                  </a:extLst>
+                </a:gridCol>
+              </a:tblGrid>
+              <a:tr h="355600">
+                <a:tc gridSpan="3">
+                  <a:txBody>
+                    <a:bodyPr/>
+                    <a:lstStyle/>
+                    <a:p>
+                      <a:pPr algn="ctr"/>
+                      <a:r>
+                        <a:rPr lang="ru-RU" dirty="0"/>
+                        <a:t>Признаки</a:t>
+                      </a:r>
+                    </a:p>
+                  </a:txBody>
+                  <a:tcPr>
+                    <a:lnL w="12700" cap="flat" cmpd="sng" algn="ctr">
+                      <a:solidFill>
+                        <a:schemeClr val="tx1"/>
+                      </a:solidFill>
+                      <a:prstDash val="solid"/>
+                      <a:round/>
+                      <a:headEnd type="none" w="med" len="med"/>
+                      <a:tailEnd type="none" w="med" len="med"/>
+                    </a:lnL>
+                    <a:lnR w="12700" cap="flat" cmpd="sng" algn="ctr">
+                      <a:solidFill>
+                        <a:schemeClr val="tx1"/>
+                      </a:solidFill>
+                      <a:prstDash val="solid"/>
+                      <a:round/>
+                      <a:headEnd type="none" w="med" len="med"/>
+                      <a:tailEnd type="none" w="med" len="med"/>
+                    </a:lnR>
+                    <a:lnT w="12700" cap="flat" cmpd="sng" algn="ctr">
+                      <a:solidFill>
+                        <a:schemeClr val="tx1"/>
+                      </a:solidFill>
+                      <a:prstDash val="solid"/>
+                      <a:round/>
+                      <a:headEnd type="none" w="med" len="med"/>
+                      <a:tailEnd type="none" w="med" len="med"/>
+                    </a:lnT>
+                    <a:lnB w="12700" cap="flat" cmpd="sng" algn="ctr">
+                      <a:solidFill>
+                        <a:schemeClr val="tx1"/>
+                      </a:solidFill>
+                      <a:prstDash val="solid"/>
+                      <a:round/>
+                      <a:headEnd type="none" w="med" len="med"/>
+                      <a:tailEnd type="none" w="med" len="med"/>
+                    </a:lnB>
+                  </a:tcPr>
+                </a:tc>
+                <a:tc hMerge="1">
+                  <a:txBody>
+                    <a:bodyPr/>
+                    <a:lstStyle/>
+                    <a:p>
+                      <a:endParaRPr lang="ru-RU" dirty="0"/>
+                    </a:p>
+                  </a:txBody>
+                  <a:tcPr/>
+                </a:tc>
+                <a:tc hMerge="1">
+                  <a:txBody>
+                    <a:bodyPr/>
+                    <a:lstStyle/>
+                    <a:p>
+                      <a:endParaRPr lang="ru-RU" dirty="0"/>
+                    </a:p>
+                  </a:txBody>
+                  <a:tcPr/>
+                </a:tc>
+                <a:extLst>
+                  <a:ext uri="{0D108BD9-81ED-4DB2-BD59-A6C34878D82A}">
+                    <a16:rowId xmlns:a16="http://schemas.microsoft.com/office/drawing/2014/main" val="3220114628"/>
+                  </a:ext>
+                </a:extLst>
+              </a:tr>
+              <a:tr h="631658">
+                <a:tc>
+                  <a:txBody>
+                    <a:bodyPr/>
+                    <a:lstStyle/>
+                    <a:p>
+                      <a:pPr marL="0" marR="0" lvl="0" indent="0" algn="ctr" defTabSz="914400" rtl="0" eaLnBrk="1" fontAlgn="auto" latinLnBrk="0" hangingPunct="1">
+                        <a:lnSpc>
+                          <a:spcPct val="100000"/>
+                        </a:lnSpc>
+                        <a:spcBef>
+                          <a:spcPts val="0"/>
+                        </a:spcBef>
+                        <a:spcAft>
+                          <a:spcPts val="0"/>
+                        </a:spcAft>
+                        <a:buClrTx/>
+                        <a:buSzTx/>
+                        <a:buFont typeface="Arial" panose="020B0604020202020204" pitchFamily="34" charset="0"/>
+                        <a:buNone/>
+                        <a:tabLst/>
+                        <a:defRPr/>
+                      </a:pPr>
+                      <a:r>
+                        <a:rPr lang="af-ZA" sz="1700" b="0" i="0" kern="1200" dirty="0">
+                          <a:solidFill>
+                            <a:schemeClr val="tx1"/>
+                          </a:solidFill>
+                          <a:effectLst/>
+                          <a:latin typeface="+mn-lt"/>
+                          <a:ea typeface="+mn-ea"/>
+                          <a:cs typeface="+mn-cs"/>
+                        </a:rPr>
+                        <a:t>Url – </a:t>
+                      </a:r>
+                      <a:r>
+                        <a:rPr lang="ru-RU" sz="1700" b="0" i="0" kern="1200" dirty="0">
+                          <a:solidFill>
+                            <a:schemeClr val="tx1"/>
+                          </a:solidFill>
+                          <a:effectLst/>
+                          <a:latin typeface="+mn-lt"/>
+                          <a:ea typeface="+mn-ea"/>
+                          <a:cs typeface="+mn-cs"/>
+                        </a:rPr>
+                        <a:t>исходная строка </a:t>
+                      </a:r>
+                      <a:r>
+                        <a:rPr lang="en-US" sz="1700" b="0" i="0" kern="1200" dirty="0">
+                          <a:solidFill>
+                            <a:schemeClr val="tx1"/>
+                          </a:solidFill>
+                          <a:effectLst/>
+                          <a:latin typeface="+mn-lt"/>
+                          <a:ea typeface="+mn-ea"/>
+                          <a:cs typeface="+mn-cs"/>
+                        </a:rPr>
+                        <a:t>DNS</a:t>
+                      </a:r>
+                      <a:endParaRPr lang="af-ZA" sz="1700" b="0" i="0" kern="1200" dirty="0">
+                        <a:solidFill>
+                          <a:schemeClr val="tx1"/>
+                        </a:solidFill>
+                        <a:effectLst/>
+                        <a:latin typeface="+mn-lt"/>
+                        <a:ea typeface="+mn-ea"/>
+                        <a:cs typeface="+mn-cs"/>
+                      </a:endParaRPr>
+                    </a:p>
+                  </a:txBody>
+                  <a:tcPr>
+                    <a:lnL w="12700" cap="flat" cmpd="sng" algn="ctr">
+                      <a:solidFill>
+                        <a:schemeClr val="tx1"/>
+                      </a:solidFill>
+                      <a:prstDash val="solid"/>
+                      <a:round/>
+                      <a:headEnd type="none" w="med" len="med"/>
+                      <a:tailEnd type="none" w="med" len="med"/>
+                    </a:lnL>
+                    <a:lnR w="12700" cap="flat" cmpd="sng" algn="ctr">
+                      <a:solidFill>
+                        <a:schemeClr val="tx1"/>
+                      </a:solidFill>
+                      <a:prstDash val="solid"/>
+                      <a:round/>
+                      <a:headEnd type="none" w="med" len="med"/>
+                      <a:tailEnd type="none" w="med" len="med"/>
+                    </a:lnR>
+                    <a:lnT w="12700" cap="flat" cmpd="sng" algn="ctr">
+                      <a:solidFill>
+                        <a:schemeClr val="tx1"/>
+                      </a:solidFill>
+                      <a:prstDash val="solid"/>
+                      <a:round/>
+                      <a:headEnd type="none" w="med" len="med"/>
+                      <a:tailEnd type="none" w="med" len="med"/>
+                    </a:lnT>
+                    <a:lnB w="12700" cap="flat" cmpd="sng" algn="ctr">
+                      <a:solidFill>
+                        <a:schemeClr val="tx1"/>
+                      </a:solidFill>
+                      <a:prstDash val="solid"/>
+                      <a:round/>
+                      <a:headEnd type="none" w="med" len="med"/>
+                      <a:tailEnd type="none" w="med" len="med"/>
+                    </a:lnB>
+                  </a:tcPr>
+                </a:tc>
+                <a:tc>
+                  <a:txBody>
+                    <a:bodyPr/>
+                    <a:lstStyle/>
+                    <a:p>
+                      <a:pPr marL="0" marR="0" lvl="0" indent="0" algn="ctr" defTabSz="914400" rtl="0" eaLnBrk="1" fontAlgn="auto" latinLnBrk="0" hangingPunct="1">
+                        <a:lnSpc>
+                          <a:spcPct val="100000"/>
+                        </a:lnSpc>
+                        <a:spcBef>
+                          <a:spcPts val="0"/>
+                        </a:spcBef>
+                        <a:spcAft>
+                          <a:spcPts val="0"/>
+                        </a:spcAft>
+                        <a:buClrTx/>
+                        <a:buSzTx/>
+                        <a:buFont typeface="Arial" panose="020B0604020202020204" pitchFamily="34" charset="0"/>
+                        <a:buNone/>
+                        <a:tabLst/>
+                        <a:defRPr/>
+                      </a:pPr>
+                      <a:r>
+                        <a:rPr lang="af-ZA" sz="1700" b="0" i="0" kern="1200" dirty="0">
+                          <a:solidFill>
+                            <a:schemeClr val="tx1"/>
+                          </a:solidFill>
+                          <a:effectLst/>
+                          <a:latin typeface="+mn-lt"/>
+                          <a:ea typeface="+mn-ea"/>
+                          <a:cs typeface="+mn-cs"/>
+                        </a:rPr>
+                        <a:t>TldPopularity – </a:t>
+                      </a:r>
+                      <a:r>
+                        <a:rPr lang="ru-RU" sz="1700" b="0" i="0" kern="1200" dirty="0">
+                          <a:solidFill>
+                            <a:schemeClr val="tx1"/>
+                          </a:solidFill>
+                          <a:effectLst/>
+                          <a:latin typeface="+mn-lt"/>
+                          <a:ea typeface="+mn-ea"/>
+                          <a:cs typeface="+mn-cs"/>
+                        </a:rPr>
+                        <a:t>популярность доменной зоны</a:t>
+                      </a:r>
+                    </a:p>
+                  </a:txBody>
+                  <a:tcPr>
+                    <a:lnL w="12700" cap="flat" cmpd="sng" algn="ctr">
+                      <a:solidFill>
+                        <a:schemeClr val="tx1"/>
+                      </a:solidFill>
+                      <a:prstDash val="solid"/>
+                      <a:round/>
+                      <a:headEnd type="none" w="med" len="med"/>
+                      <a:tailEnd type="none" w="med" len="med"/>
+                    </a:lnL>
+                    <a:lnR w="12700" cap="flat" cmpd="sng" algn="ctr">
+                      <a:solidFill>
+                        <a:schemeClr val="tx1"/>
+                      </a:solidFill>
+                      <a:prstDash val="solid"/>
+                      <a:round/>
+                      <a:headEnd type="none" w="med" len="med"/>
+                      <a:tailEnd type="none" w="med" len="med"/>
+                    </a:lnR>
+                    <a:lnT w="12700" cap="flat" cmpd="sng" algn="ctr">
+                      <a:solidFill>
+                        <a:schemeClr val="tx1"/>
+                      </a:solidFill>
+                      <a:prstDash val="solid"/>
+                      <a:round/>
+                      <a:headEnd type="none" w="med" len="med"/>
+                      <a:tailEnd type="none" w="med" len="med"/>
+                    </a:lnT>
+                    <a:lnB w="12700" cap="flat" cmpd="sng" algn="ctr">
+                      <a:solidFill>
+                        <a:schemeClr val="tx1"/>
+                      </a:solidFill>
+                      <a:prstDash val="solid"/>
+                      <a:round/>
+                      <a:headEnd type="none" w="med" len="med"/>
+                      <a:tailEnd type="none" w="med" len="med"/>
+                    </a:lnB>
+                  </a:tcPr>
+                </a:tc>
+                <a:tc>
+                  <a:txBody>
+                    <a:bodyPr/>
+                    <a:lstStyle/>
+                    <a:p>
+                      <a:pPr marL="0" marR="0" lvl="0" indent="0" algn="ctr" defTabSz="914400" rtl="0" eaLnBrk="1" fontAlgn="auto" latinLnBrk="0" hangingPunct="1">
+                        <a:lnSpc>
+                          <a:spcPct val="100000"/>
+                        </a:lnSpc>
+                        <a:spcBef>
+                          <a:spcPts val="0"/>
+                        </a:spcBef>
+                        <a:spcAft>
+                          <a:spcPts val="0"/>
+                        </a:spcAft>
+                        <a:buClrTx/>
+                        <a:buSzTx/>
+                        <a:buFont typeface="Arial" panose="020B0604020202020204" pitchFamily="34" charset="0"/>
+                        <a:buNone/>
+                        <a:tabLst/>
+                        <a:defRPr/>
+                      </a:pPr>
+                      <a:r>
+                        <a:rPr lang="ru-RU" sz="1700" b="0" i="0" kern="1200" dirty="0" err="1">
+                          <a:solidFill>
+                            <a:schemeClr val="tx1"/>
+                          </a:solidFill>
+                          <a:effectLst/>
+                          <a:latin typeface="+mn-lt"/>
+                          <a:ea typeface="+mn-ea"/>
+                          <a:cs typeface="+mn-cs"/>
+                        </a:rPr>
+                        <a:t>IsRandomString</a:t>
+                      </a:r>
+                      <a:r>
+                        <a:rPr lang="ru-RU" sz="1700" b="0" i="0" kern="1200" dirty="0">
+                          <a:solidFill>
+                            <a:schemeClr val="tx1"/>
+                          </a:solidFill>
+                          <a:effectLst/>
+                          <a:latin typeface="+mn-lt"/>
+                          <a:ea typeface="+mn-ea"/>
+                          <a:cs typeface="+mn-cs"/>
+                        </a:rPr>
+                        <a:t> – похожесть на случайную строку</a:t>
+                      </a:r>
+                    </a:p>
+                  </a:txBody>
+                  <a:tcPr>
+                    <a:lnL w="12700" cap="flat" cmpd="sng" algn="ctr">
+                      <a:solidFill>
+                        <a:schemeClr val="tx1"/>
+                      </a:solidFill>
+                      <a:prstDash val="solid"/>
+                      <a:round/>
+                      <a:headEnd type="none" w="med" len="med"/>
+                      <a:tailEnd type="none" w="med" len="med"/>
+                    </a:lnL>
+                    <a:lnR w="12700" cap="flat" cmpd="sng" algn="ctr">
+                      <a:solidFill>
+                        <a:schemeClr val="tx1"/>
+                      </a:solidFill>
+                      <a:prstDash val="solid"/>
+                      <a:round/>
+                      <a:headEnd type="none" w="med" len="med"/>
+                      <a:tailEnd type="none" w="med" len="med"/>
+                    </a:lnR>
+                    <a:lnT w="12700" cap="flat" cmpd="sng" algn="ctr">
+                      <a:solidFill>
+                        <a:schemeClr val="tx1"/>
+                      </a:solidFill>
+                      <a:prstDash val="solid"/>
+                      <a:round/>
+                      <a:headEnd type="none" w="med" len="med"/>
+                      <a:tailEnd type="none" w="med" len="med"/>
+                    </a:lnT>
+                    <a:lnB w="12700" cap="flat" cmpd="sng" algn="ctr">
+                      <a:solidFill>
+                        <a:schemeClr val="tx1"/>
+                      </a:solidFill>
+                      <a:prstDash val="solid"/>
+                      <a:round/>
+                      <a:headEnd type="none" w="med" len="med"/>
+                      <a:tailEnd type="none" w="med" len="med"/>
+                    </a:lnB>
+                  </a:tcPr>
+                </a:tc>
+                <a:extLst>
+                  <a:ext uri="{0D108BD9-81ED-4DB2-BD59-A6C34878D82A}">
+                    <a16:rowId xmlns:a16="http://schemas.microsoft.com/office/drawing/2014/main" val="122675270"/>
+                  </a:ext>
+                </a:extLst>
+              </a:tr>
+              <a:tr h="631658">
+                <a:tc>
+                  <a:txBody>
+                    <a:bodyPr/>
+                    <a:lstStyle/>
+                    <a:p>
+                      <a:pPr marL="0" marR="0" lvl="0" indent="0" algn="ctr" defTabSz="914400" rtl="0" eaLnBrk="1" fontAlgn="auto" latinLnBrk="0" hangingPunct="1">
+                        <a:lnSpc>
+                          <a:spcPct val="100000"/>
+                        </a:lnSpc>
+                        <a:spcBef>
+                          <a:spcPts val="0"/>
+                        </a:spcBef>
+                        <a:spcAft>
+                          <a:spcPts val="0"/>
+                        </a:spcAft>
+                        <a:buClrTx/>
+                        <a:buSzTx/>
+                        <a:buFont typeface="Arial" panose="020B0604020202020204" pitchFamily="34" charset="0"/>
+                        <a:buNone/>
+                        <a:tabLst/>
+                        <a:defRPr/>
+                      </a:pPr>
+                      <a:r>
+                        <a:rPr lang="af-ZA" sz="1700" b="0" i="0" kern="1200" dirty="0">
+                          <a:solidFill>
+                            <a:schemeClr val="tx1"/>
+                          </a:solidFill>
+                          <a:effectLst/>
+                          <a:latin typeface="+mn-lt"/>
+                          <a:ea typeface="+mn-ea"/>
+                          <a:cs typeface="+mn-cs"/>
+                        </a:rPr>
+                        <a:t>DomainNameLength – </a:t>
+                      </a:r>
+                      <a:r>
+                        <a:rPr lang="ru-RU" sz="1700" b="0" i="0" kern="1200" dirty="0">
+                          <a:solidFill>
+                            <a:schemeClr val="tx1"/>
+                          </a:solidFill>
+                          <a:effectLst/>
+                          <a:latin typeface="+mn-lt"/>
+                          <a:ea typeface="+mn-ea"/>
+                          <a:cs typeface="+mn-cs"/>
+                        </a:rPr>
+                        <a:t>длина доменного имени</a:t>
+                      </a:r>
+                    </a:p>
+                  </a:txBody>
+                  <a:tcPr>
+                    <a:lnL w="12700" cap="flat" cmpd="sng" algn="ctr">
+                      <a:solidFill>
+                        <a:schemeClr val="tx1"/>
+                      </a:solidFill>
+                      <a:prstDash val="solid"/>
+                      <a:round/>
+                      <a:headEnd type="none" w="med" len="med"/>
+                      <a:tailEnd type="none" w="med" len="med"/>
+                    </a:lnL>
+                    <a:lnR w="12700" cap="flat" cmpd="sng" algn="ctr">
+                      <a:solidFill>
+                        <a:schemeClr val="tx1"/>
+                      </a:solidFill>
+                      <a:prstDash val="solid"/>
+                      <a:round/>
+                      <a:headEnd type="none" w="med" len="med"/>
+                      <a:tailEnd type="none" w="med" len="med"/>
+                    </a:lnR>
+                    <a:lnT w="12700" cap="flat" cmpd="sng" algn="ctr">
+                      <a:solidFill>
+                        <a:schemeClr val="tx1"/>
+                      </a:solidFill>
+                      <a:prstDash val="solid"/>
+                      <a:round/>
+                      <a:headEnd type="none" w="med" len="med"/>
+                      <a:tailEnd type="none" w="med" len="med"/>
+                    </a:lnT>
+                    <a:lnB w="12700" cap="flat" cmpd="sng" algn="ctr">
+                      <a:solidFill>
+                        <a:schemeClr val="tx1"/>
+                      </a:solidFill>
+                      <a:prstDash val="solid"/>
+                      <a:round/>
+                      <a:headEnd type="none" w="med" len="med"/>
+                      <a:tailEnd type="none" w="med" len="med"/>
+                    </a:lnB>
+                  </a:tcPr>
+                </a:tc>
+                <a:tc>
+                  <a:txBody>
+                    <a:bodyPr/>
+                    <a:lstStyle/>
+                    <a:p>
+                      <a:pPr marL="0" marR="0" lvl="0" indent="0" algn="ctr" defTabSz="914400" rtl="0" eaLnBrk="1" fontAlgn="auto" latinLnBrk="0" hangingPunct="1">
+                        <a:lnSpc>
+                          <a:spcPct val="100000"/>
+                        </a:lnSpc>
+                        <a:spcBef>
+                          <a:spcPts val="0"/>
+                        </a:spcBef>
+                        <a:spcAft>
+                          <a:spcPts val="0"/>
+                        </a:spcAft>
+                        <a:buClrTx/>
+                        <a:buSzTx/>
+                        <a:buFont typeface="Arial" panose="020B0604020202020204" pitchFamily="34" charset="0"/>
+                        <a:buNone/>
+                        <a:tabLst/>
+                        <a:defRPr/>
+                      </a:pPr>
+                      <a:r>
+                        <a:rPr lang="af-ZA" sz="1700" b="0" i="0" kern="1200" dirty="0">
+                          <a:solidFill>
+                            <a:schemeClr val="tx1"/>
+                          </a:solidFill>
+                          <a:effectLst/>
+                          <a:latin typeface="+mn-lt"/>
+                          <a:ea typeface="+mn-ea"/>
+                          <a:cs typeface="+mn-cs"/>
+                        </a:rPr>
+                        <a:t>TldLength – </a:t>
+                      </a:r>
+                      <a:r>
+                        <a:rPr lang="ru-RU" sz="1700" b="0" i="0" kern="1200" dirty="0">
+                          <a:solidFill>
+                            <a:schemeClr val="tx1"/>
+                          </a:solidFill>
+                          <a:effectLst/>
+                          <a:latin typeface="+mn-lt"/>
+                          <a:ea typeface="+mn-ea"/>
+                          <a:cs typeface="+mn-cs"/>
+                        </a:rPr>
+                        <a:t>длина доменной зоны</a:t>
+                      </a:r>
+                    </a:p>
+                  </a:txBody>
+                  <a:tcPr>
+                    <a:lnL w="12700" cap="flat" cmpd="sng" algn="ctr">
+                      <a:solidFill>
+                        <a:schemeClr val="tx1"/>
+                      </a:solidFill>
+                      <a:prstDash val="solid"/>
+                      <a:round/>
+                      <a:headEnd type="none" w="med" len="med"/>
+                      <a:tailEnd type="none" w="med" len="med"/>
+                    </a:lnL>
+                    <a:lnR w="12700" cap="flat" cmpd="sng" algn="ctr">
+                      <a:solidFill>
+                        <a:schemeClr val="tx1"/>
+                      </a:solidFill>
+                      <a:prstDash val="solid"/>
+                      <a:round/>
+                      <a:headEnd type="none" w="med" len="med"/>
+                      <a:tailEnd type="none" w="med" len="med"/>
+                    </a:lnR>
+                    <a:lnT w="12700" cap="flat" cmpd="sng" algn="ctr">
+                      <a:solidFill>
+                        <a:schemeClr val="tx1"/>
+                      </a:solidFill>
+                      <a:prstDash val="solid"/>
+                      <a:round/>
+                      <a:headEnd type="none" w="med" len="med"/>
+                      <a:tailEnd type="none" w="med" len="med"/>
+                    </a:lnT>
+                    <a:lnB w="12700" cap="flat" cmpd="sng" algn="ctr">
+                      <a:solidFill>
+                        <a:schemeClr val="tx1"/>
+                      </a:solidFill>
+                      <a:prstDash val="solid"/>
+                      <a:round/>
+                      <a:headEnd type="none" w="med" len="med"/>
+                      <a:tailEnd type="none" w="med" len="med"/>
+                    </a:lnB>
+                  </a:tcPr>
+                </a:tc>
+                <a:tc>
+                  <a:txBody>
+                    <a:bodyPr/>
+                    <a:lstStyle/>
+                    <a:p>
+                      <a:pPr marL="0" marR="0" lvl="0" indent="0" algn="ctr" defTabSz="914400" rtl="0" eaLnBrk="1" fontAlgn="auto" latinLnBrk="0" hangingPunct="1">
+                        <a:lnSpc>
+                          <a:spcPct val="100000"/>
+                        </a:lnSpc>
+                        <a:spcBef>
+                          <a:spcPts val="0"/>
+                        </a:spcBef>
+                        <a:spcAft>
+                          <a:spcPts val="0"/>
+                        </a:spcAft>
+                        <a:buClrTx/>
+                        <a:buSzTx/>
+                        <a:buFont typeface="Arial" panose="020B0604020202020204" pitchFamily="34" charset="0"/>
+                        <a:buNone/>
+                        <a:tabLst/>
+                        <a:defRPr/>
+                      </a:pPr>
+                      <a:r>
+                        <a:rPr lang="ru-RU" sz="1700" b="0" i="0" kern="1200" dirty="0">
+                          <a:solidFill>
+                            <a:schemeClr val="tx1"/>
+                          </a:solidFill>
+                          <a:effectLst/>
+                          <a:latin typeface="+mn-lt"/>
+                          <a:ea typeface="+mn-ea"/>
+                          <a:cs typeface="+mn-cs"/>
+                        </a:rPr>
+                        <a:t>RepeatedCharScore – частота повторов символов подряд</a:t>
+                      </a:r>
+                    </a:p>
+                  </a:txBody>
+                  <a:tcPr>
+                    <a:lnL w="12700" cap="flat" cmpd="sng" algn="ctr">
+                      <a:solidFill>
+                        <a:schemeClr val="tx1"/>
+                      </a:solidFill>
+                      <a:prstDash val="solid"/>
+                      <a:round/>
+                      <a:headEnd type="none" w="med" len="med"/>
+                      <a:tailEnd type="none" w="med" len="med"/>
+                    </a:lnL>
+                    <a:lnR w="12700" cap="flat" cmpd="sng" algn="ctr">
+                      <a:solidFill>
+                        <a:schemeClr val="tx1"/>
+                      </a:solidFill>
+                      <a:prstDash val="solid"/>
+                      <a:round/>
+                      <a:headEnd type="none" w="med" len="med"/>
+                      <a:tailEnd type="none" w="med" len="med"/>
+                    </a:lnR>
+                    <a:lnT w="12700" cap="flat" cmpd="sng" algn="ctr">
+                      <a:solidFill>
+                        <a:schemeClr val="tx1"/>
+                      </a:solidFill>
+                      <a:prstDash val="solid"/>
+                      <a:round/>
+                      <a:headEnd type="none" w="med" len="med"/>
+                      <a:tailEnd type="none" w="med" len="med"/>
+                    </a:lnT>
+                    <a:lnB w="12700" cap="flat" cmpd="sng" algn="ctr">
+                      <a:solidFill>
+                        <a:schemeClr val="tx1"/>
+                      </a:solidFill>
+                      <a:prstDash val="solid"/>
+                      <a:round/>
+                      <a:headEnd type="none" w="med" len="med"/>
+                      <a:tailEnd type="none" w="med" len="med"/>
+                    </a:lnB>
+                  </a:tcPr>
+                </a:tc>
+                <a:extLst>
+                  <a:ext uri="{0D108BD9-81ED-4DB2-BD59-A6C34878D82A}">
+                    <a16:rowId xmlns:a16="http://schemas.microsoft.com/office/drawing/2014/main" val="3055145229"/>
+                  </a:ext>
+                </a:extLst>
+              </a:tr>
+              <a:tr h="902368">
+                <a:tc>
+                  <a:txBody>
+                    <a:bodyPr/>
+                    <a:lstStyle/>
+                    <a:p>
+                      <a:pPr marL="0" marR="0" lvl="0" indent="0" algn="ctr" defTabSz="914400" rtl="0" eaLnBrk="1" fontAlgn="auto" latinLnBrk="0" hangingPunct="1">
+                        <a:lnSpc>
+                          <a:spcPct val="100000"/>
+                        </a:lnSpc>
+                        <a:spcBef>
+                          <a:spcPts val="0"/>
+                        </a:spcBef>
+                        <a:spcAft>
+                          <a:spcPts val="0"/>
+                        </a:spcAft>
+                        <a:buClrTx/>
+                        <a:buSzTx/>
+                        <a:buFont typeface="Arial" panose="020B0604020202020204" pitchFamily="34" charset="0"/>
+                        <a:buNone/>
+                        <a:tabLst/>
+                        <a:defRPr/>
+                      </a:pPr>
+                      <a:r>
+                        <a:rPr lang="af-ZA" sz="1700" b="0" i="0" kern="1200" dirty="0">
+                          <a:solidFill>
+                            <a:schemeClr val="tx1"/>
+                          </a:solidFill>
+                          <a:effectLst/>
+                          <a:latin typeface="+mn-lt"/>
+                          <a:ea typeface="+mn-ea"/>
+                          <a:cs typeface="+mn-cs"/>
+                        </a:rPr>
+                        <a:t>UrlEntropy – </a:t>
+                      </a:r>
+                      <a:r>
+                        <a:rPr lang="ru-RU" sz="1700" b="0" i="0" kern="1200" dirty="0">
+                          <a:solidFill>
+                            <a:schemeClr val="tx1"/>
+                          </a:solidFill>
+                          <a:effectLst/>
+                          <a:latin typeface="+mn-lt"/>
+                          <a:ea typeface="+mn-ea"/>
+                          <a:cs typeface="+mn-cs"/>
+                        </a:rPr>
+                        <a:t>энтропия символов </a:t>
+                      </a:r>
+                      <a:r>
+                        <a:rPr lang="en-US" sz="1700" b="0" i="0" kern="1200" dirty="0">
+                          <a:solidFill>
+                            <a:schemeClr val="tx1"/>
+                          </a:solidFill>
+                          <a:effectLst/>
+                          <a:latin typeface="+mn-lt"/>
+                          <a:ea typeface="+mn-ea"/>
+                          <a:cs typeface="+mn-cs"/>
+                        </a:rPr>
+                        <a:t>DNS</a:t>
+                      </a:r>
+                      <a:endParaRPr lang="af-ZA" sz="1700" b="0" i="0" kern="1200" dirty="0">
+                        <a:solidFill>
+                          <a:schemeClr val="tx1"/>
+                        </a:solidFill>
+                        <a:effectLst/>
+                        <a:latin typeface="+mn-lt"/>
+                        <a:ea typeface="+mn-ea"/>
+                        <a:cs typeface="+mn-cs"/>
+                      </a:endParaRPr>
+                    </a:p>
+                  </a:txBody>
+                  <a:tcPr>
+                    <a:lnL w="12700" cap="flat" cmpd="sng" algn="ctr">
+                      <a:solidFill>
+                        <a:schemeClr val="tx1"/>
+                      </a:solidFill>
+                      <a:prstDash val="solid"/>
+                      <a:round/>
+                      <a:headEnd type="none" w="med" len="med"/>
+                      <a:tailEnd type="none" w="med" len="med"/>
+                    </a:lnL>
+                    <a:lnR w="12700" cap="flat" cmpd="sng" algn="ctr">
+                      <a:solidFill>
+                        <a:schemeClr val="tx1"/>
+                      </a:solidFill>
+                      <a:prstDash val="solid"/>
+                      <a:round/>
+                      <a:headEnd type="none" w="med" len="med"/>
+                      <a:tailEnd type="none" w="med" len="med"/>
+                    </a:lnR>
+                    <a:lnT w="12700" cap="flat" cmpd="sng" algn="ctr">
+                      <a:solidFill>
+                        <a:schemeClr val="tx1"/>
+                      </a:solidFill>
+                      <a:prstDash val="solid"/>
+                      <a:round/>
+                      <a:headEnd type="none" w="med" len="med"/>
+                      <a:tailEnd type="none" w="med" len="med"/>
+                    </a:lnT>
+                    <a:lnB w="12700" cap="flat" cmpd="sng" algn="ctr">
+                      <a:solidFill>
+                        <a:schemeClr val="tx1"/>
+                      </a:solidFill>
+                      <a:prstDash val="solid"/>
+                      <a:round/>
+                      <a:headEnd type="none" w="med" len="med"/>
+                      <a:tailEnd type="none" w="med" len="med"/>
+                    </a:lnB>
+                  </a:tcPr>
+                </a:tc>
+                <a:tc>
+                  <a:txBody>
+                    <a:bodyPr/>
+                    <a:lstStyle/>
+                    <a:p>
+                      <a:pPr marL="0" marR="0" lvl="0" indent="0" algn="ctr" defTabSz="914400" rtl="0" eaLnBrk="1" fontAlgn="auto" latinLnBrk="0" hangingPunct="1">
+                        <a:lnSpc>
+                          <a:spcPct val="100000"/>
+                        </a:lnSpc>
+                        <a:spcBef>
+                          <a:spcPts val="0"/>
+                        </a:spcBef>
+                        <a:spcAft>
+                          <a:spcPts val="0"/>
+                        </a:spcAft>
+                        <a:buClrTx/>
+                        <a:buSzTx/>
+                        <a:buFont typeface="Arial" panose="020B0604020202020204" pitchFamily="34" charset="0"/>
+                        <a:buNone/>
+                        <a:tabLst/>
+                        <a:defRPr/>
+                      </a:pPr>
+                      <a:r>
+                        <a:rPr lang="ru-RU" sz="1700" b="0" i="0" kern="1200" dirty="0">
+                          <a:solidFill>
+                            <a:schemeClr val="tx1"/>
+                          </a:solidFill>
+                          <a:effectLst/>
+                          <a:latin typeface="+mn-lt"/>
+                          <a:ea typeface="+mn-ea"/>
+                          <a:cs typeface="+mn-cs"/>
+                        </a:rPr>
+                        <a:t>HyphenRatio – доля дефисов среди символов</a:t>
+                      </a:r>
+                    </a:p>
+                  </a:txBody>
+                  <a:tcPr>
+                    <a:lnL w="12700" cap="flat" cmpd="sng" algn="ctr">
+                      <a:solidFill>
+                        <a:schemeClr val="tx1"/>
+                      </a:solidFill>
+                      <a:prstDash val="solid"/>
+                      <a:round/>
+                      <a:headEnd type="none" w="med" len="med"/>
+                      <a:tailEnd type="none" w="med" len="med"/>
+                    </a:lnL>
+                    <a:lnR w="12700" cap="flat" cmpd="sng" algn="ctr">
+                      <a:solidFill>
+                        <a:schemeClr val="tx1"/>
+                      </a:solidFill>
+                      <a:prstDash val="solid"/>
+                      <a:round/>
+                      <a:headEnd type="none" w="med" len="med"/>
+                      <a:tailEnd type="none" w="med" len="med"/>
+                    </a:lnR>
+                    <a:lnT w="12700" cap="flat" cmpd="sng" algn="ctr">
+                      <a:solidFill>
+                        <a:schemeClr val="tx1"/>
+                      </a:solidFill>
+                      <a:prstDash val="solid"/>
+                      <a:round/>
+                      <a:headEnd type="none" w="med" len="med"/>
+                      <a:tailEnd type="none" w="med" len="med"/>
+                    </a:lnT>
+                    <a:lnB w="12700" cap="flat" cmpd="sng" algn="ctr">
+                      <a:solidFill>
+                        <a:schemeClr val="tx1"/>
+                      </a:solidFill>
+                      <a:prstDash val="solid"/>
+                      <a:round/>
+                      <a:headEnd type="none" w="med" len="med"/>
+                      <a:tailEnd type="none" w="med" len="med"/>
+                    </a:lnB>
+                  </a:tcPr>
+                </a:tc>
+                <a:tc>
+                  <a:txBody>
+                    <a:bodyPr/>
+                    <a:lstStyle/>
+                    <a:p>
+                      <a:pPr marL="0" marR="0" lvl="0" indent="0" algn="ctr" defTabSz="914400" rtl="0" eaLnBrk="1" fontAlgn="auto" latinLnBrk="0" hangingPunct="1">
+                        <a:lnSpc>
+                          <a:spcPct val="100000"/>
+                        </a:lnSpc>
+                        <a:spcBef>
+                          <a:spcPts val="0"/>
+                        </a:spcBef>
+                        <a:spcAft>
+                          <a:spcPts val="0"/>
+                        </a:spcAft>
+                        <a:buClrTx/>
+                        <a:buSzTx/>
+                        <a:buFont typeface="Arial" panose="020B0604020202020204" pitchFamily="34" charset="0"/>
+                        <a:buNone/>
+                        <a:tabLst/>
+                        <a:defRPr/>
+                      </a:pPr>
+                      <a:r>
+                        <a:rPr lang="ru-RU" sz="1700" b="0" i="0" kern="1200" dirty="0">
+                          <a:solidFill>
+                            <a:schemeClr val="tx1"/>
+                          </a:solidFill>
+                          <a:effectLst/>
+                          <a:latin typeface="+mn-lt"/>
+                          <a:ea typeface="+mn-ea"/>
+                          <a:cs typeface="+mn-cs"/>
+                        </a:rPr>
+                        <a:t>VowelConsonantRatio – соотношение гласных и согласных</a:t>
+                      </a:r>
+                    </a:p>
+                  </a:txBody>
+                  <a:tcPr>
+                    <a:lnL w="12700" cap="flat" cmpd="sng" algn="ctr">
+                      <a:solidFill>
+                        <a:schemeClr val="tx1"/>
+                      </a:solidFill>
+                      <a:prstDash val="solid"/>
+                      <a:round/>
+                      <a:headEnd type="none" w="med" len="med"/>
+                      <a:tailEnd type="none" w="med" len="med"/>
+                    </a:lnL>
+                    <a:lnR w="12700" cap="flat" cmpd="sng" algn="ctr">
+                      <a:solidFill>
+                        <a:schemeClr val="tx1"/>
+                      </a:solidFill>
+                      <a:prstDash val="solid"/>
+                      <a:round/>
+                      <a:headEnd type="none" w="med" len="med"/>
+                      <a:tailEnd type="none" w="med" len="med"/>
+                    </a:lnR>
+                    <a:lnT w="12700" cap="flat" cmpd="sng" algn="ctr">
+                      <a:solidFill>
+                        <a:schemeClr val="tx1"/>
+                      </a:solidFill>
+                      <a:prstDash val="solid"/>
+                      <a:round/>
+                      <a:headEnd type="none" w="med" len="med"/>
+                      <a:tailEnd type="none" w="med" len="med"/>
+                    </a:lnT>
+                    <a:lnB w="12700" cap="flat" cmpd="sng" algn="ctr">
+                      <a:solidFill>
+                        <a:schemeClr val="tx1"/>
+                      </a:solidFill>
+                      <a:prstDash val="solid"/>
+                      <a:round/>
+                      <a:headEnd type="none" w="med" len="med"/>
+                      <a:tailEnd type="none" w="med" len="med"/>
+                    </a:lnB>
+                  </a:tcPr>
+                </a:tc>
+                <a:extLst>
+                  <a:ext uri="{0D108BD9-81ED-4DB2-BD59-A6C34878D82A}">
+                    <a16:rowId xmlns:a16="http://schemas.microsoft.com/office/drawing/2014/main" val="353301639"/>
+                  </a:ext>
+                </a:extLst>
+              </a:tr>
+              <a:tr h="631658">
+                <a:tc>
+                  <a:txBody>
+                    <a:bodyPr/>
+                    <a:lstStyle/>
+                    <a:p>
+                      <a:pPr marL="0" marR="0" lvl="0" indent="0" algn="ctr" defTabSz="914400" rtl="0" eaLnBrk="1" fontAlgn="auto" latinLnBrk="0" hangingPunct="1">
+                        <a:lnSpc>
+                          <a:spcPct val="100000"/>
+                        </a:lnSpc>
+                        <a:spcBef>
+                          <a:spcPts val="0"/>
+                        </a:spcBef>
+                        <a:spcAft>
+                          <a:spcPts val="0"/>
+                        </a:spcAft>
+                        <a:buClrTx/>
+                        <a:buSzTx/>
+                        <a:buFont typeface="Arial" panose="020B0604020202020204" pitchFamily="34" charset="0"/>
+                        <a:buNone/>
+                        <a:tabLst/>
+                        <a:defRPr/>
+                      </a:pPr>
+                      <a:r>
+                        <a:rPr lang="af-ZA" sz="1700" b="0" i="0" kern="1200" dirty="0">
+                          <a:solidFill>
+                            <a:schemeClr val="tx1"/>
+                          </a:solidFill>
+                          <a:effectLst/>
+                          <a:latin typeface="+mn-lt"/>
+                          <a:ea typeface="+mn-ea"/>
+                          <a:cs typeface="+mn-cs"/>
+                        </a:rPr>
+                        <a:t>PercentageNumericChars – </a:t>
+                      </a:r>
+                      <a:r>
+                        <a:rPr lang="ru-RU" sz="1700" b="0" i="0" kern="1200" dirty="0">
+                          <a:solidFill>
+                            <a:schemeClr val="tx1"/>
+                          </a:solidFill>
+                          <a:effectLst/>
+                          <a:latin typeface="+mn-lt"/>
+                          <a:ea typeface="+mn-ea"/>
+                          <a:cs typeface="+mn-cs"/>
+                        </a:rPr>
+                        <a:t>доля цифр в </a:t>
+                      </a:r>
+                      <a:r>
+                        <a:rPr lang="en-US" sz="1700" b="0" i="0" kern="1200" dirty="0">
+                          <a:solidFill>
+                            <a:schemeClr val="tx1"/>
+                          </a:solidFill>
+                          <a:effectLst/>
+                          <a:latin typeface="+mn-lt"/>
+                          <a:ea typeface="+mn-ea"/>
+                          <a:cs typeface="+mn-cs"/>
+                        </a:rPr>
+                        <a:t>DNS</a:t>
+                      </a:r>
+                      <a:endParaRPr lang="af-ZA" sz="1700" b="0" i="0" kern="1200" dirty="0">
+                        <a:solidFill>
+                          <a:schemeClr val="tx1"/>
+                        </a:solidFill>
+                        <a:effectLst/>
+                        <a:latin typeface="+mn-lt"/>
+                        <a:ea typeface="+mn-ea"/>
+                        <a:cs typeface="+mn-cs"/>
+                      </a:endParaRPr>
+                    </a:p>
+                  </a:txBody>
+                  <a:tcPr>
+                    <a:lnL w="12700" cap="flat" cmpd="sng" algn="ctr">
+                      <a:solidFill>
+                        <a:schemeClr val="tx1"/>
+                      </a:solidFill>
+                      <a:prstDash val="solid"/>
+                      <a:round/>
+                      <a:headEnd type="none" w="med" len="med"/>
+                      <a:tailEnd type="none" w="med" len="med"/>
+                    </a:lnL>
+                    <a:lnR w="12700" cap="flat" cmpd="sng" algn="ctr">
+                      <a:solidFill>
+                        <a:schemeClr val="tx1"/>
+                      </a:solidFill>
+                      <a:prstDash val="solid"/>
+                      <a:round/>
+                      <a:headEnd type="none" w="med" len="med"/>
+                      <a:tailEnd type="none" w="med" len="med"/>
+                    </a:lnR>
+                    <a:lnT w="12700" cap="flat" cmpd="sng" algn="ctr">
+                      <a:solidFill>
+                        <a:schemeClr val="tx1"/>
+                      </a:solidFill>
+                      <a:prstDash val="solid"/>
+                      <a:round/>
+                      <a:headEnd type="none" w="med" len="med"/>
+                      <a:tailEnd type="none" w="med" len="med"/>
+                    </a:lnT>
+                    <a:lnB w="12700" cap="flat" cmpd="sng" algn="ctr">
+                      <a:solidFill>
+                        <a:schemeClr val="tx1"/>
+                      </a:solidFill>
+                      <a:prstDash val="solid"/>
+                      <a:round/>
+                      <a:headEnd type="none" w="med" len="med"/>
+                      <a:tailEnd type="none" w="med" len="med"/>
+                    </a:lnB>
+                  </a:tcPr>
+                </a:tc>
+                <a:tc>
+                  <a:txBody>
+                    <a:bodyPr/>
+                    <a:lstStyle/>
+                    <a:p>
+                      <a:pPr marL="0" indent="0" algn="ctr">
+                        <a:buFont typeface="Arial" panose="020B0604020202020204" pitchFamily="34" charset="0"/>
+                        <a:buNone/>
+                      </a:pPr>
+                      <a:r>
+                        <a:rPr lang="ru-RU" sz="1700" b="0" i="0" kern="1200" dirty="0">
+                          <a:solidFill>
+                            <a:schemeClr val="tx1"/>
+                          </a:solidFill>
+                          <a:effectLst/>
+                          <a:latin typeface="+mn-lt"/>
+                          <a:ea typeface="+mn-ea"/>
+                          <a:cs typeface="+mn-cs"/>
+                        </a:rPr>
+                        <a:t>VeryShortTokenCount – число очень коротких токенов</a:t>
+                      </a:r>
+                      <a:endParaRPr lang="ru-RU" sz="1700" dirty="0"/>
+                    </a:p>
+                  </a:txBody>
+                  <a:tcPr>
+                    <a:lnL w="12700" cap="flat" cmpd="sng" algn="ctr">
+                      <a:solidFill>
+                        <a:schemeClr val="tx1"/>
+                      </a:solidFill>
+                      <a:prstDash val="solid"/>
+                      <a:round/>
+                      <a:headEnd type="none" w="med" len="med"/>
+                      <a:tailEnd type="none" w="med" len="med"/>
+                    </a:lnL>
+                    <a:lnR w="12700" cap="flat" cmpd="sng" algn="ctr">
+                      <a:solidFill>
+                        <a:schemeClr val="tx1"/>
+                      </a:solidFill>
+                      <a:prstDash val="solid"/>
+                      <a:round/>
+                      <a:headEnd type="none" w="med" len="med"/>
+                      <a:tailEnd type="none" w="med" len="med"/>
+                    </a:lnR>
+                    <a:lnT w="12700" cap="flat" cmpd="sng" algn="ctr">
+                      <a:solidFill>
+                        <a:schemeClr val="tx1"/>
+                      </a:solidFill>
+                      <a:prstDash val="solid"/>
+                      <a:round/>
+                      <a:headEnd type="none" w="med" len="med"/>
+                      <a:tailEnd type="none" w="med" len="med"/>
+                    </a:lnT>
+                    <a:lnB w="12700" cap="flat" cmpd="sng" algn="ctr">
+                      <a:solidFill>
+                        <a:schemeClr val="tx1"/>
+                      </a:solidFill>
+                      <a:prstDash val="solid"/>
+                      <a:round/>
+                      <a:headEnd type="none" w="med" len="med"/>
+                      <a:tailEnd type="none" w="med" len="med"/>
+                    </a:lnB>
+                  </a:tcPr>
+                </a:tc>
+                <a:tc>
+                  <a:txBody>
+                    <a:bodyPr/>
+                    <a:lstStyle/>
+                    <a:p>
+                      <a:pPr marL="0" marR="0" lvl="0" indent="0" algn="ctr" defTabSz="914400" rtl="0" eaLnBrk="1" fontAlgn="auto" latinLnBrk="0" hangingPunct="1">
+                        <a:lnSpc>
+                          <a:spcPct val="100000"/>
+                        </a:lnSpc>
+                        <a:spcBef>
+                          <a:spcPts val="0"/>
+                        </a:spcBef>
+                        <a:spcAft>
+                          <a:spcPts val="0"/>
+                        </a:spcAft>
+                        <a:buClrTx/>
+                        <a:buSzTx/>
+                        <a:buFont typeface="Arial" panose="020B0604020202020204" pitchFamily="34" charset="0"/>
+                        <a:buNone/>
+                        <a:tabLst/>
+                        <a:defRPr/>
+                      </a:pPr>
+                      <a:r>
+                        <a:rPr lang="af-ZA" sz="1700" b="0" i="0" kern="1200" dirty="0">
+                          <a:solidFill>
+                            <a:schemeClr val="tx1"/>
+                          </a:solidFill>
+                          <a:effectLst/>
+                          <a:latin typeface="+mn-lt"/>
+                          <a:ea typeface="+mn-ea"/>
+                          <a:cs typeface="+mn-cs"/>
+                        </a:rPr>
+                        <a:t>UnigramRarity – </a:t>
+                      </a:r>
+                      <a:r>
+                        <a:rPr lang="ru-RU" sz="1700" b="0" i="0" kern="1200" dirty="0">
+                          <a:solidFill>
+                            <a:schemeClr val="tx1"/>
+                          </a:solidFill>
+                          <a:effectLst/>
+                          <a:latin typeface="+mn-lt"/>
+                          <a:ea typeface="+mn-ea"/>
+                          <a:cs typeface="+mn-cs"/>
+                        </a:rPr>
+                        <a:t>редкость отдельных символов</a:t>
+                      </a:r>
+                    </a:p>
+                  </a:txBody>
+                  <a:tcPr>
+                    <a:lnL w="12700" cap="flat" cmpd="sng" algn="ctr">
+                      <a:solidFill>
+                        <a:schemeClr val="tx1"/>
+                      </a:solidFill>
+                      <a:prstDash val="solid"/>
+                      <a:round/>
+                      <a:headEnd type="none" w="med" len="med"/>
+                      <a:tailEnd type="none" w="med" len="med"/>
+                    </a:lnL>
+                    <a:lnR w="12700" cap="flat" cmpd="sng" algn="ctr">
+                      <a:solidFill>
+                        <a:schemeClr val="tx1"/>
+                      </a:solidFill>
+                      <a:prstDash val="solid"/>
+                      <a:round/>
+                      <a:headEnd type="none" w="med" len="med"/>
+                      <a:tailEnd type="none" w="med" len="med"/>
+                    </a:lnR>
+                    <a:lnT w="12700" cap="flat" cmpd="sng" algn="ctr">
+                      <a:solidFill>
+                        <a:schemeClr val="tx1"/>
+                      </a:solidFill>
+                      <a:prstDash val="solid"/>
+                      <a:round/>
+                      <a:headEnd type="none" w="med" len="med"/>
+                      <a:tailEnd type="none" w="med" len="med"/>
+                    </a:lnT>
+                    <a:lnB w="12700" cap="flat" cmpd="sng" algn="ctr">
+                      <a:solidFill>
+                        <a:schemeClr val="tx1"/>
+                      </a:solidFill>
+                      <a:prstDash val="solid"/>
+                      <a:round/>
+                      <a:headEnd type="none" w="med" len="med"/>
+                      <a:tailEnd type="none" w="med" len="med"/>
+                    </a:lnB>
+                  </a:tcPr>
+                </a:tc>
+                <a:extLst>
+                  <a:ext uri="{0D108BD9-81ED-4DB2-BD59-A6C34878D82A}">
+                    <a16:rowId xmlns:a16="http://schemas.microsoft.com/office/drawing/2014/main" val="1609896533"/>
+                  </a:ext>
+                </a:extLst>
+              </a:tr>
+              <a:tr h="902368">
+                <a:tc>
+                  <a:txBody>
+                    <a:bodyPr/>
+                    <a:lstStyle/>
+                    <a:p>
+                      <a:pPr marL="0" marR="0" lvl="0" indent="0" algn="ctr" defTabSz="914400" rtl="0" eaLnBrk="1" fontAlgn="auto" latinLnBrk="0" hangingPunct="1">
+                        <a:lnSpc>
+                          <a:spcPct val="100000"/>
+                        </a:lnSpc>
+                        <a:spcBef>
+                          <a:spcPts val="0"/>
+                        </a:spcBef>
+                        <a:spcAft>
+                          <a:spcPts val="0"/>
+                        </a:spcAft>
+                        <a:buClrTx/>
+                        <a:buSzTx/>
+                        <a:buFont typeface="Arial" panose="020B0604020202020204" pitchFamily="34" charset="0"/>
+                        <a:buNone/>
+                        <a:tabLst/>
+                        <a:defRPr/>
+                      </a:pPr>
+                      <a:r>
+                        <a:rPr lang="af-ZA" sz="1700" b="0" i="0" kern="1200" dirty="0">
+                          <a:solidFill>
+                            <a:schemeClr val="tx1"/>
+                          </a:solidFill>
+                          <a:effectLst/>
+                          <a:latin typeface="+mn-lt"/>
+                          <a:ea typeface="+mn-ea"/>
+                          <a:cs typeface="+mn-cs"/>
+                        </a:rPr>
+                        <a:t>DotCount – </a:t>
+                      </a:r>
+                      <a:r>
+                        <a:rPr lang="ru-RU" sz="1700" b="0" i="0" kern="1200" dirty="0">
+                          <a:solidFill>
+                            <a:schemeClr val="tx1"/>
+                          </a:solidFill>
+                          <a:effectLst/>
+                          <a:latin typeface="+mn-lt"/>
+                          <a:ea typeface="+mn-ea"/>
+                          <a:cs typeface="+mn-cs"/>
+                        </a:rPr>
+                        <a:t>количество точек</a:t>
+                      </a:r>
+                    </a:p>
+                  </a:txBody>
+                  <a:tcPr>
+                    <a:lnL w="12700" cap="flat" cmpd="sng" algn="ctr">
+                      <a:solidFill>
+                        <a:schemeClr val="tx1"/>
+                      </a:solidFill>
+                      <a:prstDash val="solid"/>
+                      <a:round/>
+                      <a:headEnd type="none" w="med" len="med"/>
+                      <a:tailEnd type="none" w="med" len="med"/>
+                    </a:lnL>
+                    <a:lnR w="12700" cap="flat" cmpd="sng" algn="ctr">
+                      <a:solidFill>
+                        <a:schemeClr val="tx1"/>
+                      </a:solidFill>
+                      <a:prstDash val="solid"/>
+                      <a:round/>
+                      <a:headEnd type="none" w="med" len="med"/>
+                      <a:tailEnd type="none" w="med" len="med"/>
+                    </a:lnR>
+                    <a:lnT w="12700" cap="flat" cmpd="sng" algn="ctr">
+                      <a:solidFill>
+                        <a:schemeClr val="tx1"/>
+                      </a:solidFill>
+                      <a:prstDash val="solid"/>
+                      <a:round/>
+                      <a:headEnd type="none" w="med" len="med"/>
+                      <a:tailEnd type="none" w="med" len="med"/>
+                    </a:lnT>
+                    <a:lnB w="12700" cap="flat" cmpd="sng" algn="ctr">
+                      <a:solidFill>
+                        <a:schemeClr val="tx1"/>
+                      </a:solidFill>
+                      <a:prstDash val="solid"/>
+                      <a:round/>
+                      <a:headEnd type="none" w="med" len="med"/>
+                      <a:tailEnd type="none" w="med" len="med"/>
+                    </a:lnB>
+                  </a:tcPr>
+                </a:tc>
+                <a:tc>
+                  <a:txBody>
+                    <a:bodyPr/>
+                    <a:lstStyle/>
+                    <a:p>
+                      <a:pPr marL="0" marR="0" lvl="0" indent="0" algn="ctr" defTabSz="914400" rtl="0" eaLnBrk="1" fontAlgn="auto" latinLnBrk="0" hangingPunct="1">
+                        <a:lnSpc>
+                          <a:spcPct val="100000"/>
+                        </a:lnSpc>
+                        <a:spcBef>
+                          <a:spcPts val="0"/>
+                        </a:spcBef>
+                        <a:spcAft>
+                          <a:spcPts val="0"/>
+                        </a:spcAft>
+                        <a:buClrTx/>
+                        <a:buSzTx/>
+                        <a:buFont typeface="Arial" panose="020B0604020202020204" pitchFamily="34" charset="0"/>
+                        <a:buNone/>
+                        <a:tabLst/>
+                        <a:defRPr/>
+                      </a:pPr>
+                      <a:r>
+                        <a:rPr lang="af-ZA" sz="1700" b="0" i="0" kern="1200" dirty="0">
+                          <a:solidFill>
+                            <a:schemeClr val="tx1"/>
+                          </a:solidFill>
+                          <a:effectLst/>
+                          <a:latin typeface="+mn-lt"/>
+                          <a:ea typeface="+mn-ea"/>
+                          <a:cs typeface="+mn-cs"/>
+                        </a:rPr>
+                        <a:t>AverageTokenLength – </a:t>
+                      </a:r>
+                      <a:r>
+                        <a:rPr lang="ru-RU" sz="1700" b="0" i="0" kern="1200" dirty="0">
+                          <a:solidFill>
+                            <a:schemeClr val="tx1"/>
+                          </a:solidFill>
+                          <a:effectLst/>
+                          <a:latin typeface="+mn-lt"/>
+                          <a:ea typeface="+mn-ea"/>
+                          <a:cs typeface="+mn-cs"/>
+                        </a:rPr>
+                        <a:t>средняя длина токена</a:t>
+                      </a:r>
+                    </a:p>
+                  </a:txBody>
+                  <a:tcPr>
+                    <a:lnL w="12700" cap="flat" cmpd="sng" algn="ctr">
+                      <a:solidFill>
+                        <a:schemeClr val="tx1"/>
+                      </a:solidFill>
+                      <a:prstDash val="solid"/>
+                      <a:round/>
+                      <a:headEnd type="none" w="med" len="med"/>
+                      <a:tailEnd type="none" w="med" len="med"/>
+                    </a:lnL>
+                    <a:lnR w="12700" cap="flat" cmpd="sng" algn="ctr">
+                      <a:solidFill>
+                        <a:schemeClr val="tx1"/>
+                      </a:solidFill>
+                      <a:prstDash val="solid"/>
+                      <a:round/>
+                      <a:headEnd type="none" w="med" len="med"/>
+                      <a:tailEnd type="none" w="med" len="med"/>
+                    </a:lnR>
+                    <a:lnT w="12700" cap="flat" cmpd="sng" algn="ctr">
+                      <a:solidFill>
+                        <a:schemeClr val="tx1"/>
+                      </a:solidFill>
+                      <a:prstDash val="solid"/>
+                      <a:round/>
+                      <a:headEnd type="none" w="med" len="med"/>
+                      <a:tailEnd type="none" w="med" len="med"/>
+                    </a:lnT>
+                    <a:lnB w="12700" cap="flat" cmpd="sng" algn="ctr">
+                      <a:solidFill>
+                        <a:schemeClr val="tx1"/>
+                      </a:solidFill>
+                      <a:prstDash val="solid"/>
+                      <a:round/>
+                      <a:headEnd type="none" w="med" len="med"/>
+                      <a:tailEnd type="none" w="med" len="med"/>
+                    </a:lnB>
+                  </a:tcPr>
+                </a:tc>
+                <a:tc>
+                  <a:txBody>
+                    <a:bodyPr/>
+                    <a:lstStyle/>
+                    <a:p>
+                      <a:pPr marL="0" marR="0" lvl="0" indent="0" algn="ctr" defTabSz="914400" rtl="0" eaLnBrk="1" fontAlgn="auto" latinLnBrk="0" hangingPunct="1">
+                        <a:lnSpc>
+                          <a:spcPct val="100000"/>
+                        </a:lnSpc>
+                        <a:spcBef>
+                          <a:spcPts val="0"/>
+                        </a:spcBef>
+                        <a:spcAft>
+                          <a:spcPts val="0"/>
+                        </a:spcAft>
+                        <a:buClrTx/>
+                        <a:buSzTx/>
+                        <a:buFont typeface="Arial" panose="020B0604020202020204" pitchFamily="34" charset="0"/>
+                        <a:buNone/>
+                        <a:tabLst/>
+                        <a:defRPr/>
+                      </a:pPr>
+                      <a:r>
+                        <a:rPr lang="ru-RU" sz="1700" b="0" i="0" kern="1200" dirty="0">
+                          <a:solidFill>
+                            <a:schemeClr val="tx1"/>
+                          </a:solidFill>
+                          <a:effectLst/>
+                          <a:latin typeface="+mn-lt"/>
+                          <a:ea typeface="+mn-ea"/>
+                          <a:cs typeface="+mn-cs"/>
+                        </a:rPr>
+                        <a:t>LevenshteinToBrands – расстояние Левенштейна до брендов</a:t>
+                      </a:r>
+                    </a:p>
+                  </a:txBody>
+                  <a:tcPr>
+                    <a:lnL w="12700" cap="flat" cmpd="sng" algn="ctr">
+                      <a:solidFill>
+                        <a:schemeClr val="tx1"/>
+                      </a:solidFill>
+                      <a:prstDash val="solid"/>
+                      <a:round/>
+                      <a:headEnd type="none" w="med" len="med"/>
+                      <a:tailEnd type="none" w="med" len="med"/>
+                    </a:lnL>
+                    <a:lnR w="12700" cap="flat" cmpd="sng" algn="ctr">
+                      <a:solidFill>
+                        <a:schemeClr val="tx1"/>
+                      </a:solidFill>
+                      <a:prstDash val="solid"/>
+                      <a:round/>
+                      <a:headEnd type="none" w="med" len="med"/>
+                      <a:tailEnd type="none" w="med" len="med"/>
+                    </a:lnR>
+                    <a:lnT w="12700" cap="flat" cmpd="sng" algn="ctr">
+                      <a:solidFill>
+                        <a:schemeClr val="tx1"/>
+                      </a:solidFill>
+                      <a:prstDash val="solid"/>
+                      <a:round/>
+                      <a:headEnd type="none" w="med" len="med"/>
+                      <a:tailEnd type="none" w="med" len="med"/>
+                    </a:lnT>
+                    <a:lnB w="12700" cap="flat" cmpd="sng" algn="ctr">
+                      <a:solidFill>
+                        <a:schemeClr val="tx1"/>
+                      </a:solidFill>
+                      <a:prstDash val="solid"/>
+                      <a:round/>
+                      <a:headEnd type="none" w="med" len="med"/>
+                      <a:tailEnd type="none" w="med" len="med"/>
+                    </a:lnB>
+                  </a:tcPr>
+                </a:tc>
+                <a:extLst>
+                  <a:ext uri="{0D108BD9-81ED-4DB2-BD59-A6C34878D82A}">
+                    <a16:rowId xmlns:a16="http://schemas.microsoft.com/office/drawing/2014/main" val="2066050063"/>
+                  </a:ext>
+                </a:extLst>
+              </a:tr>
+              <a:tr h="631658">
+                <a:tc>
+                  <a:txBody>
+                    <a:bodyPr/>
+                    <a:lstStyle/>
+                    <a:p>
+                      <a:pPr marL="0" marR="0" lvl="0" indent="0" algn="ctr" defTabSz="914400" rtl="0" eaLnBrk="1" fontAlgn="auto" latinLnBrk="0" hangingPunct="1">
+                        <a:lnSpc>
+                          <a:spcPct val="100000"/>
+                        </a:lnSpc>
+                        <a:spcBef>
+                          <a:spcPts val="0"/>
+                        </a:spcBef>
+                        <a:spcAft>
+                          <a:spcPts val="0"/>
+                        </a:spcAft>
+                        <a:buClrTx/>
+                        <a:buSzTx/>
+                        <a:buFont typeface="Arial" panose="020B0604020202020204" pitchFamily="34" charset="0"/>
+                        <a:buNone/>
+                        <a:tabLst/>
+                        <a:defRPr/>
+                      </a:pPr>
+                      <a:r>
+                        <a:rPr lang="af-ZA" sz="1700" b="0" i="0" kern="1200" dirty="0">
+                          <a:solidFill>
+                            <a:schemeClr val="tx1"/>
+                          </a:solidFill>
+                          <a:effectLst/>
+                          <a:latin typeface="+mn-lt"/>
+                          <a:ea typeface="+mn-ea"/>
+                          <a:cs typeface="+mn-cs"/>
+                        </a:rPr>
+                        <a:t>TokenCount – </a:t>
+                      </a:r>
+                      <a:r>
+                        <a:rPr lang="ru-RU" sz="1700" b="0" i="0" kern="1200" dirty="0">
+                          <a:solidFill>
+                            <a:schemeClr val="tx1"/>
+                          </a:solidFill>
+                          <a:effectLst/>
+                          <a:latin typeface="+mn-lt"/>
+                          <a:ea typeface="+mn-ea"/>
+                          <a:cs typeface="+mn-cs"/>
+                        </a:rPr>
+                        <a:t>число смысловых токенов</a:t>
+                      </a:r>
+                    </a:p>
+                  </a:txBody>
+                  <a:tcPr>
+                    <a:lnL w="12700" cap="flat" cmpd="sng" algn="ctr">
+                      <a:solidFill>
+                        <a:schemeClr val="tx1"/>
+                      </a:solidFill>
+                      <a:prstDash val="solid"/>
+                      <a:round/>
+                      <a:headEnd type="none" w="med" len="med"/>
+                      <a:tailEnd type="none" w="med" len="med"/>
+                    </a:lnL>
+                    <a:lnR w="12700" cap="flat" cmpd="sng" algn="ctr">
+                      <a:solidFill>
+                        <a:schemeClr val="tx1"/>
+                      </a:solidFill>
+                      <a:prstDash val="solid"/>
+                      <a:round/>
+                      <a:headEnd type="none" w="med" len="med"/>
+                      <a:tailEnd type="none" w="med" len="med"/>
+                    </a:lnR>
+                    <a:lnT w="12700" cap="flat" cmpd="sng" algn="ctr">
+                      <a:solidFill>
+                        <a:schemeClr val="tx1"/>
+                      </a:solidFill>
+                      <a:prstDash val="solid"/>
+                      <a:round/>
+                      <a:headEnd type="none" w="med" len="med"/>
+                      <a:tailEnd type="none" w="med" len="med"/>
+                    </a:lnT>
+                    <a:lnB w="12700" cap="flat" cmpd="sng" algn="ctr">
+                      <a:solidFill>
+                        <a:schemeClr val="tx1"/>
+                      </a:solidFill>
+                      <a:prstDash val="solid"/>
+                      <a:round/>
+                      <a:headEnd type="none" w="med" len="med"/>
+                      <a:tailEnd type="none" w="med" len="med"/>
+                    </a:lnB>
+                  </a:tcPr>
+                </a:tc>
+                <a:tc>
+                  <a:txBody>
+                    <a:bodyPr/>
+                    <a:lstStyle/>
+                    <a:p>
+                      <a:pPr marL="0" marR="0" lvl="0" indent="0" algn="ctr" defTabSz="914400" rtl="0" eaLnBrk="1" fontAlgn="auto" latinLnBrk="0" hangingPunct="1">
+                        <a:lnSpc>
+                          <a:spcPct val="100000"/>
+                        </a:lnSpc>
+                        <a:spcBef>
+                          <a:spcPts val="0"/>
+                        </a:spcBef>
+                        <a:spcAft>
+                          <a:spcPts val="0"/>
+                        </a:spcAft>
+                        <a:buClrTx/>
+                        <a:buSzTx/>
+                        <a:buFont typeface="Arial" panose="020B0604020202020204" pitchFamily="34" charset="0"/>
+                        <a:buNone/>
+                        <a:tabLst/>
+                        <a:defRPr/>
+                      </a:pPr>
+                      <a:r>
+                        <a:rPr lang="ru-RU" sz="1700" b="0" i="0" kern="1200" dirty="0">
+                          <a:solidFill>
+                            <a:schemeClr val="tx1"/>
+                          </a:solidFill>
+                          <a:effectLst/>
+                          <a:latin typeface="+mn-lt"/>
+                          <a:ea typeface="+mn-ea"/>
+                          <a:cs typeface="+mn-cs"/>
+                        </a:rPr>
+                        <a:t>HasBrandPrefix – содержит ли название бренда</a:t>
+                      </a:r>
+                    </a:p>
+                  </a:txBody>
+                  <a:tcPr>
+                    <a:lnL w="12700" cap="flat" cmpd="sng" algn="ctr">
+                      <a:solidFill>
+                        <a:schemeClr val="tx1"/>
+                      </a:solidFill>
+                      <a:prstDash val="solid"/>
+                      <a:round/>
+                      <a:headEnd type="none" w="med" len="med"/>
+                      <a:tailEnd type="none" w="med" len="med"/>
+                    </a:lnL>
+                    <a:lnR w="12700" cap="flat" cmpd="sng" algn="ctr">
+                      <a:solidFill>
+                        <a:schemeClr val="tx1"/>
+                      </a:solidFill>
+                      <a:prstDash val="solid"/>
+                      <a:round/>
+                      <a:headEnd type="none" w="med" len="med"/>
+                      <a:tailEnd type="none" w="med" len="med"/>
+                    </a:lnR>
+                    <a:lnT w="12700" cap="flat" cmpd="sng" algn="ctr">
+                      <a:solidFill>
+                        <a:schemeClr val="tx1"/>
+                      </a:solidFill>
+                      <a:prstDash val="solid"/>
+                      <a:round/>
+                      <a:headEnd type="none" w="med" len="med"/>
+                      <a:tailEnd type="none" w="med" len="med"/>
+                    </a:lnT>
+                    <a:lnB w="12700" cap="flat" cmpd="sng" algn="ctr">
+                      <a:solidFill>
+                        <a:schemeClr val="tx1"/>
+                      </a:solidFill>
+                      <a:prstDash val="solid"/>
+                      <a:round/>
+                      <a:headEnd type="none" w="med" len="med"/>
+                      <a:tailEnd type="none" w="med" len="med"/>
+                    </a:lnB>
+                  </a:tcPr>
+                </a:tc>
+                <a:tc>
+                  <a:txBody>
+                    <a:bodyPr/>
+                    <a:lstStyle/>
+                    <a:p>
+                      <a:pPr marL="0" indent="0" algn="ctr">
+                        <a:buFont typeface="Arial" panose="020B0604020202020204" pitchFamily="34" charset="0"/>
+                        <a:buNone/>
+                      </a:pPr>
+                      <a:r>
+                        <a:rPr lang="af-ZA" sz="1700" b="0" i="0" kern="1200" dirty="0">
+                          <a:solidFill>
+                            <a:schemeClr val="tx1"/>
+                          </a:solidFill>
+                          <a:effectLst/>
+                          <a:latin typeface="+mn-lt"/>
+                          <a:ea typeface="+mn-ea"/>
+                          <a:cs typeface="+mn-cs"/>
+                        </a:rPr>
+                        <a:t>BigramEnglishScore – </a:t>
+                      </a:r>
+                      <a:r>
+                        <a:rPr lang="ru-RU" sz="1700" b="0" i="0" kern="1200" dirty="0">
+                          <a:solidFill>
+                            <a:schemeClr val="tx1"/>
+                          </a:solidFill>
+                          <a:effectLst/>
+                          <a:latin typeface="+mn-lt"/>
+                          <a:ea typeface="+mn-ea"/>
+                          <a:cs typeface="+mn-cs"/>
+                        </a:rPr>
+                        <a:t>оценка двухбуквенных сочетаний</a:t>
+                      </a:r>
+                      <a:endParaRPr lang="ru-RU" sz="1700" dirty="0"/>
+                    </a:p>
+                  </a:txBody>
+                  <a:tcPr>
+                    <a:lnL w="12700" cap="flat" cmpd="sng" algn="ctr">
+                      <a:solidFill>
+                        <a:schemeClr val="tx1"/>
+                      </a:solidFill>
+                      <a:prstDash val="solid"/>
+                      <a:round/>
+                      <a:headEnd type="none" w="med" len="med"/>
+                      <a:tailEnd type="none" w="med" len="med"/>
+                    </a:lnL>
+                    <a:lnR w="12700" cap="flat" cmpd="sng" algn="ctr">
+                      <a:solidFill>
+                        <a:schemeClr val="tx1"/>
+                      </a:solidFill>
+                      <a:prstDash val="solid"/>
+                      <a:round/>
+                      <a:headEnd type="none" w="med" len="med"/>
+                      <a:tailEnd type="none" w="med" len="med"/>
+                    </a:lnR>
+                    <a:lnT w="12700" cap="flat" cmpd="sng" algn="ctr">
+                      <a:solidFill>
+                        <a:schemeClr val="tx1"/>
+                      </a:solidFill>
+                      <a:prstDash val="solid"/>
+                      <a:round/>
+                      <a:headEnd type="none" w="med" len="med"/>
+                      <a:tailEnd type="none" w="med" len="med"/>
+                    </a:lnT>
+                    <a:lnB w="12700" cap="flat" cmpd="sng" algn="ctr">
+                      <a:solidFill>
+                        <a:schemeClr val="tx1"/>
+                      </a:solidFill>
+                      <a:prstDash val="solid"/>
+                      <a:round/>
+                      <a:headEnd type="none" w="med" len="med"/>
+                      <a:tailEnd type="none" w="med" len="med"/>
+                    </a:lnB>
+                  </a:tcPr>
+                </a:tc>
+                <a:extLst>
+                  <a:ext uri="{0D108BD9-81ED-4DB2-BD59-A6C34878D82A}">
+                    <a16:rowId xmlns:a16="http://schemas.microsoft.com/office/drawing/2014/main" val="2487338795"/>
+                  </a:ext>
+                </a:extLst>
+              </a:tr>
+              <a:tr h="902368">
+                <a:tc>
+                  <a:txBody>
+                    <a:bodyPr/>
+                    <a:lstStyle/>
+                    <a:p>
+                      <a:pPr marL="0" marR="0" lvl="0" indent="0" algn="ctr" defTabSz="914400" rtl="0" eaLnBrk="1" fontAlgn="auto" latinLnBrk="0" hangingPunct="1">
+                        <a:lnSpc>
+                          <a:spcPct val="100000"/>
+                        </a:lnSpc>
+                        <a:spcBef>
+                          <a:spcPts val="0"/>
+                        </a:spcBef>
+                        <a:spcAft>
+                          <a:spcPts val="0"/>
+                        </a:spcAft>
+                        <a:buClrTx/>
+                        <a:buSzTx/>
+                        <a:buFont typeface="Arial" panose="020B0604020202020204" pitchFamily="34" charset="0"/>
+                        <a:buNone/>
+                        <a:tabLst/>
+                        <a:defRPr/>
+                      </a:pPr>
+                      <a:r>
+                        <a:rPr lang="af-ZA" sz="1700" b="0" i="0" kern="1200" dirty="0">
+                          <a:solidFill>
+                            <a:schemeClr val="tx1"/>
+                          </a:solidFill>
+                          <a:effectLst/>
+                          <a:latin typeface="+mn-lt"/>
+                          <a:ea typeface="+mn-ea"/>
+                          <a:cs typeface="+mn-cs"/>
+                        </a:rPr>
+                        <a:t>SubdomainCount – </a:t>
+                      </a:r>
+                      <a:r>
+                        <a:rPr lang="ru-RU" sz="1700" b="0" i="0" kern="1200" dirty="0">
+                          <a:solidFill>
+                            <a:schemeClr val="tx1"/>
+                          </a:solidFill>
+                          <a:effectLst/>
+                          <a:latin typeface="+mn-lt"/>
+                          <a:ea typeface="+mn-ea"/>
+                          <a:cs typeface="+mn-cs"/>
+                        </a:rPr>
+                        <a:t>количество поддоменов</a:t>
+                      </a:r>
+                    </a:p>
+                  </a:txBody>
+                  <a:tcPr>
+                    <a:lnL w="12700" cap="flat" cmpd="sng" algn="ctr">
+                      <a:solidFill>
+                        <a:schemeClr val="tx1"/>
+                      </a:solidFill>
+                      <a:prstDash val="solid"/>
+                      <a:round/>
+                      <a:headEnd type="none" w="med" len="med"/>
+                      <a:tailEnd type="none" w="med" len="med"/>
+                    </a:lnL>
+                    <a:lnR w="12700" cap="flat" cmpd="sng" algn="ctr">
+                      <a:solidFill>
+                        <a:schemeClr val="tx1"/>
+                      </a:solidFill>
+                      <a:prstDash val="solid"/>
+                      <a:round/>
+                      <a:headEnd type="none" w="med" len="med"/>
+                      <a:tailEnd type="none" w="med" len="med"/>
+                    </a:lnR>
+                    <a:lnT w="12700" cap="flat" cmpd="sng" algn="ctr">
+                      <a:solidFill>
+                        <a:schemeClr val="tx1"/>
+                      </a:solidFill>
+                      <a:prstDash val="solid"/>
+                      <a:round/>
+                      <a:headEnd type="none" w="med" len="med"/>
+                      <a:tailEnd type="none" w="med" len="med"/>
+                    </a:lnT>
+                    <a:lnB w="12700" cap="flat" cmpd="sng" algn="ctr">
+                      <a:solidFill>
+                        <a:schemeClr val="tx1"/>
+                      </a:solidFill>
+                      <a:prstDash val="solid"/>
+                      <a:round/>
+                      <a:headEnd type="none" w="med" len="med"/>
+                      <a:tailEnd type="none" w="med" len="med"/>
+                    </a:lnB>
+                  </a:tcPr>
+                </a:tc>
+                <a:tc>
+                  <a:txBody>
+                    <a:bodyPr/>
+                    <a:lstStyle/>
+                    <a:p>
+                      <a:pPr marL="0" marR="0" lvl="0" indent="0" algn="ctr" defTabSz="914400" rtl="0" eaLnBrk="1" fontAlgn="auto" latinLnBrk="0" hangingPunct="1">
+                        <a:lnSpc>
+                          <a:spcPct val="100000"/>
+                        </a:lnSpc>
+                        <a:spcBef>
+                          <a:spcPts val="0"/>
+                        </a:spcBef>
+                        <a:spcAft>
+                          <a:spcPts val="0"/>
+                        </a:spcAft>
+                        <a:buClrTx/>
+                        <a:buSzTx/>
+                        <a:buFont typeface="Arial" panose="020B0604020202020204" pitchFamily="34" charset="0"/>
+                        <a:buNone/>
+                        <a:tabLst/>
+                        <a:defRPr/>
+                      </a:pPr>
+                      <a:r>
+                        <a:rPr lang="ru-RU" sz="1700" b="0" i="0" kern="1200" dirty="0">
+                          <a:solidFill>
+                            <a:schemeClr val="tx1"/>
+                          </a:solidFill>
+                          <a:effectLst/>
+                          <a:latin typeface="+mn-lt"/>
+                          <a:ea typeface="+mn-ea"/>
+                          <a:cs typeface="+mn-cs"/>
+                        </a:rPr>
+                        <a:t>DigitToLengthRatio – отношение цифр к длине </a:t>
+                      </a:r>
+                      <a:r>
+                        <a:rPr lang="en-US" sz="1700" b="0" i="0" kern="1200" dirty="0">
+                          <a:solidFill>
+                            <a:schemeClr val="tx1"/>
+                          </a:solidFill>
+                          <a:effectLst/>
+                          <a:latin typeface="+mn-lt"/>
+                          <a:ea typeface="+mn-ea"/>
+                          <a:cs typeface="+mn-cs"/>
+                        </a:rPr>
+                        <a:t>DNS</a:t>
+                      </a:r>
+                      <a:endParaRPr lang="ru-RU" sz="1700" b="0" i="0" kern="1200" dirty="0">
+                        <a:solidFill>
+                          <a:schemeClr val="tx1"/>
+                        </a:solidFill>
+                        <a:effectLst/>
+                        <a:latin typeface="+mn-lt"/>
+                        <a:ea typeface="+mn-ea"/>
+                        <a:cs typeface="+mn-cs"/>
+                      </a:endParaRPr>
+                    </a:p>
+                  </a:txBody>
+                  <a:tcPr>
+                    <a:lnL w="12700" cap="flat" cmpd="sng" algn="ctr">
+                      <a:solidFill>
+                        <a:schemeClr val="tx1"/>
+                      </a:solidFill>
+                      <a:prstDash val="solid"/>
+                      <a:round/>
+                      <a:headEnd type="none" w="med" len="med"/>
+                      <a:tailEnd type="none" w="med" len="med"/>
+                    </a:lnL>
+                    <a:lnR w="12700" cap="flat" cmpd="sng" algn="ctr">
+                      <a:solidFill>
+                        <a:schemeClr val="tx1"/>
+                      </a:solidFill>
+                      <a:prstDash val="solid"/>
+                      <a:round/>
+                      <a:headEnd type="none" w="med" len="med"/>
+                      <a:tailEnd type="none" w="med" len="med"/>
+                    </a:lnR>
+                    <a:lnT w="12700" cap="flat" cmpd="sng" algn="ctr">
+                      <a:solidFill>
+                        <a:schemeClr val="tx1"/>
+                      </a:solidFill>
+                      <a:prstDash val="solid"/>
+                      <a:round/>
+                      <a:headEnd type="none" w="med" len="med"/>
+                      <a:tailEnd type="none" w="med" len="med"/>
+                    </a:lnT>
+                    <a:lnB w="12700" cap="flat" cmpd="sng" algn="ctr">
+                      <a:solidFill>
+                        <a:schemeClr val="tx1"/>
+                      </a:solidFill>
+                      <a:prstDash val="solid"/>
+                      <a:round/>
+                      <a:headEnd type="none" w="med" len="med"/>
+                      <a:tailEnd type="none" w="med" len="med"/>
+                    </a:lnB>
+                  </a:tcPr>
+                </a:tc>
+                <a:tc>
+                  <a:txBody>
+                    <a:bodyPr/>
+                    <a:lstStyle/>
+                    <a:p>
+                      <a:pPr marL="0" marR="0" lvl="0" indent="0" algn="ctr" defTabSz="914400" rtl="0" eaLnBrk="1" fontAlgn="auto" latinLnBrk="0" hangingPunct="1">
+                        <a:lnSpc>
+                          <a:spcPct val="100000"/>
+                        </a:lnSpc>
+                        <a:spcBef>
+                          <a:spcPts val="0"/>
+                        </a:spcBef>
+                        <a:spcAft>
+                          <a:spcPts val="0"/>
+                        </a:spcAft>
+                        <a:buClrTx/>
+                        <a:buSzTx/>
+                        <a:buFont typeface="Arial" panose="020B0604020202020204" pitchFamily="34" charset="0"/>
+                        <a:buNone/>
+                        <a:tabLst/>
+                        <a:defRPr/>
+                      </a:pPr>
+                      <a:r>
+                        <a:rPr lang="ru-RU" sz="1700" b="0" i="0" kern="1200" dirty="0">
+                          <a:solidFill>
+                            <a:schemeClr val="tx1"/>
+                          </a:solidFill>
+                          <a:effectLst/>
+                          <a:latin typeface="+mn-lt"/>
+                          <a:ea typeface="+mn-ea"/>
+                          <a:cs typeface="+mn-cs"/>
+                        </a:rPr>
+                        <a:t>CharacterTransitionScore – плавность переходов между символами</a:t>
+                      </a:r>
+                    </a:p>
+                  </a:txBody>
+                  <a:tcPr>
+                    <a:lnL w="12700" cap="flat" cmpd="sng" algn="ctr">
+                      <a:solidFill>
+                        <a:schemeClr val="tx1"/>
+                      </a:solidFill>
+                      <a:prstDash val="solid"/>
+                      <a:round/>
+                      <a:headEnd type="none" w="med" len="med"/>
+                      <a:tailEnd type="none" w="med" len="med"/>
+                    </a:lnL>
+                    <a:lnR w="12700" cap="flat" cmpd="sng" algn="ctr">
+                      <a:solidFill>
+                        <a:schemeClr val="tx1"/>
+                      </a:solidFill>
+                      <a:prstDash val="solid"/>
+                      <a:round/>
+                      <a:headEnd type="none" w="med" len="med"/>
+                      <a:tailEnd type="none" w="med" len="med"/>
+                    </a:lnR>
+                    <a:lnT w="12700" cap="flat" cmpd="sng" algn="ctr">
+                      <a:solidFill>
+                        <a:schemeClr val="tx1"/>
+                      </a:solidFill>
+                      <a:prstDash val="solid"/>
+                      <a:round/>
+                      <a:headEnd type="none" w="med" len="med"/>
+                      <a:tailEnd type="none" w="med" len="med"/>
+                    </a:lnT>
+                    <a:lnB w="12700" cap="flat" cmpd="sng" algn="ctr">
+                      <a:solidFill>
+                        <a:schemeClr val="tx1"/>
+                      </a:solidFill>
+                      <a:prstDash val="solid"/>
+                      <a:round/>
+                      <a:headEnd type="none" w="med" len="med"/>
+                      <a:tailEnd type="none" w="med" len="med"/>
+                    </a:lnB>
+                  </a:tcPr>
+                </a:tc>
+                <a:extLst>
+                  <a:ext uri="{0D108BD9-81ED-4DB2-BD59-A6C34878D82A}">
+                    <a16:rowId xmlns:a16="http://schemas.microsoft.com/office/drawing/2014/main" val="2791710359"/>
+                  </a:ext>
+                </a:extLst>
+              </a:tr>
+              <a:tr h="631658">
+                <a:tc>
+                  <a:txBody>
+                    <a:bodyPr/>
+                    <a:lstStyle/>
+                    <a:p>
+                      <a:pPr marL="0" marR="0" lvl="0" indent="0" algn="ctr" defTabSz="914400" rtl="0" eaLnBrk="1" fontAlgn="auto" latinLnBrk="0" hangingPunct="1">
+                        <a:lnSpc>
+                          <a:spcPct val="100000"/>
+                        </a:lnSpc>
+                        <a:spcBef>
+                          <a:spcPts val="0"/>
+                        </a:spcBef>
+                        <a:spcAft>
+                          <a:spcPts val="0"/>
+                        </a:spcAft>
+                        <a:buClrTx/>
+                        <a:buSzTx/>
+                        <a:buFont typeface="Arial" panose="020B0604020202020204" pitchFamily="34" charset="0"/>
+                        <a:buNone/>
+                        <a:tabLst/>
+                        <a:defRPr/>
+                      </a:pPr>
+                      <a:r>
+                        <a:rPr lang="ru-RU" sz="1700" b="0" i="0" kern="1200" dirty="0">
+                          <a:solidFill>
+                            <a:schemeClr val="tx1"/>
+                          </a:solidFill>
+                          <a:effectLst/>
+                          <a:latin typeface="+mn-lt"/>
+                          <a:ea typeface="+mn-ea"/>
+                          <a:cs typeface="+mn-cs"/>
+                        </a:rPr>
+                        <a:t>HasHyphenInDomain – наличие дефиса в домене</a:t>
+                      </a:r>
+                    </a:p>
+                  </a:txBody>
+                  <a:tcPr>
+                    <a:lnL w="12700" cap="flat" cmpd="sng" algn="ctr">
+                      <a:solidFill>
+                        <a:schemeClr val="tx1"/>
+                      </a:solidFill>
+                      <a:prstDash val="solid"/>
+                      <a:round/>
+                      <a:headEnd type="none" w="med" len="med"/>
+                      <a:tailEnd type="none" w="med" len="med"/>
+                    </a:lnL>
+                    <a:lnR w="12700" cap="flat" cmpd="sng" algn="ctr">
+                      <a:solidFill>
+                        <a:schemeClr val="tx1"/>
+                      </a:solidFill>
+                      <a:prstDash val="solid"/>
+                      <a:round/>
+                      <a:headEnd type="none" w="med" len="med"/>
+                      <a:tailEnd type="none" w="med" len="med"/>
+                    </a:lnR>
+                    <a:lnT w="12700" cap="flat" cmpd="sng" algn="ctr">
+                      <a:solidFill>
+                        <a:schemeClr val="tx1"/>
+                      </a:solidFill>
+                      <a:prstDash val="solid"/>
+                      <a:round/>
+                      <a:headEnd type="none" w="med" len="med"/>
+                      <a:tailEnd type="none" w="med" len="med"/>
+                    </a:lnT>
+                    <a:lnB w="12700" cap="flat" cmpd="sng" algn="ctr">
+                      <a:solidFill>
+                        <a:schemeClr val="tx1"/>
+                      </a:solidFill>
+                      <a:prstDash val="solid"/>
+                      <a:round/>
+                      <a:headEnd type="none" w="med" len="med"/>
+                      <a:tailEnd type="none" w="med" len="med"/>
+                    </a:lnB>
+                  </a:tcPr>
+                </a:tc>
+                <a:tc>
+                  <a:txBody>
+                    <a:bodyPr/>
+                    <a:lstStyle/>
+                    <a:p>
+                      <a:pPr marL="0" marR="0" lvl="0" indent="0" algn="ctr" defTabSz="914400" rtl="0" eaLnBrk="1" fontAlgn="auto" latinLnBrk="0" hangingPunct="1">
+                        <a:lnSpc>
+                          <a:spcPct val="100000"/>
+                        </a:lnSpc>
+                        <a:spcBef>
+                          <a:spcPts val="0"/>
+                        </a:spcBef>
+                        <a:spcAft>
+                          <a:spcPts val="0"/>
+                        </a:spcAft>
+                        <a:buClrTx/>
+                        <a:buSzTx/>
+                        <a:buFont typeface="Arial" panose="020B0604020202020204" pitchFamily="34" charset="0"/>
+                        <a:buNone/>
+                        <a:tabLst/>
+                        <a:defRPr/>
+                      </a:pPr>
+                      <a:r>
+                        <a:rPr lang="af-ZA" sz="1700" b="0" i="0" kern="1200" dirty="0">
+                          <a:solidFill>
+                            <a:schemeClr val="tx1"/>
+                          </a:solidFill>
+                          <a:effectLst/>
+                          <a:latin typeface="+mn-lt"/>
+                          <a:ea typeface="+mn-ea"/>
+                          <a:cs typeface="+mn-cs"/>
+                        </a:rPr>
+                        <a:t>ConsonantClusterScore – </a:t>
+                      </a:r>
+                      <a:r>
+                        <a:rPr lang="ru-RU" sz="1700" b="0" i="0" kern="1200" dirty="0">
+                          <a:solidFill>
+                            <a:schemeClr val="tx1"/>
+                          </a:solidFill>
+                          <a:effectLst/>
+                          <a:latin typeface="+mn-lt"/>
+                          <a:ea typeface="+mn-ea"/>
+                          <a:cs typeface="+mn-cs"/>
+                        </a:rPr>
+                        <a:t>скопление согласных подряд</a:t>
+                      </a:r>
+                    </a:p>
+                  </a:txBody>
+                  <a:tcPr>
+                    <a:lnL w="12700" cap="flat" cmpd="sng" algn="ctr">
+                      <a:solidFill>
+                        <a:schemeClr val="tx1"/>
+                      </a:solidFill>
+                      <a:prstDash val="solid"/>
+                      <a:round/>
+                      <a:headEnd type="none" w="med" len="med"/>
+                      <a:tailEnd type="none" w="med" len="med"/>
+                    </a:lnL>
+                    <a:lnR w="12700" cap="flat" cmpd="sng" algn="ctr">
+                      <a:solidFill>
+                        <a:schemeClr val="tx1"/>
+                      </a:solidFill>
+                      <a:prstDash val="solid"/>
+                      <a:round/>
+                      <a:headEnd type="none" w="med" len="med"/>
+                      <a:tailEnd type="none" w="med" len="med"/>
+                    </a:lnR>
+                    <a:lnT w="12700" cap="flat" cmpd="sng" algn="ctr">
+                      <a:solidFill>
+                        <a:schemeClr val="tx1"/>
+                      </a:solidFill>
+                      <a:prstDash val="solid"/>
+                      <a:round/>
+                      <a:headEnd type="none" w="med" len="med"/>
+                      <a:tailEnd type="none" w="med" len="med"/>
+                    </a:lnT>
+                    <a:lnB w="12700" cap="flat" cmpd="sng" algn="ctr">
+                      <a:solidFill>
+                        <a:schemeClr val="tx1"/>
+                      </a:solidFill>
+                      <a:prstDash val="solid"/>
+                      <a:round/>
+                      <a:headEnd type="none" w="med" len="med"/>
+                      <a:tailEnd type="none" w="med" len="med"/>
+                    </a:lnB>
+                  </a:tcPr>
+                </a:tc>
+                <a:tc>
+                  <a:txBody>
+                    <a:bodyPr/>
+                    <a:lstStyle/>
+                    <a:p>
+                      <a:pPr marL="0" indent="0" algn="ctr">
+                        <a:buFont typeface="Arial" panose="020B0604020202020204" pitchFamily="34" charset="0"/>
+                        <a:buNone/>
+                      </a:pPr>
+                      <a:r>
+                        <a:rPr lang="af-ZA" sz="1700" b="0" i="0" kern="1200" dirty="0">
+                          <a:solidFill>
+                            <a:schemeClr val="tx1"/>
+                          </a:solidFill>
+                          <a:effectLst/>
+                          <a:latin typeface="+mn-lt"/>
+                          <a:ea typeface="+mn-ea"/>
+                          <a:cs typeface="+mn-cs"/>
+                        </a:rPr>
+                        <a:t>RepeatedNGramScore – </a:t>
+                      </a:r>
+                      <a:r>
+                        <a:rPr lang="ru-RU" sz="1700" b="0" i="0" kern="1200" dirty="0">
+                          <a:solidFill>
+                            <a:schemeClr val="tx1"/>
+                          </a:solidFill>
+                          <a:effectLst/>
+                          <a:latin typeface="+mn-lt"/>
+                          <a:ea typeface="+mn-ea"/>
+                          <a:cs typeface="+mn-cs"/>
+                        </a:rPr>
+                        <a:t>повторяемость </a:t>
+                      </a:r>
+                      <a:r>
+                        <a:rPr lang="af-ZA" sz="1700" b="0" i="0" kern="1200" dirty="0">
+                          <a:solidFill>
+                            <a:schemeClr val="tx1"/>
+                          </a:solidFill>
+                          <a:effectLst/>
+                          <a:latin typeface="+mn-lt"/>
+                          <a:ea typeface="+mn-ea"/>
+                          <a:cs typeface="+mn-cs"/>
+                        </a:rPr>
+                        <a:t>N-</a:t>
+                      </a:r>
+                      <a:r>
+                        <a:rPr lang="ru-RU" sz="1700" b="0" i="0" kern="1200" dirty="0">
+                          <a:solidFill>
+                            <a:schemeClr val="tx1"/>
+                          </a:solidFill>
+                          <a:effectLst/>
+                          <a:latin typeface="+mn-lt"/>
+                          <a:ea typeface="+mn-ea"/>
+                          <a:cs typeface="+mn-cs"/>
+                        </a:rPr>
+                        <a:t>грамм</a:t>
+                      </a:r>
+                      <a:endParaRPr lang="ru-RU" sz="1700" dirty="0"/>
+                    </a:p>
+                  </a:txBody>
+                  <a:tcPr>
+                    <a:lnL w="12700" cap="flat" cmpd="sng" algn="ctr">
+                      <a:solidFill>
+                        <a:schemeClr val="tx1"/>
+                      </a:solidFill>
+                      <a:prstDash val="solid"/>
+                      <a:round/>
+                      <a:headEnd type="none" w="med" len="med"/>
+                      <a:tailEnd type="none" w="med" len="med"/>
+                    </a:lnL>
+                    <a:lnR w="12700" cap="flat" cmpd="sng" algn="ctr">
+                      <a:solidFill>
+                        <a:schemeClr val="tx1"/>
+                      </a:solidFill>
+                      <a:prstDash val="solid"/>
+                      <a:round/>
+                      <a:headEnd type="none" w="med" len="med"/>
+                      <a:tailEnd type="none" w="med" len="med"/>
+                    </a:lnR>
+                    <a:lnT w="12700" cap="flat" cmpd="sng" algn="ctr">
+                      <a:solidFill>
+                        <a:schemeClr val="tx1"/>
+                      </a:solidFill>
+                      <a:prstDash val="solid"/>
+                      <a:round/>
+                      <a:headEnd type="none" w="med" len="med"/>
+                      <a:tailEnd type="none" w="med" len="med"/>
+                    </a:lnT>
+                    <a:lnB w="12700" cap="flat" cmpd="sng" algn="ctr">
+                      <a:solidFill>
+                        <a:schemeClr val="tx1"/>
+                      </a:solidFill>
+                      <a:prstDash val="solid"/>
+                      <a:round/>
+                      <a:headEnd type="none" w="med" len="med"/>
+                      <a:tailEnd type="none" w="med" len="med"/>
+                    </a:lnB>
+                  </a:tcPr>
+                </a:tc>
+                <a:extLst>
+                  <a:ext uri="{0D108BD9-81ED-4DB2-BD59-A6C34878D82A}">
+                    <a16:rowId xmlns:a16="http://schemas.microsoft.com/office/drawing/2014/main" val="3882626614"/>
+                  </a:ext>
+                </a:extLst>
+              </a:tr>
+              <a:tr h="631658">
+                <a:tc>
+                  <a:txBody>
+                    <a:bodyPr/>
+                    <a:lstStyle/>
+                    <a:p>
+                      <a:pPr marL="0" marR="0" lvl="0" indent="0" algn="ctr" defTabSz="914400" rtl="0" eaLnBrk="1" fontAlgn="auto" latinLnBrk="0" hangingPunct="1">
+                        <a:lnSpc>
+                          <a:spcPct val="100000"/>
+                        </a:lnSpc>
+                        <a:spcBef>
+                          <a:spcPts val="0"/>
+                        </a:spcBef>
+                        <a:spcAft>
+                          <a:spcPts val="0"/>
+                        </a:spcAft>
+                        <a:buClrTx/>
+                        <a:buSzTx/>
+                        <a:buFont typeface="Arial" panose="020B0604020202020204" pitchFamily="34" charset="0"/>
+                        <a:buNone/>
+                        <a:tabLst/>
+                        <a:defRPr/>
+                      </a:pPr>
+                      <a:r>
+                        <a:rPr lang="af-ZA" sz="1700" b="0" i="0" kern="1200" dirty="0">
+                          <a:solidFill>
+                            <a:schemeClr val="tx1"/>
+                          </a:solidFill>
+                          <a:effectLst/>
+                          <a:latin typeface="+mn-lt"/>
+                          <a:ea typeface="+mn-ea"/>
+                          <a:cs typeface="+mn-cs"/>
+                        </a:rPr>
+                        <a:t>NumberOfDigits – </a:t>
+                      </a:r>
+                      <a:r>
+                        <a:rPr lang="ru-RU" sz="1700" b="0" i="0" kern="1200" dirty="0">
+                          <a:solidFill>
+                            <a:schemeClr val="tx1"/>
+                          </a:solidFill>
+                          <a:effectLst/>
+                          <a:latin typeface="+mn-lt"/>
+                          <a:ea typeface="+mn-ea"/>
+                          <a:cs typeface="+mn-cs"/>
+                        </a:rPr>
+                        <a:t>общее количество цифр</a:t>
+                      </a:r>
+                    </a:p>
+                  </a:txBody>
+                  <a:tcPr>
+                    <a:lnL w="12700" cap="flat" cmpd="sng" algn="ctr">
+                      <a:solidFill>
+                        <a:schemeClr val="tx1"/>
+                      </a:solidFill>
+                      <a:prstDash val="solid"/>
+                      <a:round/>
+                      <a:headEnd type="none" w="med" len="med"/>
+                      <a:tailEnd type="none" w="med" len="med"/>
+                    </a:lnL>
+                    <a:lnR w="12700" cap="flat" cmpd="sng" algn="ctr">
+                      <a:solidFill>
+                        <a:schemeClr val="tx1"/>
+                      </a:solidFill>
+                      <a:prstDash val="solid"/>
+                      <a:round/>
+                      <a:headEnd type="none" w="med" len="med"/>
+                      <a:tailEnd type="none" w="med" len="med"/>
+                    </a:lnR>
+                    <a:lnT w="12700" cap="flat" cmpd="sng" algn="ctr">
+                      <a:solidFill>
+                        <a:schemeClr val="tx1"/>
+                      </a:solidFill>
+                      <a:prstDash val="solid"/>
+                      <a:round/>
+                      <a:headEnd type="none" w="med" len="med"/>
+                      <a:tailEnd type="none" w="med" len="med"/>
+                    </a:lnT>
+                    <a:lnB w="12700" cap="flat" cmpd="sng" algn="ctr">
+                      <a:solidFill>
+                        <a:schemeClr val="tx1"/>
+                      </a:solidFill>
+                      <a:prstDash val="solid"/>
+                      <a:round/>
+                      <a:headEnd type="none" w="med" len="med"/>
+                      <a:tailEnd type="none" w="med" len="med"/>
+                    </a:lnB>
+                  </a:tcPr>
+                </a:tc>
+                <a:tc>
+                  <a:txBody>
+                    <a:bodyPr/>
+                    <a:lstStyle/>
+                    <a:p>
+                      <a:pPr marL="0" marR="0" lvl="0" indent="0" algn="ctr" defTabSz="914400" rtl="0" eaLnBrk="1" fontAlgn="auto" latinLnBrk="0" hangingPunct="1">
+                        <a:lnSpc>
+                          <a:spcPct val="100000"/>
+                        </a:lnSpc>
+                        <a:spcBef>
+                          <a:spcPts val="0"/>
+                        </a:spcBef>
+                        <a:spcAft>
+                          <a:spcPts val="0"/>
+                        </a:spcAft>
+                        <a:buClrTx/>
+                        <a:buSzTx/>
+                        <a:buFont typeface="Arial" panose="020B0604020202020204" pitchFamily="34" charset="0"/>
+                        <a:buNone/>
+                        <a:tabLst/>
+                        <a:defRPr/>
+                      </a:pPr>
+                      <a:r>
+                        <a:rPr lang="ru-RU" sz="1700" b="0" i="0" kern="1200" dirty="0">
+                          <a:solidFill>
+                            <a:schemeClr val="tx1"/>
+                          </a:solidFill>
+                          <a:effectLst/>
+                          <a:latin typeface="+mn-lt"/>
+                          <a:ea typeface="+mn-ea"/>
+                          <a:cs typeface="+mn-cs"/>
+                        </a:rPr>
+                        <a:t>IsAllSubdomain – всё ли выглядит как поддомены</a:t>
+                      </a:r>
+                    </a:p>
+                  </a:txBody>
+                  <a:tcPr>
+                    <a:lnL w="12700" cap="flat" cmpd="sng" algn="ctr">
+                      <a:solidFill>
+                        <a:schemeClr val="tx1"/>
+                      </a:solidFill>
+                      <a:prstDash val="solid"/>
+                      <a:round/>
+                      <a:headEnd type="none" w="med" len="med"/>
+                      <a:tailEnd type="none" w="med" len="med"/>
+                    </a:lnL>
+                    <a:lnR w="12700" cap="flat" cmpd="sng" algn="ctr">
+                      <a:solidFill>
+                        <a:schemeClr val="tx1"/>
+                      </a:solidFill>
+                      <a:prstDash val="solid"/>
+                      <a:round/>
+                      <a:headEnd type="none" w="med" len="med"/>
+                      <a:tailEnd type="none" w="med" len="med"/>
+                    </a:lnR>
+                    <a:lnT w="12700" cap="flat" cmpd="sng" algn="ctr">
+                      <a:solidFill>
+                        <a:schemeClr val="tx1"/>
+                      </a:solidFill>
+                      <a:prstDash val="solid"/>
+                      <a:round/>
+                      <a:headEnd type="none" w="med" len="med"/>
+                      <a:tailEnd type="none" w="med" len="med"/>
+                    </a:lnT>
+                    <a:lnB w="12700" cap="flat" cmpd="sng" algn="ctr">
+                      <a:solidFill>
+                        <a:schemeClr val="tx1"/>
+                      </a:solidFill>
+                      <a:prstDash val="solid"/>
+                      <a:round/>
+                      <a:headEnd type="none" w="med" len="med"/>
+                      <a:tailEnd type="none" w="med" len="med"/>
+                    </a:lnB>
+                  </a:tcPr>
+                </a:tc>
+                <a:tc>
+                  <a:txBody>
+                    <a:bodyPr/>
+                    <a:lstStyle/>
+                    <a:p>
+                      <a:pPr marL="0" marR="0" lvl="0" indent="0" algn="ctr" defTabSz="914400" rtl="0" eaLnBrk="1" fontAlgn="auto" latinLnBrk="0" hangingPunct="1">
+                        <a:lnSpc>
+                          <a:spcPct val="100000"/>
+                        </a:lnSpc>
+                        <a:spcBef>
+                          <a:spcPts val="0"/>
+                        </a:spcBef>
+                        <a:spcAft>
+                          <a:spcPts val="0"/>
+                        </a:spcAft>
+                        <a:buClrTx/>
+                        <a:buSzTx/>
+                        <a:buFont typeface="Arial" panose="020B0604020202020204" pitchFamily="34" charset="0"/>
+                        <a:buNone/>
+                        <a:tabLst/>
+                        <a:defRPr/>
+                      </a:pPr>
+                      <a:r>
+                        <a:rPr lang="af-ZA" sz="1700" b="0" i="0" kern="1200" dirty="0">
+                          <a:solidFill>
+                            <a:schemeClr val="tx1"/>
+                          </a:solidFill>
+                          <a:effectLst/>
+                          <a:latin typeface="+mn-lt"/>
+                          <a:ea typeface="+mn-ea"/>
+                          <a:cs typeface="+mn-cs"/>
+                        </a:rPr>
+                        <a:t>ClassLabel – </a:t>
+                      </a:r>
+                      <a:r>
+                        <a:rPr lang="ru-RU" sz="1700" b="0" i="0" kern="1200" dirty="0">
+                          <a:solidFill>
+                            <a:schemeClr val="tx1"/>
+                          </a:solidFill>
+                          <a:effectLst/>
+                          <a:latin typeface="+mn-lt"/>
+                          <a:ea typeface="+mn-ea"/>
+                          <a:cs typeface="+mn-cs"/>
+                        </a:rPr>
+                        <a:t>метка класса (</a:t>
+                      </a:r>
+                      <a:r>
+                        <a:rPr lang="af-ZA" sz="1700" b="0" i="0" kern="1200" dirty="0">
+                          <a:solidFill>
+                            <a:schemeClr val="tx1"/>
+                          </a:solidFill>
+                          <a:effectLst/>
+                          <a:latin typeface="+mn-lt"/>
+                          <a:ea typeface="+mn-ea"/>
+                          <a:cs typeface="+mn-cs"/>
+                        </a:rPr>
+                        <a:t>phishing / legitimate)</a:t>
+                      </a:r>
+                    </a:p>
+                  </a:txBody>
+                  <a:tcPr>
+                    <a:lnL w="12700" cap="flat" cmpd="sng" algn="ctr">
+                      <a:solidFill>
+                        <a:schemeClr val="tx1"/>
+                      </a:solidFill>
+                      <a:prstDash val="solid"/>
+                      <a:round/>
+                      <a:headEnd type="none" w="med" len="med"/>
+                      <a:tailEnd type="none" w="med" len="med"/>
+                    </a:lnL>
+                    <a:lnR w="12700" cap="flat" cmpd="sng" algn="ctr">
+                      <a:solidFill>
+                        <a:schemeClr val="tx1"/>
+                      </a:solidFill>
+                      <a:prstDash val="solid"/>
+                      <a:round/>
+                      <a:headEnd type="none" w="med" len="med"/>
+                      <a:tailEnd type="none" w="med" len="med"/>
+                    </a:lnR>
+                    <a:lnT w="12700" cap="flat" cmpd="sng" algn="ctr">
+                      <a:solidFill>
+                        <a:schemeClr val="tx1"/>
+                      </a:solidFill>
+                      <a:prstDash val="solid"/>
+                      <a:round/>
+                      <a:headEnd type="none" w="med" len="med"/>
+                      <a:tailEnd type="none" w="med" len="med"/>
+                    </a:lnT>
+                    <a:lnB w="12700" cap="flat" cmpd="sng" algn="ctr">
+                      <a:solidFill>
+                        <a:schemeClr val="tx1"/>
+                      </a:solidFill>
+                      <a:prstDash val="solid"/>
+                      <a:round/>
+                      <a:headEnd type="none" w="med" len="med"/>
+                      <a:tailEnd type="none" w="med" len="med"/>
+                    </a:lnB>
+                  </a:tcPr>
+                </a:tc>
+                <a:extLst>
+                  <a:ext uri="{0D108BD9-81ED-4DB2-BD59-A6C34878D82A}">
+                    <a16:rowId xmlns:a16="http://schemas.microsoft.com/office/drawing/2014/main" val="2808608992"/>
+                  </a:ext>
+                </a:extLst>
+              </a:tr>
+            </a:tbl>
+          </a:graphicData>
+        </a:graphic>
+      </p:graphicFrame>
     </p:spTree>
     <p:extLst>
       <p:ext uri="{BB962C8B-B14F-4D97-AF65-F5344CB8AC3E}">
-        <p14:creationId xmlns:p14="http://schemas.microsoft.com/office/powerpoint/2010/main" val="485132904"/>
+        <p14:creationId xmlns:p14="http://schemas.microsoft.com/office/powerpoint/2010/main" val="4196442722"/>
       </p:ext>
     </p:extLst>
   </p:cSld>
@@ -21643,7 +24158,7 @@
             <p:ph sz="quarter" idx="4"/>
             <p:extLst>
               <p:ext uri="{D42A27DB-BD31-4B8C-83A1-F6EECF244321}">
-                <p14:modId xmlns:p14="http://schemas.microsoft.com/office/powerpoint/2010/main" val="3718895664"/>
+                <p14:modId xmlns:p14="http://schemas.microsoft.com/office/powerpoint/2010/main" val="2971503242"/>
               </p:ext>
             </p:extLst>
           </p:nvPr>
@@ -21686,7 +24201,7 @@
                       </a:r>
                       <a:r>
                         <a:rPr lang="en-US" dirty="0"/>
-                        <a:t>URL)</a:t>
+                        <a:t>DNS)</a:t>
                       </a:r>
                     </a:p>
                   </a:txBody>
@@ -21791,7 +24306,7 @@
                     <a:p>
                       <a:r>
                         <a:rPr lang="en-US" dirty="0"/>
-                        <a:t>en.wikipedia.org</a:t>
+                        <a:t>wikipedia.org</a:t>
                       </a:r>
                     </a:p>
                   </a:txBody>
@@ -23138,13 +25653,13 @@
         </p:nvSpPr>
         <p:spPr>
           <a:xfrm>
-            <a:off x="914399" y="2303463"/>
-            <a:ext cx="7050157" cy="4143375"/>
+            <a:off x="520701" y="2303463"/>
+            <a:ext cx="8468754" cy="4554537"/>
           </a:xfrm>
         </p:spPr>
         <p:txBody>
           <a:bodyPr>
-            <a:normAutofit/>
+            <a:noAutofit/>
           </a:bodyPr>
           <a:lstStyle/>
           <a:p>
@@ -23214,42 +25729,61 @@
             </a:pPr>
             <a:r>
               <a:rPr lang="ru-RU" sz="2200" dirty="0"/>
-              <a:t>Процесс обучения: </a:t>
+              <a:t>Процесс обучения:</a:t>
             </a:r>
           </a:p>
           <a:p>
             <a:r>
               <a:rPr lang="ru-RU" sz="2200" dirty="0"/>
-              <a:t>Загрузка </a:t>
-            </a:r>
-            <a:r>
-              <a:rPr lang="en-US" sz="2200" dirty="0"/>
-              <a:t>legitphish_clean.csv.</a:t>
-            </a:r>
-          </a:p>
-          <a:p>
+              <a:t>Загрузка сырого </a:t>
+            </a:r>
+            <a:r>
+              <a:rPr lang="af-ZA" sz="2200" dirty="0"/>
+              <a:t>CSV </a:t>
+            </a:r>
             <a:r>
               <a:rPr lang="ru-RU" sz="2200" dirty="0"/>
-              <a:t>Извлечение признаков и обучение в </a:t>
-            </a:r>
-            <a:r>
-              <a:rPr lang="en-US" sz="2200" dirty="0" err="1"/>
-              <a:t>DnsModelTrainer</a:t>
-            </a:r>
-            <a:r>
-              <a:rPr lang="en-US" sz="2200" dirty="0"/>
-              <a:t>.</a:t>
-            </a:r>
-          </a:p>
-          <a:p>
+              <a:t>с </a:t>
+            </a:r>
+            <a:r>
+              <a:rPr lang="af-ZA" sz="2200" dirty="0"/>
+              <a:t>DNS, </a:t>
+            </a:r>
             <a:r>
               <a:rPr lang="ru-RU" sz="2200" dirty="0"/>
-              <a:t>Сохранение </a:t>
-            </a:r>
-            <a:r>
-              <a:rPr lang="en-US" sz="2200" dirty="0"/>
+              <a:t>автоматическое извлечение 25+ признаков (</a:t>
+            </a:r>
+            <a:r>
+              <a:rPr lang="af-ZA" sz="2200" dirty="0"/>
+              <a:t>DnsDataLoader.LoadFromCsv).</a:t>
+            </a:r>
+          </a:p>
+          <a:p>
+            <a:r>
+              <a:rPr lang="ru-RU" sz="2200" dirty="0"/>
+              <a:t>Очистка данных: удаление дубликатов, интеграция обратной связи пользователей.</a:t>
+            </a:r>
+          </a:p>
+          <a:p>
+            <a:r>
+              <a:rPr lang="ru-RU" sz="2200" dirty="0"/>
+              <a:t>Балансировка классов до соотношения ~1:1 (</a:t>
+            </a:r>
+            <a:r>
+              <a:rPr lang="af-ZA" sz="2200" dirty="0"/>
+              <a:t>BalanceDataset).</a:t>
+            </a:r>
+          </a:p>
+          <a:p>
+            <a:r>
+              <a:rPr lang="ru-RU" sz="2200" dirty="0"/>
+              <a:t>Сохранение готовой модели в </a:t>
+            </a:r>
+            <a:r>
+              <a:rPr lang="af-ZA" sz="2200" dirty="0"/>
               <a:t>dns_suspicion_model.zip.</a:t>
             </a:r>
+            <a:endParaRPr lang="en-US" sz="2200" dirty="0"/>
           </a:p>
         </p:txBody>
       </p:sp>
@@ -23441,7 +25975,7 @@
             </a:r>
             <a:r>
               <a:rPr lang="ru-RU" sz="2200" dirty="0"/>
-              <a:t>количество деревьев): 100</a:t>
+              <a:t>количество деревьев): 500</a:t>
             </a:r>
           </a:p>
           <a:p>
@@ -23455,7 +25989,7 @@
             </a:r>
             <a:r>
               <a:rPr lang="ru-RU" sz="2200" dirty="0"/>
-              <a:t>число листьев на дерево): 20</a:t>
+              <a:t>число листьев на дерево): 60</a:t>
             </a:r>
           </a:p>
           <a:p>
@@ -23469,8 +26003,13 @@
             </a:r>
             <a:r>
               <a:rPr lang="ru-RU" sz="2200" dirty="0"/>
-              <a:t>темп обучения): 0.2</a:t>
-            </a:r>
+              <a:t>темп обучения): 0.05</a:t>
+            </a:r>
+            <a:r>
+              <a:rPr lang="en-US" sz="2200" dirty="0"/>
+              <a:t>f</a:t>
+            </a:r>
+            <a:endParaRPr lang="ru-RU" sz="2200" dirty="0"/>
           </a:p>
           <a:p>
             <a:pPr marL="342900" indent="-342900">
@@ -23479,8 +26018,13 @@
             </a:pPr>
             <a:r>
               <a:rPr lang="af-ZA" sz="2200" dirty="0"/>
-              <a:t>Minimum Example Count per Leaf: 10</a:t>
-            </a:r>
+              <a:t>Minimum Example Count per Leaf: </a:t>
+            </a:r>
+            <a:r>
+              <a:rPr lang="ru-RU" sz="2200" dirty="0"/>
+              <a:t>2</a:t>
+            </a:r>
+            <a:endParaRPr lang="af-ZA" sz="2200" dirty="0"/>
           </a:p>
           <a:p>
             <a:pPr marL="342900" indent="-342900">
@@ -26282,11 +28826,13 @@
         <p:spPr>
           <a:xfrm>
             <a:off x="914400" y="3032556"/>
-            <a:ext cx="6349999" cy="2234642"/>
+            <a:ext cx="6349999" cy="2860244"/>
           </a:xfrm>
         </p:spPr>
         <p:txBody>
-          <a:bodyPr/>
+          <a:bodyPr>
+            <a:normAutofit/>
+          </a:bodyPr>
           <a:lstStyle/>
           <a:p>
             <a:pPr marL="342900" indent="-342900">
@@ -26294,18 +28840,18 @@
               <a:buChar char="•"/>
             </a:pPr>
             <a:r>
-              <a:rPr lang="en-US" dirty="0"/>
+              <a:rPr lang="en-US" sz="2200" dirty="0"/>
               <a:t>GitHub:</a:t>
             </a:r>
           </a:p>
           <a:p>
             <a:r>
-              <a:rPr lang="en-US" dirty="0">
+              <a:rPr lang="en-US" sz="2200" dirty="0">
                 <a:hlinkClick r:id="rId3"/>
               </a:rPr>
               <a:t>https://github.com/andreyilych/cs2valvesoftware</a:t>
             </a:r>
-            <a:endParaRPr lang="en-US" dirty="0"/>
+            <a:endParaRPr lang="en-US" sz="2200" dirty="0"/>
           </a:p>
           <a:p>
             <a:pPr marL="342900" indent="-342900">
@@ -26313,15 +28859,42 @@
               <a:buChar char="•"/>
             </a:pPr>
             <a:r>
-              <a:rPr lang="ru-RU" dirty="0"/>
+              <a:rPr lang="ru-RU" sz="2200" dirty="0"/>
               <a:t>Сайт:</a:t>
             </a:r>
           </a:p>
           <a:p>
             <a:r>
-              <a:rPr lang="en-US" dirty="0"/>
+              <a:rPr lang="en-US" sz="2200" dirty="0">
+                <a:hlinkClick r:id="rId4"/>
+              </a:rPr>
               <a:t>http://130.49.149.249/</a:t>
             </a:r>
+            <a:endParaRPr lang="ru-RU" sz="2200" dirty="0"/>
+          </a:p>
+          <a:p>
+            <a:pPr marL="342900" indent="-342900">
+              <a:buFont typeface="Arial" panose="020B0604020202020204" pitchFamily="34" charset="0"/>
+              <a:buChar char="•"/>
+            </a:pPr>
+            <a:r>
+              <a:rPr lang="ru-RU" sz="2200" dirty="0"/>
+              <a:t>Ссылка на доску:</a:t>
+            </a:r>
+          </a:p>
+          <a:p>
+            <a:r>
+              <a:rPr lang="af-ZA" sz="2200" b="0" i="0" u="none" strike="noStrike" dirty="0">
+                <a:solidFill>
+                  <a:srgbClr val="71AAEB"/>
+                </a:solidFill>
+                <a:effectLst/>
+                <a:latin typeface="-apple-system"/>
+                <a:hlinkClick r:id="rId5"/>
+              </a:rPr>
+              <a:t>https://ru.yougile.com/team/83a8d5020098/cs2team</a:t>
+            </a:r>
+            <a:endParaRPr lang="en-US" sz="2200" dirty="0"/>
           </a:p>
         </p:txBody>
       </p:sp>

--- a/анализатор подозрительности доменных имен (DNS).pptx
+++ b/анализатор подозрительности доменных имен (DNS).pptx
@@ -24158,14 +24158,14 @@
             <p:ph sz="quarter" idx="4"/>
             <p:extLst>
               <p:ext uri="{D42A27DB-BD31-4B8C-83A1-F6EECF244321}">
-                <p14:modId xmlns:p14="http://schemas.microsoft.com/office/powerpoint/2010/main" val="2971503242"/>
+                <p14:modId xmlns:p14="http://schemas.microsoft.com/office/powerpoint/2010/main" val="496990586"/>
               </p:ext>
             </p:extLst>
           </p:nvPr>
         </p:nvGraphicFramePr>
         <p:xfrm>
           <a:off x="2198285" y="2273439"/>
-          <a:ext cx="8160152" cy="4606539"/>
+          <a:ext cx="8160152" cy="3948462"/>
         </p:xfrm>
         <a:graphic>
           <a:graphicData uri="http://schemas.openxmlformats.org/drawingml/2006/table">
@@ -24343,74 +24343,6 @@
                     <a:lstStyle/>
                     <a:p>
                       <a:r>
-                        <a:rPr lang="en-US" dirty="0"/>
-                        <a:t>192.168.1.1/login</a:t>
-                      </a:r>
-                    </a:p>
-                  </a:txBody>
-                  <a:tcPr anchor="ctr"/>
-                </a:tc>
-                <a:tc>
-                  <a:txBody>
-                    <a:bodyPr/>
-                    <a:lstStyle/>
-                    <a:p>
-                      <a:r>
-                        <a:rPr lang="en-US" dirty="0"/>
-                        <a:t>⚠️ Phishing</a:t>
-                      </a:r>
-                    </a:p>
-                  </a:txBody>
-                  <a:tcPr anchor="ctr"/>
-                </a:tc>
-                <a:extLst>
-                  <a:ext uri="{0D108BD9-81ED-4DB2-BD59-A6C34878D82A}">
-                    <a16:rowId xmlns:a16="http://schemas.microsoft.com/office/drawing/2014/main" val="3322085491"/>
-                  </a:ext>
-                </a:extLst>
-              </a:tr>
-              <a:tr h="658077">
-                <a:tc>
-                  <a:txBody>
-                    <a:bodyPr/>
-                    <a:lstStyle/>
-                    <a:p>
-                      <a:r>
-                        <a:rPr lang="en-US" dirty="0"/>
-                        <a:t>bit.ly/3xyz</a:t>
-                      </a:r>
-                      <a:endParaRPr lang="ru-RU" dirty="0"/>
-                    </a:p>
-                  </a:txBody>
-                  <a:tcPr anchor="ctr"/>
-                </a:tc>
-                <a:tc>
-                  <a:txBody>
-                    <a:bodyPr/>
-                    <a:lstStyle/>
-                    <a:p>
-                      <a:r>
-                        <a:rPr lang="en-US" dirty="0"/>
-                        <a:t>⚠️ Phishing</a:t>
-                      </a:r>
-                      <a:endParaRPr lang="ru-RU" dirty="0"/>
-                    </a:p>
-                  </a:txBody>
-                  <a:tcPr anchor="ctr"/>
-                </a:tc>
-                <a:extLst>
-                  <a:ext uri="{0D108BD9-81ED-4DB2-BD59-A6C34878D82A}">
-                    <a16:rowId xmlns:a16="http://schemas.microsoft.com/office/drawing/2014/main" val="2682318458"/>
-                  </a:ext>
-                </a:extLst>
-              </a:tr>
-              <a:tr h="658077">
-                <a:tc>
-                  <a:txBody>
-                    <a:bodyPr/>
-                    <a:lstStyle/>
-                    <a:p>
-                      <a:r>
                         <a:rPr lang="af-ZA" dirty="0"/>
                         <a:t>github.com</a:t>
                       </a:r>
@@ -24440,6 +24372,65 @@
                 <a:extLst>
                   <a:ext uri="{0D108BD9-81ED-4DB2-BD59-A6C34878D82A}">
                     <a16:rowId xmlns:a16="http://schemas.microsoft.com/office/drawing/2014/main" val="1247557740"/>
+                  </a:ext>
+                </a:extLst>
+              </a:tr>
+              <a:tr h="658077">
+                <a:tc>
+                  <a:txBody>
+                    <a:bodyPr/>
+                    <a:lstStyle/>
+                    <a:p>
+                      <a:r>
+                        <a:rPr lang="af-ZA" sz="1800" b="0" i="0" kern="1200" dirty="0">
+                          <a:solidFill>
+                            <a:schemeClr val="tx1"/>
+                          </a:solidFill>
+                          <a:effectLst/>
+                          <a:latin typeface="+mn-lt"/>
+                          <a:ea typeface="+mn-ea"/>
+                          <a:cs typeface="+mn-cs"/>
+                        </a:rPr>
+                        <a:t>paypal.xyz</a:t>
+                      </a:r>
+                      <a:endParaRPr lang="ru-RU" dirty="0"/>
+                    </a:p>
+                  </a:txBody>
+                  <a:tcPr anchor="ctr"/>
+                </a:tc>
+                <a:tc>
+                  <a:txBody>
+                    <a:bodyPr/>
+                    <a:lstStyle/>
+                    <a:p>
+                      <a:pPr marL="0" marR="0" lvl="0" indent="0" algn="l" defTabSz="914400" rtl="0" eaLnBrk="1" fontAlgn="auto" latinLnBrk="0" hangingPunct="1">
+                        <a:lnSpc>
+                          <a:spcPct val="100000"/>
+                        </a:lnSpc>
+                        <a:spcBef>
+                          <a:spcPts val="0"/>
+                        </a:spcBef>
+                        <a:spcAft>
+                          <a:spcPts val="0"/>
+                        </a:spcAft>
+                        <a:buClrTx/>
+                        <a:buSzTx/>
+                        <a:buFontTx/>
+                        <a:buNone/>
+                        <a:tabLst/>
+                        <a:defRPr/>
+                      </a:pPr>
+                      <a:r>
+                        <a:rPr lang="en-US" dirty="0"/>
+                        <a:t>⚠️ Phishing</a:t>
+                      </a:r>
+                    </a:p>
+                  </a:txBody>
+                  <a:tcPr anchor="ctr"/>
+                </a:tc>
+                <a:extLst>
+                  <a:ext uri="{0D108BD9-81ED-4DB2-BD59-A6C34878D82A}">
+                    <a16:rowId xmlns:a16="http://schemas.microsoft.com/office/drawing/2014/main" val="1887972438"/>
                   </a:ext>
                 </a:extLst>
               </a:tr>
@@ -25113,7 +25104,7 @@
             <p:ph sz="half" idx="1"/>
             <p:extLst>
               <p:ext uri="{D42A27DB-BD31-4B8C-83A1-F6EECF244321}">
-                <p14:modId xmlns:p14="http://schemas.microsoft.com/office/powerpoint/2010/main" val="1466035707"/>
+                <p14:modId xmlns:p14="http://schemas.microsoft.com/office/powerpoint/2010/main" val="3986094375"/>
               </p:ext>
             </p:extLst>
           </p:nvPr>
@@ -25412,7 +25403,7 @@
                             <a:schemeClr val="accent6"/>
                           </a:solidFill>
                         </a:rPr>
-                        <a:t>Разный стек, часто </a:t>
+                        <a:t>Разный стек</a:t>
                       </a:r>
                       <a:r>
                         <a:rPr lang="af-ZA" sz="2200" dirty="0">
@@ -25420,7 +25411,7 @@
                             <a:schemeClr val="accent6"/>
                           </a:solidFill>
                         </a:rPr>
-                        <a:t>Python.</a:t>
+                        <a:t>.</a:t>
                       </a:r>
                       <a:endParaRPr lang="en-US" sz="2200" dirty="0">
                         <a:solidFill>
@@ -25681,19 +25672,11 @@
             </a:r>
             <a:r>
               <a:rPr lang="en-US" sz="2200" dirty="0"/>
-              <a:t>C#. </a:t>
+              <a:t>C#</a:t>
             </a:r>
             <a:r>
               <a:rPr lang="ru-RU" sz="2200" dirty="0"/>
-              <a:t>Никакого </a:t>
-            </a:r>
-            <a:r>
-              <a:rPr lang="en-US" sz="2200" dirty="0"/>
-              <a:t>Python – </a:t>
-            </a:r>
-            <a:r>
-              <a:rPr lang="ru-RU" sz="2200" dirty="0"/>
-              <a:t>всё в единой экосистеме .</a:t>
+              <a:t>. </a:t>
             </a:r>
             <a:r>
               <a:rPr lang="en-US" sz="2200" dirty="0"/>
@@ -26336,7 +26319,7 @@
         </p:spPr>
         <p:txBody>
           <a:bodyPr>
-            <a:normAutofit fontScale="92500" lnSpcReduction="10000"/>
+            <a:normAutofit/>
           </a:bodyPr>
           <a:lstStyle/>
           <a:p>
@@ -26345,8 +26328,8 @@
               <a:buChar char="•"/>
             </a:pPr>
             <a:r>
-              <a:rPr lang="ru-RU" dirty="0"/>
-              <a:t>Отсутствие Python‑зависимостей, не требуется интерпретатор.</a:t>
+              <a:rPr lang="ru-RU" sz="2200" dirty="0"/>
+              <a:t>Бесшовная интеграция с ASP.NET Core – модель загружается один раз при старте сервера.</a:t>
             </a:r>
           </a:p>
           <a:p>
@@ -26354,7 +26337,7 @@
               <a:buFont typeface="Arial" panose="020B0604020202020204" pitchFamily="34" charset="0"/>
               <a:buChar char="•"/>
             </a:pPr>
-            <a:endParaRPr lang="ru-RU" dirty="0"/>
+            <a:endParaRPr lang="ru-RU" sz="2200" dirty="0"/>
           </a:p>
           <a:p>
             <a:pPr marL="342900" indent="-342900">
@@ -26362,8 +26345,16 @@
               <a:buChar char="•"/>
             </a:pPr>
             <a:r>
-              <a:rPr lang="ru-RU" dirty="0"/>
-              <a:t>Бесшовная интеграция с ASP.NET Core – модель загружается один раз при старте сервера.</a:t>
+              <a:rPr lang="ru-RU" sz="2200" dirty="0"/>
+              <a:t>Высокая производительность: нативное выполнение, быстрый </a:t>
+            </a:r>
+            <a:r>
+              <a:rPr lang="ru-RU" sz="2200" dirty="0" err="1"/>
+              <a:t>инференс</a:t>
+            </a:r>
+            <a:r>
+              <a:rPr lang="ru-RU" sz="2200" dirty="0"/>
+              <a:t>.</a:t>
             </a:r>
           </a:p>
           <a:p>
@@ -26371,7 +26362,7 @@
               <a:buFont typeface="Arial" panose="020B0604020202020204" pitchFamily="34" charset="0"/>
               <a:buChar char="•"/>
             </a:pPr>
-            <a:endParaRPr lang="ru-RU" dirty="0"/>
+            <a:endParaRPr lang="ru-RU" sz="2200" dirty="0"/>
           </a:p>
           <a:p>
             <a:pPr marL="342900" indent="-342900">
@@ -26379,16 +26370,16 @@
               <a:buChar char="•"/>
             </a:pPr>
             <a:r>
-              <a:rPr lang="ru-RU" dirty="0"/>
-              <a:t>Высокая производительность: нативное выполнение, быстрый </a:t>
-            </a:r>
-            <a:r>
-              <a:rPr lang="ru-RU" dirty="0" err="1"/>
-              <a:t>инференс</a:t>
-            </a:r>
-            <a:r>
-              <a:rPr lang="ru-RU" dirty="0"/>
-              <a:t>.</a:t>
+              <a:rPr lang="ru-RU" sz="2200" dirty="0"/>
+              <a:t>Кроссплатформенность, контейнеризация через </a:t>
+            </a:r>
+            <a:r>
+              <a:rPr lang="ru-RU" sz="2200" dirty="0" err="1"/>
+              <a:t>Docker</a:t>
+            </a:r>
+            <a:r>
+              <a:rPr lang="ru-RU" sz="2200" dirty="0"/>
+              <a:t> без лишних слоёв.</a:t>
             </a:r>
           </a:p>
           <a:p>
@@ -26396,7 +26387,7 @@
               <a:buFont typeface="Arial" panose="020B0604020202020204" pitchFamily="34" charset="0"/>
               <a:buChar char="•"/>
             </a:pPr>
-            <a:endParaRPr lang="ru-RU" dirty="0"/>
+            <a:endParaRPr lang="ru-RU" sz="2200" dirty="0"/>
           </a:p>
           <a:p>
             <a:pPr marL="342900" indent="-342900">
@@ -26404,43 +26395,18 @@
               <a:buChar char="•"/>
             </a:pPr>
             <a:r>
-              <a:rPr lang="ru-RU" dirty="0"/>
-              <a:t>Кроссплатформенность, контейнеризация через </a:t>
-            </a:r>
-            <a:r>
-              <a:rPr lang="ru-RU" dirty="0" err="1"/>
-              <a:t>Docker</a:t>
-            </a:r>
-            <a:r>
-              <a:rPr lang="ru-RU" dirty="0"/>
-              <a:t> без лишних слоёв.</a:t>
-            </a:r>
-          </a:p>
-          <a:p>
-            <a:pPr marL="342900" indent="-342900">
-              <a:buFont typeface="Arial" panose="020B0604020202020204" pitchFamily="34" charset="0"/>
-              <a:buChar char="•"/>
-            </a:pPr>
-            <a:endParaRPr lang="ru-RU" dirty="0"/>
-          </a:p>
-          <a:p>
-            <a:pPr marL="342900" indent="-342900">
-              <a:buFont typeface="Arial" panose="020B0604020202020204" pitchFamily="34" charset="0"/>
-              <a:buChar char="•"/>
-            </a:pPr>
-            <a:r>
-              <a:rPr lang="ru-RU" dirty="0"/>
+              <a:rPr lang="ru-RU" sz="2200" dirty="0"/>
               <a:t>Модель – просто </a:t>
             </a:r>
             <a:r>
-              <a:rPr lang="ru-RU" dirty="0" err="1"/>
+              <a:rPr lang="ru-RU" sz="2200" dirty="0" err="1"/>
               <a:t>zip</a:t>
             </a:r>
             <a:r>
-              <a:rPr lang="ru-RU" dirty="0"/>
+              <a:rPr lang="ru-RU" sz="2200" dirty="0"/>
               <a:t>‑архив, легко обновляется.</a:t>
             </a:r>
-            <a:endParaRPr lang="en-US" dirty="0"/>
+            <a:endParaRPr lang="en-US" sz="2200" dirty="0"/>
           </a:p>
         </p:txBody>
       </p:sp>
@@ -27736,7 +27702,7 @@
             </a:pPr>
             <a:r>
               <a:rPr lang="ru-RU" sz="2200" dirty="0"/>
-              <a:t>Отобразили в презентации то чего достигли в ходе работы над проектом</a:t>
+              <a:t>Отобразили в презентации то, чего достигли в ходе работы над проектом</a:t>
             </a:r>
           </a:p>
           <a:p>
@@ -27767,7 +27733,7 @@
             </a:pPr>
             <a:r>
               <a:rPr lang="ru-RU" sz="2200" dirty="0"/>
-              <a:t>Столкнулись с тем что сервис принимал адреса с пробелами внутри себя за легитимные</a:t>
+              <a:t>Столкнулись с тем, что сервис принимал адреса с пробелами внутри себя за легитимные</a:t>
             </a:r>
           </a:p>
           <a:p>
@@ -27777,7 +27743,7 @@
             </a:pPr>
             <a:r>
               <a:rPr lang="ru-RU" sz="2200" dirty="0"/>
-              <a:t>Не высокий уровень точности модели</a:t>
+              <a:t>Невысокий уровень точности модели</a:t>
             </a:r>
           </a:p>
           <a:p>
@@ -28535,7 +28501,7 @@
             </a:pPr>
             <a:r>
               <a:rPr lang="ru-RU" dirty="0"/>
-              <a:t>Интеграция ML.NET в ASP.NET Core без Python.</a:t>
+              <a:t>Интеграция ML.NET в ASP.NET Core.</a:t>
             </a:r>
           </a:p>
           <a:p>
@@ -30495,6 +30461,15 @@
 </file>
 
 <file path=customXml/item1.xml><?xml version="1.0" encoding="utf-8"?>
+<?mso-contentType ?>
+<FormTemplates xmlns="http://schemas.microsoft.com/sharepoint/v3/contenttype/forms">
+  <Display>DocumentLibraryForm</Display>
+  <Edit>DocumentLibraryForm</Edit>
+  <New>DocumentLibraryForm</New>
+</FormTemplates>
+</file>
+
+<file path=customXml/item2.xml><?xml version="1.0" encoding="utf-8"?>
 <ct:contentTypeSchema xmlns:ct="http://schemas.microsoft.com/office/2006/metadata/contentType" xmlns:ma="http://schemas.microsoft.com/office/2006/metadata/properties/metaAttributes" ct:_="" ma:_="" ma:contentTypeName="Document" ma:contentTypeID="0x01010079F111ED35F8CC479449609E8A0923A6" ma:contentTypeVersion="28" ma:contentTypeDescription="Create a new document." ma:contentTypeScope="" ma:versionID="60f5a4f2d2b0abadcf532d48ebf9cb71">
   <xsd:schema xmlns:xsd="http://www.w3.org/2001/XMLSchema" xmlns:xs="http://www.w3.org/2001/XMLSchema" xmlns:p="http://schemas.microsoft.com/office/2006/metadata/properties" xmlns:ns1="http://schemas.microsoft.com/sharepoint/v3" xmlns:ns2="71af3243-3dd4-4a8d-8c0d-dd76da1f02a5" xmlns:ns3="16c05727-aa75-4e4a-9b5f-8a80a1165891" xmlns:ns4="230e9df3-be65-4c73-a93b-d1236ebd677e" targetNamespace="http://schemas.microsoft.com/office/2006/metadata/properties" ma:root="true" ma:fieldsID="7dd78129e6a1811f84807ad11c651531" ns1:_="" ns2:_="" ns3:_="" ns4:_="">
     <xsd:import namespace="http://schemas.microsoft.com/sharepoint/v3"/>
@@ -30806,15 +30781,6 @@
 </ct:contentTypeSchema>
 </file>
 
-<file path=customXml/item2.xml><?xml version="1.0" encoding="utf-8"?>
-<?mso-contentType ?>
-<FormTemplates xmlns="http://schemas.microsoft.com/sharepoint/v3/contenttype/forms">
-  <Display>DocumentLibraryForm</Display>
-  <Edit>DocumentLibraryForm</Edit>
-  <New>DocumentLibraryForm</New>
-</FormTemplates>
-</file>
-
 <file path=customXml/item3.xml><?xml version="1.0" encoding="utf-8"?>
 <p:properties xmlns:p="http://schemas.microsoft.com/office/2006/metadata/properties" xmlns:xsi="http://www.w3.org/2001/XMLSchema-instance" xmlns:pc="http://schemas.microsoft.com/office/infopath/2007/PartnerControls">
   <documentManagement>
@@ -30836,6 +30802,14 @@
 </file>
 
 <file path=customXml/itemProps1.xml><?xml version="1.0" encoding="utf-8"?>
+<ds:datastoreItem xmlns:ds="http://schemas.openxmlformats.org/officeDocument/2006/customXml" ds:itemID="{16DBB56F-4362-4386-A1A1-3DF898896616}">
+  <ds:schemaRefs>
+    <ds:schemaRef ds:uri="http://schemas.microsoft.com/sharepoint/v3/contenttype/forms"/>
+  </ds:schemaRefs>
+</ds:datastoreItem>
+</file>
+
+<file path=customXml/itemProps2.xml><?xml version="1.0" encoding="utf-8"?>
 <ds:datastoreItem xmlns:ds="http://schemas.openxmlformats.org/officeDocument/2006/customXml" ds:itemID="{04948363-B267-4BAC-8655-100FBEC280C1}">
   <ds:schemaRefs>
     <ds:schemaRef ds:uri="http://schemas.microsoft.com/office/2006/metadata/contentType"/>
@@ -30856,14 +30830,6 @@
 </ds:datastoreItem>
 </file>
 
-<file path=customXml/itemProps2.xml><?xml version="1.0" encoding="utf-8"?>
-<ds:datastoreItem xmlns:ds="http://schemas.openxmlformats.org/officeDocument/2006/customXml" ds:itemID="{16DBB56F-4362-4386-A1A1-3DF898896616}">
-  <ds:schemaRefs>
-    <ds:schemaRef ds:uri="http://schemas.microsoft.com/sharepoint/v3/contenttype/forms"/>
-  </ds:schemaRefs>
-</ds:datastoreItem>
-</file>
-
 <file path=customXml/itemProps3.xml><?xml version="1.0" encoding="utf-8"?>
 <ds:datastoreItem xmlns:ds="http://schemas.openxmlformats.org/officeDocument/2006/customXml" ds:itemID="{BA719FA4-954C-4FA8-82CB-206659C3B826}">
   <ds:schemaRefs>
